--- a/ai101/slides/week-14.pptx
+++ b/ai101/slides/week-14.pptx
@@ -12,6 +12,11 @@
     <p:sldId id="260" r:id="rId11"/>
     <p:sldId id="261" r:id="rId12"/>
     <p:sldId id="262" r:id="rId13"/>
+    <p:sldId id="263" r:id="rId14"/>
+    <p:sldId id="264" r:id="rId15"/>
+    <p:sldId id="265" r:id="rId16"/>
+    <p:sldId id="266" r:id="rId17"/>
+    <p:sldId id="267" r:id="rId18"/>
   </p:sldIdLst>
   <p:sldSz cx="12191695" cy="6858000" type="screen4x3"/>
   <p:notesSz cx="6858000" cy="9144000"/>
@@ -3166,6 +3171,827 @@
 </p:sld>
 </file>
 
+<file path=ppt/slides/slide10.xml><?xml version="1.0" encoding="utf-8"?>
+<p:sld xmlns:a="http://schemas.openxmlformats.org/drawingml/2006/main" xmlns:p="http://schemas.openxmlformats.org/presentationml/2006/main" xmlns:r="http://schemas.openxmlformats.org/officeDocument/2006/relationships">
+  <p:cSld>
+    <p:bg>
+      <p:bgPr>
+        <a:solidFill>
+          <a:srgbClr val="102127"/>
+        </a:solidFill>
+        <a:effectLst/>
+      </p:bgPr>
+    </p:bg>
+    <p:spTree>
+      <p:nvGrpSpPr>
+        <p:cNvPr id="1" name=""/>
+        <p:cNvGrpSpPr/>
+        <p:nvPr/>
+      </p:nvGrpSpPr>
+      <p:grpSpPr/>
+      <p:sp>
+        <p:nvSpPr>
+          <p:cNvPr id="2" name="TextBox 1"/>
+          <p:cNvSpPr txBox="1"/>
+          <p:nvPr/>
+        </p:nvSpPr>
+        <p:spPr>
+          <a:xfrm>
+            <a:off x="502920" y="274320"/>
+            <a:ext cx="11155680" cy="731520"/>
+          </a:xfrm>
+          <a:prstGeom prst="rect">
+            <a:avLst/>
+          </a:prstGeom>
+          <a:noFill/>
+        </p:spPr>
+        <p:txBody>
+          <a:bodyPr wrap="none">
+            <a:spAutoFit/>
+          </a:bodyPr>
+          <a:lstStyle/>
+          <a:p>
+            <a:r>
+              <a:rPr sz="2600" b="1">
+                <a:solidFill>
+                  <a:srgbClr val="01AEFD"/>
+                </a:solidFill>
+              </a:rPr>
+              <a:t>Type this into script.js  (3 of 5)</a:t>
+            </a:r>
+          </a:p>
+        </p:txBody>
+      </p:sp>
+      <p:sp>
+        <p:nvSpPr>
+          <p:cNvPr id="3" name="TextBox 2"/>
+          <p:cNvSpPr txBox="1"/>
+          <p:nvPr/>
+        </p:nvSpPr>
+        <p:spPr>
+          <a:xfrm>
+            <a:off x="502920" y="1051560"/>
+            <a:ext cx="11155680" cy="5394960"/>
+          </a:xfrm>
+          <a:prstGeom prst="rect">
+            <a:avLst/>
+          </a:prstGeom>
+          <a:noFill/>
+        </p:spPr>
+        <p:txBody>
+          <a:bodyPr wrap="none">
+            <a:spAutoFit/>
+          </a:bodyPr>
+          <a:lstStyle/>
+          <a:p>
+            <a:pPr>
+              <a:spcAft>
+                <a:spcPts val="0"/>
+              </a:spcAft>
+            </a:pPr>
+            <a:r>
+              <a:rPr sz="1700">
+                <a:solidFill>
+                  <a:srgbClr val="6D8C97"/>
+                </a:solidFill>
+                <a:latin typeface="Consolas"/>
+              </a:rPr>
+              <a:t> 198  </a:t>
+            </a:r>
+            <a:r>
+              <a:rPr sz="1700">
+                <a:solidFill>
+                  <a:srgbClr val="DCECEF"/>
+                </a:solidFill>
+                <a:latin typeface="Consolas"/>
+              </a:rPr>
+              <a:t>    addLine('problem', problem.message);</a:t>
+            </a:r>
+          </a:p>
+          <a:p>
+            <a:pPr>
+              <a:spcAft>
+                <a:spcPts val="0"/>
+              </a:spcAft>
+            </a:pPr>
+            <a:r>
+              <a:rPr sz="1700">
+                <a:solidFill>
+                  <a:srgbClr val="6D8C97"/>
+                </a:solidFill>
+                <a:latin typeface="Consolas"/>
+              </a:rPr>
+              <a:t> 199  </a:t>
+            </a:r>
+            <a:r>
+              <a:rPr sz="1700">
+                <a:solidFill>
+                  <a:srgbClr val="DCECEF"/>
+                </a:solidFill>
+                <a:latin typeface="Consolas"/>
+              </a:rPr>
+              <a:t>  }</a:t>
+            </a:r>
+          </a:p>
+          <a:p>
+            <a:pPr>
+              <a:spcAft>
+                <a:spcPts val="0"/>
+              </a:spcAft>
+            </a:pPr>
+            <a:r>
+              <a:rPr sz="1700">
+                <a:solidFill>
+                  <a:srgbClr val="6D8C97"/>
+                </a:solidFill>
+                <a:latin typeface="Consolas"/>
+              </a:rPr>
+              <a:t> 200  </a:t>
+            </a:r>
+            <a:r>
+              <a:rPr sz="1700">
+                <a:solidFill>
+                  <a:srgbClr val="DCECEF"/>
+                </a:solidFill>
+                <a:latin typeface="Consolas"/>
+              </a:rPr>
+              <a:t>});</a:t>
+            </a:r>
+          </a:p>
+        </p:txBody>
+      </p:sp>
+    </p:spTree>
+  </p:cSld>
+  <p:clrMapOvr>
+    <a:masterClrMapping/>
+  </p:clrMapOvr>
+</p:sld>
+</file>
+
+<file path=ppt/slides/slide11.xml><?xml version="1.0" encoding="utf-8"?>
+<p:sld xmlns:a="http://schemas.openxmlformats.org/drawingml/2006/main" xmlns:p="http://schemas.openxmlformats.org/presentationml/2006/main" xmlns:r="http://schemas.openxmlformats.org/officeDocument/2006/relationships">
+  <p:cSld>
+    <p:bg>
+      <p:bgPr>
+        <a:solidFill>
+          <a:srgbClr val="102127"/>
+        </a:solidFill>
+        <a:effectLst/>
+      </p:bgPr>
+    </p:bg>
+    <p:spTree>
+      <p:nvGrpSpPr>
+        <p:cNvPr id="1" name=""/>
+        <p:cNvGrpSpPr/>
+        <p:nvPr/>
+      </p:nvGrpSpPr>
+      <p:grpSpPr/>
+      <p:sp>
+        <p:nvSpPr>
+          <p:cNvPr id="2" name="TextBox 1"/>
+          <p:cNvSpPr txBox="1"/>
+          <p:nvPr/>
+        </p:nvSpPr>
+        <p:spPr>
+          <a:xfrm>
+            <a:off x="502920" y="274320"/>
+            <a:ext cx="11155680" cy="731520"/>
+          </a:xfrm>
+          <a:prstGeom prst="rect">
+            <a:avLst/>
+          </a:prstGeom>
+          <a:noFill/>
+        </p:spPr>
+        <p:txBody>
+          <a:bodyPr wrap="none">
+            <a:spAutoFit/>
+          </a:bodyPr>
+          <a:lstStyle/>
+          <a:p>
+            <a:r>
+              <a:rPr sz="2600" b="1">
+                <a:solidFill>
+                  <a:srgbClr val="01AEFD"/>
+                </a:solidFill>
+              </a:rPr>
+              <a:t>Type this into index.html  (4 of 5)</a:t>
+            </a:r>
+          </a:p>
+        </p:txBody>
+      </p:sp>
+      <p:sp>
+        <p:nvSpPr>
+          <p:cNvPr id="3" name="TextBox 2"/>
+          <p:cNvSpPr txBox="1"/>
+          <p:nvPr/>
+        </p:nvSpPr>
+        <p:spPr>
+          <a:xfrm>
+            <a:off x="502920" y="1051560"/>
+            <a:ext cx="11155680" cy="5394960"/>
+          </a:xfrm>
+          <a:prstGeom prst="rect">
+            <a:avLst/>
+          </a:prstGeom>
+          <a:noFill/>
+        </p:spPr>
+        <p:txBody>
+          <a:bodyPr wrap="none">
+            <a:spAutoFit/>
+          </a:bodyPr>
+          <a:lstStyle/>
+          <a:p>
+            <a:pPr>
+              <a:spcAft>
+                <a:spcPts val="0"/>
+              </a:spcAft>
+            </a:pPr>
+            <a:r>
+              <a:rPr sz="1700">
+                <a:solidFill>
+                  <a:srgbClr val="6D8C97"/>
+                </a:solidFill>
+                <a:latin typeface="Consolas"/>
+              </a:rPr>
+              <a:t>   1  </a:t>
+            </a:r>
+            <a:r>
+              <a:rPr sz="1700">
+                <a:solidFill>
+                  <a:srgbClr val="DCECEF"/>
+                </a:solidFill>
+                <a:latin typeface="Consolas"/>
+              </a:rPr>
+              <a:t>&lt;main class="app"&gt;</a:t>
+            </a:r>
+          </a:p>
+          <a:p>
+            <a:pPr>
+              <a:spcAft>
+                <a:spcPts val="0"/>
+              </a:spcAft>
+            </a:pPr>
+            <a:r>
+              <a:rPr sz="1700">
+                <a:solidFill>
+                  <a:srgbClr val="6D8C97"/>
+                </a:solidFill>
+                <a:latin typeface="Consolas"/>
+              </a:rPr>
+              <a:t>   2  </a:t>
+            </a:r>
+            <a:r>
+              <a:rPr sz="1700">
+                <a:solidFill>
+                  <a:srgbClr val="DCECEF"/>
+                </a:solidFill>
+                <a:latin typeface="Consolas"/>
+              </a:rPr>
+              <a:t>  &lt;header class="top"&gt;</a:t>
+            </a:r>
+          </a:p>
+          <a:p>
+            <a:pPr>
+              <a:spcAft>
+                <a:spcPts val="0"/>
+              </a:spcAft>
+            </a:pPr>
+            <a:r>
+              <a:rPr sz="1700">
+                <a:solidFill>
+                  <a:srgbClr val="6D8C97"/>
+                </a:solidFill>
+                <a:latin typeface="Consolas"/>
+              </a:rPr>
+              <a:t>   3  </a:t>
+            </a:r>
+            <a:r>
+              <a:rPr sz="1700">
+                <a:solidFill>
+                  <a:srgbClr val="DCECEF"/>
+                </a:solidFill>
+                <a:latin typeface="Consolas"/>
+              </a:rPr>
+              <a:t>    &lt;h1&gt;My AI Companion&lt;/h1&gt;</a:t>
+            </a:r>
+          </a:p>
+          <a:p>
+            <a:pPr>
+              <a:spcAft>
+                <a:spcPts val="0"/>
+              </a:spcAft>
+            </a:pPr>
+            <a:r>
+              <a:rPr sz="1700">
+                <a:solidFill>
+                  <a:srgbClr val="6D8C97"/>
+                </a:solidFill>
+                <a:latin typeface="Consolas"/>
+              </a:rPr>
+              <a:t>   4  </a:t>
+            </a:r>
+            <a:r>
+              <a:rPr sz="1700">
+                <a:solidFill>
+                  <a:srgbClr val="DCECEF"/>
+                </a:solidFill>
+                <a:latin typeface="Consolas"/>
+              </a:rPr>
+              <a:t>    &lt;p class="tag"&gt;Built by me, running on the school AI&lt;/p&gt;</a:t>
+            </a:r>
+          </a:p>
+          <a:p>
+            <a:pPr>
+              <a:spcAft>
+                <a:spcPts val="0"/>
+              </a:spcAft>
+            </a:pPr>
+            <a:r>
+              <a:rPr sz="1700">
+                <a:solidFill>
+                  <a:srgbClr val="6D8C97"/>
+                </a:solidFill>
+                <a:latin typeface="Consolas"/>
+              </a:rPr>
+              <a:t>   5  </a:t>
+            </a:r>
+            <a:r>
+              <a:rPr sz="1700">
+                <a:solidFill>
+                  <a:srgbClr val="7FE0A0"/>
+                </a:solidFill>
+                <a:latin typeface="Consolas"/>
+              </a:rPr>
+              <a:t>    &lt;p class="caution"&gt;It can be confidently wrong. Check anything that matters.&lt;/p&gt;</a:t>
+            </a:r>
+          </a:p>
+          <a:p>
+            <a:pPr>
+              <a:spcAft>
+                <a:spcPts val="0"/>
+              </a:spcAft>
+            </a:pPr>
+            <a:r>
+              <a:rPr sz="1700">
+                <a:solidFill>
+                  <a:srgbClr val="6D8C97"/>
+                </a:solidFill>
+                <a:latin typeface="Consolas"/>
+              </a:rPr>
+              <a:t>   6  </a:t>
+            </a:r>
+            <a:r>
+              <a:rPr sz="1700">
+                <a:solidFill>
+                  <a:srgbClr val="DCECEF"/>
+                </a:solidFill>
+                <a:latin typeface="Consolas"/>
+              </a:rPr>
+              <a:t>  &lt;/header&gt;</a:t>
+            </a:r>
+          </a:p>
+        </p:txBody>
+      </p:sp>
+    </p:spTree>
+  </p:cSld>
+  <p:clrMapOvr>
+    <a:masterClrMapping/>
+  </p:clrMapOvr>
+</p:sld>
+</file>
+
+<file path=ppt/slides/slide12.xml><?xml version="1.0" encoding="utf-8"?>
+<p:sld xmlns:a="http://schemas.openxmlformats.org/drawingml/2006/main" xmlns:p="http://schemas.openxmlformats.org/presentationml/2006/main" xmlns:r="http://schemas.openxmlformats.org/officeDocument/2006/relationships">
+  <p:cSld>
+    <p:bg>
+      <p:bgPr>
+        <a:solidFill>
+          <a:srgbClr val="102127"/>
+        </a:solidFill>
+        <a:effectLst/>
+      </p:bgPr>
+    </p:bg>
+    <p:spTree>
+      <p:nvGrpSpPr>
+        <p:cNvPr id="1" name=""/>
+        <p:cNvGrpSpPr/>
+        <p:nvPr/>
+      </p:nvGrpSpPr>
+      <p:grpSpPr/>
+      <p:sp>
+        <p:nvSpPr>
+          <p:cNvPr id="2" name="TextBox 1"/>
+          <p:cNvSpPr txBox="1"/>
+          <p:nvPr/>
+        </p:nvSpPr>
+        <p:spPr>
+          <a:xfrm>
+            <a:off x="502920" y="274320"/>
+            <a:ext cx="11155680" cy="731520"/>
+          </a:xfrm>
+          <a:prstGeom prst="rect">
+            <a:avLst/>
+          </a:prstGeom>
+          <a:noFill/>
+        </p:spPr>
+        <p:txBody>
+          <a:bodyPr wrap="none">
+            <a:spAutoFit/>
+          </a:bodyPr>
+          <a:lstStyle/>
+          <a:p>
+            <a:r>
+              <a:rPr sz="2600" b="1">
+                <a:solidFill>
+                  <a:srgbClr val="01AEFD"/>
+                </a:solidFill>
+              </a:rPr>
+              <a:t>Type this into style.css  (5 of 5)</a:t>
+            </a:r>
+          </a:p>
+        </p:txBody>
+      </p:sp>
+      <p:sp>
+        <p:nvSpPr>
+          <p:cNvPr id="3" name="TextBox 2"/>
+          <p:cNvSpPr txBox="1"/>
+          <p:nvPr/>
+        </p:nvSpPr>
+        <p:spPr>
+          <a:xfrm>
+            <a:off x="502920" y="1051560"/>
+            <a:ext cx="11155680" cy="5394960"/>
+          </a:xfrm>
+          <a:prstGeom prst="rect">
+            <a:avLst/>
+          </a:prstGeom>
+          <a:noFill/>
+        </p:spPr>
+        <p:txBody>
+          <a:bodyPr wrap="none">
+            <a:spAutoFit/>
+          </a:bodyPr>
+          <a:lstStyle/>
+          <a:p>
+            <a:pPr>
+              <a:spcAft>
+                <a:spcPts val="0"/>
+              </a:spcAft>
+            </a:pPr>
+            <a:r>
+              <a:rPr sz="1400">
+                <a:solidFill>
+                  <a:srgbClr val="6D8C97"/>
+                </a:solidFill>
+                <a:latin typeface="Consolas"/>
+              </a:rPr>
+              <a:t>   1  </a:t>
+            </a:r>
+            <a:r>
+              <a:rPr sz="1400">
+                <a:solidFill>
+                  <a:srgbClr val="DCECEF"/>
+                </a:solidFill>
+                <a:latin typeface="Consolas"/>
+              </a:rPr>
+              <a:t>body {</a:t>
+            </a:r>
+          </a:p>
+          <a:p>
+            <a:pPr>
+              <a:spcAft>
+                <a:spcPts val="0"/>
+              </a:spcAft>
+            </a:pPr>
+            <a:r>
+              <a:rPr sz="1400">
+                <a:solidFill>
+                  <a:srgbClr val="6D8C97"/>
+                </a:solidFill>
+                <a:latin typeface="Consolas"/>
+              </a:rPr>
+              <a:t>   2  </a:t>
+            </a:r>
+            <a:r>
+              <a:rPr sz="1400">
+                <a:solidFill>
+                  <a:srgbClr val="DCECEF"/>
+                </a:solidFill>
+                <a:latin typeface="Consolas"/>
+              </a:rPr>
+              <a:t>  margin: 0;</a:t>
+            </a:r>
+          </a:p>
+          <a:p>
+            <a:pPr>
+              <a:spcAft>
+                <a:spcPts val="0"/>
+              </a:spcAft>
+            </a:pPr>
+            <a:r>
+              <a:rPr sz="1400">
+                <a:solidFill>
+                  <a:srgbClr val="6D8C97"/>
+                </a:solidFill>
+                <a:latin typeface="Consolas"/>
+              </a:rPr>
+              <a:t>   3  </a:t>
+            </a:r>
+            <a:r>
+              <a:rPr sz="1400">
+                <a:solidFill>
+                  <a:srgbClr val="DCECEF"/>
+                </a:solidFill>
+                <a:latin typeface="Consolas"/>
+              </a:rPr>
+              <a:t>  font-family: Arial, Helvetica, sans-serif;</a:t>
+            </a:r>
+          </a:p>
+          <a:p>
+            <a:pPr>
+              <a:spcAft>
+                <a:spcPts val="0"/>
+              </a:spcAft>
+            </a:pPr>
+            <a:r>
+              <a:rPr sz="1400">
+                <a:solidFill>
+                  <a:srgbClr val="6D8C97"/>
+                </a:solidFill>
+                <a:latin typeface="Consolas"/>
+              </a:rPr>
+              <a:t>   4  </a:t>
+            </a:r>
+            <a:r>
+              <a:rPr sz="1400">
+                <a:solidFill>
+                  <a:srgbClr val="DCECEF"/>
+                </a:solidFill>
+                <a:latin typeface="Consolas"/>
+              </a:rPr>
+              <a:t>  background: #eef2f7;</a:t>
+            </a:r>
+          </a:p>
+          <a:p>
+            <a:pPr>
+              <a:spcAft>
+                <a:spcPts val="0"/>
+              </a:spcAft>
+            </a:pPr>
+            <a:r>
+              <a:rPr sz="1400">
+                <a:solidFill>
+                  <a:srgbClr val="6D8C97"/>
+                </a:solidFill>
+                <a:latin typeface="Consolas"/>
+              </a:rPr>
+              <a:t>   5  </a:t>
+            </a:r>
+            <a:r>
+              <a:rPr sz="1400">
+                <a:solidFill>
+                  <a:srgbClr val="DCECEF"/>
+                </a:solidFill>
+                <a:latin typeface="Consolas"/>
+              </a:rPr>
+              <a:t>  color: #1f2a37;</a:t>
+            </a:r>
+          </a:p>
+          <a:p>
+            <a:pPr>
+              <a:spcAft>
+                <a:spcPts val="0"/>
+              </a:spcAft>
+            </a:pPr>
+            <a:r>
+              <a:rPr sz="1400">
+                <a:solidFill>
+                  <a:srgbClr val="6D8C97"/>
+                </a:solidFill>
+                <a:latin typeface="Consolas"/>
+              </a:rPr>
+              <a:t>   6  </a:t>
+            </a:r>
+            <a:r>
+              <a:rPr sz="1400">
+                <a:solidFill>
+                  <a:srgbClr val="7FE0A0"/>
+                </a:solidFill>
+                <a:latin typeface="Consolas"/>
+              </a:rPr>
+              <a:t>}</a:t>
+            </a:r>
+          </a:p>
+          <a:p>
+            <a:pPr>
+              <a:spcAft>
+                <a:spcPts val="0"/>
+              </a:spcAft>
+            </a:pPr>
+            <a:r>
+              <a:rPr sz="1400">
+                <a:solidFill>
+                  <a:srgbClr val="6D8C97"/>
+                </a:solidFill>
+                <a:latin typeface="Consolas"/>
+              </a:rPr>
+              <a:t>   7  </a:t>
+            </a:r>
+            <a:r>
+              <a:rPr sz="1400">
+                <a:solidFill>
+                  <a:srgbClr val="7FE0A0"/>
+                </a:solidFill>
+                <a:latin typeface="Consolas"/>
+              </a:rPr>
+              <a:t>.caution {</a:t>
+            </a:r>
+          </a:p>
+          <a:p>
+            <a:pPr>
+              <a:spcAft>
+                <a:spcPts val="0"/>
+              </a:spcAft>
+            </a:pPr>
+            <a:r>
+              <a:rPr sz="1400">
+                <a:solidFill>
+                  <a:srgbClr val="6D8C97"/>
+                </a:solidFill>
+                <a:latin typeface="Consolas"/>
+              </a:rPr>
+              <a:t>   8  </a:t>
+            </a:r>
+            <a:r>
+              <a:rPr sz="1400">
+                <a:solidFill>
+                  <a:srgbClr val="7FE0A0"/>
+                </a:solidFill>
+                <a:latin typeface="Consolas"/>
+              </a:rPr>
+              <a:t>  margin: 0 0 18px;</a:t>
+            </a:r>
+          </a:p>
+          <a:p>
+            <a:pPr>
+              <a:spcAft>
+                <a:spcPts val="0"/>
+              </a:spcAft>
+            </a:pPr>
+            <a:r>
+              <a:rPr sz="1400">
+                <a:solidFill>
+                  <a:srgbClr val="6D8C97"/>
+                </a:solidFill>
+                <a:latin typeface="Consolas"/>
+              </a:rPr>
+              <a:t>   9  </a:t>
+            </a:r>
+            <a:r>
+              <a:rPr sz="1400">
+                <a:solidFill>
+                  <a:srgbClr val="7FE0A0"/>
+                </a:solidFill>
+                <a:latin typeface="Consolas"/>
+              </a:rPr>
+              <a:t>  padding: 8px 11px;</a:t>
+            </a:r>
+          </a:p>
+          <a:p>
+            <a:pPr>
+              <a:spcAft>
+                <a:spcPts val="0"/>
+              </a:spcAft>
+            </a:pPr>
+            <a:r>
+              <a:rPr sz="1400">
+                <a:solidFill>
+                  <a:srgbClr val="6D8C97"/>
+                </a:solidFill>
+                <a:latin typeface="Consolas"/>
+              </a:rPr>
+              <a:t>  10  </a:t>
+            </a:r>
+            <a:r>
+              <a:rPr sz="1400">
+                <a:solidFill>
+                  <a:srgbClr val="7FE0A0"/>
+                </a:solidFill>
+                <a:latin typeface="Consolas"/>
+              </a:rPr>
+              <a:t>  border-left: 3px solid #e9952a;</a:t>
+            </a:r>
+          </a:p>
+          <a:p>
+            <a:pPr>
+              <a:spcAft>
+                <a:spcPts val="0"/>
+              </a:spcAft>
+            </a:pPr>
+            <a:r>
+              <a:rPr sz="1400">
+                <a:solidFill>
+                  <a:srgbClr val="6D8C97"/>
+                </a:solidFill>
+                <a:latin typeface="Consolas"/>
+              </a:rPr>
+              <a:t>  11  </a:t>
+            </a:r>
+            <a:r>
+              <a:rPr sz="1400">
+                <a:solidFill>
+                  <a:srgbClr val="7FE0A0"/>
+                </a:solidFill>
+                <a:latin typeface="Consolas"/>
+              </a:rPr>
+              <a:t>  background: #fff8e9;</a:t>
+            </a:r>
+          </a:p>
+          <a:p>
+            <a:pPr>
+              <a:spcAft>
+                <a:spcPts val="0"/>
+              </a:spcAft>
+            </a:pPr>
+            <a:r>
+              <a:rPr sz="1400">
+                <a:solidFill>
+                  <a:srgbClr val="6D8C97"/>
+                </a:solidFill>
+                <a:latin typeface="Consolas"/>
+              </a:rPr>
+              <a:t>  12  </a:t>
+            </a:r>
+            <a:r>
+              <a:rPr sz="1400">
+                <a:solidFill>
+                  <a:srgbClr val="7FE0A0"/>
+                </a:solidFill>
+                <a:latin typeface="Consolas"/>
+              </a:rPr>
+              <a:t>  color: #8a5a12;</a:t>
+            </a:r>
+          </a:p>
+          <a:p>
+            <a:pPr>
+              <a:spcAft>
+                <a:spcPts val="0"/>
+              </a:spcAft>
+            </a:pPr>
+            <a:r>
+              <a:rPr sz="1400">
+                <a:solidFill>
+                  <a:srgbClr val="6D8C97"/>
+                </a:solidFill>
+                <a:latin typeface="Consolas"/>
+              </a:rPr>
+              <a:t>  13  </a:t>
+            </a:r>
+            <a:r>
+              <a:rPr sz="1400">
+                <a:solidFill>
+                  <a:srgbClr val="7FE0A0"/>
+                </a:solidFill>
+                <a:latin typeface="Consolas"/>
+              </a:rPr>
+              <a:t>  font-size: 13px;</a:t>
+            </a:r>
+          </a:p>
+          <a:p>
+            <a:pPr>
+              <a:spcAft>
+                <a:spcPts val="0"/>
+              </a:spcAft>
+            </a:pPr>
+            <a:r>
+              <a:rPr sz="1400">
+                <a:solidFill>
+                  <a:srgbClr val="6D8C97"/>
+                </a:solidFill>
+                <a:latin typeface="Consolas"/>
+              </a:rPr>
+              <a:t>  14  </a:t>
+            </a:r>
+            <a:r>
+              <a:rPr sz="1400">
+                <a:solidFill>
+                  <a:srgbClr val="DCECEF"/>
+                </a:solidFill>
+                <a:latin typeface="Consolas"/>
+              </a:rPr>
+              <a:t>}</a:t>
+            </a:r>
+          </a:p>
+        </p:txBody>
+      </p:sp>
+    </p:spTree>
+  </p:cSld>
+  <p:clrMapOvr>
+    <a:masterClrMapping/>
+  </p:clrMapOvr>
+</p:sld>
+</file>
+
 <file path=ppt/slides/slide2.xml><?xml version="1.0" encoding="utf-8"?>
 <p:sld xmlns:a="http://schemas.openxmlformats.org/drawingml/2006/main" xmlns:p="http://schemas.openxmlformats.org/presentationml/2006/main" xmlns:r="http://schemas.openxmlformats.org/officeDocument/2006/relationships">
   <p:cSld>
@@ -3886,6 +4712,920 @@
                 </a:solidFill>
               </a:rPr>
               <a:t>• So never let it decide anything alone</a:t>
+            </a:r>
+          </a:p>
+        </p:txBody>
+      </p:sp>
+    </p:spTree>
+  </p:cSld>
+  <p:clrMapOvr>
+    <a:masterClrMapping/>
+  </p:clrMapOvr>
+</p:sld>
+</file>
+
+<file path=ppt/slides/slide8.xml><?xml version="1.0" encoding="utf-8"?>
+<p:sld xmlns:a="http://schemas.openxmlformats.org/drawingml/2006/main" xmlns:p="http://schemas.openxmlformats.org/presentationml/2006/main" xmlns:r="http://schemas.openxmlformats.org/officeDocument/2006/relationships">
+  <p:cSld>
+    <p:bg>
+      <p:bgPr>
+        <a:solidFill>
+          <a:srgbClr val="102127"/>
+        </a:solidFill>
+        <a:effectLst/>
+      </p:bgPr>
+    </p:bg>
+    <p:spTree>
+      <p:nvGrpSpPr>
+        <p:cNvPr id="1" name=""/>
+        <p:cNvGrpSpPr/>
+        <p:nvPr/>
+      </p:nvGrpSpPr>
+      <p:grpSpPr/>
+      <p:sp>
+        <p:nvSpPr>
+          <p:cNvPr id="2" name="TextBox 1"/>
+          <p:cNvSpPr txBox="1"/>
+          <p:nvPr/>
+        </p:nvSpPr>
+        <p:spPr>
+          <a:xfrm>
+            <a:off x="502920" y="274320"/>
+            <a:ext cx="11155680" cy="731520"/>
+          </a:xfrm>
+          <a:prstGeom prst="rect">
+            <a:avLst/>
+          </a:prstGeom>
+          <a:noFill/>
+        </p:spPr>
+        <p:txBody>
+          <a:bodyPr wrap="none">
+            <a:spAutoFit/>
+          </a:bodyPr>
+          <a:lstStyle/>
+          <a:p>
+            <a:r>
+              <a:rPr sz="2600" b="1">
+                <a:solidFill>
+                  <a:srgbClr val="01AEFD"/>
+                </a:solidFill>
+              </a:rPr>
+              <a:t>Type this into script.js  (1 of 5)</a:t>
+            </a:r>
+          </a:p>
+        </p:txBody>
+      </p:sp>
+      <p:sp>
+        <p:nvSpPr>
+          <p:cNvPr id="3" name="TextBox 2"/>
+          <p:cNvSpPr txBox="1"/>
+          <p:nvPr/>
+        </p:nvSpPr>
+        <p:spPr>
+          <a:xfrm>
+            <a:off x="502920" y="1051560"/>
+            <a:ext cx="11155680" cy="5394960"/>
+          </a:xfrm>
+          <a:prstGeom prst="rect">
+            <a:avLst/>
+          </a:prstGeom>
+          <a:noFill/>
+        </p:spPr>
+        <p:txBody>
+          <a:bodyPr wrap="none">
+            <a:spAutoFit/>
+          </a:bodyPr>
+          <a:lstStyle/>
+          <a:p>
+            <a:pPr>
+              <a:spcAft>
+                <a:spcPts val="0"/>
+              </a:spcAft>
+            </a:pPr>
+            <a:r>
+              <a:rPr sz="1400">
+                <a:solidFill>
+                  <a:srgbClr val="6D8C97"/>
+                </a:solidFill>
+                <a:latin typeface="Consolas"/>
+              </a:rPr>
+              <a:t> 168  </a:t>
+            </a:r>
+            <a:r>
+              <a:rPr sz="1400">
+                <a:solidFill>
+                  <a:srgbClr val="DCECEF"/>
+                </a:solidFill>
+                <a:latin typeface="Consolas"/>
+              </a:rPr>
+              <a:t> </a:t>
+            </a:r>
+          </a:p>
+          <a:p>
+            <a:pPr>
+              <a:spcAft>
+                <a:spcPts val="0"/>
+              </a:spcAft>
+            </a:pPr>
+            <a:r>
+              <a:rPr sz="1400">
+                <a:solidFill>
+                  <a:srgbClr val="6D8C97"/>
+                </a:solidFill>
+                <a:latin typeface="Consolas"/>
+              </a:rPr>
+              <a:t> 169  </a:t>
+            </a:r>
+            <a:r>
+              <a:rPr sz="1400">
+                <a:solidFill>
+                  <a:srgbClr val="DCECEF"/>
+                </a:solidFill>
+                <a:latin typeface="Consolas"/>
+              </a:rPr>
+              <a:t>// The browser calls this when the form is submitted.</a:t>
+            </a:r>
+          </a:p>
+          <a:p>
+            <a:pPr>
+              <a:spcAft>
+                <a:spcPts val="0"/>
+              </a:spcAft>
+            </a:pPr>
+            <a:r>
+              <a:rPr sz="1400">
+                <a:solidFill>
+                  <a:srgbClr val="6D8C97"/>
+                </a:solidFill>
+                <a:latin typeface="Consolas"/>
+              </a:rPr>
+              <a:t> 170  </a:t>
+            </a:r>
+            <a:r>
+              <a:rPr sz="1400">
+                <a:solidFill>
+                  <a:srgbClr val="DCECEF"/>
+                </a:solidFill>
+                <a:latin typeface="Consolas"/>
+              </a:rPr>
+              <a:t>composer.addEventListener('submit', async function (event) {</a:t>
+            </a:r>
+          </a:p>
+          <a:p>
+            <a:pPr>
+              <a:spcAft>
+                <a:spcPts val="0"/>
+              </a:spcAft>
+            </a:pPr>
+            <a:r>
+              <a:rPr sz="1400">
+                <a:solidFill>
+                  <a:srgbClr val="6D8C97"/>
+                </a:solidFill>
+                <a:latin typeface="Consolas"/>
+              </a:rPr>
+              <a:t> 171  </a:t>
+            </a:r>
+            <a:r>
+              <a:rPr sz="1400">
+                <a:solidFill>
+                  <a:srgbClr val="DCECEF"/>
+                </a:solidFill>
+                <a:latin typeface="Consolas"/>
+              </a:rPr>
+              <a:t>  event.preventDefault();</a:t>
+            </a:r>
+          </a:p>
+          <a:p>
+            <a:pPr>
+              <a:spcAft>
+                <a:spcPts val="0"/>
+              </a:spcAft>
+            </a:pPr>
+            <a:r>
+              <a:rPr sz="1400">
+                <a:solidFill>
+                  <a:srgbClr val="6D8C97"/>
+                </a:solidFill>
+                <a:latin typeface="Consolas"/>
+              </a:rPr>
+              <a:t> 172  </a:t>
+            </a:r>
+            <a:r>
+              <a:rPr sz="1400">
+                <a:solidFill>
+                  <a:srgbClr val="DCECEF"/>
+                </a:solidFill>
+                <a:latin typeface="Consolas"/>
+              </a:rPr>
+              <a:t>  const text = promptBox.value.trim();</a:t>
+            </a:r>
+          </a:p>
+          <a:p>
+            <a:pPr>
+              <a:spcAft>
+                <a:spcPts val="0"/>
+              </a:spcAft>
+            </a:pPr>
+            <a:r>
+              <a:rPr sz="1400">
+                <a:solidFill>
+                  <a:srgbClr val="6D8C97"/>
+                </a:solidFill>
+                <a:latin typeface="Consolas"/>
+              </a:rPr>
+              <a:t> 173  </a:t>
+            </a:r>
+            <a:r>
+              <a:rPr sz="1400">
+                <a:solidFill>
+                  <a:srgbClr val="DCECEF"/>
+                </a:solidFill>
+                <a:latin typeface="Consolas"/>
+              </a:rPr>
+              <a:t>  if (text === '') { return; }</a:t>
+            </a:r>
+          </a:p>
+          <a:p>
+            <a:pPr>
+              <a:spcAft>
+                <a:spcPts val="0"/>
+              </a:spcAft>
+            </a:pPr>
+            <a:r>
+              <a:rPr sz="1400">
+                <a:solidFill>
+                  <a:srgbClr val="6D8C97"/>
+                </a:solidFill>
+                <a:latin typeface="Consolas"/>
+              </a:rPr>
+              <a:t> 174  </a:t>
+            </a:r>
+            <a:r>
+              <a:rPr sz="1400">
+                <a:solidFill>
+                  <a:srgbClr val="7FE0A0"/>
+                </a:solidFill>
+                <a:latin typeface="Consolas"/>
+              </a:rPr>
+              <a:t> </a:t>
+            </a:r>
+          </a:p>
+          <a:p>
+            <a:pPr>
+              <a:spcAft>
+                <a:spcPts val="0"/>
+              </a:spcAft>
+            </a:pPr>
+            <a:r>
+              <a:rPr sz="1400">
+                <a:solidFill>
+                  <a:srgbClr val="6D8C97"/>
+                </a:solidFill>
+                <a:latin typeface="Consolas"/>
+              </a:rPr>
+              <a:t> 175  </a:t>
+            </a:r>
+            <a:r>
+              <a:rPr sz="1400">
+                <a:solidFill>
+                  <a:srgbClr val="7FE0A0"/>
+                </a:solidFill>
+                <a:latin typeface="Consolas"/>
+              </a:rPr>
+              <a:t>  // Week 14: never trust what a user types. A giant message wastes the</a:t>
+            </a:r>
+          </a:p>
+          <a:p>
+            <a:pPr>
+              <a:spcAft>
+                <a:spcPts val="0"/>
+              </a:spcAft>
+            </a:pPr>
+            <a:r>
+              <a:rPr sz="1400">
+                <a:solidFill>
+                  <a:srgbClr val="6D8C97"/>
+                </a:solidFill>
+                <a:latin typeface="Consolas"/>
+              </a:rPr>
+              <a:t> 176  </a:t>
+            </a:r>
+            <a:r>
+              <a:rPr sz="1400">
+                <a:solidFill>
+                  <a:srgbClr val="7FE0A0"/>
+                </a:solidFill>
+                <a:latin typeface="Consolas"/>
+              </a:rPr>
+              <a:t>  // whole conversation budget and gets the request refused for everyone.</a:t>
+            </a:r>
+          </a:p>
+          <a:p>
+            <a:pPr>
+              <a:spcAft>
+                <a:spcPts val="0"/>
+              </a:spcAft>
+            </a:pPr>
+            <a:r>
+              <a:rPr sz="1400">
+                <a:solidFill>
+                  <a:srgbClr val="6D8C97"/>
+                </a:solidFill>
+                <a:latin typeface="Consolas"/>
+              </a:rPr>
+              <a:t> 177  </a:t>
+            </a:r>
+            <a:r>
+              <a:rPr sz="1400">
+                <a:solidFill>
+                  <a:srgbClr val="7FE0A0"/>
+                </a:solidFill>
+                <a:latin typeface="Consolas"/>
+              </a:rPr>
+              <a:t>  if (text.length &gt; 500) {</a:t>
+            </a:r>
+          </a:p>
+          <a:p>
+            <a:pPr>
+              <a:spcAft>
+                <a:spcPts val="0"/>
+              </a:spcAft>
+            </a:pPr>
+            <a:r>
+              <a:rPr sz="1400">
+                <a:solidFill>
+                  <a:srgbClr val="6D8C97"/>
+                </a:solidFill>
+                <a:latin typeface="Consolas"/>
+              </a:rPr>
+              <a:t> 178  </a:t>
+            </a:r>
+            <a:r>
+              <a:rPr sz="1400">
+                <a:solidFill>
+                  <a:srgbClr val="7FE0A0"/>
+                </a:solidFill>
+                <a:latin typeface="Consolas"/>
+              </a:rPr>
+              <a:t>    addLine('problem', 'That is too long for one message - try under 500 characters.');</a:t>
+            </a:r>
+          </a:p>
+          <a:p>
+            <a:pPr>
+              <a:spcAft>
+                <a:spcPts val="0"/>
+              </a:spcAft>
+            </a:pPr>
+            <a:r>
+              <a:rPr sz="1400">
+                <a:solidFill>
+                  <a:srgbClr val="6D8C97"/>
+                </a:solidFill>
+                <a:latin typeface="Consolas"/>
+              </a:rPr>
+              <a:t> 179  </a:t>
+            </a:r>
+            <a:r>
+              <a:rPr sz="1400">
+                <a:solidFill>
+                  <a:srgbClr val="7FE0A0"/>
+                </a:solidFill>
+                <a:latin typeface="Consolas"/>
+              </a:rPr>
+              <a:t>    return;</a:t>
+            </a:r>
+          </a:p>
+          <a:p>
+            <a:pPr>
+              <a:spcAft>
+                <a:spcPts val="0"/>
+              </a:spcAft>
+            </a:pPr>
+            <a:r>
+              <a:rPr sz="1400">
+                <a:solidFill>
+                  <a:srgbClr val="6D8C97"/>
+                </a:solidFill>
+                <a:latin typeface="Consolas"/>
+              </a:rPr>
+              <a:t> 180  </a:t>
+            </a:r>
+            <a:r>
+              <a:rPr sz="1400">
+                <a:solidFill>
+                  <a:srgbClr val="7FE0A0"/>
+                </a:solidFill>
+                <a:latin typeface="Consolas"/>
+              </a:rPr>
+              <a:t>  }</a:t>
+            </a:r>
+          </a:p>
+          <a:p>
+            <a:pPr>
+              <a:spcAft>
+                <a:spcPts val="0"/>
+              </a:spcAft>
+            </a:pPr>
+            <a:r>
+              <a:rPr sz="1400">
+                <a:solidFill>
+                  <a:srgbClr val="6D8C97"/>
+                </a:solidFill>
+                <a:latin typeface="Consolas"/>
+              </a:rPr>
+              <a:t> 181  </a:t>
+            </a:r>
+            <a:r>
+              <a:rPr sz="1400">
+                <a:solidFill>
+                  <a:srgbClr val="7FE0A0"/>
+                </a:solidFill>
+                <a:latin typeface="Consolas"/>
+              </a:rPr>
+              <a:t> </a:t>
+            </a:r>
+          </a:p>
+          <a:p>
+            <a:pPr>
+              <a:spcAft>
+                <a:spcPts val="0"/>
+              </a:spcAft>
+            </a:pPr>
+            <a:r>
+              <a:rPr sz="1400">
+                <a:solidFill>
+                  <a:srgbClr val="6D8C97"/>
+                </a:solidFill>
+                <a:latin typeface="Consolas"/>
+              </a:rPr>
+              <a:t> 182  </a:t>
+            </a:r>
+            <a:r>
+              <a:rPr sz="1400">
+                <a:solidFill>
+                  <a:srgbClr val="DCECEF"/>
+                </a:solidFill>
+                <a:latin typeface="Consolas"/>
+              </a:rPr>
+              <a:t>  promptBox.value = '';</a:t>
+            </a:r>
+          </a:p>
+        </p:txBody>
+      </p:sp>
+    </p:spTree>
+  </p:cSld>
+  <p:clrMapOvr>
+    <a:masterClrMapping/>
+  </p:clrMapOvr>
+</p:sld>
+</file>
+
+<file path=ppt/slides/slide9.xml><?xml version="1.0" encoding="utf-8"?>
+<p:sld xmlns:a="http://schemas.openxmlformats.org/drawingml/2006/main" xmlns:p="http://schemas.openxmlformats.org/presentationml/2006/main" xmlns:r="http://schemas.openxmlformats.org/officeDocument/2006/relationships">
+  <p:cSld>
+    <p:bg>
+      <p:bgPr>
+        <a:solidFill>
+          <a:srgbClr val="102127"/>
+        </a:solidFill>
+        <a:effectLst/>
+      </p:bgPr>
+    </p:bg>
+    <p:spTree>
+      <p:nvGrpSpPr>
+        <p:cNvPr id="1" name=""/>
+        <p:cNvGrpSpPr/>
+        <p:nvPr/>
+      </p:nvGrpSpPr>
+      <p:grpSpPr/>
+      <p:sp>
+        <p:nvSpPr>
+          <p:cNvPr id="2" name="TextBox 1"/>
+          <p:cNvSpPr txBox="1"/>
+          <p:nvPr/>
+        </p:nvSpPr>
+        <p:spPr>
+          <a:xfrm>
+            <a:off x="502920" y="274320"/>
+            <a:ext cx="11155680" cy="731520"/>
+          </a:xfrm>
+          <a:prstGeom prst="rect">
+            <a:avLst/>
+          </a:prstGeom>
+          <a:noFill/>
+        </p:spPr>
+        <p:txBody>
+          <a:bodyPr wrap="none">
+            <a:spAutoFit/>
+          </a:bodyPr>
+          <a:lstStyle/>
+          <a:p>
+            <a:r>
+              <a:rPr sz="2600" b="1">
+                <a:solidFill>
+                  <a:srgbClr val="01AEFD"/>
+                </a:solidFill>
+              </a:rPr>
+              <a:t>Type this into script.js  (2 of 5)</a:t>
+            </a:r>
+          </a:p>
+        </p:txBody>
+      </p:sp>
+      <p:sp>
+        <p:nvSpPr>
+          <p:cNvPr id="3" name="TextBox 2"/>
+          <p:cNvSpPr txBox="1"/>
+          <p:nvPr/>
+        </p:nvSpPr>
+        <p:spPr>
+          <a:xfrm>
+            <a:off x="502920" y="1051560"/>
+            <a:ext cx="11155680" cy="5394960"/>
+          </a:xfrm>
+          <a:prstGeom prst="rect">
+            <a:avLst/>
+          </a:prstGeom>
+          <a:noFill/>
+        </p:spPr>
+        <p:txBody>
+          <a:bodyPr wrap="none">
+            <a:spAutoFit/>
+          </a:bodyPr>
+          <a:lstStyle/>
+          <a:p>
+            <a:pPr>
+              <a:spcAft>
+                <a:spcPts val="0"/>
+              </a:spcAft>
+            </a:pPr>
+            <a:r>
+              <a:rPr sz="1400">
+                <a:solidFill>
+                  <a:srgbClr val="6D8C97"/>
+                </a:solidFill>
+                <a:latin typeface="Consolas"/>
+              </a:rPr>
+              <a:t> 183  </a:t>
+            </a:r>
+            <a:r>
+              <a:rPr sz="1400">
+                <a:solidFill>
+                  <a:srgbClr val="DCECEF"/>
+                </a:solidFill>
+                <a:latin typeface="Consolas"/>
+              </a:rPr>
+              <a:t>  addLine('you', text);</a:t>
+            </a:r>
+          </a:p>
+          <a:p>
+            <a:pPr>
+              <a:spcAft>
+                <a:spcPts val="0"/>
+              </a:spcAft>
+            </a:pPr>
+            <a:r>
+              <a:rPr sz="1400">
+                <a:solidFill>
+                  <a:srgbClr val="6D8C97"/>
+                </a:solidFill>
+                <a:latin typeface="Consolas"/>
+              </a:rPr>
+              <a:t> 184  </a:t>
+            </a:r>
+            <a:r>
+              <a:rPr sz="1400">
+                <a:solidFill>
+                  <a:srgbClr val="DCECEF"/>
+                </a:solidFill>
+                <a:latin typeface="Consolas"/>
+              </a:rPr>
+              <a:t>  history.push({ role: 'user', content: text });</a:t>
+            </a:r>
+          </a:p>
+          <a:p>
+            <a:pPr>
+              <a:spcAft>
+                <a:spcPts val="0"/>
+              </a:spcAft>
+            </a:pPr>
+            <a:r>
+              <a:rPr sz="1400">
+                <a:solidFill>
+                  <a:srgbClr val="6D8C97"/>
+                </a:solidFill>
+                <a:latin typeface="Consolas"/>
+              </a:rPr>
+              <a:t> 185  </a:t>
+            </a:r>
+            <a:r>
+              <a:rPr sz="1400">
+                <a:solidFill>
+                  <a:srgbClr val="DCECEF"/>
+                </a:solidFill>
+                <a:latin typeface="Consolas"/>
+              </a:rPr>
+              <a:t> </a:t>
+            </a:r>
+          </a:p>
+          <a:p>
+            <a:pPr>
+              <a:spcAft>
+                <a:spcPts val="0"/>
+              </a:spcAft>
+            </a:pPr>
+            <a:r>
+              <a:rPr sz="1400">
+                <a:solidFill>
+                  <a:srgbClr val="6D8C97"/>
+                </a:solidFill>
+                <a:latin typeface="Consolas"/>
+              </a:rPr>
+              <a:t> 186  </a:t>
+            </a:r>
+            <a:r>
+              <a:rPr sz="1400">
+                <a:solidFill>
+                  <a:srgbClr val="DCECEF"/>
+                </a:solidFill>
+                <a:latin typeface="Consolas"/>
+              </a:rPr>
+              <a:t>  const bubble = addLine('bot', '');</a:t>
+            </a:r>
+          </a:p>
+          <a:p>
+            <a:pPr>
+              <a:spcAft>
+                <a:spcPts val="0"/>
+              </a:spcAft>
+            </a:pPr>
+            <a:r>
+              <a:rPr sz="1400">
+                <a:solidFill>
+                  <a:srgbClr val="6D8C97"/>
+                </a:solidFill>
+                <a:latin typeface="Consolas"/>
+              </a:rPr>
+              <a:t> 187  </a:t>
+            </a:r>
+            <a:r>
+              <a:rPr sz="1400">
+                <a:solidFill>
+                  <a:srgbClr val="DCECEF"/>
+                </a:solidFill>
+                <a:latin typeface="Consolas"/>
+              </a:rPr>
+              <a:t>  bubble.classList.add('writing');   // week 11: blinking cursor while it types</a:t>
+            </a:r>
+          </a:p>
+          <a:p>
+            <a:pPr>
+              <a:spcAft>
+                <a:spcPts val="0"/>
+              </a:spcAft>
+            </a:pPr>
+            <a:r>
+              <a:rPr sz="1400">
+                <a:solidFill>
+                  <a:srgbClr val="6D8C97"/>
+                </a:solidFill>
+                <a:latin typeface="Consolas"/>
+              </a:rPr>
+              <a:t> 188  </a:t>
+            </a:r>
+            <a:r>
+              <a:rPr sz="1400">
+                <a:solidFill>
+                  <a:srgbClr val="DCECEF"/>
+                </a:solidFill>
+                <a:latin typeface="Consolas"/>
+              </a:rPr>
+              <a:t>  try {</a:t>
+            </a:r>
+          </a:p>
+          <a:p>
+            <a:pPr>
+              <a:spcAft>
+                <a:spcPts val="0"/>
+              </a:spcAft>
+            </a:pPr>
+            <a:r>
+              <a:rPr sz="1400">
+                <a:solidFill>
+                  <a:srgbClr val="6D8C97"/>
+                </a:solidFill>
+                <a:latin typeface="Consolas"/>
+              </a:rPr>
+              <a:t> 189  </a:t>
+            </a:r>
+            <a:r>
+              <a:rPr sz="1400">
+                <a:solidFill>
+                  <a:srgbClr val="DCECEF"/>
+                </a:solidFill>
+                <a:latin typeface="Consolas"/>
+              </a:rPr>
+              <a:t>    // The function we hand over runs on EVERY piece that arrives.</a:t>
+            </a:r>
+          </a:p>
+          <a:p>
+            <a:pPr>
+              <a:spcAft>
+                <a:spcPts val="0"/>
+              </a:spcAft>
+            </a:pPr>
+            <a:r>
+              <a:rPr sz="1400">
+                <a:solidFill>
+                  <a:srgbClr val="6D8C97"/>
+                </a:solidFill>
+                <a:latin typeface="Consolas"/>
+              </a:rPr>
+              <a:t> 190  </a:t>
+            </a:r>
+            <a:r>
+              <a:rPr sz="1400">
+                <a:solidFill>
+                  <a:srgbClr val="DCECEF"/>
+                </a:solidFill>
+                <a:latin typeface="Consolas"/>
+              </a:rPr>
+              <a:t>    const reply = await askAI(function (soFar) {</a:t>
+            </a:r>
+          </a:p>
+          <a:p>
+            <a:pPr>
+              <a:spcAft>
+                <a:spcPts val="0"/>
+              </a:spcAft>
+            </a:pPr>
+            <a:r>
+              <a:rPr sz="1400">
+                <a:solidFill>
+                  <a:srgbClr val="6D8C97"/>
+                </a:solidFill>
+                <a:latin typeface="Consolas"/>
+              </a:rPr>
+              <a:t> 191  </a:t>
+            </a:r>
+            <a:r>
+              <a:rPr sz="1400">
+                <a:solidFill>
+                  <a:srgbClr val="DCECEF"/>
+                </a:solidFill>
+                <a:latin typeface="Consolas"/>
+              </a:rPr>
+              <a:t>      bubble.textContent = soFar;</a:t>
+            </a:r>
+          </a:p>
+          <a:p>
+            <a:pPr>
+              <a:spcAft>
+                <a:spcPts val="0"/>
+              </a:spcAft>
+            </a:pPr>
+            <a:r>
+              <a:rPr sz="1400">
+                <a:solidFill>
+                  <a:srgbClr val="6D8C97"/>
+                </a:solidFill>
+                <a:latin typeface="Consolas"/>
+              </a:rPr>
+              <a:t> 192  </a:t>
+            </a:r>
+            <a:r>
+              <a:rPr sz="1400">
+                <a:solidFill>
+                  <a:srgbClr val="DCECEF"/>
+                </a:solidFill>
+                <a:latin typeface="Consolas"/>
+              </a:rPr>
+              <a:t>      chat.scrollTop = chat.scrollHeight;</a:t>
+            </a:r>
+          </a:p>
+          <a:p>
+            <a:pPr>
+              <a:spcAft>
+                <a:spcPts val="0"/>
+              </a:spcAft>
+            </a:pPr>
+            <a:r>
+              <a:rPr sz="1400">
+                <a:solidFill>
+                  <a:srgbClr val="6D8C97"/>
+                </a:solidFill>
+                <a:latin typeface="Consolas"/>
+              </a:rPr>
+              <a:t> 193  </a:t>
+            </a:r>
+            <a:r>
+              <a:rPr sz="1400">
+                <a:solidFill>
+                  <a:srgbClr val="DCECEF"/>
+                </a:solidFill>
+                <a:latin typeface="Consolas"/>
+              </a:rPr>
+              <a:t>    });</a:t>
+            </a:r>
+          </a:p>
+          <a:p>
+            <a:pPr>
+              <a:spcAft>
+                <a:spcPts val="0"/>
+              </a:spcAft>
+            </a:pPr>
+            <a:r>
+              <a:rPr sz="1400">
+                <a:solidFill>
+                  <a:srgbClr val="6D8C97"/>
+                </a:solidFill>
+                <a:latin typeface="Consolas"/>
+              </a:rPr>
+              <a:t> 194  </a:t>
+            </a:r>
+            <a:r>
+              <a:rPr sz="1400">
+                <a:solidFill>
+                  <a:srgbClr val="DCECEF"/>
+                </a:solidFill>
+                <a:latin typeface="Consolas"/>
+              </a:rPr>
+              <a:t>    bubble.classList.remove('writing');</a:t>
+            </a:r>
+          </a:p>
+          <a:p>
+            <a:pPr>
+              <a:spcAft>
+                <a:spcPts val="0"/>
+              </a:spcAft>
+            </a:pPr>
+            <a:r>
+              <a:rPr sz="1400">
+                <a:solidFill>
+                  <a:srgbClr val="6D8C97"/>
+                </a:solidFill>
+                <a:latin typeface="Consolas"/>
+              </a:rPr>
+              <a:t> 195  </a:t>
+            </a:r>
+            <a:r>
+              <a:rPr sz="1400">
+                <a:solidFill>
+                  <a:srgbClr val="DCECEF"/>
+                </a:solidFill>
+                <a:latin typeface="Consolas"/>
+              </a:rPr>
+              <a:t>    history.push({ role: 'assistant', content: reply });   // it said this too</a:t>
+            </a:r>
+          </a:p>
+          <a:p>
+            <a:pPr>
+              <a:spcAft>
+                <a:spcPts val="0"/>
+              </a:spcAft>
+            </a:pPr>
+            <a:r>
+              <a:rPr sz="1400">
+                <a:solidFill>
+                  <a:srgbClr val="6D8C97"/>
+                </a:solidFill>
+                <a:latin typeface="Consolas"/>
+              </a:rPr>
+              <a:t> 196  </a:t>
+            </a:r>
+            <a:r>
+              <a:rPr sz="1400">
+                <a:solidFill>
+                  <a:srgbClr val="DCECEF"/>
+                </a:solidFill>
+                <a:latin typeface="Consolas"/>
+              </a:rPr>
+              <a:t>  } catch (problem) {</a:t>
+            </a:r>
+          </a:p>
+          <a:p>
+            <a:pPr>
+              <a:spcAft>
+                <a:spcPts val="0"/>
+              </a:spcAft>
+            </a:pPr>
+            <a:r>
+              <a:rPr sz="1400">
+                <a:solidFill>
+                  <a:srgbClr val="6D8C97"/>
+                </a:solidFill>
+                <a:latin typeface="Consolas"/>
+              </a:rPr>
+              <a:t> 197  </a:t>
+            </a:r>
+            <a:r>
+              <a:rPr sz="1400">
+                <a:solidFill>
+                  <a:srgbClr val="DCECEF"/>
+                </a:solidFill>
+                <a:latin typeface="Consolas"/>
+              </a:rPr>
+              <a:t>    bubble.remove();</a:t>
             </a:r>
           </a:p>
         </p:txBody>

--- a/ai101/slides/week-14.pptx
+++ b/ai101/slides/week-14.pptx
@@ -3256,7 +3256,7 @@
                 </a:solidFill>
                 <a:latin typeface="Consolas"/>
               </a:rPr>
-              <a:t> 198  </a:t>
+              <a:t> 201  </a:t>
             </a:r>
             <a:r>
               <a:rPr sz="1700">
@@ -3281,7 +3281,7 @@
                 </a:solidFill>
                 <a:latin typeface="Consolas"/>
               </a:rPr>
-              <a:t> 199  </a:t>
+              <a:t> 202  </a:t>
             </a:r>
             <a:r>
               <a:rPr sz="1700">
@@ -3306,7 +3306,7 @@
                 </a:solidFill>
                 <a:latin typeface="Consolas"/>
               </a:rPr>
-              <a:t> 200  </a:t>
+              <a:t> 203  </a:t>
             </a:r>
             <a:r>
               <a:rPr sz="1700">
@@ -3413,7 +3413,7 @@
                 </a:solidFill>
                 <a:latin typeface="Consolas"/>
               </a:rPr>
-              <a:t>   1  </a:t>
+              <a:t>   3  </a:t>
             </a:r>
             <a:r>
               <a:rPr sz="1700">
@@ -3438,7 +3438,7 @@
                 </a:solidFill>
                 <a:latin typeface="Consolas"/>
               </a:rPr>
-              <a:t>   2  </a:t>
+              <a:t>   4  </a:t>
             </a:r>
             <a:r>
               <a:rPr sz="1700">
@@ -3463,7 +3463,7 @@
                 </a:solidFill>
                 <a:latin typeface="Consolas"/>
               </a:rPr>
-              <a:t>   3  </a:t>
+              <a:t>   5  </a:t>
             </a:r>
             <a:r>
               <a:rPr sz="1700">
@@ -3488,7 +3488,7 @@
                 </a:solidFill>
                 <a:latin typeface="Consolas"/>
               </a:rPr>
-              <a:t>   4  </a:t>
+              <a:t>   6  </a:t>
             </a:r>
             <a:r>
               <a:rPr sz="1700">
@@ -3513,7 +3513,7 @@
                 </a:solidFill>
                 <a:latin typeface="Consolas"/>
               </a:rPr>
-              <a:t>   5  </a:t>
+              <a:t>   7  </a:t>
             </a:r>
             <a:r>
               <a:rPr sz="1700">
@@ -3538,7 +3538,7 @@
                 </a:solidFill>
                 <a:latin typeface="Consolas"/>
               </a:rPr>
-              <a:t>   6  </a:t>
+              <a:t>   8  </a:t>
             </a:r>
             <a:r>
               <a:rPr sz="1700">
@@ -4809,7 +4809,7 @@
                 </a:solidFill>
                 <a:latin typeface="Consolas"/>
               </a:rPr>
-              <a:t> 168  </a:t>
+              <a:t> 171  </a:t>
             </a:r>
             <a:r>
               <a:rPr sz="1400">
@@ -4834,7 +4834,7 @@
                 </a:solidFill>
                 <a:latin typeface="Consolas"/>
               </a:rPr>
-              <a:t> 169  </a:t>
+              <a:t> 172  </a:t>
             </a:r>
             <a:r>
               <a:rPr sz="1400">
@@ -4859,7 +4859,7 @@
                 </a:solidFill>
                 <a:latin typeface="Consolas"/>
               </a:rPr>
-              <a:t> 170  </a:t>
+              <a:t> 173  </a:t>
             </a:r>
             <a:r>
               <a:rPr sz="1400">
@@ -4884,7 +4884,7 @@
                 </a:solidFill>
                 <a:latin typeface="Consolas"/>
               </a:rPr>
-              <a:t> 171  </a:t>
+              <a:t> 174  </a:t>
             </a:r>
             <a:r>
               <a:rPr sz="1400">
@@ -4909,7 +4909,7 @@
                 </a:solidFill>
                 <a:latin typeface="Consolas"/>
               </a:rPr>
-              <a:t> 172  </a:t>
+              <a:t> 175  </a:t>
             </a:r>
             <a:r>
               <a:rPr sz="1400">
@@ -4934,7 +4934,7 @@
                 </a:solidFill>
                 <a:latin typeface="Consolas"/>
               </a:rPr>
-              <a:t> 173  </a:t>
+              <a:t> 176  </a:t>
             </a:r>
             <a:r>
               <a:rPr sz="1400">
@@ -4959,7 +4959,7 @@
                 </a:solidFill>
                 <a:latin typeface="Consolas"/>
               </a:rPr>
-              <a:t> 174  </a:t>
+              <a:t> 177  </a:t>
             </a:r>
             <a:r>
               <a:rPr sz="1400">
@@ -4984,7 +4984,7 @@
                 </a:solidFill>
                 <a:latin typeface="Consolas"/>
               </a:rPr>
-              <a:t> 175  </a:t>
+              <a:t> 178  </a:t>
             </a:r>
             <a:r>
               <a:rPr sz="1400">
@@ -5009,7 +5009,7 @@
                 </a:solidFill>
                 <a:latin typeface="Consolas"/>
               </a:rPr>
-              <a:t> 176  </a:t>
+              <a:t> 179  </a:t>
             </a:r>
             <a:r>
               <a:rPr sz="1400">
@@ -5034,7 +5034,7 @@
                 </a:solidFill>
                 <a:latin typeface="Consolas"/>
               </a:rPr>
-              <a:t> 177  </a:t>
+              <a:t> 180  </a:t>
             </a:r>
             <a:r>
               <a:rPr sz="1400">
@@ -5059,7 +5059,7 @@
                 </a:solidFill>
                 <a:latin typeface="Consolas"/>
               </a:rPr>
-              <a:t> 178  </a:t>
+              <a:t> 181  </a:t>
             </a:r>
             <a:r>
               <a:rPr sz="1400">
@@ -5084,7 +5084,7 @@
                 </a:solidFill>
                 <a:latin typeface="Consolas"/>
               </a:rPr>
-              <a:t> 179  </a:t>
+              <a:t> 182  </a:t>
             </a:r>
             <a:r>
               <a:rPr sz="1400">
@@ -5109,7 +5109,7 @@
                 </a:solidFill>
                 <a:latin typeface="Consolas"/>
               </a:rPr>
-              <a:t> 180  </a:t>
+              <a:t> 183  </a:t>
             </a:r>
             <a:r>
               <a:rPr sz="1400">
@@ -5134,7 +5134,7 @@
                 </a:solidFill>
                 <a:latin typeface="Consolas"/>
               </a:rPr>
-              <a:t> 181  </a:t>
+              <a:t> 184  </a:t>
             </a:r>
             <a:r>
               <a:rPr sz="1400">
@@ -5159,7 +5159,7 @@
                 </a:solidFill>
                 <a:latin typeface="Consolas"/>
               </a:rPr>
-              <a:t> 182  </a:t>
+              <a:t> 185  </a:t>
             </a:r>
             <a:r>
               <a:rPr sz="1400">
@@ -5266,7 +5266,7 @@
                 </a:solidFill>
                 <a:latin typeface="Consolas"/>
               </a:rPr>
-              <a:t> 183  </a:t>
+              <a:t> 186  </a:t>
             </a:r>
             <a:r>
               <a:rPr sz="1400">
@@ -5291,7 +5291,7 @@
                 </a:solidFill>
                 <a:latin typeface="Consolas"/>
               </a:rPr>
-              <a:t> 184  </a:t>
+              <a:t> 187  </a:t>
             </a:r>
             <a:r>
               <a:rPr sz="1400">
@@ -5316,7 +5316,7 @@
                 </a:solidFill>
                 <a:latin typeface="Consolas"/>
               </a:rPr>
-              <a:t> 185  </a:t>
+              <a:t> 188  </a:t>
             </a:r>
             <a:r>
               <a:rPr sz="1400">
@@ -5341,7 +5341,7 @@
                 </a:solidFill>
                 <a:latin typeface="Consolas"/>
               </a:rPr>
-              <a:t> 186  </a:t>
+              <a:t> 189  </a:t>
             </a:r>
             <a:r>
               <a:rPr sz="1400">
@@ -5366,7 +5366,7 @@
                 </a:solidFill>
                 <a:latin typeface="Consolas"/>
               </a:rPr>
-              <a:t> 187  </a:t>
+              <a:t> 190  </a:t>
             </a:r>
             <a:r>
               <a:rPr sz="1400">
@@ -5391,7 +5391,7 @@
                 </a:solidFill>
                 <a:latin typeface="Consolas"/>
               </a:rPr>
-              <a:t> 188  </a:t>
+              <a:t> 191  </a:t>
             </a:r>
             <a:r>
               <a:rPr sz="1400">
@@ -5416,7 +5416,7 @@
                 </a:solidFill>
                 <a:latin typeface="Consolas"/>
               </a:rPr>
-              <a:t> 189  </a:t>
+              <a:t> 192  </a:t>
             </a:r>
             <a:r>
               <a:rPr sz="1400">
@@ -5441,7 +5441,7 @@
                 </a:solidFill>
                 <a:latin typeface="Consolas"/>
               </a:rPr>
-              <a:t> 190  </a:t>
+              <a:t> 193  </a:t>
             </a:r>
             <a:r>
               <a:rPr sz="1400">
@@ -5466,7 +5466,7 @@
                 </a:solidFill>
                 <a:latin typeface="Consolas"/>
               </a:rPr>
-              <a:t> 191  </a:t>
+              <a:t> 194  </a:t>
             </a:r>
             <a:r>
               <a:rPr sz="1400">
@@ -5491,7 +5491,7 @@
                 </a:solidFill>
                 <a:latin typeface="Consolas"/>
               </a:rPr>
-              <a:t> 192  </a:t>
+              <a:t> 195  </a:t>
             </a:r>
             <a:r>
               <a:rPr sz="1400">
@@ -5516,7 +5516,7 @@
                 </a:solidFill>
                 <a:latin typeface="Consolas"/>
               </a:rPr>
-              <a:t> 193  </a:t>
+              <a:t> 196  </a:t>
             </a:r>
             <a:r>
               <a:rPr sz="1400">
@@ -5541,7 +5541,7 @@
                 </a:solidFill>
                 <a:latin typeface="Consolas"/>
               </a:rPr>
-              <a:t> 194  </a:t>
+              <a:t> 197  </a:t>
             </a:r>
             <a:r>
               <a:rPr sz="1400">
@@ -5566,7 +5566,7 @@
                 </a:solidFill>
                 <a:latin typeface="Consolas"/>
               </a:rPr>
-              <a:t> 195  </a:t>
+              <a:t> 198  </a:t>
             </a:r>
             <a:r>
               <a:rPr sz="1400">
@@ -5591,7 +5591,7 @@
                 </a:solidFill>
                 <a:latin typeface="Consolas"/>
               </a:rPr>
-              <a:t> 196  </a:t>
+              <a:t> 199  </a:t>
             </a:r>
             <a:r>
               <a:rPr sz="1400">
@@ -5616,7 +5616,7 @@
                 </a:solidFill>
                 <a:latin typeface="Consolas"/>
               </a:rPr>
-              <a:t> 197  </a:t>
+              <a:t> 200  </a:t>
             </a:r>
             <a:r>
               <a:rPr sz="1400">

--- a/ai101/slides/week-14.pptx
+++ b/ai101/slides/week-14.pptx
@@ -3256,7 +3256,7 @@
                 </a:solidFill>
                 <a:latin typeface="Consolas"/>
               </a:rPr>
-              <a:t> 201  </a:t>
+              <a:t> 209  </a:t>
             </a:r>
             <a:r>
               <a:rPr sz="1700">
@@ -3265,7 +3265,7 @@
                 </a:solidFill>
                 <a:latin typeface="Consolas"/>
               </a:rPr>
-              <a:t>    addLine('problem', problem.message);</a:t>
+              <a:t>    // 'Failed to fetch' means the request never arrived anywhere. That is</a:t>
             </a:r>
           </a:p>
           <a:p>
@@ -3281,7 +3281,7 @@
                 </a:solidFill>
                 <a:latin typeface="Consolas"/>
               </a:rPr>
-              <a:t> 202  </a:t>
+              <a:t> 210  </a:t>
             </a:r>
             <a:r>
               <a:rPr sz="1700">
@@ -3290,6 +3290,131 @@
                 </a:solidFill>
                 <a:latin typeface="Consolas"/>
               </a:rPr>
+              <a:t>    // the commonest real failure and the least helpful wording, so replace it.</a:t>
+            </a:r>
+          </a:p>
+          <a:p>
+            <a:pPr>
+              <a:spcAft>
+                <a:spcPts val="0"/>
+              </a:spcAft>
+            </a:pPr>
+            <a:r>
+              <a:rPr sz="1700">
+                <a:solidFill>
+                  <a:srgbClr val="6D8C97"/>
+                </a:solidFill>
+                <a:latin typeface="Consolas"/>
+              </a:rPr>
+              <a:t> 211  </a:t>
+            </a:r>
+            <a:r>
+              <a:rPr sz="1700">
+                <a:solidFill>
+                  <a:srgbClr val="DCECEF"/>
+                </a:solidFill>
+                <a:latin typeface="Consolas"/>
+              </a:rPr>
+              <a:t>    const said = problem.message === 'Failed to fetch'</a:t>
+            </a:r>
+          </a:p>
+          <a:p>
+            <a:pPr>
+              <a:spcAft>
+                <a:spcPts val="0"/>
+              </a:spcAft>
+            </a:pPr>
+            <a:r>
+              <a:rPr sz="1700">
+                <a:solidFill>
+                  <a:srgbClr val="6D8C97"/>
+                </a:solidFill>
+                <a:latin typeface="Consolas"/>
+              </a:rPr>
+              <a:t> 212  </a:t>
+            </a:r>
+            <a:r>
+              <a:rPr sz="1700">
+                <a:solidFill>
+                  <a:srgbClr val="DCECEF"/>
+                </a:solidFill>
+                <a:latin typeface="Consolas"/>
+              </a:rPr>
+              <a:t>      ? 'Could not reach the AI. Are you on the school network?'</a:t>
+            </a:r>
+          </a:p>
+          <a:p>
+            <a:pPr>
+              <a:spcAft>
+                <a:spcPts val="0"/>
+              </a:spcAft>
+            </a:pPr>
+            <a:r>
+              <a:rPr sz="1700">
+                <a:solidFill>
+                  <a:srgbClr val="6D8C97"/>
+                </a:solidFill>
+                <a:latin typeface="Consolas"/>
+              </a:rPr>
+              <a:t> 213  </a:t>
+            </a:r>
+            <a:r>
+              <a:rPr sz="1700">
+                <a:solidFill>
+                  <a:srgbClr val="DCECEF"/>
+                </a:solidFill>
+                <a:latin typeface="Consolas"/>
+              </a:rPr>
+              <a:t>      : problem.message;</a:t>
+            </a:r>
+          </a:p>
+          <a:p>
+            <a:pPr>
+              <a:spcAft>
+                <a:spcPts val="0"/>
+              </a:spcAft>
+            </a:pPr>
+            <a:r>
+              <a:rPr sz="1700">
+                <a:solidFill>
+                  <a:srgbClr val="6D8C97"/>
+                </a:solidFill>
+                <a:latin typeface="Consolas"/>
+              </a:rPr>
+              <a:t> 214  </a:t>
+            </a:r>
+            <a:r>
+              <a:rPr sz="1700">
+                <a:solidFill>
+                  <a:srgbClr val="DCECEF"/>
+                </a:solidFill>
+                <a:latin typeface="Consolas"/>
+              </a:rPr>
+              <a:t>    addLine('problem', said);</a:t>
+            </a:r>
+          </a:p>
+          <a:p>
+            <a:pPr>
+              <a:spcAft>
+                <a:spcPts val="0"/>
+              </a:spcAft>
+            </a:pPr>
+            <a:r>
+              <a:rPr sz="1700">
+                <a:solidFill>
+                  <a:srgbClr val="6D8C97"/>
+                </a:solidFill>
+                <a:latin typeface="Consolas"/>
+              </a:rPr>
+              <a:t> 215  </a:t>
+            </a:r>
+            <a:r>
+              <a:rPr sz="1700">
+                <a:solidFill>
+                  <a:srgbClr val="DCECEF"/>
+                </a:solidFill>
+                <a:latin typeface="Consolas"/>
+              </a:rPr>
               <a:t>  }</a:t>
             </a:r>
           </a:p>
@@ -3306,7 +3431,7 @@
                 </a:solidFill>
                 <a:latin typeface="Consolas"/>
               </a:rPr>
-              <a:t> 203  </a:t>
+              <a:t> 216  </a:t>
             </a:r>
             <a:r>
               <a:rPr sz="1700">
@@ -4809,7 +4934,7 @@
                 </a:solidFill>
                 <a:latin typeface="Consolas"/>
               </a:rPr>
-              <a:t> 171  </a:t>
+              <a:t> 179  </a:t>
             </a:r>
             <a:r>
               <a:rPr sz="1400">
@@ -4834,7 +4959,7 @@
                 </a:solidFill>
                 <a:latin typeface="Consolas"/>
               </a:rPr>
-              <a:t> 172  </a:t>
+              <a:t> 180  </a:t>
             </a:r>
             <a:r>
               <a:rPr sz="1400">
@@ -4859,7 +4984,7 @@
                 </a:solidFill>
                 <a:latin typeface="Consolas"/>
               </a:rPr>
-              <a:t> 173  </a:t>
+              <a:t> 181  </a:t>
             </a:r>
             <a:r>
               <a:rPr sz="1400">
@@ -4884,7 +5009,7 @@
                 </a:solidFill>
                 <a:latin typeface="Consolas"/>
               </a:rPr>
-              <a:t> 174  </a:t>
+              <a:t> 182  </a:t>
             </a:r>
             <a:r>
               <a:rPr sz="1400">
@@ -4909,7 +5034,7 @@
                 </a:solidFill>
                 <a:latin typeface="Consolas"/>
               </a:rPr>
-              <a:t> 175  </a:t>
+              <a:t> 183  </a:t>
             </a:r>
             <a:r>
               <a:rPr sz="1400">
@@ -4934,7 +5059,7 @@
                 </a:solidFill>
                 <a:latin typeface="Consolas"/>
               </a:rPr>
-              <a:t> 176  </a:t>
+              <a:t> 184  </a:t>
             </a:r>
             <a:r>
               <a:rPr sz="1400">
@@ -4959,7 +5084,7 @@
                 </a:solidFill>
                 <a:latin typeface="Consolas"/>
               </a:rPr>
-              <a:t> 177  </a:t>
+              <a:t> 185  </a:t>
             </a:r>
             <a:r>
               <a:rPr sz="1400">
@@ -4984,7 +5109,7 @@
                 </a:solidFill>
                 <a:latin typeface="Consolas"/>
               </a:rPr>
-              <a:t> 178  </a:t>
+              <a:t> 186  </a:t>
             </a:r>
             <a:r>
               <a:rPr sz="1400">
@@ -5009,7 +5134,7 @@
                 </a:solidFill>
                 <a:latin typeface="Consolas"/>
               </a:rPr>
-              <a:t> 179  </a:t>
+              <a:t> 187  </a:t>
             </a:r>
             <a:r>
               <a:rPr sz="1400">
@@ -5034,7 +5159,7 @@
                 </a:solidFill>
                 <a:latin typeface="Consolas"/>
               </a:rPr>
-              <a:t> 180  </a:t>
+              <a:t> 188  </a:t>
             </a:r>
             <a:r>
               <a:rPr sz="1400">
@@ -5059,7 +5184,7 @@
                 </a:solidFill>
                 <a:latin typeface="Consolas"/>
               </a:rPr>
-              <a:t> 181  </a:t>
+              <a:t> 189  </a:t>
             </a:r>
             <a:r>
               <a:rPr sz="1400">
@@ -5084,7 +5209,7 @@
                 </a:solidFill>
                 <a:latin typeface="Consolas"/>
               </a:rPr>
-              <a:t> 182  </a:t>
+              <a:t> 190  </a:t>
             </a:r>
             <a:r>
               <a:rPr sz="1400">
@@ -5109,7 +5234,7 @@
                 </a:solidFill>
                 <a:latin typeface="Consolas"/>
               </a:rPr>
-              <a:t> 183  </a:t>
+              <a:t> 191  </a:t>
             </a:r>
             <a:r>
               <a:rPr sz="1400">
@@ -5134,7 +5259,7 @@
                 </a:solidFill>
                 <a:latin typeface="Consolas"/>
               </a:rPr>
-              <a:t> 184  </a:t>
+              <a:t> 192  </a:t>
             </a:r>
             <a:r>
               <a:rPr sz="1400">
@@ -5159,7 +5284,7 @@
                 </a:solidFill>
                 <a:latin typeface="Consolas"/>
               </a:rPr>
-              <a:t> 185  </a:t>
+              <a:t> 193  </a:t>
             </a:r>
             <a:r>
               <a:rPr sz="1400">
@@ -5266,7 +5391,7 @@
                 </a:solidFill>
                 <a:latin typeface="Consolas"/>
               </a:rPr>
-              <a:t> 186  </a:t>
+              <a:t> 194  </a:t>
             </a:r>
             <a:r>
               <a:rPr sz="1400">
@@ -5291,7 +5416,7 @@
                 </a:solidFill>
                 <a:latin typeface="Consolas"/>
               </a:rPr>
-              <a:t> 187  </a:t>
+              <a:t> 195  </a:t>
             </a:r>
             <a:r>
               <a:rPr sz="1400">
@@ -5316,7 +5441,7 @@
                 </a:solidFill>
                 <a:latin typeface="Consolas"/>
               </a:rPr>
-              <a:t> 188  </a:t>
+              <a:t> 196  </a:t>
             </a:r>
             <a:r>
               <a:rPr sz="1400">
@@ -5341,7 +5466,7 @@
                 </a:solidFill>
                 <a:latin typeface="Consolas"/>
               </a:rPr>
-              <a:t> 189  </a:t>
+              <a:t> 197  </a:t>
             </a:r>
             <a:r>
               <a:rPr sz="1400">
@@ -5366,7 +5491,7 @@
                 </a:solidFill>
                 <a:latin typeface="Consolas"/>
               </a:rPr>
-              <a:t> 190  </a:t>
+              <a:t> 198  </a:t>
             </a:r>
             <a:r>
               <a:rPr sz="1400">
@@ -5391,7 +5516,7 @@
                 </a:solidFill>
                 <a:latin typeface="Consolas"/>
               </a:rPr>
-              <a:t> 191  </a:t>
+              <a:t> 199  </a:t>
             </a:r>
             <a:r>
               <a:rPr sz="1400">
@@ -5416,7 +5541,7 @@
                 </a:solidFill>
                 <a:latin typeface="Consolas"/>
               </a:rPr>
-              <a:t> 192  </a:t>
+              <a:t> 200  </a:t>
             </a:r>
             <a:r>
               <a:rPr sz="1400">
@@ -5441,7 +5566,7 @@
                 </a:solidFill>
                 <a:latin typeface="Consolas"/>
               </a:rPr>
-              <a:t> 193  </a:t>
+              <a:t> 201  </a:t>
             </a:r>
             <a:r>
               <a:rPr sz="1400">
@@ -5466,7 +5591,7 @@
                 </a:solidFill>
                 <a:latin typeface="Consolas"/>
               </a:rPr>
-              <a:t> 194  </a:t>
+              <a:t> 202  </a:t>
             </a:r>
             <a:r>
               <a:rPr sz="1400">
@@ -5491,7 +5616,7 @@
                 </a:solidFill>
                 <a:latin typeface="Consolas"/>
               </a:rPr>
-              <a:t> 195  </a:t>
+              <a:t> 203  </a:t>
             </a:r>
             <a:r>
               <a:rPr sz="1400">
@@ -5516,7 +5641,7 @@
                 </a:solidFill>
                 <a:latin typeface="Consolas"/>
               </a:rPr>
-              <a:t> 196  </a:t>
+              <a:t> 204  </a:t>
             </a:r>
             <a:r>
               <a:rPr sz="1400">
@@ -5541,7 +5666,7 @@
                 </a:solidFill>
                 <a:latin typeface="Consolas"/>
               </a:rPr>
-              <a:t> 197  </a:t>
+              <a:t> 205  </a:t>
             </a:r>
             <a:r>
               <a:rPr sz="1400">
@@ -5566,7 +5691,7 @@
                 </a:solidFill>
                 <a:latin typeface="Consolas"/>
               </a:rPr>
-              <a:t> 198  </a:t>
+              <a:t> 206  </a:t>
             </a:r>
             <a:r>
               <a:rPr sz="1400">
@@ -5591,7 +5716,7 @@
                 </a:solidFill>
                 <a:latin typeface="Consolas"/>
               </a:rPr>
-              <a:t> 199  </a:t>
+              <a:t> 207  </a:t>
             </a:r>
             <a:r>
               <a:rPr sz="1400">
@@ -5616,7 +5741,7 @@
                 </a:solidFill>
                 <a:latin typeface="Consolas"/>
               </a:rPr>
-              <a:t> 200  </a:t>
+              <a:t> 208  </a:t>
             </a:r>
             <a:r>
               <a:rPr sz="1400">

--- a/ai101/slides/week-14.pptx
+++ b/ai101/slides/week-14.pptx
@@ -4582,7 +4582,7 @@
                   <a:srgbClr val="1F2A37"/>
                 </a:solidFill>
               </a:rPr>
-              <a:t>• Compare answers across the room</a:t>
+              <a:t>• Compare your answer with a classmate's</a:t>
             </a:r>
           </a:p>
           <a:p>

--- a/ai101/slides/week-14.pptx
+++ b/ai101/slides/week-14.pptx
@@ -17,6 +17,27 @@
     <p:sldId id="265" r:id="rId16"/>
     <p:sldId id="266" r:id="rId17"/>
     <p:sldId id="267" r:id="rId18"/>
+    <p:sldId id="268" r:id="rId19"/>
+    <p:sldId id="269" r:id="rId20"/>
+    <p:sldId id="270" r:id="rId21"/>
+    <p:sldId id="271" r:id="rId22"/>
+    <p:sldId id="272" r:id="rId23"/>
+    <p:sldId id="273" r:id="rId24"/>
+    <p:sldId id="274" r:id="rId25"/>
+    <p:sldId id="275" r:id="rId26"/>
+    <p:sldId id="276" r:id="rId27"/>
+    <p:sldId id="277" r:id="rId28"/>
+    <p:sldId id="278" r:id="rId29"/>
+    <p:sldId id="279" r:id="rId30"/>
+    <p:sldId id="280" r:id="rId31"/>
+    <p:sldId id="281" r:id="rId32"/>
+    <p:sldId id="282" r:id="rId33"/>
+    <p:sldId id="283" r:id="rId34"/>
+    <p:sldId id="284" r:id="rId35"/>
+    <p:sldId id="285" r:id="rId36"/>
+    <p:sldId id="286" r:id="rId37"/>
+    <p:sldId id="287" r:id="rId38"/>
+    <p:sldId id="288" r:id="rId39"/>
   </p:sldIdLst>
   <p:sldSz cx="12191695" cy="6858000" type="screen4x3"/>
   <p:notesSz cx="6858000" cy="9144000"/>
@@ -3198,7 +3219,7 @@
         <p:spPr>
           <a:xfrm>
             <a:off x="502920" y="274320"/>
-            <a:ext cx="11155680" cy="731520"/>
+            <a:ext cx="11155680" cy="548640"/>
           </a:xfrm>
           <a:prstGeom prst="rect">
             <a:avLst/>
@@ -3212,12 +3233,12 @@
           <a:lstStyle/>
           <a:p>
             <a:r>
-              <a:rPr sz="2600" b="1">
+              <a:rPr sz="2200" b="1">
                 <a:solidFill>
                   <a:srgbClr val="01AEFD"/>
                 </a:solidFill>
               </a:rPr>
-              <a:t>Type this into script.js  (3 of 5)</a:t>
+              <a:t>Type this into script.js   -   line 189</a:t>
             </a:r>
           </a:p>
         </p:txBody>
@@ -3230,8 +3251,8 @@
         </p:nvSpPr>
         <p:spPr>
           <a:xfrm>
-            <a:off x="502920" y="1051560"/>
-            <a:ext cx="11155680" cy="5394960"/>
+            <a:off x="502920" y="960120"/>
+            <a:ext cx="11155680" cy="4297680"/>
           </a:xfrm>
           <a:prstGeom prst="rect">
             <a:avLst/>
@@ -3250,197 +3271,305 @@
               </a:spcAft>
             </a:pPr>
             <a:r>
-              <a:rPr sz="1700">
-                <a:solidFill>
-                  <a:srgbClr val="6D8C97"/>
-                </a:solidFill>
-                <a:latin typeface="Consolas"/>
-              </a:rPr>
-              <a:t> 209  </a:t>
-            </a:r>
-            <a:r>
-              <a:rPr sz="1700">
+              <a:rPr sz="1300">
+                <a:solidFill>
+                  <a:srgbClr val="6D8C97"/>
+                </a:solidFill>
+                <a:latin typeface="Consolas"/>
+              </a:rPr>
+              <a:t> 179  </a:t>
+            </a:r>
+            <a:r>
+              <a:rPr sz="1300">
+                <a:solidFill>
+                  <a:srgbClr val="6D8C97"/>
+                </a:solidFill>
+                <a:latin typeface="Consolas"/>
+              </a:rPr>
+              <a:t> </a:t>
+            </a:r>
+          </a:p>
+          <a:p>
+            <a:pPr>
+              <a:spcAft>
+                <a:spcPts val="0"/>
+              </a:spcAft>
+            </a:pPr>
+            <a:r>
+              <a:rPr sz="1300">
+                <a:solidFill>
+                  <a:srgbClr val="6D8C97"/>
+                </a:solidFill>
+                <a:latin typeface="Consolas"/>
+              </a:rPr>
+              <a:t> 180  </a:t>
+            </a:r>
+            <a:r>
+              <a:rPr sz="1300">
+                <a:solidFill>
+                  <a:srgbClr val="6D8C97"/>
+                </a:solidFill>
+                <a:latin typeface="Consolas"/>
+              </a:rPr>
+              <a:t>// The browser calls this when the form is submitted.</a:t>
+            </a:r>
+          </a:p>
+          <a:p>
+            <a:pPr>
+              <a:spcAft>
+                <a:spcPts val="0"/>
+              </a:spcAft>
+            </a:pPr>
+            <a:r>
+              <a:rPr sz="1300">
+                <a:solidFill>
+                  <a:srgbClr val="6D8C97"/>
+                </a:solidFill>
+                <a:latin typeface="Consolas"/>
+              </a:rPr>
+              <a:t> 181  </a:t>
+            </a:r>
+            <a:r>
+              <a:rPr sz="1300">
+                <a:solidFill>
+                  <a:srgbClr val="6D8C97"/>
+                </a:solidFill>
+                <a:latin typeface="Consolas"/>
+              </a:rPr>
+              <a:t>composer.addEventListener('submit', async function (event) {</a:t>
+            </a:r>
+          </a:p>
+          <a:p>
+            <a:pPr>
+              <a:spcAft>
+                <a:spcPts val="0"/>
+              </a:spcAft>
+            </a:pPr>
+            <a:r>
+              <a:rPr sz="1300">
+                <a:solidFill>
+                  <a:srgbClr val="6D8C97"/>
+                </a:solidFill>
+                <a:latin typeface="Consolas"/>
+              </a:rPr>
+              <a:t> 182  </a:t>
+            </a:r>
+            <a:r>
+              <a:rPr sz="1300">
+                <a:solidFill>
+                  <a:srgbClr val="6D8C97"/>
+                </a:solidFill>
+                <a:latin typeface="Consolas"/>
+              </a:rPr>
+              <a:t>  event.preventDefault();</a:t>
+            </a:r>
+          </a:p>
+          <a:p>
+            <a:pPr>
+              <a:spcAft>
+                <a:spcPts val="0"/>
+              </a:spcAft>
+            </a:pPr>
+            <a:r>
+              <a:rPr sz="1300">
+                <a:solidFill>
+                  <a:srgbClr val="6D8C97"/>
+                </a:solidFill>
+                <a:latin typeface="Consolas"/>
+              </a:rPr>
+              <a:t> 183  </a:t>
+            </a:r>
+            <a:r>
+              <a:rPr sz="1300">
+                <a:solidFill>
+                  <a:srgbClr val="6D8C97"/>
+                </a:solidFill>
+                <a:latin typeface="Consolas"/>
+              </a:rPr>
+              <a:t>  const text = promptBox.value.trim();</a:t>
+            </a:r>
+          </a:p>
+          <a:p>
+            <a:pPr>
+              <a:spcAft>
+                <a:spcPts val="0"/>
+              </a:spcAft>
+            </a:pPr>
+            <a:r>
+              <a:rPr sz="1300">
+                <a:solidFill>
+                  <a:srgbClr val="6D8C97"/>
+                </a:solidFill>
+                <a:latin typeface="Consolas"/>
+              </a:rPr>
+              <a:t> 184  </a:t>
+            </a:r>
+            <a:r>
+              <a:rPr sz="1300">
+                <a:solidFill>
+                  <a:srgbClr val="6D8C97"/>
+                </a:solidFill>
+                <a:latin typeface="Consolas"/>
+              </a:rPr>
+              <a:t>  if (text === '') { return; }</a:t>
+            </a:r>
+          </a:p>
+          <a:p>
+            <a:pPr>
+              <a:spcAft>
+                <a:spcPts val="0"/>
+              </a:spcAft>
+            </a:pPr>
+            <a:r>
+              <a:rPr sz="1300">
+                <a:solidFill>
+                  <a:srgbClr val="6D8C97"/>
+                </a:solidFill>
+                <a:latin typeface="Consolas"/>
+              </a:rPr>
+              <a:t> 185  </a:t>
+            </a:r>
+            <a:r>
+              <a:rPr sz="1300">
+                <a:solidFill>
+                  <a:srgbClr val="6D8C97"/>
+                </a:solidFill>
+                <a:latin typeface="Consolas"/>
+              </a:rPr>
+              <a:t> </a:t>
+            </a:r>
+          </a:p>
+          <a:p>
+            <a:pPr>
+              <a:spcAft>
+                <a:spcPts val="0"/>
+              </a:spcAft>
+            </a:pPr>
+            <a:r>
+              <a:rPr sz="1300">
+                <a:solidFill>
+                  <a:srgbClr val="6D8C97"/>
+                </a:solidFill>
+                <a:latin typeface="Consolas"/>
+              </a:rPr>
+              <a:t> 186  </a:t>
+            </a:r>
+            <a:r>
+              <a:rPr sz="1300">
+                <a:solidFill>
+                  <a:srgbClr val="6D8C97"/>
+                </a:solidFill>
+                <a:latin typeface="Consolas"/>
+              </a:rPr>
+              <a:t>  // Week 14: never trust what a user types. A giant message wastes the</a:t>
+            </a:r>
+          </a:p>
+          <a:p>
+            <a:pPr>
+              <a:spcAft>
+                <a:spcPts val="0"/>
+              </a:spcAft>
+            </a:pPr>
+            <a:r>
+              <a:rPr sz="1300">
+                <a:solidFill>
+                  <a:srgbClr val="6D8C97"/>
+                </a:solidFill>
+                <a:latin typeface="Consolas"/>
+              </a:rPr>
+              <a:t> 187  </a:t>
+            </a:r>
+            <a:r>
+              <a:rPr sz="1300">
+                <a:solidFill>
+                  <a:srgbClr val="6D8C97"/>
+                </a:solidFill>
+                <a:latin typeface="Consolas"/>
+              </a:rPr>
+              <a:t>  // whole conversation budget and gets the request refused for everyone.</a:t>
+            </a:r>
+          </a:p>
+          <a:p>
+            <a:pPr>
+              <a:spcAft>
+                <a:spcPts val="0"/>
+              </a:spcAft>
+            </a:pPr>
+            <a:r>
+              <a:rPr sz="1300">
+                <a:solidFill>
+                  <a:srgbClr val="6D8C97"/>
+                </a:solidFill>
+                <a:latin typeface="Consolas"/>
+              </a:rPr>
+              <a:t> 188  </a:t>
+            </a:r>
+            <a:r>
+              <a:rPr sz="1300">
+                <a:solidFill>
+                  <a:srgbClr val="6D8C97"/>
+                </a:solidFill>
+                <a:latin typeface="Consolas"/>
+              </a:rPr>
+              <a:t>  if (text.length &gt; 500) {</a:t>
+            </a:r>
+          </a:p>
+          <a:p>
+            <a:pPr>
+              <a:spcAft>
+                <a:spcPts val="0"/>
+              </a:spcAft>
+            </a:pPr>
+            <a:r>
+              <a:rPr sz="1300">
+                <a:solidFill>
+                  <a:srgbClr val="6D8C97"/>
+                </a:solidFill>
+                <a:latin typeface="Consolas"/>
+              </a:rPr>
+              <a:t> 189  </a:t>
+            </a:r>
+            <a:r>
+              <a:rPr sz="1300">
+                <a:solidFill>
+                  <a:srgbClr val="7FE0A0"/>
+                </a:solidFill>
+                <a:latin typeface="Consolas"/>
+              </a:rPr>
+              <a:t>    addLine('problem', 'That is too long for one message - try under 500 characters.');</a:t>
+            </a:r>
+          </a:p>
+        </p:txBody>
+      </p:sp>
+      <p:sp>
+        <p:nvSpPr>
+          <p:cNvPr id="4" name="TextBox 3"/>
+          <p:cNvSpPr txBox="1"/>
+          <p:nvPr/>
+        </p:nvSpPr>
+        <p:spPr>
+          <a:xfrm>
+            <a:off x="548640" y="5623560"/>
+            <a:ext cx="11064240" cy="1051560"/>
+          </a:xfrm>
+          <a:prstGeom prst="rect">
+            <a:avLst/>
+          </a:prstGeom>
+          <a:noFill/>
+        </p:spPr>
+        <p:txBody>
+          <a:bodyPr wrap="square">
+            <a:spAutoFit/>
+          </a:bodyPr>
+          <a:lstStyle/>
+          <a:p>
+            <a:r>
+              <a:rPr sz="2000">
                 <a:solidFill>
                   <a:srgbClr val="DCECEF"/>
                 </a:solidFill>
-                <a:latin typeface="Consolas"/>
-              </a:rPr>
-              <a:t>    // 'Failed to fetch' means the request never arrived anywhere. That is</a:t>
-            </a:r>
-          </a:p>
-          <a:p>
-            <a:pPr>
-              <a:spcAft>
-                <a:spcPts val="0"/>
-              </a:spcAft>
-            </a:pPr>
-            <a:r>
-              <a:rPr sz="1700">
-                <a:solidFill>
-                  <a:srgbClr val="6D8C97"/>
-                </a:solidFill>
-                <a:latin typeface="Consolas"/>
-              </a:rPr>
-              <a:t> 210  </a:t>
-            </a:r>
-            <a:r>
-              <a:rPr sz="1700">
-                <a:solidFill>
-                  <a:srgbClr val="DCECEF"/>
-                </a:solidFill>
-                <a:latin typeface="Consolas"/>
-              </a:rPr>
-              <a:t>    // the commonest real failure and the least helpful wording, so replace it.</a:t>
-            </a:r>
-          </a:p>
-          <a:p>
-            <a:pPr>
-              <a:spcAft>
-                <a:spcPts val="0"/>
-              </a:spcAft>
-            </a:pPr>
-            <a:r>
-              <a:rPr sz="1700">
-                <a:solidFill>
-                  <a:srgbClr val="6D8C97"/>
-                </a:solidFill>
-                <a:latin typeface="Consolas"/>
-              </a:rPr>
-              <a:t> 211  </a:t>
-            </a:r>
-            <a:r>
-              <a:rPr sz="1700">
-                <a:solidFill>
-                  <a:srgbClr val="DCECEF"/>
-                </a:solidFill>
-                <a:latin typeface="Consolas"/>
-              </a:rPr>
-              <a:t>    const said = problem.message === 'Failed to fetch'</a:t>
-            </a:r>
-          </a:p>
-          <a:p>
-            <a:pPr>
-              <a:spcAft>
-                <a:spcPts val="0"/>
-              </a:spcAft>
-            </a:pPr>
-            <a:r>
-              <a:rPr sz="1700">
-                <a:solidFill>
-                  <a:srgbClr val="6D8C97"/>
-                </a:solidFill>
-                <a:latin typeface="Consolas"/>
-              </a:rPr>
-              <a:t> 212  </a:t>
-            </a:r>
-            <a:r>
-              <a:rPr sz="1700">
-                <a:solidFill>
-                  <a:srgbClr val="DCECEF"/>
-                </a:solidFill>
-                <a:latin typeface="Consolas"/>
-              </a:rPr>
-              <a:t>      ? 'Could not reach the AI. Are you on the school network?'</a:t>
-            </a:r>
-          </a:p>
-          <a:p>
-            <a:pPr>
-              <a:spcAft>
-                <a:spcPts val="0"/>
-              </a:spcAft>
-            </a:pPr>
-            <a:r>
-              <a:rPr sz="1700">
-                <a:solidFill>
-                  <a:srgbClr val="6D8C97"/>
-                </a:solidFill>
-                <a:latin typeface="Consolas"/>
-              </a:rPr>
-              <a:t> 213  </a:t>
-            </a:r>
-            <a:r>
-              <a:rPr sz="1700">
-                <a:solidFill>
-                  <a:srgbClr val="DCECEF"/>
-                </a:solidFill>
-                <a:latin typeface="Consolas"/>
-              </a:rPr>
-              <a:t>      : problem.message;</a:t>
-            </a:r>
-          </a:p>
-          <a:p>
-            <a:pPr>
-              <a:spcAft>
-                <a:spcPts val="0"/>
-              </a:spcAft>
-            </a:pPr>
-            <a:r>
-              <a:rPr sz="1700">
-                <a:solidFill>
-                  <a:srgbClr val="6D8C97"/>
-                </a:solidFill>
-                <a:latin typeface="Consolas"/>
-              </a:rPr>
-              <a:t> 214  </a:t>
-            </a:r>
-            <a:r>
-              <a:rPr sz="1700">
-                <a:solidFill>
-                  <a:srgbClr val="DCECEF"/>
-                </a:solidFill>
-                <a:latin typeface="Consolas"/>
-              </a:rPr>
-              <a:t>    addLine('problem', said);</a:t>
-            </a:r>
-          </a:p>
-          <a:p>
-            <a:pPr>
-              <a:spcAft>
-                <a:spcPts val="0"/>
-              </a:spcAft>
-            </a:pPr>
-            <a:r>
-              <a:rPr sz="1700">
-                <a:solidFill>
-                  <a:srgbClr val="6D8C97"/>
-                </a:solidFill>
-                <a:latin typeface="Consolas"/>
-              </a:rPr>
-              <a:t> 215  </a:t>
-            </a:r>
-            <a:r>
-              <a:rPr sz="1700">
-                <a:solidFill>
-                  <a:srgbClr val="DCECEF"/>
-                </a:solidFill>
-                <a:latin typeface="Consolas"/>
-              </a:rPr>
-              <a:t>  }</a:t>
-            </a:r>
-          </a:p>
-          <a:p>
-            <a:pPr>
-              <a:spcAft>
-                <a:spcPts val="0"/>
-              </a:spcAft>
-            </a:pPr>
-            <a:r>
-              <a:rPr sz="1700">
-                <a:solidFill>
-                  <a:srgbClr val="6D8C97"/>
-                </a:solidFill>
-                <a:latin typeface="Consolas"/>
-              </a:rPr>
-              <a:t> 216  </a:t>
-            </a:r>
-            <a:r>
-              <a:rPr sz="1700">
-                <a:solidFill>
-                  <a:srgbClr val="DCECEF"/>
-                </a:solidFill>
-                <a:latin typeface="Consolas"/>
-              </a:rPr>
-              <a:t>});</a:t>
+              </a:rPr>
+              <a:t>Tell them kindly it is too long.</a:t>
             </a:r>
           </a:p>
         </p:txBody>
@@ -3480,7 +3609,7 @@
         <p:spPr>
           <a:xfrm>
             <a:off x="502920" y="274320"/>
-            <a:ext cx="11155680" cy="731520"/>
+            <a:ext cx="11155680" cy="548640"/>
           </a:xfrm>
           <a:prstGeom prst="rect">
             <a:avLst/>
@@ -3494,12 +3623,12 @@
           <a:lstStyle/>
           <a:p>
             <a:r>
-              <a:rPr sz="2600" b="1">
+              <a:rPr sz="2200" b="1">
                 <a:solidFill>
                   <a:srgbClr val="01AEFD"/>
                 </a:solidFill>
               </a:rPr>
-              <a:t>Type this into index.html  (4 of 5)</a:t>
+              <a:t>Type this into script.js   -   line 190</a:t>
             </a:r>
           </a:p>
         </p:txBody>
@@ -3512,8 +3641,8 @@
         </p:nvSpPr>
         <p:spPr>
           <a:xfrm>
-            <a:off x="502920" y="1051560"/>
-            <a:ext cx="11155680" cy="5394960"/>
+            <a:off x="502920" y="960120"/>
+            <a:ext cx="11155680" cy="4297680"/>
           </a:xfrm>
           <a:prstGeom prst="rect">
             <a:avLst/>
@@ -3532,147 +3661,330 @@
               </a:spcAft>
             </a:pPr>
             <a:r>
-              <a:rPr sz="1700">
-                <a:solidFill>
-                  <a:srgbClr val="6D8C97"/>
-                </a:solidFill>
-                <a:latin typeface="Consolas"/>
-              </a:rPr>
-              <a:t>   3  </a:t>
-            </a:r>
-            <a:r>
-              <a:rPr sz="1700">
+              <a:rPr sz="1300">
+                <a:solidFill>
+                  <a:srgbClr val="6D8C97"/>
+                </a:solidFill>
+                <a:latin typeface="Consolas"/>
+              </a:rPr>
+              <a:t> 179  </a:t>
+            </a:r>
+            <a:r>
+              <a:rPr sz="1300">
+                <a:solidFill>
+                  <a:srgbClr val="6D8C97"/>
+                </a:solidFill>
+                <a:latin typeface="Consolas"/>
+              </a:rPr>
+              <a:t> </a:t>
+            </a:r>
+          </a:p>
+          <a:p>
+            <a:pPr>
+              <a:spcAft>
+                <a:spcPts val="0"/>
+              </a:spcAft>
+            </a:pPr>
+            <a:r>
+              <a:rPr sz="1300">
+                <a:solidFill>
+                  <a:srgbClr val="6D8C97"/>
+                </a:solidFill>
+                <a:latin typeface="Consolas"/>
+              </a:rPr>
+              <a:t> 180  </a:t>
+            </a:r>
+            <a:r>
+              <a:rPr sz="1300">
+                <a:solidFill>
+                  <a:srgbClr val="6D8C97"/>
+                </a:solidFill>
+                <a:latin typeface="Consolas"/>
+              </a:rPr>
+              <a:t>// The browser calls this when the form is submitted.</a:t>
+            </a:r>
+          </a:p>
+          <a:p>
+            <a:pPr>
+              <a:spcAft>
+                <a:spcPts val="0"/>
+              </a:spcAft>
+            </a:pPr>
+            <a:r>
+              <a:rPr sz="1300">
+                <a:solidFill>
+                  <a:srgbClr val="6D8C97"/>
+                </a:solidFill>
+                <a:latin typeface="Consolas"/>
+              </a:rPr>
+              <a:t> 181  </a:t>
+            </a:r>
+            <a:r>
+              <a:rPr sz="1300">
+                <a:solidFill>
+                  <a:srgbClr val="6D8C97"/>
+                </a:solidFill>
+                <a:latin typeface="Consolas"/>
+              </a:rPr>
+              <a:t>composer.addEventListener('submit', async function (event) {</a:t>
+            </a:r>
+          </a:p>
+          <a:p>
+            <a:pPr>
+              <a:spcAft>
+                <a:spcPts val="0"/>
+              </a:spcAft>
+            </a:pPr>
+            <a:r>
+              <a:rPr sz="1300">
+                <a:solidFill>
+                  <a:srgbClr val="6D8C97"/>
+                </a:solidFill>
+                <a:latin typeface="Consolas"/>
+              </a:rPr>
+              <a:t> 182  </a:t>
+            </a:r>
+            <a:r>
+              <a:rPr sz="1300">
+                <a:solidFill>
+                  <a:srgbClr val="6D8C97"/>
+                </a:solidFill>
+                <a:latin typeface="Consolas"/>
+              </a:rPr>
+              <a:t>  event.preventDefault();</a:t>
+            </a:r>
+          </a:p>
+          <a:p>
+            <a:pPr>
+              <a:spcAft>
+                <a:spcPts val="0"/>
+              </a:spcAft>
+            </a:pPr>
+            <a:r>
+              <a:rPr sz="1300">
+                <a:solidFill>
+                  <a:srgbClr val="6D8C97"/>
+                </a:solidFill>
+                <a:latin typeface="Consolas"/>
+              </a:rPr>
+              <a:t> 183  </a:t>
+            </a:r>
+            <a:r>
+              <a:rPr sz="1300">
+                <a:solidFill>
+                  <a:srgbClr val="6D8C97"/>
+                </a:solidFill>
+                <a:latin typeface="Consolas"/>
+              </a:rPr>
+              <a:t>  const text = promptBox.value.trim();</a:t>
+            </a:r>
+          </a:p>
+          <a:p>
+            <a:pPr>
+              <a:spcAft>
+                <a:spcPts val="0"/>
+              </a:spcAft>
+            </a:pPr>
+            <a:r>
+              <a:rPr sz="1300">
+                <a:solidFill>
+                  <a:srgbClr val="6D8C97"/>
+                </a:solidFill>
+                <a:latin typeface="Consolas"/>
+              </a:rPr>
+              <a:t> 184  </a:t>
+            </a:r>
+            <a:r>
+              <a:rPr sz="1300">
+                <a:solidFill>
+                  <a:srgbClr val="6D8C97"/>
+                </a:solidFill>
+                <a:latin typeface="Consolas"/>
+              </a:rPr>
+              <a:t>  if (text === '') { return; }</a:t>
+            </a:r>
+          </a:p>
+          <a:p>
+            <a:pPr>
+              <a:spcAft>
+                <a:spcPts val="0"/>
+              </a:spcAft>
+            </a:pPr>
+            <a:r>
+              <a:rPr sz="1300">
+                <a:solidFill>
+                  <a:srgbClr val="6D8C97"/>
+                </a:solidFill>
+                <a:latin typeface="Consolas"/>
+              </a:rPr>
+              <a:t> 185  </a:t>
+            </a:r>
+            <a:r>
+              <a:rPr sz="1300">
+                <a:solidFill>
+                  <a:srgbClr val="6D8C97"/>
+                </a:solidFill>
+                <a:latin typeface="Consolas"/>
+              </a:rPr>
+              <a:t> </a:t>
+            </a:r>
+          </a:p>
+          <a:p>
+            <a:pPr>
+              <a:spcAft>
+                <a:spcPts val="0"/>
+              </a:spcAft>
+            </a:pPr>
+            <a:r>
+              <a:rPr sz="1300">
+                <a:solidFill>
+                  <a:srgbClr val="6D8C97"/>
+                </a:solidFill>
+                <a:latin typeface="Consolas"/>
+              </a:rPr>
+              <a:t> 186  </a:t>
+            </a:r>
+            <a:r>
+              <a:rPr sz="1300">
+                <a:solidFill>
+                  <a:srgbClr val="6D8C97"/>
+                </a:solidFill>
+                <a:latin typeface="Consolas"/>
+              </a:rPr>
+              <a:t>  // Week 14: never trust what a user types. A giant message wastes the</a:t>
+            </a:r>
+          </a:p>
+          <a:p>
+            <a:pPr>
+              <a:spcAft>
+                <a:spcPts val="0"/>
+              </a:spcAft>
+            </a:pPr>
+            <a:r>
+              <a:rPr sz="1300">
+                <a:solidFill>
+                  <a:srgbClr val="6D8C97"/>
+                </a:solidFill>
+                <a:latin typeface="Consolas"/>
+              </a:rPr>
+              <a:t> 187  </a:t>
+            </a:r>
+            <a:r>
+              <a:rPr sz="1300">
+                <a:solidFill>
+                  <a:srgbClr val="6D8C97"/>
+                </a:solidFill>
+                <a:latin typeface="Consolas"/>
+              </a:rPr>
+              <a:t>  // whole conversation budget and gets the request refused for everyone.</a:t>
+            </a:r>
+          </a:p>
+          <a:p>
+            <a:pPr>
+              <a:spcAft>
+                <a:spcPts val="0"/>
+              </a:spcAft>
+            </a:pPr>
+            <a:r>
+              <a:rPr sz="1300">
+                <a:solidFill>
+                  <a:srgbClr val="6D8C97"/>
+                </a:solidFill>
+                <a:latin typeface="Consolas"/>
+              </a:rPr>
+              <a:t> 188  </a:t>
+            </a:r>
+            <a:r>
+              <a:rPr sz="1300">
+                <a:solidFill>
+                  <a:srgbClr val="6D8C97"/>
+                </a:solidFill>
+                <a:latin typeface="Consolas"/>
+              </a:rPr>
+              <a:t>  if (text.length &gt; 500) {</a:t>
+            </a:r>
+          </a:p>
+          <a:p>
+            <a:pPr>
+              <a:spcAft>
+                <a:spcPts val="0"/>
+              </a:spcAft>
+            </a:pPr>
+            <a:r>
+              <a:rPr sz="1300">
+                <a:solidFill>
+                  <a:srgbClr val="6D8C97"/>
+                </a:solidFill>
+                <a:latin typeface="Consolas"/>
+              </a:rPr>
+              <a:t> 189  </a:t>
+            </a:r>
+            <a:r>
+              <a:rPr sz="1300">
+                <a:solidFill>
+                  <a:srgbClr val="6D8C97"/>
+                </a:solidFill>
+                <a:latin typeface="Consolas"/>
+              </a:rPr>
+              <a:t>    addLine('problem', 'That is too long for one message - try under 500 characters.');</a:t>
+            </a:r>
+          </a:p>
+          <a:p>
+            <a:pPr>
+              <a:spcAft>
+                <a:spcPts val="0"/>
+              </a:spcAft>
+            </a:pPr>
+            <a:r>
+              <a:rPr sz="1300">
+                <a:solidFill>
+                  <a:srgbClr val="6D8C97"/>
+                </a:solidFill>
+                <a:latin typeface="Consolas"/>
+              </a:rPr>
+              <a:t> 190  </a:t>
+            </a:r>
+            <a:r>
+              <a:rPr sz="1300">
+                <a:solidFill>
+                  <a:srgbClr val="7FE0A0"/>
+                </a:solidFill>
+                <a:latin typeface="Consolas"/>
+              </a:rPr>
+              <a:t>    return;</a:t>
+            </a:r>
+          </a:p>
+        </p:txBody>
+      </p:sp>
+      <p:sp>
+        <p:nvSpPr>
+          <p:cNvPr id="4" name="TextBox 3"/>
+          <p:cNvSpPr txBox="1"/>
+          <p:nvPr/>
+        </p:nvSpPr>
+        <p:spPr>
+          <a:xfrm>
+            <a:off x="548640" y="5623560"/>
+            <a:ext cx="11064240" cy="1051560"/>
+          </a:xfrm>
+          <a:prstGeom prst="rect">
+            <a:avLst/>
+          </a:prstGeom>
+          <a:noFill/>
+        </p:spPr>
+        <p:txBody>
+          <a:bodyPr wrap="square">
+            <a:spAutoFit/>
+          </a:bodyPr>
+          <a:lstStyle/>
+          <a:p>
+            <a:r>
+              <a:rPr sz="2000">
                 <a:solidFill>
                   <a:srgbClr val="DCECEF"/>
                 </a:solidFill>
-                <a:latin typeface="Consolas"/>
-              </a:rPr>
-              <a:t>&lt;main class="app"&gt;</a:t>
-            </a:r>
-          </a:p>
-          <a:p>
-            <a:pPr>
-              <a:spcAft>
-                <a:spcPts val="0"/>
-              </a:spcAft>
-            </a:pPr>
-            <a:r>
-              <a:rPr sz="1700">
-                <a:solidFill>
-                  <a:srgbClr val="6D8C97"/>
-                </a:solidFill>
-                <a:latin typeface="Consolas"/>
-              </a:rPr>
-              <a:t>   4  </a:t>
-            </a:r>
-            <a:r>
-              <a:rPr sz="1700">
-                <a:solidFill>
-                  <a:srgbClr val="DCECEF"/>
-                </a:solidFill>
-                <a:latin typeface="Consolas"/>
-              </a:rPr>
-              <a:t>  &lt;header class="top"&gt;</a:t>
-            </a:r>
-          </a:p>
-          <a:p>
-            <a:pPr>
-              <a:spcAft>
-                <a:spcPts val="0"/>
-              </a:spcAft>
-            </a:pPr>
-            <a:r>
-              <a:rPr sz="1700">
-                <a:solidFill>
-                  <a:srgbClr val="6D8C97"/>
-                </a:solidFill>
-                <a:latin typeface="Consolas"/>
-              </a:rPr>
-              <a:t>   5  </a:t>
-            </a:r>
-            <a:r>
-              <a:rPr sz="1700">
-                <a:solidFill>
-                  <a:srgbClr val="DCECEF"/>
-                </a:solidFill>
-                <a:latin typeface="Consolas"/>
-              </a:rPr>
-              <a:t>    &lt;h1&gt;My AI Companion&lt;/h1&gt;</a:t>
-            </a:r>
-          </a:p>
-          <a:p>
-            <a:pPr>
-              <a:spcAft>
-                <a:spcPts val="0"/>
-              </a:spcAft>
-            </a:pPr>
-            <a:r>
-              <a:rPr sz="1700">
-                <a:solidFill>
-                  <a:srgbClr val="6D8C97"/>
-                </a:solidFill>
-                <a:latin typeface="Consolas"/>
-              </a:rPr>
-              <a:t>   6  </a:t>
-            </a:r>
-            <a:r>
-              <a:rPr sz="1700">
-                <a:solidFill>
-                  <a:srgbClr val="DCECEF"/>
-                </a:solidFill>
-                <a:latin typeface="Consolas"/>
-              </a:rPr>
-              <a:t>    &lt;p class="tag"&gt;Built by me, running on the school AI&lt;/p&gt;</a:t>
-            </a:r>
-          </a:p>
-          <a:p>
-            <a:pPr>
-              <a:spcAft>
-                <a:spcPts val="0"/>
-              </a:spcAft>
-            </a:pPr>
-            <a:r>
-              <a:rPr sz="1700">
-                <a:solidFill>
-                  <a:srgbClr val="6D8C97"/>
-                </a:solidFill>
-                <a:latin typeface="Consolas"/>
-              </a:rPr>
-              <a:t>   7  </a:t>
-            </a:r>
-            <a:r>
-              <a:rPr sz="1700">
-                <a:solidFill>
-                  <a:srgbClr val="7FE0A0"/>
-                </a:solidFill>
-                <a:latin typeface="Consolas"/>
-              </a:rPr>
-              <a:t>    &lt;p class="caution"&gt;It can be confidently wrong. Check anything that matters.&lt;/p&gt;</a:t>
-            </a:r>
-          </a:p>
-          <a:p>
-            <a:pPr>
-              <a:spcAft>
-                <a:spcPts val="0"/>
-              </a:spcAft>
-            </a:pPr>
-            <a:r>
-              <a:rPr sz="1700">
-                <a:solidFill>
-                  <a:srgbClr val="6D8C97"/>
-                </a:solidFill>
-                <a:latin typeface="Consolas"/>
-              </a:rPr>
-              <a:t>   8  </a:t>
-            </a:r>
-            <a:r>
-              <a:rPr sz="1700">
-                <a:solidFill>
-                  <a:srgbClr val="DCECEF"/>
-                </a:solidFill>
-                <a:latin typeface="Consolas"/>
-              </a:rPr>
-              <a:t>  &lt;/header&gt;</a:t>
+              </a:rPr>
+              <a:t>And stop before sending - do not waste the whole budget on one message.</a:t>
             </a:r>
           </a:p>
         </p:txBody>
@@ -3712,7 +4024,7 @@
         <p:spPr>
           <a:xfrm>
             <a:off x="502920" y="274320"/>
-            <a:ext cx="11155680" cy="731520"/>
+            <a:ext cx="11155680" cy="548640"/>
           </a:xfrm>
           <a:prstGeom prst="rect">
             <a:avLst/>
@@ -3726,12 +4038,12 @@
           <a:lstStyle/>
           <a:p>
             <a:r>
-              <a:rPr sz="2600" b="1">
+              <a:rPr sz="2200" b="1">
                 <a:solidFill>
                   <a:srgbClr val="01AEFD"/>
                 </a:solidFill>
               </a:rPr>
-              <a:t>Type this into style.css  (5 of 5)</a:t>
+              <a:t>Type this into script.js   -   line 191</a:t>
             </a:r>
           </a:p>
         </p:txBody>
@@ -3744,8 +4056,8 @@
         </p:nvSpPr>
         <p:spPr>
           <a:xfrm>
-            <a:off x="502920" y="1051560"/>
-            <a:ext cx="11155680" cy="5394960"/>
+            <a:off x="502920" y="960120"/>
+            <a:ext cx="11155680" cy="4297680"/>
           </a:xfrm>
           <a:prstGeom prst="rect">
             <a:avLst/>
@@ -3764,347 +4076,2470 @@
               </a:spcAft>
             </a:pPr>
             <a:r>
-              <a:rPr sz="1400">
-                <a:solidFill>
-                  <a:srgbClr val="6D8C97"/>
-                </a:solidFill>
-                <a:latin typeface="Consolas"/>
-              </a:rPr>
-              <a:t>   1  </a:t>
-            </a:r>
-            <a:r>
-              <a:rPr sz="1400">
+              <a:rPr sz="1300">
+                <a:solidFill>
+                  <a:srgbClr val="6D8C97"/>
+                </a:solidFill>
+                <a:latin typeface="Consolas"/>
+              </a:rPr>
+              <a:t> 179  </a:t>
+            </a:r>
+            <a:r>
+              <a:rPr sz="1300">
+                <a:solidFill>
+                  <a:srgbClr val="6D8C97"/>
+                </a:solidFill>
+                <a:latin typeface="Consolas"/>
+              </a:rPr>
+              <a:t> </a:t>
+            </a:r>
+          </a:p>
+          <a:p>
+            <a:pPr>
+              <a:spcAft>
+                <a:spcPts val="0"/>
+              </a:spcAft>
+            </a:pPr>
+            <a:r>
+              <a:rPr sz="1300">
+                <a:solidFill>
+                  <a:srgbClr val="6D8C97"/>
+                </a:solidFill>
+                <a:latin typeface="Consolas"/>
+              </a:rPr>
+              <a:t> 180  </a:t>
+            </a:r>
+            <a:r>
+              <a:rPr sz="1300">
+                <a:solidFill>
+                  <a:srgbClr val="6D8C97"/>
+                </a:solidFill>
+                <a:latin typeface="Consolas"/>
+              </a:rPr>
+              <a:t>// The browser calls this when the form is submitted.</a:t>
+            </a:r>
+          </a:p>
+          <a:p>
+            <a:pPr>
+              <a:spcAft>
+                <a:spcPts val="0"/>
+              </a:spcAft>
+            </a:pPr>
+            <a:r>
+              <a:rPr sz="1300">
+                <a:solidFill>
+                  <a:srgbClr val="6D8C97"/>
+                </a:solidFill>
+                <a:latin typeface="Consolas"/>
+              </a:rPr>
+              <a:t> 181  </a:t>
+            </a:r>
+            <a:r>
+              <a:rPr sz="1300">
+                <a:solidFill>
+                  <a:srgbClr val="6D8C97"/>
+                </a:solidFill>
+                <a:latin typeface="Consolas"/>
+              </a:rPr>
+              <a:t>composer.addEventListener('submit', async function (event) {</a:t>
+            </a:r>
+          </a:p>
+          <a:p>
+            <a:pPr>
+              <a:spcAft>
+                <a:spcPts val="0"/>
+              </a:spcAft>
+            </a:pPr>
+            <a:r>
+              <a:rPr sz="1300">
+                <a:solidFill>
+                  <a:srgbClr val="6D8C97"/>
+                </a:solidFill>
+                <a:latin typeface="Consolas"/>
+              </a:rPr>
+              <a:t> 182  </a:t>
+            </a:r>
+            <a:r>
+              <a:rPr sz="1300">
+                <a:solidFill>
+                  <a:srgbClr val="6D8C97"/>
+                </a:solidFill>
+                <a:latin typeface="Consolas"/>
+              </a:rPr>
+              <a:t>  event.preventDefault();</a:t>
+            </a:r>
+          </a:p>
+          <a:p>
+            <a:pPr>
+              <a:spcAft>
+                <a:spcPts val="0"/>
+              </a:spcAft>
+            </a:pPr>
+            <a:r>
+              <a:rPr sz="1300">
+                <a:solidFill>
+                  <a:srgbClr val="6D8C97"/>
+                </a:solidFill>
+                <a:latin typeface="Consolas"/>
+              </a:rPr>
+              <a:t> 183  </a:t>
+            </a:r>
+            <a:r>
+              <a:rPr sz="1300">
+                <a:solidFill>
+                  <a:srgbClr val="6D8C97"/>
+                </a:solidFill>
+                <a:latin typeface="Consolas"/>
+              </a:rPr>
+              <a:t>  const text = promptBox.value.trim();</a:t>
+            </a:r>
+          </a:p>
+          <a:p>
+            <a:pPr>
+              <a:spcAft>
+                <a:spcPts val="0"/>
+              </a:spcAft>
+            </a:pPr>
+            <a:r>
+              <a:rPr sz="1300">
+                <a:solidFill>
+                  <a:srgbClr val="6D8C97"/>
+                </a:solidFill>
+                <a:latin typeface="Consolas"/>
+              </a:rPr>
+              <a:t> 184  </a:t>
+            </a:r>
+            <a:r>
+              <a:rPr sz="1300">
+                <a:solidFill>
+                  <a:srgbClr val="6D8C97"/>
+                </a:solidFill>
+                <a:latin typeface="Consolas"/>
+              </a:rPr>
+              <a:t>  if (text === '') { return; }</a:t>
+            </a:r>
+          </a:p>
+          <a:p>
+            <a:pPr>
+              <a:spcAft>
+                <a:spcPts val="0"/>
+              </a:spcAft>
+            </a:pPr>
+            <a:r>
+              <a:rPr sz="1300">
+                <a:solidFill>
+                  <a:srgbClr val="6D8C97"/>
+                </a:solidFill>
+                <a:latin typeface="Consolas"/>
+              </a:rPr>
+              <a:t> 185  </a:t>
+            </a:r>
+            <a:r>
+              <a:rPr sz="1300">
+                <a:solidFill>
+                  <a:srgbClr val="6D8C97"/>
+                </a:solidFill>
+                <a:latin typeface="Consolas"/>
+              </a:rPr>
+              <a:t> </a:t>
+            </a:r>
+          </a:p>
+          <a:p>
+            <a:pPr>
+              <a:spcAft>
+                <a:spcPts val="0"/>
+              </a:spcAft>
+            </a:pPr>
+            <a:r>
+              <a:rPr sz="1300">
+                <a:solidFill>
+                  <a:srgbClr val="6D8C97"/>
+                </a:solidFill>
+                <a:latin typeface="Consolas"/>
+              </a:rPr>
+              <a:t> 186  </a:t>
+            </a:r>
+            <a:r>
+              <a:rPr sz="1300">
+                <a:solidFill>
+                  <a:srgbClr val="6D8C97"/>
+                </a:solidFill>
+                <a:latin typeface="Consolas"/>
+              </a:rPr>
+              <a:t>  // Week 14: never trust what a user types. A giant message wastes the</a:t>
+            </a:r>
+          </a:p>
+          <a:p>
+            <a:pPr>
+              <a:spcAft>
+                <a:spcPts val="0"/>
+              </a:spcAft>
+            </a:pPr>
+            <a:r>
+              <a:rPr sz="1300">
+                <a:solidFill>
+                  <a:srgbClr val="6D8C97"/>
+                </a:solidFill>
+                <a:latin typeface="Consolas"/>
+              </a:rPr>
+              <a:t> 187  </a:t>
+            </a:r>
+            <a:r>
+              <a:rPr sz="1300">
+                <a:solidFill>
+                  <a:srgbClr val="6D8C97"/>
+                </a:solidFill>
+                <a:latin typeface="Consolas"/>
+              </a:rPr>
+              <a:t>  // whole conversation budget and gets the request refused for everyone.</a:t>
+            </a:r>
+          </a:p>
+          <a:p>
+            <a:pPr>
+              <a:spcAft>
+                <a:spcPts val="0"/>
+              </a:spcAft>
+            </a:pPr>
+            <a:r>
+              <a:rPr sz="1300">
+                <a:solidFill>
+                  <a:srgbClr val="6D8C97"/>
+                </a:solidFill>
+                <a:latin typeface="Consolas"/>
+              </a:rPr>
+              <a:t> 188  </a:t>
+            </a:r>
+            <a:r>
+              <a:rPr sz="1300">
+                <a:solidFill>
+                  <a:srgbClr val="6D8C97"/>
+                </a:solidFill>
+                <a:latin typeface="Consolas"/>
+              </a:rPr>
+              <a:t>  if (text.length &gt; 500) {</a:t>
+            </a:r>
+          </a:p>
+          <a:p>
+            <a:pPr>
+              <a:spcAft>
+                <a:spcPts val="0"/>
+              </a:spcAft>
+            </a:pPr>
+            <a:r>
+              <a:rPr sz="1300">
+                <a:solidFill>
+                  <a:srgbClr val="6D8C97"/>
+                </a:solidFill>
+                <a:latin typeface="Consolas"/>
+              </a:rPr>
+              <a:t> 189  </a:t>
+            </a:r>
+            <a:r>
+              <a:rPr sz="1300">
+                <a:solidFill>
+                  <a:srgbClr val="6D8C97"/>
+                </a:solidFill>
+                <a:latin typeface="Consolas"/>
+              </a:rPr>
+              <a:t>    addLine('problem', 'That is too long for one message - try under 500 characters.');</a:t>
+            </a:r>
+          </a:p>
+          <a:p>
+            <a:pPr>
+              <a:spcAft>
+                <a:spcPts val="0"/>
+              </a:spcAft>
+            </a:pPr>
+            <a:r>
+              <a:rPr sz="1300">
+                <a:solidFill>
+                  <a:srgbClr val="6D8C97"/>
+                </a:solidFill>
+                <a:latin typeface="Consolas"/>
+              </a:rPr>
+              <a:t> 190  </a:t>
+            </a:r>
+            <a:r>
+              <a:rPr sz="1300">
+                <a:solidFill>
+                  <a:srgbClr val="6D8C97"/>
+                </a:solidFill>
+                <a:latin typeface="Consolas"/>
+              </a:rPr>
+              <a:t>    return;</a:t>
+            </a:r>
+          </a:p>
+          <a:p>
+            <a:pPr>
+              <a:spcAft>
+                <a:spcPts val="0"/>
+              </a:spcAft>
+            </a:pPr>
+            <a:r>
+              <a:rPr sz="1300">
+                <a:solidFill>
+                  <a:srgbClr val="6D8C97"/>
+                </a:solidFill>
+                <a:latin typeface="Consolas"/>
+              </a:rPr>
+              <a:t> 191  </a:t>
+            </a:r>
+            <a:r>
+              <a:rPr sz="1300">
+                <a:solidFill>
+                  <a:srgbClr val="7FE0A0"/>
+                </a:solidFill>
+                <a:latin typeface="Consolas"/>
+              </a:rPr>
+              <a:t>  }</a:t>
+            </a:r>
+          </a:p>
+        </p:txBody>
+      </p:sp>
+      <p:sp>
+        <p:nvSpPr>
+          <p:cNvPr id="4" name="TextBox 3"/>
+          <p:cNvSpPr txBox="1"/>
+          <p:nvPr/>
+        </p:nvSpPr>
+        <p:spPr>
+          <a:xfrm>
+            <a:off x="548640" y="5623560"/>
+            <a:ext cx="11064240" cy="1051560"/>
+          </a:xfrm>
+          <a:prstGeom prst="rect">
+            <a:avLst/>
+          </a:prstGeom>
+          <a:noFill/>
+        </p:spPr>
+        <p:txBody>
+          <a:bodyPr wrap="square">
+            <a:spAutoFit/>
+          </a:bodyPr>
+          <a:lstStyle/>
+          <a:p>
+            <a:r>
+              <a:rPr sz="2000">
                 <a:solidFill>
                   <a:srgbClr val="DCECEF"/>
                 </a:solidFill>
-                <a:latin typeface="Consolas"/>
-              </a:rPr>
-              <a:t>body {</a:t>
-            </a:r>
-          </a:p>
-          <a:p>
-            <a:pPr>
-              <a:spcAft>
-                <a:spcPts val="0"/>
-              </a:spcAft>
-            </a:pPr>
-            <a:r>
-              <a:rPr sz="1400">
-                <a:solidFill>
-                  <a:srgbClr val="6D8C97"/>
-                </a:solidFill>
-                <a:latin typeface="Consolas"/>
-              </a:rPr>
-              <a:t>   2  </a:t>
-            </a:r>
-            <a:r>
-              <a:rPr sz="1400">
+              </a:rPr>
+              <a:t>Close the if.</a:t>
+            </a:r>
+          </a:p>
+        </p:txBody>
+      </p:sp>
+    </p:spTree>
+  </p:cSld>
+  <p:clrMapOvr>
+    <a:masterClrMapping/>
+  </p:clrMapOvr>
+</p:sld>
+</file>
+
+<file path=ppt/slides/slide13.xml><?xml version="1.0" encoding="utf-8"?>
+<p:sld xmlns:a="http://schemas.openxmlformats.org/drawingml/2006/main" xmlns:p="http://schemas.openxmlformats.org/presentationml/2006/main" xmlns:r="http://schemas.openxmlformats.org/officeDocument/2006/relationships">
+  <p:cSld>
+    <p:bg>
+      <p:bgPr>
+        <a:solidFill>
+          <a:srgbClr val="102127"/>
+        </a:solidFill>
+        <a:effectLst/>
+      </p:bgPr>
+    </p:bg>
+    <p:spTree>
+      <p:nvGrpSpPr>
+        <p:cNvPr id="1" name=""/>
+        <p:cNvGrpSpPr/>
+        <p:nvPr/>
+      </p:nvGrpSpPr>
+      <p:grpSpPr/>
+      <p:sp>
+        <p:nvSpPr>
+          <p:cNvPr id="2" name="TextBox 1"/>
+          <p:cNvSpPr txBox="1"/>
+          <p:nvPr/>
+        </p:nvSpPr>
+        <p:spPr>
+          <a:xfrm>
+            <a:off x="502920" y="274320"/>
+            <a:ext cx="11155680" cy="548640"/>
+          </a:xfrm>
+          <a:prstGeom prst="rect">
+            <a:avLst/>
+          </a:prstGeom>
+          <a:noFill/>
+        </p:spPr>
+        <p:txBody>
+          <a:bodyPr wrap="none">
+            <a:spAutoFit/>
+          </a:bodyPr>
+          <a:lstStyle/>
+          <a:p>
+            <a:r>
+              <a:rPr sz="2200" b="1">
+                <a:solidFill>
+                  <a:srgbClr val="01AEFD"/>
+                </a:solidFill>
+              </a:rPr>
+              <a:t>All together in script.js</a:t>
+            </a:r>
+          </a:p>
+        </p:txBody>
+      </p:sp>
+      <p:sp>
+        <p:nvSpPr>
+          <p:cNvPr id="3" name="TextBox 2"/>
+          <p:cNvSpPr txBox="1"/>
+          <p:nvPr/>
+        </p:nvSpPr>
+        <p:spPr>
+          <a:xfrm>
+            <a:off x="502920" y="960120"/>
+            <a:ext cx="11155680" cy="4297680"/>
+          </a:xfrm>
+          <a:prstGeom prst="rect">
+            <a:avLst/>
+          </a:prstGeom>
+          <a:noFill/>
+        </p:spPr>
+        <p:txBody>
+          <a:bodyPr wrap="none">
+            <a:spAutoFit/>
+          </a:bodyPr>
+          <a:lstStyle/>
+          <a:p>
+            <a:pPr>
+              <a:spcAft>
+                <a:spcPts val="0"/>
+              </a:spcAft>
+            </a:pPr>
+            <a:r>
+              <a:rPr sz="1300">
+                <a:solidFill>
+                  <a:srgbClr val="6D8C97"/>
+                </a:solidFill>
+                <a:latin typeface="Consolas"/>
+              </a:rPr>
+              <a:t> 179  </a:t>
+            </a:r>
+            <a:r>
+              <a:rPr sz="1300">
+                <a:solidFill>
+                  <a:srgbClr val="7FE0A0"/>
+                </a:solidFill>
+                <a:latin typeface="Consolas"/>
+              </a:rPr>
+              <a:t> </a:t>
+            </a:r>
+          </a:p>
+          <a:p>
+            <a:pPr>
+              <a:spcAft>
+                <a:spcPts val="0"/>
+              </a:spcAft>
+            </a:pPr>
+            <a:r>
+              <a:rPr sz="1300">
+                <a:solidFill>
+                  <a:srgbClr val="6D8C97"/>
+                </a:solidFill>
+                <a:latin typeface="Consolas"/>
+              </a:rPr>
+              <a:t> 180  </a:t>
+            </a:r>
+            <a:r>
+              <a:rPr sz="1300">
+                <a:solidFill>
+                  <a:srgbClr val="7FE0A0"/>
+                </a:solidFill>
+                <a:latin typeface="Consolas"/>
+              </a:rPr>
+              <a:t>// The browser calls this when the form is submitted.</a:t>
+            </a:r>
+          </a:p>
+          <a:p>
+            <a:pPr>
+              <a:spcAft>
+                <a:spcPts val="0"/>
+              </a:spcAft>
+            </a:pPr>
+            <a:r>
+              <a:rPr sz="1300">
+                <a:solidFill>
+                  <a:srgbClr val="6D8C97"/>
+                </a:solidFill>
+                <a:latin typeface="Consolas"/>
+              </a:rPr>
+              <a:t> 181  </a:t>
+            </a:r>
+            <a:r>
+              <a:rPr sz="1300">
+                <a:solidFill>
+                  <a:srgbClr val="7FE0A0"/>
+                </a:solidFill>
+                <a:latin typeface="Consolas"/>
+              </a:rPr>
+              <a:t>composer.addEventListener('submit', async function (event) {</a:t>
+            </a:r>
+          </a:p>
+          <a:p>
+            <a:pPr>
+              <a:spcAft>
+                <a:spcPts val="0"/>
+              </a:spcAft>
+            </a:pPr>
+            <a:r>
+              <a:rPr sz="1300">
+                <a:solidFill>
+                  <a:srgbClr val="6D8C97"/>
+                </a:solidFill>
+                <a:latin typeface="Consolas"/>
+              </a:rPr>
+              <a:t> 182  </a:t>
+            </a:r>
+            <a:r>
+              <a:rPr sz="1300">
+                <a:solidFill>
+                  <a:srgbClr val="7FE0A0"/>
+                </a:solidFill>
+                <a:latin typeface="Consolas"/>
+              </a:rPr>
+              <a:t>  event.preventDefault();</a:t>
+            </a:r>
+          </a:p>
+          <a:p>
+            <a:pPr>
+              <a:spcAft>
+                <a:spcPts val="0"/>
+              </a:spcAft>
+            </a:pPr>
+            <a:r>
+              <a:rPr sz="1300">
+                <a:solidFill>
+                  <a:srgbClr val="6D8C97"/>
+                </a:solidFill>
+                <a:latin typeface="Consolas"/>
+              </a:rPr>
+              <a:t> 183  </a:t>
+            </a:r>
+            <a:r>
+              <a:rPr sz="1300">
+                <a:solidFill>
+                  <a:srgbClr val="7FE0A0"/>
+                </a:solidFill>
+                <a:latin typeface="Consolas"/>
+              </a:rPr>
+              <a:t>  const text = promptBox.value.trim();</a:t>
+            </a:r>
+          </a:p>
+          <a:p>
+            <a:pPr>
+              <a:spcAft>
+                <a:spcPts val="0"/>
+              </a:spcAft>
+            </a:pPr>
+            <a:r>
+              <a:rPr sz="1300">
+                <a:solidFill>
+                  <a:srgbClr val="6D8C97"/>
+                </a:solidFill>
+                <a:latin typeface="Consolas"/>
+              </a:rPr>
+              <a:t> 184  </a:t>
+            </a:r>
+            <a:r>
+              <a:rPr sz="1300">
+                <a:solidFill>
+                  <a:srgbClr val="7FE0A0"/>
+                </a:solidFill>
+                <a:latin typeface="Consolas"/>
+              </a:rPr>
+              <a:t>  if (text === '') { return; }</a:t>
+            </a:r>
+          </a:p>
+          <a:p>
+            <a:pPr>
+              <a:spcAft>
+                <a:spcPts val="0"/>
+              </a:spcAft>
+            </a:pPr>
+            <a:r>
+              <a:rPr sz="1300">
+                <a:solidFill>
+                  <a:srgbClr val="6D8C97"/>
+                </a:solidFill>
+                <a:latin typeface="Consolas"/>
+              </a:rPr>
+              <a:t> 185  </a:t>
+            </a:r>
+            <a:r>
+              <a:rPr sz="1300">
+                <a:solidFill>
+                  <a:srgbClr val="7FE0A0"/>
+                </a:solidFill>
+                <a:latin typeface="Consolas"/>
+              </a:rPr>
+              <a:t> </a:t>
+            </a:r>
+          </a:p>
+          <a:p>
+            <a:pPr>
+              <a:spcAft>
+                <a:spcPts val="0"/>
+              </a:spcAft>
+            </a:pPr>
+            <a:r>
+              <a:rPr sz="1300">
+                <a:solidFill>
+                  <a:srgbClr val="6D8C97"/>
+                </a:solidFill>
+                <a:latin typeface="Consolas"/>
+              </a:rPr>
+              <a:t> 186  </a:t>
+            </a:r>
+            <a:r>
+              <a:rPr sz="1300">
+                <a:solidFill>
+                  <a:srgbClr val="7FE0A0"/>
+                </a:solidFill>
+                <a:latin typeface="Consolas"/>
+              </a:rPr>
+              <a:t>  // Week 14: never trust what a user types. A giant message wastes the</a:t>
+            </a:r>
+          </a:p>
+          <a:p>
+            <a:pPr>
+              <a:spcAft>
+                <a:spcPts val="0"/>
+              </a:spcAft>
+            </a:pPr>
+            <a:r>
+              <a:rPr sz="1300">
+                <a:solidFill>
+                  <a:srgbClr val="6D8C97"/>
+                </a:solidFill>
+                <a:latin typeface="Consolas"/>
+              </a:rPr>
+              <a:t> 187  </a:t>
+            </a:r>
+            <a:r>
+              <a:rPr sz="1300">
+                <a:solidFill>
+                  <a:srgbClr val="7FE0A0"/>
+                </a:solidFill>
+                <a:latin typeface="Consolas"/>
+              </a:rPr>
+              <a:t>  // whole conversation budget and gets the request refused for everyone.</a:t>
+            </a:r>
+          </a:p>
+          <a:p>
+            <a:pPr>
+              <a:spcAft>
+                <a:spcPts val="0"/>
+              </a:spcAft>
+            </a:pPr>
+            <a:r>
+              <a:rPr sz="1300">
+                <a:solidFill>
+                  <a:srgbClr val="6D8C97"/>
+                </a:solidFill>
+                <a:latin typeface="Consolas"/>
+              </a:rPr>
+              <a:t> 188  </a:t>
+            </a:r>
+            <a:r>
+              <a:rPr sz="1300">
+                <a:solidFill>
+                  <a:srgbClr val="7FE0A0"/>
+                </a:solidFill>
+                <a:latin typeface="Consolas"/>
+              </a:rPr>
+              <a:t>  if (text.length &gt; 500) {</a:t>
+            </a:r>
+          </a:p>
+          <a:p>
+            <a:pPr>
+              <a:spcAft>
+                <a:spcPts val="0"/>
+              </a:spcAft>
+            </a:pPr>
+            <a:r>
+              <a:rPr sz="1300">
+                <a:solidFill>
+                  <a:srgbClr val="6D8C97"/>
+                </a:solidFill>
+                <a:latin typeface="Consolas"/>
+              </a:rPr>
+              <a:t> 189  </a:t>
+            </a:r>
+            <a:r>
+              <a:rPr sz="1300">
+                <a:solidFill>
+                  <a:srgbClr val="7FE0A0"/>
+                </a:solidFill>
+                <a:latin typeface="Consolas"/>
+              </a:rPr>
+              <a:t>    addLine('problem', 'That is too long for one message - try under 500 characters.');</a:t>
+            </a:r>
+          </a:p>
+          <a:p>
+            <a:pPr>
+              <a:spcAft>
+                <a:spcPts val="0"/>
+              </a:spcAft>
+            </a:pPr>
+            <a:r>
+              <a:rPr sz="1300">
+                <a:solidFill>
+                  <a:srgbClr val="6D8C97"/>
+                </a:solidFill>
+                <a:latin typeface="Consolas"/>
+              </a:rPr>
+              <a:t> 190  </a:t>
+            </a:r>
+            <a:r>
+              <a:rPr sz="1300">
+                <a:solidFill>
+                  <a:srgbClr val="7FE0A0"/>
+                </a:solidFill>
+                <a:latin typeface="Consolas"/>
+              </a:rPr>
+              <a:t>    return;</a:t>
+            </a:r>
+          </a:p>
+          <a:p>
+            <a:pPr>
+              <a:spcAft>
+                <a:spcPts val="0"/>
+              </a:spcAft>
+            </a:pPr>
+            <a:r>
+              <a:rPr sz="1300">
+                <a:solidFill>
+                  <a:srgbClr val="6D8C97"/>
+                </a:solidFill>
+                <a:latin typeface="Consolas"/>
+              </a:rPr>
+              <a:t> 191  </a:t>
+            </a:r>
+            <a:r>
+              <a:rPr sz="1300">
+                <a:solidFill>
+                  <a:srgbClr val="7FE0A0"/>
+                </a:solidFill>
+                <a:latin typeface="Consolas"/>
+              </a:rPr>
+              <a:t>  }</a:t>
+            </a:r>
+          </a:p>
+          <a:p>
+            <a:pPr>
+              <a:spcAft>
+                <a:spcPts val="0"/>
+              </a:spcAft>
+            </a:pPr>
+            <a:r>
+              <a:rPr sz="1300">
+                <a:solidFill>
+                  <a:srgbClr val="6D8C97"/>
+                </a:solidFill>
+                <a:latin typeface="Consolas"/>
+              </a:rPr>
+              <a:t> 192  </a:t>
+            </a:r>
+            <a:r>
+              <a:rPr sz="1300">
+                <a:solidFill>
+                  <a:srgbClr val="7FE0A0"/>
+                </a:solidFill>
+                <a:latin typeface="Consolas"/>
+              </a:rPr>
+              <a:t> </a:t>
+            </a:r>
+          </a:p>
+          <a:p>
+            <a:pPr>
+              <a:spcAft>
+                <a:spcPts val="0"/>
+              </a:spcAft>
+            </a:pPr>
+            <a:r>
+              <a:rPr sz="1300">
+                <a:solidFill>
+                  <a:srgbClr val="6D8C97"/>
+                </a:solidFill>
+                <a:latin typeface="Consolas"/>
+              </a:rPr>
+              <a:t> 193  </a:t>
+            </a:r>
+            <a:r>
+              <a:rPr sz="1300">
+                <a:solidFill>
+                  <a:srgbClr val="7FE0A0"/>
+                </a:solidFill>
+                <a:latin typeface="Consolas"/>
+              </a:rPr>
+              <a:t>  promptBox.value = '';</a:t>
+            </a:r>
+          </a:p>
+          <a:p>
+            <a:pPr>
+              <a:spcAft>
+                <a:spcPts val="0"/>
+              </a:spcAft>
+            </a:pPr>
+            <a:r>
+              <a:rPr sz="1300">
+                <a:solidFill>
+                  <a:srgbClr val="6D8C97"/>
+                </a:solidFill>
+                <a:latin typeface="Consolas"/>
+              </a:rPr>
+              <a:t> 194  </a:t>
+            </a:r>
+            <a:r>
+              <a:rPr sz="1300">
+                <a:solidFill>
+                  <a:srgbClr val="7FE0A0"/>
+                </a:solidFill>
+                <a:latin typeface="Consolas"/>
+              </a:rPr>
+              <a:t>  addLine('you', text);</a:t>
+            </a:r>
+          </a:p>
+          <a:p>
+            <a:pPr>
+              <a:spcAft>
+                <a:spcPts val="0"/>
+              </a:spcAft>
+            </a:pPr>
+            <a:r>
+              <a:rPr sz="1300">
+                <a:solidFill>
+                  <a:srgbClr val="6D8C97"/>
+                </a:solidFill>
+                <a:latin typeface="Consolas"/>
+              </a:rPr>
+              <a:t> 195  </a:t>
+            </a:r>
+            <a:r>
+              <a:rPr sz="1300">
+                <a:solidFill>
+                  <a:srgbClr val="7FE0A0"/>
+                </a:solidFill>
+                <a:latin typeface="Consolas"/>
+              </a:rPr>
+              <a:t>  history.push({ role: 'user', content: text });</a:t>
+            </a:r>
+          </a:p>
+          <a:p>
+            <a:pPr>
+              <a:spcAft>
+                <a:spcPts val="0"/>
+              </a:spcAft>
+            </a:pPr>
+            <a:r>
+              <a:rPr sz="1300">
+                <a:solidFill>
+                  <a:srgbClr val="6D8C97"/>
+                </a:solidFill>
+                <a:latin typeface="Consolas"/>
+              </a:rPr>
+              <a:t> 196  </a:t>
+            </a:r>
+            <a:r>
+              <a:rPr sz="1300">
+                <a:solidFill>
+                  <a:srgbClr val="7FE0A0"/>
+                </a:solidFill>
+                <a:latin typeface="Consolas"/>
+              </a:rPr>
+              <a:t> </a:t>
+            </a:r>
+          </a:p>
+          <a:p>
+            <a:pPr>
+              <a:spcAft>
+                <a:spcPts val="0"/>
+              </a:spcAft>
+            </a:pPr>
+            <a:r>
+              <a:rPr sz="1300">
+                <a:solidFill>
+                  <a:srgbClr val="6D8C97"/>
+                </a:solidFill>
+                <a:latin typeface="Consolas"/>
+              </a:rPr>
+              <a:t> 197  </a:t>
+            </a:r>
+            <a:r>
+              <a:rPr sz="1300">
+                <a:solidFill>
+                  <a:srgbClr val="7FE0A0"/>
+                </a:solidFill>
+                <a:latin typeface="Consolas"/>
+              </a:rPr>
+              <a:t>  const bubble = addLine('bot', '');</a:t>
+            </a:r>
+          </a:p>
+          <a:p>
+            <a:pPr>
+              <a:spcAft>
+                <a:spcPts val="0"/>
+              </a:spcAft>
+            </a:pPr>
+            <a:r>
+              <a:rPr sz="1300">
+                <a:solidFill>
+                  <a:srgbClr val="6D8C97"/>
+                </a:solidFill>
+                <a:latin typeface="Consolas"/>
+              </a:rPr>
+              <a:t> 198  </a:t>
+            </a:r>
+            <a:r>
+              <a:rPr sz="1300">
+                <a:solidFill>
+                  <a:srgbClr val="7FE0A0"/>
+                </a:solidFill>
+                <a:latin typeface="Consolas"/>
+              </a:rPr>
+              <a:t>  bubble.classList.add('writing');   // week 11: blinking cursor while it types</a:t>
+            </a:r>
+          </a:p>
+          <a:p>
+            <a:pPr>
+              <a:spcAft>
+                <a:spcPts val="0"/>
+              </a:spcAft>
+            </a:pPr>
+            <a:r>
+              <a:rPr sz="1300">
+                <a:solidFill>
+                  <a:srgbClr val="6D8C97"/>
+                </a:solidFill>
+                <a:latin typeface="Consolas"/>
+              </a:rPr>
+              <a:t> 199  </a:t>
+            </a:r>
+            <a:r>
+              <a:rPr sz="1300">
+                <a:solidFill>
+                  <a:srgbClr val="7FE0A0"/>
+                </a:solidFill>
+                <a:latin typeface="Consolas"/>
+              </a:rPr>
+              <a:t>  try {</a:t>
+            </a:r>
+          </a:p>
+          <a:p>
+            <a:pPr>
+              <a:spcAft>
+                <a:spcPts val="0"/>
+              </a:spcAft>
+            </a:pPr>
+            <a:r>
+              <a:rPr sz="1300">
+                <a:solidFill>
+                  <a:srgbClr val="6D8C97"/>
+                </a:solidFill>
+                <a:latin typeface="Consolas"/>
+              </a:rPr>
+              <a:t> 200  </a:t>
+            </a:r>
+            <a:r>
+              <a:rPr sz="1300">
+                <a:solidFill>
+                  <a:srgbClr val="7FE0A0"/>
+                </a:solidFill>
+                <a:latin typeface="Consolas"/>
+              </a:rPr>
+              <a:t>    // The function we hand over runs on EVERY piece that arrives.</a:t>
+            </a:r>
+          </a:p>
+          <a:p>
+            <a:pPr>
+              <a:spcAft>
+                <a:spcPts val="0"/>
+              </a:spcAft>
+            </a:pPr>
+            <a:r>
+              <a:rPr sz="1300">
+                <a:solidFill>
+                  <a:srgbClr val="6D8C97"/>
+                </a:solidFill>
+                <a:latin typeface="Consolas"/>
+              </a:rPr>
+              <a:t> 201  </a:t>
+            </a:r>
+            <a:r>
+              <a:rPr sz="1300">
+                <a:solidFill>
+                  <a:srgbClr val="7FE0A0"/>
+                </a:solidFill>
+                <a:latin typeface="Consolas"/>
+              </a:rPr>
+              <a:t>    const reply = await askAI(function (soFar) {</a:t>
+            </a:r>
+          </a:p>
+          <a:p>
+            <a:pPr>
+              <a:spcAft>
+                <a:spcPts val="0"/>
+              </a:spcAft>
+            </a:pPr>
+            <a:r>
+              <a:rPr sz="1300">
+                <a:solidFill>
+                  <a:srgbClr val="6D8C97"/>
+                </a:solidFill>
+                <a:latin typeface="Consolas"/>
+              </a:rPr>
+              <a:t> 202  </a:t>
+            </a:r>
+            <a:r>
+              <a:rPr sz="1300">
+                <a:solidFill>
+                  <a:srgbClr val="7FE0A0"/>
+                </a:solidFill>
+                <a:latin typeface="Consolas"/>
+              </a:rPr>
+              <a:t>      bubble.textContent = soFar;</a:t>
+            </a:r>
+          </a:p>
+          <a:p>
+            <a:pPr>
+              <a:spcAft>
+                <a:spcPts val="0"/>
+              </a:spcAft>
+            </a:pPr>
+            <a:r>
+              <a:rPr sz="1300">
+                <a:solidFill>
+                  <a:srgbClr val="6D8C97"/>
+                </a:solidFill>
+                <a:latin typeface="Consolas"/>
+              </a:rPr>
+              <a:t> 203  </a:t>
+            </a:r>
+            <a:r>
+              <a:rPr sz="1300">
+                <a:solidFill>
+                  <a:srgbClr val="7FE0A0"/>
+                </a:solidFill>
+                <a:latin typeface="Consolas"/>
+              </a:rPr>
+              <a:t>      chat.scrollTop = chat.scrollHeight;</a:t>
+            </a:r>
+          </a:p>
+          <a:p>
+            <a:pPr>
+              <a:spcAft>
+                <a:spcPts val="0"/>
+              </a:spcAft>
+            </a:pPr>
+            <a:r>
+              <a:rPr sz="1300">
+                <a:solidFill>
+                  <a:srgbClr val="6D8C97"/>
+                </a:solidFill>
+                <a:latin typeface="Consolas"/>
+              </a:rPr>
+              <a:t> 204  </a:t>
+            </a:r>
+            <a:r>
+              <a:rPr sz="1300">
+                <a:solidFill>
+                  <a:srgbClr val="7FE0A0"/>
+                </a:solidFill>
+                <a:latin typeface="Consolas"/>
+              </a:rPr>
+              <a:t>    });</a:t>
+            </a:r>
+          </a:p>
+          <a:p>
+            <a:pPr>
+              <a:spcAft>
+                <a:spcPts val="0"/>
+              </a:spcAft>
+            </a:pPr>
+            <a:r>
+              <a:rPr sz="1300">
+                <a:solidFill>
+                  <a:srgbClr val="6D8C97"/>
+                </a:solidFill>
+                <a:latin typeface="Consolas"/>
+              </a:rPr>
+              <a:t> 205  </a:t>
+            </a:r>
+            <a:r>
+              <a:rPr sz="1300">
+                <a:solidFill>
+                  <a:srgbClr val="7FE0A0"/>
+                </a:solidFill>
+                <a:latin typeface="Consolas"/>
+              </a:rPr>
+              <a:t>    bubble.classList.remove('writing');</a:t>
+            </a:r>
+          </a:p>
+          <a:p>
+            <a:pPr>
+              <a:spcAft>
+                <a:spcPts val="0"/>
+              </a:spcAft>
+            </a:pPr>
+            <a:r>
+              <a:rPr sz="1300">
+                <a:solidFill>
+                  <a:srgbClr val="6D8C97"/>
+                </a:solidFill>
+                <a:latin typeface="Consolas"/>
+              </a:rPr>
+              <a:t> 206  </a:t>
+            </a:r>
+            <a:r>
+              <a:rPr sz="1300">
+                <a:solidFill>
+                  <a:srgbClr val="7FE0A0"/>
+                </a:solidFill>
+                <a:latin typeface="Consolas"/>
+              </a:rPr>
+              <a:t>    history.push({ role: 'assistant', content: reply });   // it said this too</a:t>
+            </a:r>
+          </a:p>
+          <a:p>
+            <a:pPr>
+              <a:spcAft>
+                <a:spcPts val="0"/>
+              </a:spcAft>
+            </a:pPr>
+            <a:r>
+              <a:rPr sz="1300">
+                <a:solidFill>
+                  <a:srgbClr val="6D8C97"/>
+                </a:solidFill>
+                <a:latin typeface="Consolas"/>
+              </a:rPr>
+              <a:t> 207  </a:t>
+            </a:r>
+            <a:r>
+              <a:rPr sz="1300">
+                <a:solidFill>
+                  <a:srgbClr val="7FE0A0"/>
+                </a:solidFill>
+                <a:latin typeface="Consolas"/>
+              </a:rPr>
+              <a:t>  } catch (problem) {</a:t>
+            </a:r>
+          </a:p>
+          <a:p>
+            <a:pPr>
+              <a:spcAft>
+                <a:spcPts val="0"/>
+              </a:spcAft>
+            </a:pPr>
+            <a:r>
+              <a:rPr sz="1300">
+                <a:solidFill>
+                  <a:srgbClr val="6D8C97"/>
+                </a:solidFill>
+                <a:latin typeface="Consolas"/>
+              </a:rPr>
+              <a:t> 208  </a:t>
+            </a:r>
+            <a:r>
+              <a:rPr sz="1300">
+                <a:solidFill>
+                  <a:srgbClr val="7FE0A0"/>
+                </a:solidFill>
+                <a:latin typeface="Consolas"/>
+              </a:rPr>
+              <a:t>    bubble.remove();</a:t>
+            </a:r>
+          </a:p>
+          <a:p>
+            <a:pPr>
+              <a:spcAft>
+                <a:spcPts val="0"/>
+              </a:spcAft>
+            </a:pPr>
+            <a:r>
+              <a:rPr sz="1300">
+                <a:solidFill>
+                  <a:srgbClr val="6D8C97"/>
+                </a:solidFill>
+                <a:latin typeface="Consolas"/>
+              </a:rPr>
+              <a:t> 209  </a:t>
+            </a:r>
+            <a:r>
+              <a:rPr sz="1300">
+                <a:solidFill>
+                  <a:srgbClr val="7FE0A0"/>
+                </a:solidFill>
+                <a:latin typeface="Consolas"/>
+              </a:rPr>
+              <a:t>    // 'Failed to fetch' means the request never arrived anywhere. That is</a:t>
+            </a:r>
+          </a:p>
+          <a:p>
+            <a:pPr>
+              <a:spcAft>
+                <a:spcPts val="0"/>
+              </a:spcAft>
+            </a:pPr>
+            <a:r>
+              <a:rPr sz="1300">
+                <a:solidFill>
+                  <a:srgbClr val="6D8C97"/>
+                </a:solidFill>
+                <a:latin typeface="Consolas"/>
+              </a:rPr>
+              <a:t> 210  </a:t>
+            </a:r>
+            <a:r>
+              <a:rPr sz="1300">
+                <a:solidFill>
+                  <a:srgbClr val="7FE0A0"/>
+                </a:solidFill>
+                <a:latin typeface="Consolas"/>
+              </a:rPr>
+              <a:t>    // the commonest real failure and the least helpful wording, so replace it.</a:t>
+            </a:r>
+          </a:p>
+          <a:p>
+            <a:pPr>
+              <a:spcAft>
+                <a:spcPts val="0"/>
+              </a:spcAft>
+            </a:pPr>
+            <a:r>
+              <a:rPr sz="1300">
+                <a:solidFill>
+                  <a:srgbClr val="6D8C97"/>
+                </a:solidFill>
+                <a:latin typeface="Consolas"/>
+              </a:rPr>
+              <a:t> 211  </a:t>
+            </a:r>
+            <a:r>
+              <a:rPr sz="1300">
+                <a:solidFill>
+                  <a:srgbClr val="7FE0A0"/>
+                </a:solidFill>
+                <a:latin typeface="Consolas"/>
+              </a:rPr>
+              <a:t>    const said = problem.message === 'Failed to fetch'</a:t>
+            </a:r>
+          </a:p>
+          <a:p>
+            <a:pPr>
+              <a:spcAft>
+                <a:spcPts val="0"/>
+              </a:spcAft>
+            </a:pPr>
+            <a:r>
+              <a:rPr sz="1300">
+                <a:solidFill>
+                  <a:srgbClr val="6D8C97"/>
+                </a:solidFill>
+                <a:latin typeface="Consolas"/>
+              </a:rPr>
+              <a:t> 212  </a:t>
+            </a:r>
+            <a:r>
+              <a:rPr sz="1300">
+                <a:solidFill>
+                  <a:srgbClr val="7FE0A0"/>
+                </a:solidFill>
+                <a:latin typeface="Consolas"/>
+              </a:rPr>
+              <a:t>      ? 'Could not reach the AI. Are you on the school network?'</a:t>
+            </a:r>
+          </a:p>
+          <a:p>
+            <a:pPr>
+              <a:spcAft>
+                <a:spcPts val="0"/>
+              </a:spcAft>
+            </a:pPr>
+            <a:r>
+              <a:rPr sz="1300">
+                <a:solidFill>
+                  <a:srgbClr val="6D8C97"/>
+                </a:solidFill>
+                <a:latin typeface="Consolas"/>
+              </a:rPr>
+              <a:t> 213  </a:t>
+            </a:r>
+            <a:r>
+              <a:rPr sz="1300">
+                <a:solidFill>
+                  <a:srgbClr val="7FE0A0"/>
+                </a:solidFill>
+                <a:latin typeface="Consolas"/>
+              </a:rPr>
+              <a:t>      : problem.message;</a:t>
+            </a:r>
+          </a:p>
+          <a:p>
+            <a:pPr>
+              <a:spcAft>
+                <a:spcPts val="0"/>
+              </a:spcAft>
+            </a:pPr>
+            <a:r>
+              <a:rPr sz="1300">
+                <a:solidFill>
+                  <a:srgbClr val="6D8C97"/>
+                </a:solidFill>
+                <a:latin typeface="Consolas"/>
+              </a:rPr>
+              <a:t> 214  </a:t>
+            </a:r>
+            <a:r>
+              <a:rPr sz="1300">
+                <a:solidFill>
+                  <a:srgbClr val="7FE0A0"/>
+                </a:solidFill>
+                <a:latin typeface="Consolas"/>
+              </a:rPr>
+              <a:t>    addLine('problem', said);</a:t>
+            </a:r>
+          </a:p>
+          <a:p>
+            <a:pPr>
+              <a:spcAft>
+                <a:spcPts val="0"/>
+              </a:spcAft>
+            </a:pPr>
+            <a:r>
+              <a:rPr sz="1300">
+                <a:solidFill>
+                  <a:srgbClr val="6D8C97"/>
+                </a:solidFill>
+                <a:latin typeface="Consolas"/>
+              </a:rPr>
+              <a:t> 215  </a:t>
+            </a:r>
+            <a:r>
+              <a:rPr sz="1300">
+                <a:solidFill>
+                  <a:srgbClr val="7FE0A0"/>
+                </a:solidFill>
+                <a:latin typeface="Consolas"/>
+              </a:rPr>
+              <a:t>  }</a:t>
+            </a:r>
+          </a:p>
+          <a:p>
+            <a:pPr>
+              <a:spcAft>
+                <a:spcPts val="0"/>
+              </a:spcAft>
+            </a:pPr>
+            <a:r>
+              <a:rPr sz="1300">
+                <a:solidFill>
+                  <a:srgbClr val="6D8C97"/>
+                </a:solidFill>
+                <a:latin typeface="Consolas"/>
+              </a:rPr>
+              <a:t> 216  </a:t>
+            </a:r>
+            <a:r>
+              <a:rPr sz="1300">
+                <a:solidFill>
+                  <a:srgbClr val="7FE0A0"/>
+                </a:solidFill>
+                <a:latin typeface="Consolas"/>
+              </a:rPr>
+              <a:t>});</a:t>
+            </a:r>
+          </a:p>
+        </p:txBody>
+      </p:sp>
+      <p:sp>
+        <p:nvSpPr>
+          <p:cNvPr id="4" name="TextBox 3"/>
+          <p:cNvSpPr txBox="1"/>
+          <p:nvPr/>
+        </p:nvSpPr>
+        <p:spPr>
+          <a:xfrm>
+            <a:off x="548640" y="5623560"/>
+            <a:ext cx="11064240" cy="1051560"/>
+          </a:xfrm>
+          <a:prstGeom prst="rect">
+            <a:avLst/>
+          </a:prstGeom>
+          <a:noFill/>
+        </p:spPr>
+        <p:txBody>
+          <a:bodyPr wrap="square">
+            <a:spAutoFit/>
+          </a:bodyPr>
+          <a:lstStyle/>
+          <a:p>
+            <a:r>
+              <a:rPr sz="2000">
                 <a:solidFill>
                   <a:srgbClr val="DCECEF"/>
                 </a:solidFill>
-                <a:latin typeface="Consolas"/>
-              </a:rPr>
-              <a:t>  margin: 0;</a:t>
-            </a:r>
-          </a:p>
-          <a:p>
-            <a:pPr>
-              <a:spcAft>
-                <a:spcPts val="0"/>
-              </a:spcAft>
-            </a:pPr>
-            <a:r>
-              <a:rPr sz="1400">
-                <a:solidFill>
-                  <a:srgbClr val="6D8C97"/>
-                </a:solidFill>
-                <a:latin typeface="Consolas"/>
-              </a:rPr>
-              <a:t>   3  </a:t>
-            </a:r>
-            <a:r>
-              <a:rPr sz="1400">
-                <a:solidFill>
-                  <a:srgbClr val="DCECEF"/>
-                </a:solidFill>
-                <a:latin typeface="Consolas"/>
-              </a:rPr>
-              <a:t>  font-family: Arial, Helvetica, sans-serif;</a:t>
-            </a:r>
-          </a:p>
-          <a:p>
-            <a:pPr>
-              <a:spcAft>
-                <a:spcPts val="0"/>
-              </a:spcAft>
-            </a:pPr>
-            <a:r>
-              <a:rPr sz="1400">
-                <a:solidFill>
-                  <a:srgbClr val="6D8C97"/>
-                </a:solidFill>
-                <a:latin typeface="Consolas"/>
-              </a:rPr>
-              <a:t>   4  </a:t>
-            </a:r>
-            <a:r>
-              <a:rPr sz="1400">
-                <a:solidFill>
-                  <a:srgbClr val="DCECEF"/>
-                </a:solidFill>
-                <a:latin typeface="Consolas"/>
-              </a:rPr>
-              <a:t>  background: #eef2f7;</a:t>
-            </a:r>
-          </a:p>
-          <a:p>
-            <a:pPr>
-              <a:spcAft>
-                <a:spcPts val="0"/>
-              </a:spcAft>
-            </a:pPr>
-            <a:r>
-              <a:rPr sz="1400">
-                <a:solidFill>
-                  <a:srgbClr val="6D8C97"/>
-                </a:solidFill>
-                <a:latin typeface="Consolas"/>
-              </a:rPr>
-              <a:t>   5  </a:t>
-            </a:r>
-            <a:r>
-              <a:rPr sz="1400">
-                <a:solidFill>
-                  <a:srgbClr val="DCECEF"/>
-                </a:solidFill>
-                <a:latin typeface="Consolas"/>
-              </a:rPr>
-              <a:t>  color: #1f2a37;</a:t>
-            </a:r>
-          </a:p>
-          <a:p>
-            <a:pPr>
-              <a:spcAft>
-                <a:spcPts val="0"/>
-              </a:spcAft>
-            </a:pPr>
-            <a:r>
-              <a:rPr sz="1400">
-                <a:solidFill>
-                  <a:srgbClr val="6D8C97"/>
-                </a:solidFill>
-                <a:latin typeface="Consolas"/>
-              </a:rPr>
-              <a:t>   6  </a:t>
-            </a:r>
-            <a:r>
-              <a:rPr sz="1400">
-                <a:solidFill>
-                  <a:srgbClr val="7FE0A0"/>
-                </a:solidFill>
-                <a:latin typeface="Consolas"/>
-              </a:rPr>
-              <a:t>}</a:t>
-            </a:r>
-          </a:p>
-          <a:p>
-            <a:pPr>
-              <a:spcAft>
-                <a:spcPts val="0"/>
-              </a:spcAft>
-            </a:pPr>
-            <a:r>
-              <a:rPr sz="1400">
-                <a:solidFill>
-                  <a:srgbClr val="6D8C97"/>
-                </a:solidFill>
-                <a:latin typeface="Consolas"/>
-              </a:rPr>
-              <a:t>   7  </a:t>
-            </a:r>
-            <a:r>
-              <a:rPr sz="1400">
-                <a:solidFill>
-                  <a:srgbClr val="7FE0A0"/>
-                </a:solidFill>
-                <a:latin typeface="Consolas"/>
-              </a:rPr>
-              <a:t>.caution {</a:t>
-            </a:r>
-          </a:p>
-          <a:p>
-            <a:pPr>
-              <a:spcAft>
-                <a:spcPts val="0"/>
-              </a:spcAft>
-            </a:pPr>
-            <a:r>
-              <a:rPr sz="1400">
-                <a:solidFill>
-                  <a:srgbClr val="6D8C97"/>
-                </a:solidFill>
-                <a:latin typeface="Consolas"/>
-              </a:rPr>
-              <a:t>   8  </a:t>
-            </a:r>
-            <a:r>
-              <a:rPr sz="1400">
-                <a:solidFill>
-                  <a:srgbClr val="7FE0A0"/>
-                </a:solidFill>
-                <a:latin typeface="Consolas"/>
-              </a:rPr>
-              <a:t>  margin: 0 0 18px;</a:t>
-            </a:r>
-          </a:p>
-          <a:p>
-            <a:pPr>
-              <a:spcAft>
-                <a:spcPts val="0"/>
-              </a:spcAft>
-            </a:pPr>
-            <a:r>
-              <a:rPr sz="1400">
-                <a:solidFill>
-                  <a:srgbClr val="6D8C97"/>
-                </a:solidFill>
-                <a:latin typeface="Consolas"/>
-              </a:rPr>
-              <a:t>   9  </a:t>
-            </a:r>
-            <a:r>
-              <a:rPr sz="1400">
-                <a:solidFill>
-                  <a:srgbClr val="7FE0A0"/>
-                </a:solidFill>
-                <a:latin typeface="Consolas"/>
-              </a:rPr>
-              <a:t>  padding: 8px 11px;</a:t>
-            </a:r>
-          </a:p>
-          <a:p>
-            <a:pPr>
-              <a:spcAft>
-                <a:spcPts val="0"/>
-              </a:spcAft>
-            </a:pPr>
-            <a:r>
-              <a:rPr sz="1400">
-                <a:solidFill>
-                  <a:srgbClr val="6D8C97"/>
-                </a:solidFill>
-                <a:latin typeface="Consolas"/>
-              </a:rPr>
-              <a:t>  10  </a:t>
-            </a:r>
-            <a:r>
-              <a:rPr sz="1400">
-                <a:solidFill>
-                  <a:srgbClr val="7FE0A0"/>
-                </a:solidFill>
-                <a:latin typeface="Consolas"/>
-              </a:rPr>
-              <a:t>  border-left: 3px solid #e9952a;</a:t>
-            </a:r>
-          </a:p>
-          <a:p>
-            <a:pPr>
-              <a:spcAft>
-                <a:spcPts val="0"/>
-              </a:spcAft>
-            </a:pPr>
-            <a:r>
-              <a:rPr sz="1400">
-                <a:solidFill>
-                  <a:srgbClr val="6D8C97"/>
-                </a:solidFill>
-                <a:latin typeface="Consolas"/>
-              </a:rPr>
-              <a:t>  11  </a:t>
-            </a:r>
-            <a:r>
-              <a:rPr sz="1400">
-                <a:solidFill>
-                  <a:srgbClr val="7FE0A0"/>
-                </a:solidFill>
-                <a:latin typeface="Consolas"/>
-              </a:rPr>
-              <a:t>  background: #fff8e9;</a:t>
-            </a:r>
-          </a:p>
-          <a:p>
-            <a:pPr>
-              <a:spcAft>
-                <a:spcPts val="0"/>
-              </a:spcAft>
-            </a:pPr>
-            <a:r>
-              <a:rPr sz="1400">
-                <a:solidFill>
-                  <a:srgbClr val="6D8C97"/>
-                </a:solidFill>
-                <a:latin typeface="Consolas"/>
-              </a:rPr>
-              <a:t>  12  </a:t>
-            </a:r>
-            <a:r>
-              <a:rPr sz="1400">
-                <a:solidFill>
-                  <a:srgbClr val="7FE0A0"/>
-                </a:solidFill>
-                <a:latin typeface="Consolas"/>
-              </a:rPr>
-              <a:t>  color: #8a5a12;</a:t>
-            </a:r>
-          </a:p>
-          <a:p>
-            <a:pPr>
-              <a:spcAft>
-                <a:spcPts val="0"/>
-              </a:spcAft>
-            </a:pPr>
-            <a:r>
-              <a:rPr sz="1400">
-                <a:solidFill>
-                  <a:srgbClr val="6D8C97"/>
-                </a:solidFill>
-                <a:latin typeface="Consolas"/>
-              </a:rPr>
-              <a:t>  13  </a:t>
-            </a:r>
-            <a:r>
-              <a:rPr sz="1400">
-                <a:solidFill>
-                  <a:srgbClr val="7FE0A0"/>
-                </a:solidFill>
-                <a:latin typeface="Consolas"/>
-              </a:rPr>
-              <a:t>  font-size: 13px;</a:t>
-            </a:r>
-          </a:p>
-          <a:p>
-            <a:pPr>
-              <a:spcAft>
-                <a:spcPts val="0"/>
-              </a:spcAft>
-            </a:pPr>
-            <a:r>
-              <a:rPr sz="1400">
-                <a:solidFill>
-                  <a:srgbClr val="6D8C97"/>
-                </a:solidFill>
-                <a:latin typeface="Consolas"/>
-              </a:rPr>
-              <a:t>  14  </a:t>
-            </a:r>
-            <a:r>
-              <a:rPr sz="1400">
-                <a:solidFill>
-                  <a:srgbClr val="DCECEF"/>
-                </a:solidFill>
-                <a:latin typeface="Consolas"/>
-              </a:rPr>
-              <a:t>}</a:t>
+              </a:rPr>
+              <a:t>That is the whole piece. Check yours looks the same before moving on.</a:t>
+            </a:r>
+          </a:p>
+        </p:txBody>
+      </p:sp>
+    </p:spTree>
+  </p:cSld>
+  <p:clrMapOvr>
+    <a:masterClrMapping/>
+  </p:clrMapOvr>
+</p:sld>
+</file>
+
+<file path=ppt/slides/slide14.xml><?xml version="1.0" encoding="utf-8"?>
+<p:sld xmlns:a="http://schemas.openxmlformats.org/drawingml/2006/main" xmlns:p="http://schemas.openxmlformats.org/presentationml/2006/main" xmlns:r="http://schemas.openxmlformats.org/officeDocument/2006/relationships">
+  <p:cSld>
+    <p:spTree>
+      <p:nvGrpSpPr>
+        <p:cNvPr id="1" name=""/>
+        <p:cNvGrpSpPr/>
+        <p:nvPr/>
+      </p:nvGrpSpPr>
+      <p:grpSpPr/>
+      <p:sp>
+        <p:nvSpPr>
+          <p:cNvPr id="2" name="Title 1"/>
+          <p:cNvSpPr>
+            <a:spLocks noGrp="1"/>
+          </p:cNvSpPr>
+          <p:nvPr>
+            <p:ph type="title"/>
+          </p:nvPr>
+        </p:nvSpPr>
+        <p:spPr/>
+        <p:txBody>
+          <a:bodyPr/>
+          <a:lstStyle/>
+          <a:p>
+            <a:r>
+              <a:rPr sz="3800" b="1">
+                <a:solidFill>
+                  <a:srgbClr val="1F2A37"/>
+                </a:solidFill>
+              </a:rPr>
+              <a:t>Why refuse a message over 500 characters?</a:t>
+            </a:r>
+          </a:p>
+        </p:txBody>
+      </p:sp>
+      <p:sp>
+        <p:nvSpPr>
+          <p:cNvPr id="3" name="TextBox 2"/>
+          <p:cNvSpPr txBox="1"/>
+          <p:nvPr/>
+        </p:nvSpPr>
+        <p:spPr>
+          <a:xfrm>
+            <a:off x="868680" y="502920"/>
+            <a:ext cx="5486400" cy="457200"/>
+          </a:xfrm>
+          <a:prstGeom prst="rect">
+            <a:avLst/>
+          </a:prstGeom>
+          <a:noFill/>
+        </p:spPr>
+        <p:txBody>
+          <a:bodyPr wrap="none">
+            <a:spAutoFit/>
+          </a:bodyPr>
+          <a:lstStyle/>
+          <a:p>
+            <a:r>
+              <a:rPr sz="1500" b="1">
+                <a:solidFill>
+                  <a:srgbClr val="01AEFD"/>
+                </a:solidFill>
+              </a:rPr>
+              <a:t>QUICK CHECK</a:t>
+            </a:r>
+          </a:p>
+        </p:txBody>
+      </p:sp>
+      <p:sp>
+        <p:nvSpPr>
+          <p:cNvPr id="4" name="TextBox 3"/>
+          <p:cNvSpPr txBox="1"/>
+          <p:nvPr/>
+        </p:nvSpPr>
+        <p:spPr>
+          <a:xfrm>
+            <a:off x="822960" y="1828800"/>
+            <a:ext cx="10515600" cy="4206240"/>
+          </a:xfrm>
+          <a:prstGeom prst="rect">
+            <a:avLst/>
+          </a:prstGeom>
+          <a:noFill/>
+        </p:spPr>
+        <p:txBody>
+          <a:bodyPr wrap="square">
+            <a:spAutoFit/>
+          </a:bodyPr>
+          <a:lstStyle/>
+          <a:p>
+            <a:pPr>
+              <a:spcAft>
+                <a:spcPts val="1400"/>
+              </a:spcAft>
+            </a:pPr>
+            <a:r>
+              <a:rPr sz="2400">
+                <a:solidFill>
+                  <a:srgbClr val="1F2A37"/>
+                </a:solidFill>
+              </a:rPr>
+              <a:t>• A. A huge message wastes the budget and gets the request refused for everyone</a:t>
+            </a:r>
+          </a:p>
+          <a:p>
+            <a:pPr>
+              <a:spcAft>
+                <a:spcPts val="1400"/>
+              </a:spcAft>
+            </a:pPr>
+            <a:r>
+              <a:rPr sz="2400">
+                <a:solidFill>
+                  <a:srgbClr val="1F2A37"/>
+                </a:solidFill>
+              </a:rPr>
+              <a:t>• B. It is rude</a:t>
+            </a:r>
+          </a:p>
+          <a:p>
+            <a:pPr>
+              <a:spcAft>
+                <a:spcPts val="1400"/>
+              </a:spcAft>
+            </a:pPr>
+            <a:r>
+              <a:rPr sz="2400">
+                <a:solidFill>
+                  <a:srgbClr val="1F2A37"/>
+                </a:solidFill>
+              </a:rPr>
+              <a:t>• C. The AI cannot read it</a:t>
+            </a:r>
+          </a:p>
+          <a:p>
+            <a:pPr>
+              <a:spcAft>
+                <a:spcPts val="1400"/>
+              </a:spcAft>
+            </a:pPr>
+            <a:r>
+              <a:rPr sz="2400">
+                <a:solidFill>
+                  <a:srgbClr val="1F2A37"/>
+                </a:solidFill>
+              </a:rPr>
+              <a:t>• D. To save the file</a:t>
+            </a:r>
+          </a:p>
+          <a:p>
+            <a:pPr>
+              <a:spcAft>
+                <a:spcPts val="1400"/>
+              </a:spcAft>
+            </a:pPr>
+            <a:r>
+              <a:rPr sz="2400">
+                <a:solidFill>
+                  <a:srgbClr val="1F2A37"/>
+                </a:solidFill>
+              </a:rPr>
+              <a:t>• Pick one - the answer is on the next slide.</a:t>
+            </a:r>
+          </a:p>
+        </p:txBody>
+      </p:sp>
+    </p:spTree>
+  </p:cSld>
+  <p:clrMapOvr>
+    <a:masterClrMapping/>
+  </p:clrMapOvr>
+</p:sld>
+</file>
+
+<file path=ppt/slides/slide15.xml><?xml version="1.0" encoding="utf-8"?>
+<p:sld xmlns:a="http://schemas.openxmlformats.org/drawingml/2006/main" xmlns:p="http://schemas.openxmlformats.org/presentationml/2006/main" xmlns:r="http://schemas.openxmlformats.org/officeDocument/2006/relationships">
+  <p:cSld>
+    <p:spTree>
+      <p:nvGrpSpPr>
+        <p:cNvPr id="1" name=""/>
+        <p:cNvGrpSpPr/>
+        <p:nvPr/>
+      </p:nvGrpSpPr>
+      <p:grpSpPr/>
+      <p:sp>
+        <p:nvSpPr>
+          <p:cNvPr id="2" name="Title 1"/>
+          <p:cNvSpPr>
+            <a:spLocks noGrp="1"/>
+          </p:cNvSpPr>
+          <p:nvPr>
+            <p:ph type="title"/>
+          </p:nvPr>
+        </p:nvSpPr>
+        <p:spPr/>
+        <p:txBody>
+          <a:bodyPr/>
+          <a:lstStyle/>
+          <a:p>
+            <a:r>
+              <a:rPr sz="3800" b="1">
+                <a:solidFill>
+                  <a:srgbClr val="1F2A37"/>
+                </a:solidFill>
+              </a:rPr>
+              <a:t>Why refuse a message over 500 characters?</a:t>
+            </a:r>
+          </a:p>
+        </p:txBody>
+      </p:sp>
+      <p:sp>
+        <p:nvSpPr>
+          <p:cNvPr id="3" name="TextBox 2"/>
+          <p:cNvSpPr txBox="1"/>
+          <p:nvPr/>
+        </p:nvSpPr>
+        <p:spPr>
+          <a:xfrm>
+            <a:off x="868680" y="502920"/>
+            <a:ext cx="5486400" cy="457200"/>
+          </a:xfrm>
+          <a:prstGeom prst="rect">
+            <a:avLst/>
+          </a:prstGeom>
+          <a:noFill/>
+        </p:spPr>
+        <p:txBody>
+          <a:bodyPr wrap="none">
+            <a:spAutoFit/>
+          </a:bodyPr>
+          <a:lstStyle/>
+          <a:p>
+            <a:r>
+              <a:rPr sz="1500" b="1">
+                <a:solidFill>
+                  <a:srgbClr val="01AEFD"/>
+                </a:solidFill>
+              </a:rPr>
+              <a:t>ANSWER</a:t>
+            </a:r>
+          </a:p>
+        </p:txBody>
+      </p:sp>
+      <p:sp>
+        <p:nvSpPr>
+          <p:cNvPr id="4" name="TextBox 3"/>
+          <p:cNvSpPr txBox="1"/>
+          <p:nvPr/>
+        </p:nvSpPr>
+        <p:spPr>
+          <a:xfrm>
+            <a:off x="822960" y="1828800"/>
+            <a:ext cx="10515600" cy="4206240"/>
+          </a:xfrm>
+          <a:prstGeom prst="rect">
+            <a:avLst/>
+          </a:prstGeom>
+          <a:noFill/>
+        </p:spPr>
+        <p:txBody>
+          <a:bodyPr wrap="square">
+            <a:spAutoFit/>
+          </a:bodyPr>
+          <a:lstStyle/>
+          <a:p>
+            <a:pPr>
+              <a:spcAft>
+                <a:spcPts val="1400"/>
+              </a:spcAft>
+            </a:pPr>
+            <a:r>
+              <a:rPr sz="2400">
+                <a:solidFill>
+                  <a:srgbClr val="1F2A37"/>
+                </a:solidFill>
+              </a:rPr>
+              <a:t>• A. A huge message wastes the budget and gets the request refused for everyone (correct)</a:t>
+            </a:r>
+          </a:p>
+          <a:p>
+            <a:pPr>
+              <a:spcAft>
+                <a:spcPts val="1400"/>
+              </a:spcAft>
+            </a:pPr>
+            <a:r>
+              <a:rPr sz="2400">
+                <a:solidFill>
+                  <a:srgbClr val="1F2A37"/>
+                </a:solidFill>
+              </a:rPr>
+              <a:t>• B. It is rude</a:t>
+            </a:r>
+          </a:p>
+          <a:p>
+            <a:pPr>
+              <a:spcAft>
+                <a:spcPts val="1400"/>
+              </a:spcAft>
+            </a:pPr>
+            <a:r>
+              <a:rPr sz="2400">
+                <a:solidFill>
+                  <a:srgbClr val="1F2A37"/>
+                </a:solidFill>
+              </a:rPr>
+              <a:t>• C. The AI cannot read it</a:t>
+            </a:r>
+          </a:p>
+          <a:p>
+            <a:pPr>
+              <a:spcAft>
+                <a:spcPts val="1400"/>
+              </a:spcAft>
+            </a:pPr>
+            <a:r>
+              <a:rPr sz="2400">
+                <a:solidFill>
+                  <a:srgbClr val="1F2A37"/>
+                </a:solidFill>
+              </a:rPr>
+              <a:t>• D. To save the file</a:t>
+            </a:r>
+          </a:p>
+          <a:p>
+            <a:pPr>
+              <a:spcAft>
+                <a:spcPts val="1400"/>
+              </a:spcAft>
+            </a:pPr>
+            <a:r>
+              <a:rPr sz="2400">
+                <a:solidFill>
+                  <a:srgbClr val="1F2A37"/>
+                </a:solidFill>
+              </a:rPr>
+              <a:t>• One giant message can blow past the 4000-character wall and get the whole request refused.</a:t>
+            </a:r>
+          </a:p>
+        </p:txBody>
+      </p:sp>
+    </p:spTree>
+  </p:cSld>
+  <p:clrMapOvr>
+    <a:masterClrMapping/>
+  </p:clrMapOvr>
+</p:sld>
+</file>
+
+<file path=ppt/slides/slide16.xml><?xml version="1.0" encoding="utf-8"?>
+<p:sld xmlns:a="http://schemas.openxmlformats.org/drawingml/2006/main" xmlns:p="http://schemas.openxmlformats.org/presentationml/2006/main" xmlns:r="http://schemas.openxmlformats.org/officeDocument/2006/relationships">
+  <p:cSld>
+    <p:spTree>
+      <p:nvGrpSpPr>
+        <p:cNvPr id="1" name=""/>
+        <p:cNvGrpSpPr/>
+        <p:nvPr/>
+      </p:nvGrpSpPr>
+      <p:grpSpPr/>
+      <p:sp>
+        <p:nvSpPr>
+          <p:cNvPr id="2" name="Title 1"/>
+          <p:cNvSpPr>
+            <a:spLocks noGrp="1"/>
+          </p:cNvSpPr>
+          <p:nvPr>
+            <p:ph type="title"/>
+          </p:nvPr>
+        </p:nvSpPr>
+        <p:spPr/>
+        <p:txBody>
+          <a:bodyPr/>
+          <a:lstStyle/>
+          <a:p>
+            <a:r>
+              <a:rPr sz="3800" b="1">
+                <a:solidFill>
+                  <a:srgbClr val="1F2A37"/>
+                </a:solidFill>
+              </a:rPr>
+              <a:t>text.length is ...</a:t>
+            </a:r>
+          </a:p>
+        </p:txBody>
+      </p:sp>
+      <p:sp>
+        <p:nvSpPr>
+          <p:cNvPr id="3" name="TextBox 2"/>
+          <p:cNvSpPr txBox="1"/>
+          <p:nvPr/>
+        </p:nvSpPr>
+        <p:spPr>
+          <a:xfrm>
+            <a:off x="868680" y="502920"/>
+            <a:ext cx="5486400" cy="457200"/>
+          </a:xfrm>
+          <a:prstGeom prst="rect">
+            <a:avLst/>
+          </a:prstGeom>
+          <a:noFill/>
+        </p:spPr>
+        <p:txBody>
+          <a:bodyPr wrap="none">
+            <a:spAutoFit/>
+          </a:bodyPr>
+          <a:lstStyle/>
+          <a:p>
+            <a:r>
+              <a:rPr sz="1500" b="1">
+                <a:solidFill>
+                  <a:srgbClr val="01AEFD"/>
+                </a:solidFill>
+              </a:rPr>
+              <a:t>QUICK CHECK</a:t>
+            </a:r>
+          </a:p>
+        </p:txBody>
+      </p:sp>
+      <p:sp>
+        <p:nvSpPr>
+          <p:cNvPr id="4" name="TextBox 3"/>
+          <p:cNvSpPr txBox="1"/>
+          <p:nvPr/>
+        </p:nvSpPr>
+        <p:spPr>
+          <a:xfrm>
+            <a:off x="822960" y="1828800"/>
+            <a:ext cx="10515600" cy="4206240"/>
+          </a:xfrm>
+          <a:prstGeom prst="rect">
+            <a:avLst/>
+          </a:prstGeom>
+          <a:noFill/>
+        </p:spPr>
+        <p:txBody>
+          <a:bodyPr wrap="square">
+            <a:spAutoFit/>
+          </a:bodyPr>
+          <a:lstStyle/>
+          <a:p>
+            <a:pPr>
+              <a:spcAft>
+                <a:spcPts val="1400"/>
+              </a:spcAft>
+            </a:pPr>
+            <a:r>
+              <a:rPr sz="2400">
+                <a:solidFill>
+                  <a:srgbClr val="1F2A37"/>
+                </a:solidFill>
+              </a:rPr>
+              <a:t>• A. the number of characters in text</a:t>
+            </a:r>
+          </a:p>
+          <a:p>
+            <a:pPr>
+              <a:spcAft>
+                <a:spcPts val="1400"/>
+              </a:spcAft>
+            </a:pPr>
+            <a:r>
+              <a:rPr sz="2400">
+                <a:solidFill>
+                  <a:srgbClr val="1F2A37"/>
+                </a:solidFill>
+              </a:rPr>
+              <a:t>• B. the AI's reply</a:t>
+            </a:r>
+          </a:p>
+          <a:p>
+            <a:pPr>
+              <a:spcAft>
+                <a:spcPts val="1400"/>
+              </a:spcAft>
+            </a:pPr>
+            <a:r>
+              <a:rPr sz="2400">
+                <a:solidFill>
+                  <a:srgbClr val="1F2A37"/>
+                </a:solidFill>
+              </a:rPr>
+              <a:t>• C. true or false</a:t>
+            </a:r>
+          </a:p>
+          <a:p>
+            <a:pPr>
+              <a:spcAft>
+                <a:spcPts val="1400"/>
+              </a:spcAft>
+            </a:pPr>
+            <a:r>
+              <a:rPr sz="2400">
+                <a:solidFill>
+                  <a:srgbClr val="1F2A37"/>
+                </a:solidFill>
+              </a:rPr>
+              <a:t>• D. the temperature</a:t>
+            </a:r>
+          </a:p>
+          <a:p>
+            <a:pPr>
+              <a:spcAft>
+                <a:spcPts val="1400"/>
+              </a:spcAft>
+            </a:pPr>
+            <a:r>
+              <a:rPr sz="2400">
+                <a:solidFill>
+                  <a:srgbClr val="1F2A37"/>
+                </a:solidFill>
+              </a:rPr>
+              <a:t>• Pick one - the answer is on the next slide.</a:t>
+            </a:r>
+          </a:p>
+        </p:txBody>
+      </p:sp>
+    </p:spTree>
+  </p:cSld>
+  <p:clrMapOvr>
+    <a:masterClrMapping/>
+  </p:clrMapOvr>
+</p:sld>
+</file>
+
+<file path=ppt/slides/slide17.xml><?xml version="1.0" encoding="utf-8"?>
+<p:sld xmlns:a="http://schemas.openxmlformats.org/drawingml/2006/main" xmlns:p="http://schemas.openxmlformats.org/presentationml/2006/main" xmlns:r="http://schemas.openxmlformats.org/officeDocument/2006/relationships">
+  <p:cSld>
+    <p:spTree>
+      <p:nvGrpSpPr>
+        <p:cNvPr id="1" name=""/>
+        <p:cNvGrpSpPr/>
+        <p:nvPr/>
+      </p:nvGrpSpPr>
+      <p:grpSpPr/>
+      <p:sp>
+        <p:nvSpPr>
+          <p:cNvPr id="2" name="Title 1"/>
+          <p:cNvSpPr>
+            <a:spLocks noGrp="1"/>
+          </p:cNvSpPr>
+          <p:nvPr>
+            <p:ph type="title"/>
+          </p:nvPr>
+        </p:nvSpPr>
+        <p:spPr/>
+        <p:txBody>
+          <a:bodyPr/>
+          <a:lstStyle/>
+          <a:p>
+            <a:r>
+              <a:rPr sz="3800" b="1">
+                <a:solidFill>
+                  <a:srgbClr val="1F2A37"/>
+                </a:solidFill>
+              </a:rPr>
+              <a:t>text.length is ...</a:t>
+            </a:r>
+          </a:p>
+        </p:txBody>
+      </p:sp>
+      <p:sp>
+        <p:nvSpPr>
+          <p:cNvPr id="3" name="TextBox 2"/>
+          <p:cNvSpPr txBox="1"/>
+          <p:nvPr/>
+        </p:nvSpPr>
+        <p:spPr>
+          <a:xfrm>
+            <a:off x="868680" y="502920"/>
+            <a:ext cx="5486400" cy="457200"/>
+          </a:xfrm>
+          <a:prstGeom prst="rect">
+            <a:avLst/>
+          </a:prstGeom>
+          <a:noFill/>
+        </p:spPr>
+        <p:txBody>
+          <a:bodyPr wrap="none">
+            <a:spAutoFit/>
+          </a:bodyPr>
+          <a:lstStyle/>
+          <a:p>
+            <a:r>
+              <a:rPr sz="1500" b="1">
+                <a:solidFill>
+                  <a:srgbClr val="01AEFD"/>
+                </a:solidFill>
+              </a:rPr>
+              <a:t>ANSWER</a:t>
+            </a:r>
+          </a:p>
+        </p:txBody>
+      </p:sp>
+      <p:sp>
+        <p:nvSpPr>
+          <p:cNvPr id="4" name="TextBox 3"/>
+          <p:cNvSpPr txBox="1"/>
+          <p:nvPr/>
+        </p:nvSpPr>
+        <p:spPr>
+          <a:xfrm>
+            <a:off x="822960" y="1828800"/>
+            <a:ext cx="10515600" cy="4206240"/>
+          </a:xfrm>
+          <a:prstGeom prst="rect">
+            <a:avLst/>
+          </a:prstGeom>
+          <a:noFill/>
+        </p:spPr>
+        <p:txBody>
+          <a:bodyPr wrap="square">
+            <a:spAutoFit/>
+          </a:bodyPr>
+          <a:lstStyle/>
+          <a:p>
+            <a:pPr>
+              <a:spcAft>
+                <a:spcPts val="1400"/>
+              </a:spcAft>
+            </a:pPr>
+            <a:r>
+              <a:rPr sz="2400">
+                <a:solidFill>
+                  <a:srgbClr val="1F2A37"/>
+                </a:solidFill>
+              </a:rPr>
+              <a:t>• A. the number of characters in text (correct)</a:t>
+            </a:r>
+          </a:p>
+          <a:p>
+            <a:pPr>
+              <a:spcAft>
+                <a:spcPts val="1400"/>
+              </a:spcAft>
+            </a:pPr>
+            <a:r>
+              <a:rPr sz="2400">
+                <a:solidFill>
+                  <a:srgbClr val="1F2A37"/>
+                </a:solidFill>
+              </a:rPr>
+              <a:t>• B. the AI's reply</a:t>
+            </a:r>
+          </a:p>
+          <a:p>
+            <a:pPr>
+              <a:spcAft>
+                <a:spcPts val="1400"/>
+              </a:spcAft>
+            </a:pPr>
+            <a:r>
+              <a:rPr sz="2400">
+                <a:solidFill>
+                  <a:srgbClr val="1F2A37"/>
+                </a:solidFill>
+              </a:rPr>
+              <a:t>• C. true or false</a:t>
+            </a:r>
+          </a:p>
+          <a:p>
+            <a:pPr>
+              <a:spcAft>
+                <a:spcPts val="1400"/>
+              </a:spcAft>
+            </a:pPr>
+            <a:r>
+              <a:rPr sz="2400">
+                <a:solidFill>
+                  <a:srgbClr val="1F2A37"/>
+                </a:solidFill>
+              </a:rPr>
+              <a:t>• D. the temperature</a:t>
+            </a:r>
+          </a:p>
+          <a:p>
+            <a:pPr>
+              <a:spcAft>
+                <a:spcPts val="1400"/>
+              </a:spcAft>
+            </a:pPr>
+            <a:r>
+              <a:rPr sz="2400">
+                <a:solidFill>
+                  <a:srgbClr val="1F2A37"/>
+                </a:solidFill>
+              </a:rPr>
+              <a:t>• .length on a string is its character count.</a:t>
+            </a:r>
+          </a:p>
+        </p:txBody>
+      </p:sp>
+    </p:spTree>
+  </p:cSld>
+  <p:clrMapOvr>
+    <a:masterClrMapping/>
+  </p:clrMapOvr>
+</p:sld>
+</file>
+
+<file path=ppt/slides/slide18.xml><?xml version="1.0" encoding="utf-8"?>
+<p:sld xmlns:a="http://schemas.openxmlformats.org/drawingml/2006/main" xmlns:p="http://schemas.openxmlformats.org/presentationml/2006/main" xmlns:r="http://schemas.openxmlformats.org/officeDocument/2006/relationships">
+  <p:cSld>
+    <p:spTree>
+      <p:nvGrpSpPr>
+        <p:cNvPr id="1" name=""/>
+        <p:cNvGrpSpPr/>
+        <p:nvPr/>
+      </p:nvGrpSpPr>
+      <p:grpSpPr/>
+      <p:sp>
+        <p:nvSpPr>
+          <p:cNvPr id="2" name="Title 1"/>
+          <p:cNvSpPr>
+            <a:spLocks noGrp="1"/>
+          </p:cNvSpPr>
+          <p:nvPr>
+            <p:ph type="title"/>
+          </p:nvPr>
+        </p:nvSpPr>
+        <p:spPr/>
+        <p:txBody>
+          <a:bodyPr/>
+          <a:lstStyle/>
+          <a:p>
+            <a:r>
+              <a:rPr sz="3800" b="1">
+                <a:solidFill>
+                  <a:srgbClr val="1F2A37"/>
+                </a:solidFill>
+              </a:rPr>
+              <a:t>The caution line under the title reminds users that ...</a:t>
+            </a:r>
+          </a:p>
+        </p:txBody>
+      </p:sp>
+      <p:sp>
+        <p:nvSpPr>
+          <p:cNvPr id="3" name="TextBox 2"/>
+          <p:cNvSpPr txBox="1"/>
+          <p:nvPr/>
+        </p:nvSpPr>
+        <p:spPr>
+          <a:xfrm>
+            <a:off x="868680" y="502920"/>
+            <a:ext cx="5486400" cy="457200"/>
+          </a:xfrm>
+          <a:prstGeom prst="rect">
+            <a:avLst/>
+          </a:prstGeom>
+          <a:noFill/>
+        </p:spPr>
+        <p:txBody>
+          <a:bodyPr wrap="none">
+            <a:spAutoFit/>
+          </a:bodyPr>
+          <a:lstStyle/>
+          <a:p>
+            <a:r>
+              <a:rPr sz="1500" b="1">
+                <a:solidFill>
+                  <a:srgbClr val="01AEFD"/>
+                </a:solidFill>
+              </a:rPr>
+              <a:t>QUICK CHECK</a:t>
+            </a:r>
+          </a:p>
+        </p:txBody>
+      </p:sp>
+      <p:sp>
+        <p:nvSpPr>
+          <p:cNvPr id="4" name="TextBox 3"/>
+          <p:cNvSpPr txBox="1"/>
+          <p:nvPr/>
+        </p:nvSpPr>
+        <p:spPr>
+          <a:xfrm>
+            <a:off x="822960" y="1828800"/>
+            <a:ext cx="10515600" cy="4206240"/>
+          </a:xfrm>
+          <a:prstGeom prst="rect">
+            <a:avLst/>
+          </a:prstGeom>
+          <a:noFill/>
+        </p:spPr>
+        <p:txBody>
+          <a:bodyPr wrap="square">
+            <a:spAutoFit/>
+          </a:bodyPr>
+          <a:lstStyle/>
+          <a:p>
+            <a:pPr>
+              <a:spcAft>
+                <a:spcPts val="1400"/>
+              </a:spcAft>
+            </a:pPr>
+            <a:r>
+              <a:rPr sz="2400">
+                <a:solidFill>
+                  <a:srgbClr val="1F2A37"/>
+                </a:solidFill>
+              </a:rPr>
+              <a:t>• A. the AI can be confidently wrong - check what matters</a:t>
+            </a:r>
+          </a:p>
+          <a:p>
+            <a:pPr>
+              <a:spcAft>
+                <a:spcPts val="1400"/>
+              </a:spcAft>
+            </a:pPr>
+            <a:r>
+              <a:rPr sz="2400">
+                <a:solidFill>
+                  <a:srgbClr val="1F2A37"/>
+                </a:solidFill>
+              </a:rPr>
+              <a:t>• B. the AI is always right</a:t>
+            </a:r>
+          </a:p>
+          <a:p>
+            <a:pPr>
+              <a:spcAft>
+                <a:spcPts val="1400"/>
+              </a:spcAft>
+            </a:pPr>
+            <a:r>
+              <a:rPr sz="2400">
+                <a:solidFill>
+                  <a:srgbClr val="1F2A37"/>
+                </a:solidFill>
+              </a:rPr>
+              <a:t>• C. to save often</a:t>
+            </a:r>
+          </a:p>
+          <a:p>
+            <a:pPr>
+              <a:spcAft>
+                <a:spcPts val="1400"/>
+              </a:spcAft>
+            </a:pPr>
+            <a:r>
+              <a:rPr sz="2400">
+                <a:solidFill>
+                  <a:srgbClr val="1F2A37"/>
+                </a:solidFill>
+              </a:rPr>
+              <a:t>• D. to pick a character</a:t>
+            </a:r>
+          </a:p>
+          <a:p>
+            <a:pPr>
+              <a:spcAft>
+                <a:spcPts val="1400"/>
+              </a:spcAft>
+            </a:pPr>
+            <a:r>
+              <a:rPr sz="2400">
+                <a:solidFill>
+                  <a:srgbClr val="1F2A37"/>
+                </a:solidFill>
+              </a:rPr>
+              <a:t>• Pick one - the answer is on the next slide.</a:t>
+            </a:r>
+          </a:p>
+        </p:txBody>
+      </p:sp>
+    </p:spTree>
+  </p:cSld>
+  <p:clrMapOvr>
+    <a:masterClrMapping/>
+  </p:clrMapOvr>
+</p:sld>
+</file>
+
+<file path=ppt/slides/slide19.xml><?xml version="1.0" encoding="utf-8"?>
+<p:sld xmlns:a="http://schemas.openxmlformats.org/drawingml/2006/main" xmlns:p="http://schemas.openxmlformats.org/presentationml/2006/main" xmlns:r="http://schemas.openxmlformats.org/officeDocument/2006/relationships">
+  <p:cSld>
+    <p:spTree>
+      <p:nvGrpSpPr>
+        <p:cNvPr id="1" name=""/>
+        <p:cNvGrpSpPr/>
+        <p:nvPr/>
+      </p:nvGrpSpPr>
+      <p:grpSpPr/>
+      <p:sp>
+        <p:nvSpPr>
+          <p:cNvPr id="2" name="Title 1"/>
+          <p:cNvSpPr>
+            <a:spLocks noGrp="1"/>
+          </p:cNvSpPr>
+          <p:nvPr>
+            <p:ph type="title"/>
+          </p:nvPr>
+        </p:nvSpPr>
+        <p:spPr/>
+        <p:txBody>
+          <a:bodyPr/>
+          <a:lstStyle/>
+          <a:p>
+            <a:r>
+              <a:rPr sz="3800" b="1">
+                <a:solidFill>
+                  <a:srgbClr val="1F2A37"/>
+                </a:solidFill>
+              </a:rPr>
+              <a:t>The caution line under the title reminds users that ...</a:t>
+            </a:r>
+          </a:p>
+        </p:txBody>
+      </p:sp>
+      <p:sp>
+        <p:nvSpPr>
+          <p:cNvPr id="3" name="TextBox 2"/>
+          <p:cNvSpPr txBox="1"/>
+          <p:nvPr/>
+        </p:nvSpPr>
+        <p:spPr>
+          <a:xfrm>
+            <a:off x="868680" y="502920"/>
+            <a:ext cx="5486400" cy="457200"/>
+          </a:xfrm>
+          <a:prstGeom prst="rect">
+            <a:avLst/>
+          </a:prstGeom>
+          <a:noFill/>
+        </p:spPr>
+        <p:txBody>
+          <a:bodyPr wrap="none">
+            <a:spAutoFit/>
+          </a:bodyPr>
+          <a:lstStyle/>
+          <a:p>
+            <a:r>
+              <a:rPr sz="1500" b="1">
+                <a:solidFill>
+                  <a:srgbClr val="01AEFD"/>
+                </a:solidFill>
+              </a:rPr>
+              <a:t>ANSWER</a:t>
+            </a:r>
+          </a:p>
+        </p:txBody>
+      </p:sp>
+      <p:sp>
+        <p:nvSpPr>
+          <p:cNvPr id="4" name="TextBox 3"/>
+          <p:cNvSpPr txBox="1"/>
+          <p:nvPr/>
+        </p:nvSpPr>
+        <p:spPr>
+          <a:xfrm>
+            <a:off x="822960" y="1828800"/>
+            <a:ext cx="10515600" cy="4206240"/>
+          </a:xfrm>
+          <a:prstGeom prst="rect">
+            <a:avLst/>
+          </a:prstGeom>
+          <a:noFill/>
+        </p:spPr>
+        <p:txBody>
+          <a:bodyPr wrap="square">
+            <a:spAutoFit/>
+          </a:bodyPr>
+          <a:lstStyle/>
+          <a:p>
+            <a:pPr>
+              <a:spcAft>
+                <a:spcPts val="1400"/>
+              </a:spcAft>
+            </a:pPr>
+            <a:r>
+              <a:rPr sz="2400">
+                <a:solidFill>
+                  <a:srgbClr val="1F2A37"/>
+                </a:solidFill>
+              </a:rPr>
+              <a:t>• A. the AI can be confidently wrong - check what matters (correct)</a:t>
+            </a:r>
+          </a:p>
+          <a:p>
+            <a:pPr>
+              <a:spcAft>
+                <a:spcPts val="1400"/>
+              </a:spcAft>
+            </a:pPr>
+            <a:r>
+              <a:rPr sz="2400">
+                <a:solidFill>
+                  <a:srgbClr val="1F2A37"/>
+                </a:solidFill>
+              </a:rPr>
+              <a:t>• B. the AI is always right</a:t>
+            </a:r>
+          </a:p>
+          <a:p>
+            <a:pPr>
+              <a:spcAft>
+                <a:spcPts val="1400"/>
+              </a:spcAft>
+            </a:pPr>
+            <a:r>
+              <a:rPr sz="2400">
+                <a:solidFill>
+                  <a:srgbClr val="1F2A37"/>
+                </a:solidFill>
+              </a:rPr>
+              <a:t>• C. to save often</a:t>
+            </a:r>
+          </a:p>
+          <a:p>
+            <a:pPr>
+              <a:spcAft>
+                <a:spcPts val="1400"/>
+              </a:spcAft>
+            </a:pPr>
+            <a:r>
+              <a:rPr sz="2400">
+                <a:solidFill>
+                  <a:srgbClr val="1F2A37"/>
+                </a:solidFill>
+              </a:rPr>
+              <a:t>• D. to pick a character</a:t>
+            </a:r>
+          </a:p>
+          <a:p>
+            <a:pPr>
+              <a:spcAft>
+                <a:spcPts val="1400"/>
+              </a:spcAft>
+            </a:pPr>
+            <a:r>
+              <a:rPr sz="2400">
+                <a:solidFill>
+                  <a:srgbClr val="1F2A37"/>
+                </a:solidFill>
+              </a:rPr>
+              <a:t>• Even a fluent, confident answer can be wrong; the caution keeps students sceptical.</a:t>
             </a:r>
           </a:p>
         </p:txBody>
@@ -4244,6 +6679,2371 @@
 </p:sld>
 </file>
 
+<file path=ppt/slides/slide20.xml><?xml version="1.0" encoding="utf-8"?>
+<p:sld xmlns:a="http://schemas.openxmlformats.org/drawingml/2006/main" xmlns:p="http://schemas.openxmlformats.org/presentationml/2006/main" xmlns:r="http://schemas.openxmlformats.org/officeDocument/2006/relationships">
+  <p:cSld>
+    <p:spTree>
+      <p:nvGrpSpPr>
+        <p:cNvPr id="1" name=""/>
+        <p:cNvGrpSpPr/>
+        <p:nvPr/>
+      </p:nvGrpSpPr>
+      <p:grpSpPr/>
+      <p:sp>
+        <p:nvSpPr>
+          <p:cNvPr id="2" name="Title 1"/>
+          <p:cNvSpPr>
+            <a:spLocks noGrp="1"/>
+          </p:cNvSpPr>
+          <p:nvPr>
+            <p:ph type="title"/>
+          </p:nvPr>
+        </p:nvSpPr>
+        <p:spPr/>
+        <p:txBody>
+          <a:bodyPr/>
+          <a:lstStyle/>
+          <a:p>
+            <a:r>
+              <a:rPr sz="3800" b="1">
+                <a:solidFill>
+                  <a:srgbClr val="1F2A37"/>
+                </a:solidFill>
+              </a:rPr>
+              <a:t>From week 5 - why check if (!res.ok)?</a:t>
+            </a:r>
+          </a:p>
+        </p:txBody>
+      </p:sp>
+      <p:sp>
+        <p:nvSpPr>
+          <p:cNvPr id="3" name="TextBox 2"/>
+          <p:cNvSpPr txBox="1"/>
+          <p:nvPr/>
+        </p:nvSpPr>
+        <p:spPr>
+          <a:xfrm>
+            <a:off x="868680" y="502920"/>
+            <a:ext cx="5486400" cy="457200"/>
+          </a:xfrm>
+          <a:prstGeom prst="rect">
+            <a:avLst/>
+          </a:prstGeom>
+          <a:noFill/>
+        </p:spPr>
+        <p:txBody>
+          <a:bodyPr wrap="none">
+            <a:spAutoFit/>
+          </a:bodyPr>
+          <a:lstStyle/>
+          <a:p>
+            <a:r>
+              <a:rPr sz="1500" b="1">
+                <a:solidFill>
+                  <a:srgbClr val="01AEFD"/>
+                </a:solidFill>
+              </a:rPr>
+              <a:t>QUICK CHECK</a:t>
+            </a:r>
+          </a:p>
+        </p:txBody>
+      </p:sp>
+      <p:sp>
+        <p:nvSpPr>
+          <p:cNvPr id="4" name="TextBox 3"/>
+          <p:cNvSpPr txBox="1"/>
+          <p:nvPr/>
+        </p:nvSpPr>
+        <p:spPr>
+          <a:xfrm>
+            <a:off x="822960" y="1828800"/>
+            <a:ext cx="10515600" cy="4206240"/>
+          </a:xfrm>
+          <a:prstGeom prst="rect">
+            <a:avLst/>
+          </a:prstGeom>
+          <a:noFill/>
+        </p:spPr>
+        <p:txBody>
+          <a:bodyPr wrap="square">
+            <a:spAutoFit/>
+          </a:bodyPr>
+          <a:lstStyle/>
+          <a:p>
+            <a:pPr>
+              <a:spcAft>
+                <a:spcPts val="1400"/>
+              </a:spcAft>
+            </a:pPr>
+            <a:r>
+              <a:rPr sz="2400">
+                <a:solidFill>
+                  <a:srgbClr val="1F2A37"/>
+                </a:solidFill>
+              </a:rPr>
+              <a:t>• A. fetch does NOT throw on a refusal, so you must check yourself</a:t>
+            </a:r>
+          </a:p>
+          <a:p>
+            <a:pPr>
+              <a:spcAft>
+                <a:spcPts val="1400"/>
+              </a:spcAft>
+            </a:pPr>
+            <a:r>
+              <a:rPr sz="2400">
+                <a:solidFill>
+                  <a:srgbClr val="1F2A37"/>
+                </a:solidFill>
+              </a:rPr>
+              <a:t>• B. to make it faster</a:t>
+            </a:r>
+          </a:p>
+          <a:p>
+            <a:pPr>
+              <a:spcAft>
+                <a:spcPts val="1400"/>
+              </a:spcAft>
+            </a:pPr>
+            <a:r>
+              <a:rPr sz="2400">
+                <a:solidFill>
+                  <a:srgbClr val="1F2A37"/>
+                </a:solidFill>
+              </a:rPr>
+              <a:t>• C. to stream the reply</a:t>
+            </a:r>
+          </a:p>
+          <a:p>
+            <a:pPr>
+              <a:spcAft>
+                <a:spcPts val="1400"/>
+              </a:spcAft>
+            </a:pPr>
+            <a:r>
+              <a:rPr sz="2400">
+                <a:solidFill>
+                  <a:srgbClr val="1F2A37"/>
+                </a:solidFill>
+              </a:rPr>
+              <a:t>• D. to save the chat</a:t>
+            </a:r>
+          </a:p>
+          <a:p>
+            <a:pPr>
+              <a:spcAft>
+                <a:spcPts val="1400"/>
+              </a:spcAft>
+            </a:pPr>
+            <a:r>
+              <a:rPr sz="2400">
+                <a:solidFill>
+                  <a:srgbClr val="1F2A37"/>
+                </a:solidFill>
+              </a:rPr>
+              <a:t>• Pick one - the answer is on the next slide.</a:t>
+            </a:r>
+          </a:p>
+        </p:txBody>
+      </p:sp>
+    </p:spTree>
+  </p:cSld>
+  <p:clrMapOvr>
+    <a:masterClrMapping/>
+  </p:clrMapOvr>
+</p:sld>
+</file>
+
+<file path=ppt/slides/slide21.xml><?xml version="1.0" encoding="utf-8"?>
+<p:sld xmlns:a="http://schemas.openxmlformats.org/drawingml/2006/main" xmlns:p="http://schemas.openxmlformats.org/presentationml/2006/main" xmlns:r="http://schemas.openxmlformats.org/officeDocument/2006/relationships">
+  <p:cSld>
+    <p:spTree>
+      <p:nvGrpSpPr>
+        <p:cNvPr id="1" name=""/>
+        <p:cNvGrpSpPr/>
+        <p:nvPr/>
+      </p:nvGrpSpPr>
+      <p:grpSpPr/>
+      <p:sp>
+        <p:nvSpPr>
+          <p:cNvPr id="2" name="Title 1"/>
+          <p:cNvSpPr>
+            <a:spLocks noGrp="1"/>
+          </p:cNvSpPr>
+          <p:nvPr>
+            <p:ph type="title"/>
+          </p:nvPr>
+        </p:nvSpPr>
+        <p:spPr/>
+        <p:txBody>
+          <a:bodyPr/>
+          <a:lstStyle/>
+          <a:p>
+            <a:r>
+              <a:rPr sz="3800" b="1">
+                <a:solidFill>
+                  <a:srgbClr val="1F2A37"/>
+                </a:solidFill>
+              </a:rPr>
+              <a:t>From week 5 - why check if (!res.ok)?</a:t>
+            </a:r>
+          </a:p>
+        </p:txBody>
+      </p:sp>
+      <p:sp>
+        <p:nvSpPr>
+          <p:cNvPr id="3" name="TextBox 2"/>
+          <p:cNvSpPr txBox="1"/>
+          <p:nvPr/>
+        </p:nvSpPr>
+        <p:spPr>
+          <a:xfrm>
+            <a:off x="868680" y="502920"/>
+            <a:ext cx="5486400" cy="457200"/>
+          </a:xfrm>
+          <a:prstGeom prst="rect">
+            <a:avLst/>
+          </a:prstGeom>
+          <a:noFill/>
+        </p:spPr>
+        <p:txBody>
+          <a:bodyPr wrap="none">
+            <a:spAutoFit/>
+          </a:bodyPr>
+          <a:lstStyle/>
+          <a:p>
+            <a:r>
+              <a:rPr sz="1500" b="1">
+                <a:solidFill>
+                  <a:srgbClr val="01AEFD"/>
+                </a:solidFill>
+              </a:rPr>
+              <a:t>ANSWER</a:t>
+            </a:r>
+          </a:p>
+        </p:txBody>
+      </p:sp>
+      <p:sp>
+        <p:nvSpPr>
+          <p:cNvPr id="4" name="TextBox 3"/>
+          <p:cNvSpPr txBox="1"/>
+          <p:nvPr/>
+        </p:nvSpPr>
+        <p:spPr>
+          <a:xfrm>
+            <a:off x="822960" y="1828800"/>
+            <a:ext cx="10515600" cy="4206240"/>
+          </a:xfrm>
+          <a:prstGeom prst="rect">
+            <a:avLst/>
+          </a:prstGeom>
+          <a:noFill/>
+        </p:spPr>
+        <p:txBody>
+          <a:bodyPr wrap="square">
+            <a:spAutoFit/>
+          </a:bodyPr>
+          <a:lstStyle/>
+          <a:p>
+            <a:pPr>
+              <a:spcAft>
+                <a:spcPts val="1400"/>
+              </a:spcAft>
+            </a:pPr>
+            <a:r>
+              <a:rPr sz="2400">
+                <a:solidFill>
+                  <a:srgbClr val="1F2A37"/>
+                </a:solidFill>
+              </a:rPr>
+              <a:t>• A. fetch does NOT throw on a refusal, so you must check yourself (correct)</a:t>
+            </a:r>
+          </a:p>
+          <a:p>
+            <a:pPr>
+              <a:spcAft>
+                <a:spcPts val="1400"/>
+              </a:spcAft>
+            </a:pPr>
+            <a:r>
+              <a:rPr sz="2400">
+                <a:solidFill>
+                  <a:srgbClr val="1F2A37"/>
+                </a:solidFill>
+              </a:rPr>
+              <a:t>• B. to make it faster</a:t>
+            </a:r>
+          </a:p>
+          <a:p>
+            <a:pPr>
+              <a:spcAft>
+                <a:spcPts val="1400"/>
+              </a:spcAft>
+            </a:pPr>
+            <a:r>
+              <a:rPr sz="2400">
+                <a:solidFill>
+                  <a:srgbClr val="1F2A37"/>
+                </a:solidFill>
+              </a:rPr>
+              <a:t>• C. to stream the reply</a:t>
+            </a:r>
+          </a:p>
+          <a:p>
+            <a:pPr>
+              <a:spcAft>
+                <a:spcPts val="1400"/>
+              </a:spcAft>
+            </a:pPr>
+            <a:r>
+              <a:rPr sz="2400">
+                <a:solidFill>
+                  <a:srgbClr val="1F2A37"/>
+                </a:solidFill>
+              </a:rPr>
+              <a:t>• D. to save the chat</a:t>
+            </a:r>
+          </a:p>
+          <a:p>
+            <a:pPr>
+              <a:spcAft>
+                <a:spcPts val="1400"/>
+              </a:spcAft>
+            </a:pPr>
+            <a:r>
+              <a:rPr sz="2400">
+                <a:solidFill>
+                  <a:srgbClr val="1F2A37"/>
+                </a:solidFill>
+              </a:rPr>
+              <a:t>• A 401 or 429 looks just like a success to fetch until you check res.ok.</a:t>
+            </a:r>
+          </a:p>
+        </p:txBody>
+      </p:sp>
+    </p:spTree>
+  </p:cSld>
+  <p:clrMapOvr>
+    <a:masterClrMapping/>
+  </p:clrMapOvr>
+</p:sld>
+</file>
+
+<file path=ppt/slides/slide22.xml><?xml version="1.0" encoding="utf-8"?>
+<p:sld xmlns:a="http://schemas.openxmlformats.org/drawingml/2006/main" xmlns:p="http://schemas.openxmlformats.org/presentationml/2006/main" xmlns:r="http://schemas.openxmlformats.org/officeDocument/2006/relationships">
+  <p:cSld>
+    <p:spTree>
+      <p:nvGrpSpPr>
+        <p:cNvPr id="1" name=""/>
+        <p:cNvGrpSpPr/>
+        <p:nvPr/>
+      </p:nvGrpSpPr>
+      <p:grpSpPr/>
+      <p:sp>
+        <p:nvSpPr>
+          <p:cNvPr id="2" name="Title 1"/>
+          <p:cNvSpPr>
+            <a:spLocks noGrp="1"/>
+          </p:cNvSpPr>
+          <p:nvPr>
+            <p:ph type="title"/>
+          </p:nvPr>
+        </p:nvSpPr>
+        <p:spPr/>
+        <p:txBody>
+          <a:bodyPr/>
+          <a:lstStyle/>
+          <a:p>
+            <a:r>
+              <a:rPr sz="3800" b="1">
+                <a:solidFill>
+                  <a:srgbClr val="1F2A37"/>
+                </a:solidFill>
+              </a:rPr>
+              <a:t>From week 8 - what keeps the conversation under the server's limit?</a:t>
+            </a:r>
+          </a:p>
+        </p:txBody>
+      </p:sp>
+      <p:sp>
+        <p:nvSpPr>
+          <p:cNvPr id="3" name="TextBox 2"/>
+          <p:cNvSpPr txBox="1"/>
+          <p:nvPr/>
+        </p:nvSpPr>
+        <p:spPr>
+          <a:xfrm>
+            <a:off x="868680" y="502920"/>
+            <a:ext cx="5486400" cy="457200"/>
+          </a:xfrm>
+          <a:prstGeom prst="rect">
+            <a:avLst/>
+          </a:prstGeom>
+          <a:noFill/>
+        </p:spPr>
+        <p:txBody>
+          <a:bodyPr wrap="none">
+            <a:spAutoFit/>
+          </a:bodyPr>
+          <a:lstStyle/>
+          <a:p>
+            <a:r>
+              <a:rPr sz="1500" b="1">
+                <a:solidFill>
+                  <a:srgbClr val="01AEFD"/>
+                </a:solidFill>
+              </a:rPr>
+              <a:t>QUICK CHECK</a:t>
+            </a:r>
+          </a:p>
+        </p:txBody>
+      </p:sp>
+      <p:sp>
+        <p:nvSpPr>
+          <p:cNvPr id="4" name="TextBox 3"/>
+          <p:cNvSpPr txBox="1"/>
+          <p:nvPr/>
+        </p:nvSpPr>
+        <p:spPr>
+          <a:xfrm>
+            <a:off x="822960" y="1828800"/>
+            <a:ext cx="10515600" cy="4206240"/>
+          </a:xfrm>
+          <a:prstGeom prst="rect">
+            <a:avLst/>
+          </a:prstGeom>
+          <a:noFill/>
+        </p:spPr>
+        <p:txBody>
+          <a:bodyPr wrap="square">
+            <a:spAutoFit/>
+          </a:bodyPr>
+          <a:lstStyle/>
+          <a:p>
+            <a:pPr>
+              <a:spcAft>
+                <a:spcPts val="1400"/>
+              </a:spcAft>
+            </a:pPr>
+            <a:r>
+              <a:rPr sz="2400">
+                <a:solidFill>
+                  <a:srgbClr val="1F2A37"/>
+                </a:solidFill>
+              </a:rPr>
+              <a:t>• A. trimHistory drops the oldest messages</a:t>
+            </a:r>
+          </a:p>
+          <a:p>
+            <a:pPr>
+              <a:spcAft>
+                <a:spcPts val="1400"/>
+              </a:spcAft>
+            </a:pPr>
+            <a:r>
+              <a:rPr sz="2400">
+                <a:solidFill>
+                  <a:srgbClr val="1F2A37"/>
+                </a:solidFill>
+              </a:rPr>
+              <a:t>• B. the AI shortens it</a:t>
+            </a:r>
+          </a:p>
+          <a:p>
+            <a:pPr>
+              <a:spcAft>
+                <a:spcPts val="1400"/>
+              </a:spcAft>
+            </a:pPr>
+            <a:r>
+              <a:rPr sz="2400">
+                <a:solidFill>
+                  <a:srgbClr val="1F2A37"/>
+                </a:solidFill>
+              </a:rPr>
+              <a:t>• C. nothing</a:t>
+            </a:r>
+          </a:p>
+          <a:p>
+            <a:pPr>
+              <a:spcAft>
+                <a:spcPts val="1400"/>
+              </a:spcAft>
+            </a:pPr>
+            <a:r>
+              <a:rPr sz="2400">
+                <a:solidFill>
+                  <a:srgbClr val="1F2A37"/>
+                </a:solidFill>
+              </a:rPr>
+              <a:t>• D. the temperature slider</a:t>
+            </a:r>
+          </a:p>
+          <a:p>
+            <a:pPr>
+              <a:spcAft>
+                <a:spcPts val="1400"/>
+              </a:spcAft>
+            </a:pPr>
+            <a:r>
+              <a:rPr sz="2400">
+                <a:solidFill>
+                  <a:srgbClr val="1F2A37"/>
+                </a:solidFill>
+              </a:rPr>
+              <a:t>• Pick one - the answer is on the next slide.</a:t>
+            </a:r>
+          </a:p>
+        </p:txBody>
+      </p:sp>
+    </p:spTree>
+  </p:cSld>
+  <p:clrMapOvr>
+    <a:masterClrMapping/>
+  </p:clrMapOvr>
+</p:sld>
+</file>
+
+<file path=ppt/slides/slide23.xml><?xml version="1.0" encoding="utf-8"?>
+<p:sld xmlns:a="http://schemas.openxmlformats.org/drawingml/2006/main" xmlns:p="http://schemas.openxmlformats.org/presentationml/2006/main" xmlns:r="http://schemas.openxmlformats.org/officeDocument/2006/relationships">
+  <p:cSld>
+    <p:spTree>
+      <p:nvGrpSpPr>
+        <p:cNvPr id="1" name=""/>
+        <p:cNvGrpSpPr/>
+        <p:nvPr/>
+      </p:nvGrpSpPr>
+      <p:grpSpPr/>
+      <p:sp>
+        <p:nvSpPr>
+          <p:cNvPr id="2" name="Title 1"/>
+          <p:cNvSpPr>
+            <a:spLocks noGrp="1"/>
+          </p:cNvSpPr>
+          <p:nvPr>
+            <p:ph type="title"/>
+          </p:nvPr>
+        </p:nvSpPr>
+        <p:spPr/>
+        <p:txBody>
+          <a:bodyPr/>
+          <a:lstStyle/>
+          <a:p>
+            <a:r>
+              <a:rPr sz="3800" b="1">
+                <a:solidFill>
+                  <a:srgbClr val="1F2A37"/>
+                </a:solidFill>
+              </a:rPr>
+              <a:t>From week 8 - what keeps the conversation under the server's limit?</a:t>
+            </a:r>
+          </a:p>
+        </p:txBody>
+      </p:sp>
+      <p:sp>
+        <p:nvSpPr>
+          <p:cNvPr id="3" name="TextBox 2"/>
+          <p:cNvSpPr txBox="1"/>
+          <p:nvPr/>
+        </p:nvSpPr>
+        <p:spPr>
+          <a:xfrm>
+            <a:off x="868680" y="502920"/>
+            <a:ext cx="5486400" cy="457200"/>
+          </a:xfrm>
+          <a:prstGeom prst="rect">
+            <a:avLst/>
+          </a:prstGeom>
+          <a:noFill/>
+        </p:spPr>
+        <p:txBody>
+          <a:bodyPr wrap="none">
+            <a:spAutoFit/>
+          </a:bodyPr>
+          <a:lstStyle/>
+          <a:p>
+            <a:r>
+              <a:rPr sz="1500" b="1">
+                <a:solidFill>
+                  <a:srgbClr val="01AEFD"/>
+                </a:solidFill>
+              </a:rPr>
+              <a:t>ANSWER</a:t>
+            </a:r>
+          </a:p>
+        </p:txBody>
+      </p:sp>
+      <p:sp>
+        <p:nvSpPr>
+          <p:cNvPr id="4" name="TextBox 3"/>
+          <p:cNvSpPr txBox="1"/>
+          <p:nvPr/>
+        </p:nvSpPr>
+        <p:spPr>
+          <a:xfrm>
+            <a:off x="822960" y="1828800"/>
+            <a:ext cx="10515600" cy="4206240"/>
+          </a:xfrm>
+          <a:prstGeom prst="rect">
+            <a:avLst/>
+          </a:prstGeom>
+          <a:noFill/>
+        </p:spPr>
+        <p:txBody>
+          <a:bodyPr wrap="square">
+            <a:spAutoFit/>
+          </a:bodyPr>
+          <a:lstStyle/>
+          <a:p>
+            <a:pPr>
+              <a:spcAft>
+                <a:spcPts val="1400"/>
+              </a:spcAft>
+            </a:pPr>
+            <a:r>
+              <a:rPr sz="2400">
+                <a:solidFill>
+                  <a:srgbClr val="1F2A37"/>
+                </a:solidFill>
+              </a:rPr>
+              <a:t>• A. trimHistory drops the oldest messages (correct)</a:t>
+            </a:r>
+          </a:p>
+          <a:p>
+            <a:pPr>
+              <a:spcAft>
+                <a:spcPts val="1400"/>
+              </a:spcAft>
+            </a:pPr>
+            <a:r>
+              <a:rPr sz="2400">
+                <a:solidFill>
+                  <a:srgbClr val="1F2A37"/>
+                </a:solidFill>
+              </a:rPr>
+              <a:t>• B. the AI shortens it</a:t>
+            </a:r>
+          </a:p>
+          <a:p>
+            <a:pPr>
+              <a:spcAft>
+                <a:spcPts val="1400"/>
+              </a:spcAft>
+            </a:pPr>
+            <a:r>
+              <a:rPr sz="2400">
+                <a:solidFill>
+                  <a:srgbClr val="1F2A37"/>
+                </a:solidFill>
+              </a:rPr>
+              <a:t>• C. nothing</a:t>
+            </a:r>
+          </a:p>
+          <a:p>
+            <a:pPr>
+              <a:spcAft>
+                <a:spcPts val="1400"/>
+              </a:spcAft>
+            </a:pPr>
+            <a:r>
+              <a:rPr sz="2400">
+                <a:solidFill>
+                  <a:srgbClr val="1F2A37"/>
+                </a:solidFill>
+              </a:rPr>
+              <a:t>• D. the temperature slider</a:t>
+            </a:r>
+          </a:p>
+          <a:p>
+            <a:pPr>
+              <a:spcAft>
+                <a:spcPts val="1400"/>
+              </a:spcAft>
+            </a:pPr>
+            <a:r>
+              <a:rPr sz="2400">
+                <a:solidFill>
+                  <a:srgbClr val="1F2A37"/>
+                </a:solidFill>
+              </a:rPr>
+              <a:t>• trimHistory removes old messages so each request stays under the 4000-character wall.</a:t>
+            </a:r>
+          </a:p>
+        </p:txBody>
+      </p:sp>
+    </p:spTree>
+  </p:cSld>
+  <p:clrMapOvr>
+    <a:masterClrMapping/>
+  </p:clrMapOvr>
+</p:sld>
+</file>
+
+<file path=ppt/slides/slide24.xml><?xml version="1.0" encoding="utf-8"?>
+<p:sld xmlns:a="http://schemas.openxmlformats.org/drawingml/2006/main" xmlns:p="http://schemas.openxmlformats.org/presentationml/2006/main" xmlns:r="http://schemas.openxmlformats.org/officeDocument/2006/relationships">
+  <p:cSld>
+    <p:bg>
+      <p:bgPr>
+        <a:solidFill>
+          <a:srgbClr val="102127"/>
+        </a:solidFill>
+        <a:effectLst/>
+      </p:bgPr>
+    </p:bg>
+    <p:spTree>
+      <p:nvGrpSpPr>
+        <p:cNvPr id="1" name=""/>
+        <p:cNvGrpSpPr/>
+        <p:nvPr/>
+      </p:nvGrpSpPr>
+      <p:grpSpPr/>
+      <p:sp>
+        <p:nvSpPr>
+          <p:cNvPr id="2" name="TextBox 1"/>
+          <p:cNvSpPr txBox="1"/>
+          <p:nvPr/>
+        </p:nvSpPr>
+        <p:spPr>
+          <a:xfrm>
+            <a:off x="502920" y="274320"/>
+            <a:ext cx="11155680" cy="548640"/>
+          </a:xfrm>
+          <a:prstGeom prst="rect">
+            <a:avLst/>
+          </a:prstGeom>
+          <a:noFill/>
+        </p:spPr>
+        <p:txBody>
+          <a:bodyPr wrap="none">
+            <a:spAutoFit/>
+          </a:bodyPr>
+          <a:lstStyle/>
+          <a:p>
+            <a:r>
+              <a:rPr sz="2200" b="1">
+                <a:solidFill>
+                  <a:srgbClr val="01AEFD"/>
+                </a:solidFill>
+              </a:rPr>
+              <a:t>Type this into index.html   -   line 7</a:t>
+            </a:r>
+          </a:p>
+        </p:txBody>
+      </p:sp>
+      <p:sp>
+        <p:nvSpPr>
+          <p:cNvPr id="3" name="TextBox 2"/>
+          <p:cNvSpPr txBox="1"/>
+          <p:nvPr/>
+        </p:nvSpPr>
+        <p:spPr>
+          <a:xfrm>
+            <a:off x="502920" y="960120"/>
+            <a:ext cx="11155680" cy="4297680"/>
+          </a:xfrm>
+          <a:prstGeom prst="rect">
+            <a:avLst/>
+          </a:prstGeom>
+          <a:noFill/>
+        </p:spPr>
+        <p:txBody>
+          <a:bodyPr wrap="none">
+            <a:spAutoFit/>
+          </a:bodyPr>
+          <a:lstStyle/>
+          <a:p>
+            <a:pPr>
+              <a:spcAft>
+                <a:spcPts val="0"/>
+              </a:spcAft>
+            </a:pPr>
+            <a:r>
+              <a:rPr sz="1800">
+                <a:solidFill>
+                  <a:srgbClr val="6D8C97"/>
+                </a:solidFill>
+                <a:latin typeface="Consolas"/>
+              </a:rPr>
+              <a:t>   3  </a:t>
+            </a:r>
+            <a:r>
+              <a:rPr sz="1800">
+                <a:solidFill>
+                  <a:srgbClr val="6D8C97"/>
+                </a:solidFill>
+                <a:latin typeface="Consolas"/>
+              </a:rPr>
+              <a:t>&lt;main class="app"&gt;</a:t>
+            </a:r>
+          </a:p>
+          <a:p>
+            <a:pPr>
+              <a:spcAft>
+                <a:spcPts val="0"/>
+              </a:spcAft>
+            </a:pPr>
+            <a:r>
+              <a:rPr sz="1800">
+                <a:solidFill>
+                  <a:srgbClr val="6D8C97"/>
+                </a:solidFill>
+                <a:latin typeface="Consolas"/>
+              </a:rPr>
+              <a:t>   4  </a:t>
+            </a:r>
+            <a:r>
+              <a:rPr sz="1800">
+                <a:solidFill>
+                  <a:srgbClr val="6D8C97"/>
+                </a:solidFill>
+                <a:latin typeface="Consolas"/>
+              </a:rPr>
+              <a:t>  &lt;header class="top"&gt;</a:t>
+            </a:r>
+          </a:p>
+          <a:p>
+            <a:pPr>
+              <a:spcAft>
+                <a:spcPts val="0"/>
+              </a:spcAft>
+            </a:pPr>
+            <a:r>
+              <a:rPr sz="1800">
+                <a:solidFill>
+                  <a:srgbClr val="6D8C97"/>
+                </a:solidFill>
+                <a:latin typeface="Consolas"/>
+              </a:rPr>
+              <a:t>   5  </a:t>
+            </a:r>
+            <a:r>
+              <a:rPr sz="1800">
+                <a:solidFill>
+                  <a:srgbClr val="6D8C97"/>
+                </a:solidFill>
+                <a:latin typeface="Consolas"/>
+              </a:rPr>
+              <a:t>    &lt;h1&gt;My AI Companion&lt;/h1&gt;</a:t>
+            </a:r>
+          </a:p>
+          <a:p>
+            <a:pPr>
+              <a:spcAft>
+                <a:spcPts val="0"/>
+              </a:spcAft>
+            </a:pPr>
+            <a:r>
+              <a:rPr sz="1800">
+                <a:solidFill>
+                  <a:srgbClr val="6D8C97"/>
+                </a:solidFill>
+                <a:latin typeface="Consolas"/>
+              </a:rPr>
+              <a:t>   6  </a:t>
+            </a:r>
+            <a:r>
+              <a:rPr sz="1800">
+                <a:solidFill>
+                  <a:srgbClr val="6D8C97"/>
+                </a:solidFill>
+                <a:latin typeface="Consolas"/>
+              </a:rPr>
+              <a:t>    &lt;p class="tag"&gt;Built by me, running on the school AI&lt;/p&gt;</a:t>
+            </a:r>
+          </a:p>
+          <a:p>
+            <a:pPr>
+              <a:spcAft>
+                <a:spcPts val="0"/>
+              </a:spcAft>
+            </a:pPr>
+            <a:r>
+              <a:rPr sz="1800">
+                <a:solidFill>
+                  <a:srgbClr val="6D8C97"/>
+                </a:solidFill>
+                <a:latin typeface="Consolas"/>
+              </a:rPr>
+              <a:t>   7  </a:t>
+            </a:r>
+            <a:r>
+              <a:rPr sz="1800">
+                <a:solidFill>
+                  <a:srgbClr val="7FE0A0"/>
+                </a:solidFill>
+                <a:latin typeface="Consolas"/>
+              </a:rPr>
+              <a:t>    &lt;p class="caution"&gt;It can be confidently wrong. Check anything that matters.&lt;/p&gt;</a:t>
+            </a:r>
+          </a:p>
+        </p:txBody>
+      </p:sp>
+      <p:sp>
+        <p:nvSpPr>
+          <p:cNvPr id="4" name="TextBox 3"/>
+          <p:cNvSpPr txBox="1"/>
+          <p:nvPr/>
+        </p:nvSpPr>
+        <p:spPr>
+          <a:xfrm>
+            <a:off x="548640" y="5623560"/>
+            <a:ext cx="11064240" cy="1051560"/>
+          </a:xfrm>
+          <a:prstGeom prst="rect">
+            <a:avLst/>
+          </a:prstGeom>
+          <a:noFill/>
+        </p:spPr>
+        <p:txBody>
+          <a:bodyPr wrap="square">
+            <a:spAutoFit/>
+          </a:bodyPr>
+          <a:lstStyle/>
+          <a:p>
+            <a:r>
+              <a:rPr sz="2000">
+                <a:solidFill>
+                  <a:srgbClr val="DCECEF"/>
+                </a:solidFill>
+              </a:rPr>
+              <a:t>A caution line under the title: the AI can be confidently wrong. class="caution" styles it.</a:t>
+            </a:r>
+          </a:p>
+        </p:txBody>
+      </p:sp>
+    </p:spTree>
+  </p:cSld>
+  <p:clrMapOvr>
+    <a:masterClrMapping/>
+  </p:clrMapOvr>
+</p:sld>
+</file>
+
+<file path=ppt/slides/slide25.xml><?xml version="1.0" encoding="utf-8"?>
+<p:sld xmlns:a="http://schemas.openxmlformats.org/drawingml/2006/main" xmlns:p="http://schemas.openxmlformats.org/presentationml/2006/main" xmlns:r="http://schemas.openxmlformats.org/officeDocument/2006/relationships">
+  <p:cSld>
+    <p:bg>
+      <p:bgPr>
+        <a:solidFill>
+          <a:srgbClr val="102127"/>
+        </a:solidFill>
+        <a:effectLst/>
+      </p:bgPr>
+    </p:bg>
+    <p:spTree>
+      <p:nvGrpSpPr>
+        <p:cNvPr id="1" name=""/>
+        <p:cNvGrpSpPr/>
+        <p:nvPr/>
+      </p:nvGrpSpPr>
+      <p:grpSpPr/>
+      <p:sp>
+        <p:nvSpPr>
+          <p:cNvPr id="2" name="TextBox 1"/>
+          <p:cNvSpPr txBox="1"/>
+          <p:nvPr/>
+        </p:nvSpPr>
+        <p:spPr>
+          <a:xfrm>
+            <a:off x="502920" y="274320"/>
+            <a:ext cx="11155680" cy="548640"/>
+          </a:xfrm>
+          <a:prstGeom prst="rect">
+            <a:avLst/>
+          </a:prstGeom>
+          <a:noFill/>
+        </p:spPr>
+        <p:txBody>
+          <a:bodyPr wrap="none">
+            <a:spAutoFit/>
+          </a:bodyPr>
+          <a:lstStyle/>
+          <a:p>
+            <a:r>
+              <a:rPr sz="2200" b="1">
+                <a:solidFill>
+                  <a:srgbClr val="01AEFD"/>
+                </a:solidFill>
+              </a:rPr>
+              <a:t>Type this into style.css   -   line 7</a:t>
+            </a:r>
+          </a:p>
+        </p:txBody>
+      </p:sp>
+      <p:sp>
+        <p:nvSpPr>
+          <p:cNvPr id="3" name="TextBox 2"/>
+          <p:cNvSpPr txBox="1"/>
+          <p:nvPr/>
+        </p:nvSpPr>
+        <p:spPr>
+          <a:xfrm>
+            <a:off x="502920" y="960120"/>
+            <a:ext cx="11155680" cy="4297680"/>
+          </a:xfrm>
+          <a:prstGeom prst="rect">
+            <a:avLst/>
+          </a:prstGeom>
+          <a:noFill/>
+        </p:spPr>
+        <p:txBody>
+          <a:bodyPr wrap="none">
+            <a:spAutoFit/>
+          </a:bodyPr>
+          <a:lstStyle/>
+          <a:p>
+            <a:pPr>
+              <a:spcAft>
+                <a:spcPts val="0"/>
+              </a:spcAft>
+            </a:pPr>
+            <a:r>
+              <a:rPr sz="1800">
+                <a:solidFill>
+                  <a:srgbClr val="6D8C97"/>
+                </a:solidFill>
+                <a:latin typeface="Consolas"/>
+              </a:rPr>
+              <a:t>   1  </a:t>
+            </a:r>
+            <a:r>
+              <a:rPr sz="1800">
+                <a:solidFill>
+                  <a:srgbClr val="6D8C97"/>
+                </a:solidFill>
+                <a:latin typeface="Consolas"/>
+              </a:rPr>
+              <a:t>body {</a:t>
+            </a:r>
+          </a:p>
+          <a:p>
+            <a:pPr>
+              <a:spcAft>
+                <a:spcPts val="0"/>
+              </a:spcAft>
+            </a:pPr>
+            <a:r>
+              <a:rPr sz="1800">
+                <a:solidFill>
+                  <a:srgbClr val="6D8C97"/>
+                </a:solidFill>
+                <a:latin typeface="Consolas"/>
+              </a:rPr>
+              <a:t>   2  </a:t>
+            </a:r>
+            <a:r>
+              <a:rPr sz="1800">
+                <a:solidFill>
+                  <a:srgbClr val="6D8C97"/>
+                </a:solidFill>
+                <a:latin typeface="Consolas"/>
+              </a:rPr>
+              <a:t>  margin: 0;</a:t>
+            </a:r>
+          </a:p>
+          <a:p>
+            <a:pPr>
+              <a:spcAft>
+                <a:spcPts val="0"/>
+              </a:spcAft>
+            </a:pPr>
+            <a:r>
+              <a:rPr sz="1800">
+                <a:solidFill>
+                  <a:srgbClr val="6D8C97"/>
+                </a:solidFill>
+                <a:latin typeface="Consolas"/>
+              </a:rPr>
+              <a:t>   3  </a:t>
+            </a:r>
+            <a:r>
+              <a:rPr sz="1800">
+                <a:solidFill>
+                  <a:srgbClr val="6D8C97"/>
+                </a:solidFill>
+                <a:latin typeface="Consolas"/>
+              </a:rPr>
+              <a:t>  font-family: Arial, Helvetica, sans-serif;</a:t>
+            </a:r>
+          </a:p>
+          <a:p>
+            <a:pPr>
+              <a:spcAft>
+                <a:spcPts val="0"/>
+              </a:spcAft>
+            </a:pPr>
+            <a:r>
+              <a:rPr sz="1800">
+                <a:solidFill>
+                  <a:srgbClr val="6D8C97"/>
+                </a:solidFill>
+                <a:latin typeface="Consolas"/>
+              </a:rPr>
+              <a:t>   4  </a:t>
+            </a:r>
+            <a:r>
+              <a:rPr sz="1800">
+                <a:solidFill>
+                  <a:srgbClr val="6D8C97"/>
+                </a:solidFill>
+                <a:latin typeface="Consolas"/>
+              </a:rPr>
+              <a:t>  background: #eef2f7;</a:t>
+            </a:r>
+          </a:p>
+          <a:p>
+            <a:pPr>
+              <a:spcAft>
+                <a:spcPts val="0"/>
+              </a:spcAft>
+            </a:pPr>
+            <a:r>
+              <a:rPr sz="1800">
+                <a:solidFill>
+                  <a:srgbClr val="6D8C97"/>
+                </a:solidFill>
+                <a:latin typeface="Consolas"/>
+              </a:rPr>
+              <a:t>   5  </a:t>
+            </a:r>
+            <a:r>
+              <a:rPr sz="1800">
+                <a:solidFill>
+                  <a:srgbClr val="6D8C97"/>
+                </a:solidFill>
+                <a:latin typeface="Consolas"/>
+              </a:rPr>
+              <a:t>  color: #1f2a37;</a:t>
+            </a:r>
+          </a:p>
+          <a:p>
+            <a:pPr>
+              <a:spcAft>
+                <a:spcPts val="0"/>
+              </a:spcAft>
+            </a:pPr>
+            <a:r>
+              <a:rPr sz="1800">
+                <a:solidFill>
+                  <a:srgbClr val="6D8C97"/>
+                </a:solidFill>
+                <a:latin typeface="Consolas"/>
+              </a:rPr>
+              <a:t>   6  </a:t>
+            </a:r>
+            <a:r>
+              <a:rPr sz="1800">
+                <a:solidFill>
+                  <a:srgbClr val="6D8C97"/>
+                </a:solidFill>
+                <a:latin typeface="Consolas"/>
+              </a:rPr>
+              <a:t>}</a:t>
+            </a:r>
+          </a:p>
+          <a:p>
+            <a:pPr>
+              <a:spcAft>
+                <a:spcPts val="0"/>
+              </a:spcAft>
+            </a:pPr>
+            <a:r>
+              <a:rPr sz="1800">
+                <a:solidFill>
+                  <a:srgbClr val="6D8C97"/>
+                </a:solidFill>
+                <a:latin typeface="Consolas"/>
+              </a:rPr>
+              <a:t>   7  </a:t>
+            </a:r>
+            <a:r>
+              <a:rPr sz="1800">
+                <a:solidFill>
+                  <a:srgbClr val="7FE0A0"/>
+                </a:solidFill>
+                <a:latin typeface="Consolas"/>
+              </a:rPr>
+              <a:t>.caution {</a:t>
+            </a:r>
+          </a:p>
+        </p:txBody>
+      </p:sp>
+      <p:sp>
+        <p:nvSpPr>
+          <p:cNvPr id="4" name="TextBox 3"/>
+          <p:cNvSpPr txBox="1"/>
+          <p:nvPr/>
+        </p:nvSpPr>
+        <p:spPr>
+          <a:xfrm>
+            <a:off x="548640" y="5623560"/>
+            <a:ext cx="11064240" cy="1051560"/>
+          </a:xfrm>
+          <a:prstGeom prst="rect">
+            <a:avLst/>
+          </a:prstGeom>
+          <a:noFill/>
+        </p:spPr>
+        <p:txBody>
+          <a:bodyPr wrap="square">
+            <a:spAutoFit/>
+          </a:bodyPr>
+          <a:lstStyle/>
+          <a:p>
+            <a:r>
+              <a:rPr sz="2000">
+                <a:solidFill>
+                  <a:srgbClr val="DCECEF"/>
+                </a:solidFill>
+              </a:rPr>
+              <a:t>Style the caution line.</a:t>
+            </a:r>
+          </a:p>
+        </p:txBody>
+      </p:sp>
+    </p:spTree>
+  </p:cSld>
+  <p:clrMapOvr>
+    <a:masterClrMapping/>
+  </p:clrMapOvr>
+</p:sld>
+</file>
+
+<file path=ppt/slides/slide26.xml><?xml version="1.0" encoding="utf-8"?>
+<p:sld xmlns:a="http://schemas.openxmlformats.org/drawingml/2006/main" xmlns:p="http://schemas.openxmlformats.org/presentationml/2006/main" xmlns:r="http://schemas.openxmlformats.org/officeDocument/2006/relationships">
+  <p:cSld>
+    <p:bg>
+      <p:bgPr>
+        <a:solidFill>
+          <a:srgbClr val="102127"/>
+        </a:solidFill>
+        <a:effectLst/>
+      </p:bgPr>
+    </p:bg>
+    <p:spTree>
+      <p:nvGrpSpPr>
+        <p:cNvPr id="1" name=""/>
+        <p:cNvGrpSpPr/>
+        <p:nvPr/>
+      </p:nvGrpSpPr>
+      <p:grpSpPr/>
+      <p:sp>
+        <p:nvSpPr>
+          <p:cNvPr id="2" name="TextBox 1"/>
+          <p:cNvSpPr txBox="1"/>
+          <p:nvPr/>
+        </p:nvSpPr>
+        <p:spPr>
+          <a:xfrm>
+            <a:off x="502920" y="274320"/>
+            <a:ext cx="11155680" cy="548640"/>
+          </a:xfrm>
+          <a:prstGeom prst="rect">
+            <a:avLst/>
+          </a:prstGeom>
+          <a:noFill/>
+        </p:spPr>
+        <p:txBody>
+          <a:bodyPr wrap="none">
+            <a:spAutoFit/>
+          </a:bodyPr>
+          <a:lstStyle/>
+          <a:p>
+            <a:r>
+              <a:rPr sz="2200" b="1">
+                <a:solidFill>
+                  <a:srgbClr val="01AEFD"/>
+                </a:solidFill>
+              </a:rPr>
+              <a:t>Type this into style.css   -   line 8</a:t>
+            </a:r>
+          </a:p>
+        </p:txBody>
+      </p:sp>
+      <p:sp>
+        <p:nvSpPr>
+          <p:cNvPr id="3" name="TextBox 2"/>
+          <p:cNvSpPr txBox="1"/>
+          <p:nvPr/>
+        </p:nvSpPr>
+        <p:spPr>
+          <a:xfrm>
+            <a:off x="502920" y="960120"/>
+            <a:ext cx="11155680" cy="4297680"/>
+          </a:xfrm>
+          <a:prstGeom prst="rect">
+            <a:avLst/>
+          </a:prstGeom>
+          <a:noFill/>
+        </p:spPr>
+        <p:txBody>
+          <a:bodyPr wrap="none">
+            <a:spAutoFit/>
+          </a:bodyPr>
+          <a:lstStyle/>
+          <a:p>
+            <a:pPr>
+              <a:spcAft>
+                <a:spcPts val="0"/>
+              </a:spcAft>
+            </a:pPr>
+            <a:r>
+              <a:rPr sz="1800">
+                <a:solidFill>
+                  <a:srgbClr val="6D8C97"/>
+                </a:solidFill>
+                <a:latin typeface="Consolas"/>
+              </a:rPr>
+              <a:t>   1  </a:t>
+            </a:r>
+            <a:r>
+              <a:rPr sz="1800">
+                <a:solidFill>
+                  <a:srgbClr val="6D8C97"/>
+                </a:solidFill>
+                <a:latin typeface="Consolas"/>
+              </a:rPr>
+              <a:t>body {</a:t>
+            </a:r>
+          </a:p>
+          <a:p>
+            <a:pPr>
+              <a:spcAft>
+                <a:spcPts val="0"/>
+              </a:spcAft>
+            </a:pPr>
+            <a:r>
+              <a:rPr sz="1800">
+                <a:solidFill>
+                  <a:srgbClr val="6D8C97"/>
+                </a:solidFill>
+                <a:latin typeface="Consolas"/>
+              </a:rPr>
+              <a:t>   2  </a:t>
+            </a:r>
+            <a:r>
+              <a:rPr sz="1800">
+                <a:solidFill>
+                  <a:srgbClr val="6D8C97"/>
+                </a:solidFill>
+                <a:latin typeface="Consolas"/>
+              </a:rPr>
+              <a:t>  margin: 0;</a:t>
+            </a:r>
+          </a:p>
+          <a:p>
+            <a:pPr>
+              <a:spcAft>
+                <a:spcPts val="0"/>
+              </a:spcAft>
+            </a:pPr>
+            <a:r>
+              <a:rPr sz="1800">
+                <a:solidFill>
+                  <a:srgbClr val="6D8C97"/>
+                </a:solidFill>
+                <a:latin typeface="Consolas"/>
+              </a:rPr>
+              <a:t>   3  </a:t>
+            </a:r>
+            <a:r>
+              <a:rPr sz="1800">
+                <a:solidFill>
+                  <a:srgbClr val="6D8C97"/>
+                </a:solidFill>
+                <a:latin typeface="Consolas"/>
+              </a:rPr>
+              <a:t>  font-family: Arial, Helvetica, sans-serif;</a:t>
+            </a:r>
+          </a:p>
+          <a:p>
+            <a:pPr>
+              <a:spcAft>
+                <a:spcPts val="0"/>
+              </a:spcAft>
+            </a:pPr>
+            <a:r>
+              <a:rPr sz="1800">
+                <a:solidFill>
+                  <a:srgbClr val="6D8C97"/>
+                </a:solidFill>
+                <a:latin typeface="Consolas"/>
+              </a:rPr>
+              <a:t>   4  </a:t>
+            </a:r>
+            <a:r>
+              <a:rPr sz="1800">
+                <a:solidFill>
+                  <a:srgbClr val="6D8C97"/>
+                </a:solidFill>
+                <a:latin typeface="Consolas"/>
+              </a:rPr>
+              <a:t>  background: #eef2f7;</a:t>
+            </a:r>
+          </a:p>
+          <a:p>
+            <a:pPr>
+              <a:spcAft>
+                <a:spcPts val="0"/>
+              </a:spcAft>
+            </a:pPr>
+            <a:r>
+              <a:rPr sz="1800">
+                <a:solidFill>
+                  <a:srgbClr val="6D8C97"/>
+                </a:solidFill>
+                <a:latin typeface="Consolas"/>
+              </a:rPr>
+              <a:t>   5  </a:t>
+            </a:r>
+            <a:r>
+              <a:rPr sz="1800">
+                <a:solidFill>
+                  <a:srgbClr val="6D8C97"/>
+                </a:solidFill>
+                <a:latin typeface="Consolas"/>
+              </a:rPr>
+              <a:t>  color: #1f2a37;</a:t>
+            </a:r>
+          </a:p>
+          <a:p>
+            <a:pPr>
+              <a:spcAft>
+                <a:spcPts val="0"/>
+              </a:spcAft>
+            </a:pPr>
+            <a:r>
+              <a:rPr sz="1800">
+                <a:solidFill>
+                  <a:srgbClr val="6D8C97"/>
+                </a:solidFill>
+                <a:latin typeface="Consolas"/>
+              </a:rPr>
+              <a:t>   6  </a:t>
+            </a:r>
+            <a:r>
+              <a:rPr sz="1800">
+                <a:solidFill>
+                  <a:srgbClr val="6D8C97"/>
+                </a:solidFill>
+                <a:latin typeface="Consolas"/>
+              </a:rPr>
+              <a:t>}</a:t>
+            </a:r>
+          </a:p>
+          <a:p>
+            <a:pPr>
+              <a:spcAft>
+                <a:spcPts val="0"/>
+              </a:spcAft>
+            </a:pPr>
+            <a:r>
+              <a:rPr sz="1800">
+                <a:solidFill>
+                  <a:srgbClr val="6D8C97"/>
+                </a:solidFill>
+                <a:latin typeface="Consolas"/>
+              </a:rPr>
+              <a:t>   7  </a:t>
+            </a:r>
+            <a:r>
+              <a:rPr sz="1800">
+                <a:solidFill>
+                  <a:srgbClr val="6D8C97"/>
+                </a:solidFill>
+                <a:latin typeface="Consolas"/>
+              </a:rPr>
+              <a:t>.caution {</a:t>
+            </a:r>
+          </a:p>
+          <a:p>
+            <a:pPr>
+              <a:spcAft>
+                <a:spcPts val="0"/>
+              </a:spcAft>
+            </a:pPr>
+            <a:r>
+              <a:rPr sz="1800">
+                <a:solidFill>
+                  <a:srgbClr val="6D8C97"/>
+                </a:solidFill>
+                <a:latin typeface="Consolas"/>
+              </a:rPr>
+              <a:t>   8  </a:t>
+            </a:r>
+            <a:r>
+              <a:rPr sz="1800">
+                <a:solidFill>
+                  <a:srgbClr val="7FE0A0"/>
+                </a:solidFill>
+                <a:latin typeface="Consolas"/>
+              </a:rPr>
+              <a:t>  margin: 0 0 18px;</a:t>
+            </a:r>
+          </a:p>
+        </p:txBody>
+      </p:sp>
+      <p:sp>
+        <p:nvSpPr>
+          <p:cNvPr id="4" name="TextBox 3"/>
+          <p:cNvSpPr txBox="1"/>
+          <p:nvPr/>
+        </p:nvSpPr>
+        <p:spPr>
+          <a:xfrm>
+            <a:off x="548640" y="5623560"/>
+            <a:ext cx="11064240" cy="1051560"/>
+          </a:xfrm>
+          <a:prstGeom prst="rect">
+            <a:avLst/>
+          </a:prstGeom>
+          <a:noFill/>
+        </p:spPr>
+        <p:txBody>
+          <a:bodyPr wrap="square">
+            <a:spAutoFit/>
+          </a:bodyPr>
+          <a:lstStyle/>
+          <a:p>
+            <a:r>
+              <a:rPr sz="2000">
+                <a:solidFill>
+                  <a:srgbClr val="DCECEF"/>
+                </a:solidFill>
+              </a:rPr>
+              <a:t>Space around it.</a:t>
+            </a:r>
+          </a:p>
+        </p:txBody>
+      </p:sp>
+    </p:spTree>
+  </p:cSld>
+  <p:clrMapOvr>
+    <a:masterClrMapping/>
+  </p:clrMapOvr>
+</p:sld>
+</file>
+
+<file path=ppt/slides/slide27.xml><?xml version="1.0" encoding="utf-8"?>
+<p:sld xmlns:a="http://schemas.openxmlformats.org/drawingml/2006/main" xmlns:p="http://schemas.openxmlformats.org/presentationml/2006/main" xmlns:r="http://schemas.openxmlformats.org/officeDocument/2006/relationships">
+  <p:cSld>
+    <p:bg>
+      <p:bgPr>
+        <a:solidFill>
+          <a:srgbClr val="102127"/>
+        </a:solidFill>
+        <a:effectLst/>
+      </p:bgPr>
+    </p:bg>
+    <p:spTree>
+      <p:nvGrpSpPr>
+        <p:cNvPr id="1" name=""/>
+        <p:cNvGrpSpPr/>
+        <p:nvPr/>
+      </p:nvGrpSpPr>
+      <p:grpSpPr/>
+      <p:sp>
+        <p:nvSpPr>
+          <p:cNvPr id="2" name="TextBox 1"/>
+          <p:cNvSpPr txBox="1"/>
+          <p:nvPr/>
+        </p:nvSpPr>
+        <p:spPr>
+          <a:xfrm>
+            <a:off x="502920" y="274320"/>
+            <a:ext cx="11155680" cy="548640"/>
+          </a:xfrm>
+          <a:prstGeom prst="rect">
+            <a:avLst/>
+          </a:prstGeom>
+          <a:noFill/>
+        </p:spPr>
+        <p:txBody>
+          <a:bodyPr wrap="none">
+            <a:spAutoFit/>
+          </a:bodyPr>
+          <a:lstStyle/>
+          <a:p>
+            <a:r>
+              <a:rPr sz="2200" b="1">
+                <a:solidFill>
+                  <a:srgbClr val="01AEFD"/>
+                </a:solidFill>
+              </a:rPr>
+              <a:t>Type this into style.css   -   line 9</a:t>
+            </a:r>
+          </a:p>
+        </p:txBody>
+      </p:sp>
+      <p:sp>
+        <p:nvSpPr>
+          <p:cNvPr id="3" name="TextBox 2"/>
+          <p:cNvSpPr txBox="1"/>
+          <p:nvPr/>
+        </p:nvSpPr>
+        <p:spPr>
+          <a:xfrm>
+            <a:off x="502920" y="960120"/>
+            <a:ext cx="11155680" cy="4297680"/>
+          </a:xfrm>
+          <a:prstGeom prst="rect">
+            <a:avLst/>
+          </a:prstGeom>
+          <a:noFill/>
+        </p:spPr>
+        <p:txBody>
+          <a:bodyPr wrap="none">
+            <a:spAutoFit/>
+          </a:bodyPr>
+          <a:lstStyle/>
+          <a:p>
+            <a:pPr>
+              <a:spcAft>
+                <a:spcPts val="0"/>
+              </a:spcAft>
+            </a:pPr>
+            <a:r>
+              <a:rPr sz="1800">
+                <a:solidFill>
+                  <a:srgbClr val="6D8C97"/>
+                </a:solidFill>
+                <a:latin typeface="Consolas"/>
+              </a:rPr>
+              <a:t>   1  </a:t>
+            </a:r>
+            <a:r>
+              <a:rPr sz="1800">
+                <a:solidFill>
+                  <a:srgbClr val="6D8C97"/>
+                </a:solidFill>
+                <a:latin typeface="Consolas"/>
+              </a:rPr>
+              <a:t>body {</a:t>
+            </a:r>
+          </a:p>
+          <a:p>
+            <a:pPr>
+              <a:spcAft>
+                <a:spcPts val="0"/>
+              </a:spcAft>
+            </a:pPr>
+            <a:r>
+              <a:rPr sz="1800">
+                <a:solidFill>
+                  <a:srgbClr val="6D8C97"/>
+                </a:solidFill>
+                <a:latin typeface="Consolas"/>
+              </a:rPr>
+              <a:t>   2  </a:t>
+            </a:r>
+            <a:r>
+              <a:rPr sz="1800">
+                <a:solidFill>
+                  <a:srgbClr val="6D8C97"/>
+                </a:solidFill>
+                <a:latin typeface="Consolas"/>
+              </a:rPr>
+              <a:t>  margin: 0;</a:t>
+            </a:r>
+          </a:p>
+          <a:p>
+            <a:pPr>
+              <a:spcAft>
+                <a:spcPts val="0"/>
+              </a:spcAft>
+            </a:pPr>
+            <a:r>
+              <a:rPr sz="1800">
+                <a:solidFill>
+                  <a:srgbClr val="6D8C97"/>
+                </a:solidFill>
+                <a:latin typeface="Consolas"/>
+              </a:rPr>
+              <a:t>   3  </a:t>
+            </a:r>
+            <a:r>
+              <a:rPr sz="1800">
+                <a:solidFill>
+                  <a:srgbClr val="6D8C97"/>
+                </a:solidFill>
+                <a:latin typeface="Consolas"/>
+              </a:rPr>
+              <a:t>  font-family: Arial, Helvetica, sans-serif;</a:t>
+            </a:r>
+          </a:p>
+          <a:p>
+            <a:pPr>
+              <a:spcAft>
+                <a:spcPts val="0"/>
+              </a:spcAft>
+            </a:pPr>
+            <a:r>
+              <a:rPr sz="1800">
+                <a:solidFill>
+                  <a:srgbClr val="6D8C97"/>
+                </a:solidFill>
+                <a:latin typeface="Consolas"/>
+              </a:rPr>
+              <a:t>   4  </a:t>
+            </a:r>
+            <a:r>
+              <a:rPr sz="1800">
+                <a:solidFill>
+                  <a:srgbClr val="6D8C97"/>
+                </a:solidFill>
+                <a:latin typeface="Consolas"/>
+              </a:rPr>
+              <a:t>  background: #eef2f7;</a:t>
+            </a:r>
+          </a:p>
+          <a:p>
+            <a:pPr>
+              <a:spcAft>
+                <a:spcPts val="0"/>
+              </a:spcAft>
+            </a:pPr>
+            <a:r>
+              <a:rPr sz="1800">
+                <a:solidFill>
+                  <a:srgbClr val="6D8C97"/>
+                </a:solidFill>
+                <a:latin typeface="Consolas"/>
+              </a:rPr>
+              <a:t>   5  </a:t>
+            </a:r>
+            <a:r>
+              <a:rPr sz="1800">
+                <a:solidFill>
+                  <a:srgbClr val="6D8C97"/>
+                </a:solidFill>
+                <a:latin typeface="Consolas"/>
+              </a:rPr>
+              <a:t>  color: #1f2a37;</a:t>
+            </a:r>
+          </a:p>
+          <a:p>
+            <a:pPr>
+              <a:spcAft>
+                <a:spcPts val="0"/>
+              </a:spcAft>
+            </a:pPr>
+            <a:r>
+              <a:rPr sz="1800">
+                <a:solidFill>
+                  <a:srgbClr val="6D8C97"/>
+                </a:solidFill>
+                <a:latin typeface="Consolas"/>
+              </a:rPr>
+              <a:t>   6  </a:t>
+            </a:r>
+            <a:r>
+              <a:rPr sz="1800">
+                <a:solidFill>
+                  <a:srgbClr val="6D8C97"/>
+                </a:solidFill>
+                <a:latin typeface="Consolas"/>
+              </a:rPr>
+              <a:t>}</a:t>
+            </a:r>
+          </a:p>
+          <a:p>
+            <a:pPr>
+              <a:spcAft>
+                <a:spcPts val="0"/>
+              </a:spcAft>
+            </a:pPr>
+            <a:r>
+              <a:rPr sz="1800">
+                <a:solidFill>
+                  <a:srgbClr val="6D8C97"/>
+                </a:solidFill>
+                <a:latin typeface="Consolas"/>
+              </a:rPr>
+              <a:t>   7  </a:t>
+            </a:r>
+            <a:r>
+              <a:rPr sz="1800">
+                <a:solidFill>
+                  <a:srgbClr val="6D8C97"/>
+                </a:solidFill>
+                <a:latin typeface="Consolas"/>
+              </a:rPr>
+              <a:t>.caution {</a:t>
+            </a:r>
+          </a:p>
+          <a:p>
+            <a:pPr>
+              <a:spcAft>
+                <a:spcPts val="0"/>
+              </a:spcAft>
+            </a:pPr>
+            <a:r>
+              <a:rPr sz="1800">
+                <a:solidFill>
+                  <a:srgbClr val="6D8C97"/>
+                </a:solidFill>
+                <a:latin typeface="Consolas"/>
+              </a:rPr>
+              <a:t>   8  </a:t>
+            </a:r>
+            <a:r>
+              <a:rPr sz="1800">
+                <a:solidFill>
+                  <a:srgbClr val="6D8C97"/>
+                </a:solidFill>
+                <a:latin typeface="Consolas"/>
+              </a:rPr>
+              <a:t>  margin: 0 0 18px;</a:t>
+            </a:r>
+          </a:p>
+          <a:p>
+            <a:pPr>
+              <a:spcAft>
+                <a:spcPts val="0"/>
+              </a:spcAft>
+            </a:pPr>
+            <a:r>
+              <a:rPr sz="1800">
+                <a:solidFill>
+                  <a:srgbClr val="6D8C97"/>
+                </a:solidFill>
+                <a:latin typeface="Consolas"/>
+              </a:rPr>
+              <a:t>   9  </a:t>
+            </a:r>
+            <a:r>
+              <a:rPr sz="1800">
+                <a:solidFill>
+                  <a:srgbClr val="7FE0A0"/>
+                </a:solidFill>
+                <a:latin typeface="Consolas"/>
+              </a:rPr>
+              <a:t>  padding: 8px 11px;</a:t>
+            </a:r>
+          </a:p>
+        </p:txBody>
+      </p:sp>
+      <p:sp>
+        <p:nvSpPr>
+          <p:cNvPr id="4" name="TextBox 3"/>
+          <p:cNvSpPr txBox="1"/>
+          <p:nvPr/>
+        </p:nvSpPr>
+        <p:spPr>
+          <a:xfrm>
+            <a:off x="548640" y="5623560"/>
+            <a:ext cx="11064240" cy="1051560"/>
+          </a:xfrm>
+          <a:prstGeom prst="rect">
+            <a:avLst/>
+          </a:prstGeom>
+          <a:noFill/>
+        </p:spPr>
+        <p:txBody>
+          <a:bodyPr wrap="square">
+            <a:spAutoFit/>
+          </a:bodyPr>
+          <a:lstStyle/>
+          <a:p>
+            <a:r>
+              <a:rPr sz="2000">
+                <a:solidFill>
+                  <a:srgbClr val="DCECEF"/>
+                </a:solidFill>
+              </a:rPr>
+              <a:t>Padding inside.</a:t>
+            </a:r>
+          </a:p>
+        </p:txBody>
+      </p:sp>
+    </p:spTree>
+  </p:cSld>
+  <p:clrMapOvr>
+    <a:masterClrMapping/>
+  </p:clrMapOvr>
+</p:sld>
+</file>
+
+<file path=ppt/slides/slide28.xml><?xml version="1.0" encoding="utf-8"?>
+<p:sld xmlns:a="http://schemas.openxmlformats.org/drawingml/2006/main" xmlns:p="http://schemas.openxmlformats.org/presentationml/2006/main" xmlns:r="http://schemas.openxmlformats.org/officeDocument/2006/relationships">
+  <p:cSld>
+    <p:spTree>
+      <p:nvGrpSpPr>
+        <p:cNvPr id="1" name=""/>
+        <p:cNvGrpSpPr/>
+        <p:nvPr/>
+      </p:nvGrpSpPr>
+      <p:grpSpPr/>
+      <p:sp>
+        <p:nvSpPr>
+          <p:cNvPr id="2" name="Title 1"/>
+          <p:cNvSpPr>
+            <a:spLocks noGrp="1"/>
+          </p:cNvSpPr>
+          <p:nvPr>
+            <p:ph type="title"/>
+          </p:nvPr>
+        </p:nvSpPr>
+        <p:spPr/>
+        <p:txBody>
+          <a:bodyPr/>
+          <a:lstStyle/>
+          <a:p>
+            <a:r>
+              <a:rPr sz="3800" b="1">
+                <a:solidFill>
+                  <a:srgbClr val="1F2A37"/>
+                </a:solidFill>
+              </a:rPr>
+              <a:t>border-left</a:t>
+            </a:r>
+          </a:p>
+        </p:txBody>
+      </p:sp>
+      <p:sp>
+        <p:nvSpPr>
+          <p:cNvPr id="3" name="TextBox 2"/>
+          <p:cNvSpPr txBox="1"/>
+          <p:nvPr/>
+        </p:nvSpPr>
+        <p:spPr>
+          <a:xfrm>
+            <a:off x="868680" y="502920"/>
+            <a:ext cx="5486400" cy="457200"/>
+          </a:xfrm>
+          <a:prstGeom prst="rect">
+            <a:avLst/>
+          </a:prstGeom>
+          <a:noFill/>
+        </p:spPr>
+        <p:txBody>
+          <a:bodyPr wrap="none">
+            <a:spAutoFit/>
+          </a:bodyPr>
+          <a:lstStyle/>
+          <a:p>
+            <a:r>
+              <a:rPr sz="1500" b="1">
+                <a:solidFill>
+                  <a:srgbClr val="01AEFD"/>
+                </a:solidFill>
+              </a:rPr>
+              <a:t>CSS</a:t>
+            </a:r>
+          </a:p>
+        </p:txBody>
+      </p:sp>
+      <p:sp>
+        <p:nvSpPr>
+          <p:cNvPr id="4" name="TextBox 3"/>
+          <p:cNvSpPr txBox="1"/>
+          <p:nvPr/>
+        </p:nvSpPr>
+        <p:spPr>
+          <a:xfrm>
+            <a:off x="822960" y="1828800"/>
+            <a:ext cx="10515600" cy="4206240"/>
+          </a:xfrm>
+          <a:prstGeom prst="rect">
+            <a:avLst/>
+          </a:prstGeom>
+          <a:noFill/>
+        </p:spPr>
+        <p:txBody>
+          <a:bodyPr wrap="square">
+            <a:spAutoFit/>
+          </a:bodyPr>
+          <a:lstStyle/>
+          <a:p>
+            <a:pPr>
+              <a:spcAft>
+                <a:spcPts val="1400"/>
+              </a:spcAft>
+            </a:pPr>
+            <a:r>
+              <a:rPr sz="2400">
+                <a:solidFill>
+                  <a:srgbClr val="1F2A37"/>
+                </a:solidFill>
+              </a:rPr>
+              <a:t>• A border on ONE edge - the left - used here as a coloured warning stripe.</a:t>
+            </a:r>
+          </a:p>
+        </p:txBody>
+      </p:sp>
+    </p:spTree>
+  </p:cSld>
+  <p:clrMapOvr>
+    <a:masterClrMapping/>
+  </p:clrMapOvr>
+</p:sld>
+</file>
+
+<file path=ppt/slides/slide29.xml><?xml version="1.0" encoding="utf-8"?>
+<p:sld xmlns:a="http://schemas.openxmlformats.org/drawingml/2006/main" xmlns:p="http://schemas.openxmlformats.org/presentationml/2006/main" xmlns:r="http://schemas.openxmlformats.org/officeDocument/2006/relationships">
+  <p:cSld>
+    <p:bg>
+      <p:bgPr>
+        <a:solidFill>
+          <a:srgbClr val="102127"/>
+        </a:solidFill>
+        <a:effectLst/>
+      </p:bgPr>
+    </p:bg>
+    <p:spTree>
+      <p:nvGrpSpPr>
+        <p:cNvPr id="1" name=""/>
+        <p:cNvGrpSpPr/>
+        <p:nvPr/>
+      </p:nvGrpSpPr>
+      <p:grpSpPr/>
+      <p:sp>
+        <p:nvSpPr>
+          <p:cNvPr id="2" name="TextBox 1"/>
+          <p:cNvSpPr txBox="1"/>
+          <p:nvPr/>
+        </p:nvSpPr>
+        <p:spPr>
+          <a:xfrm>
+            <a:off x="502920" y="274320"/>
+            <a:ext cx="11155680" cy="548640"/>
+          </a:xfrm>
+          <a:prstGeom prst="rect">
+            <a:avLst/>
+          </a:prstGeom>
+          <a:noFill/>
+        </p:spPr>
+        <p:txBody>
+          <a:bodyPr wrap="none">
+            <a:spAutoFit/>
+          </a:bodyPr>
+          <a:lstStyle/>
+          <a:p>
+            <a:r>
+              <a:rPr sz="2200" b="1">
+                <a:solidFill>
+                  <a:srgbClr val="01AEFD"/>
+                </a:solidFill>
+              </a:rPr>
+              <a:t>Type this into style.css   -   line 10</a:t>
+            </a:r>
+          </a:p>
+        </p:txBody>
+      </p:sp>
+      <p:sp>
+        <p:nvSpPr>
+          <p:cNvPr id="3" name="TextBox 2"/>
+          <p:cNvSpPr txBox="1"/>
+          <p:nvPr/>
+        </p:nvSpPr>
+        <p:spPr>
+          <a:xfrm>
+            <a:off x="502920" y="960120"/>
+            <a:ext cx="11155680" cy="4297680"/>
+          </a:xfrm>
+          <a:prstGeom prst="rect">
+            <a:avLst/>
+          </a:prstGeom>
+          <a:noFill/>
+        </p:spPr>
+        <p:txBody>
+          <a:bodyPr wrap="none">
+            <a:spAutoFit/>
+          </a:bodyPr>
+          <a:lstStyle/>
+          <a:p>
+            <a:pPr>
+              <a:spcAft>
+                <a:spcPts val="0"/>
+              </a:spcAft>
+            </a:pPr>
+            <a:r>
+              <a:rPr sz="1800">
+                <a:solidFill>
+                  <a:srgbClr val="6D8C97"/>
+                </a:solidFill>
+                <a:latin typeface="Consolas"/>
+              </a:rPr>
+              <a:t>   1  </a:t>
+            </a:r>
+            <a:r>
+              <a:rPr sz="1800">
+                <a:solidFill>
+                  <a:srgbClr val="6D8C97"/>
+                </a:solidFill>
+                <a:latin typeface="Consolas"/>
+              </a:rPr>
+              <a:t>body {</a:t>
+            </a:r>
+          </a:p>
+          <a:p>
+            <a:pPr>
+              <a:spcAft>
+                <a:spcPts val="0"/>
+              </a:spcAft>
+            </a:pPr>
+            <a:r>
+              <a:rPr sz="1800">
+                <a:solidFill>
+                  <a:srgbClr val="6D8C97"/>
+                </a:solidFill>
+                <a:latin typeface="Consolas"/>
+              </a:rPr>
+              <a:t>   2  </a:t>
+            </a:r>
+            <a:r>
+              <a:rPr sz="1800">
+                <a:solidFill>
+                  <a:srgbClr val="6D8C97"/>
+                </a:solidFill>
+                <a:latin typeface="Consolas"/>
+              </a:rPr>
+              <a:t>  margin: 0;</a:t>
+            </a:r>
+          </a:p>
+          <a:p>
+            <a:pPr>
+              <a:spcAft>
+                <a:spcPts val="0"/>
+              </a:spcAft>
+            </a:pPr>
+            <a:r>
+              <a:rPr sz="1800">
+                <a:solidFill>
+                  <a:srgbClr val="6D8C97"/>
+                </a:solidFill>
+                <a:latin typeface="Consolas"/>
+              </a:rPr>
+              <a:t>   3  </a:t>
+            </a:r>
+            <a:r>
+              <a:rPr sz="1800">
+                <a:solidFill>
+                  <a:srgbClr val="6D8C97"/>
+                </a:solidFill>
+                <a:latin typeface="Consolas"/>
+              </a:rPr>
+              <a:t>  font-family: Arial, Helvetica, sans-serif;</a:t>
+            </a:r>
+          </a:p>
+          <a:p>
+            <a:pPr>
+              <a:spcAft>
+                <a:spcPts val="0"/>
+              </a:spcAft>
+            </a:pPr>
+            <a:r>
+              <a:rPr sz="1800">
+                <a:solidFill>
+                  <a:srgbClr val="6D8C97"/>
+                </a:solidFill>
+                <a:latin typeface="Consolas"/>
+              </a:rPr>
+              <a:t>   4  </a:t>
+            </a:r>
+            <a:r>
+              <a:rPr sz="1800">
+                <a:solidFill>
+                  <a:srgbClr val="6D8C97"/>
+                </a:solidFill>
+                <a:latin typeface="Consolas"/>
+              </a:rPr>
+              <a:t>  background: #eef2f7;</a:t>
+            </a:r>
+          </a:p>
+          <a:p>
+            <a:pPr>
+              <a:spcAft>
+                <a:spcPts val="0"/>
+              </a:spcAft>
+            </a:pPr>
+            <a:r>
+              <a:rPr sz="1800">
+                <a:solidFill>
+                  <a:srgbClr val="6D8C97"/>
+                </a:solidFill>
+                <a:latin typeface="Consolas"/>
+              </a:rPr>
+              <a:t>   5  </a:t>
+            </a:r>
+            <a:r>
+              <a:rPr sz="1800">
+                <a:solidFill>
+                  <a:srgbClr val="6D8C97"/>
+                </a:solidFill>
+                <a:latin typeface="Consolas"/>
+              </a:rPr>
+              <a:t>  color: #1f2a37;</a:t>
+            </a:r>
+          </a:p>
+          <a:p>
+            <a:pPr>
+              <a:spcAft>
+                <a:spcPts val="0"/>
+              </a:spcAft>
+            </a:pPr>
+            <a:r>
+              <a:rPr sz="1800">
+                <a:solidFill>
+                  <a:srgbClr val="6D8C97"/>
+                </a:solidFill>
+                <a:latin typeface="Consolas"/>
+              </a:rPr>
+              <a:t>   6  </a:t>
+            </a:r>
+            <a:r>
+              <a:rPr sz="1800">
+                <a:solidFill>
+                  <a:srgbClr val="6D8C97"/>
+                </a:solidFill>
+                <a:latin typeface="Consolas"/>
+              </a:rPr>
+              <a:t>}</a:t>
+            </a:r>
+          </a:p>
+          <a:p>
+            <a:pPr>
+              <a:spcAft>
+                <a:spcPts val="0"/>
+              </a:spcAft>
+            </a:pPr>
+            <a:r>
+              <a:rPr sz="1800">
+                <a:solidFill>
+                  <a:srgbClr val="6D8C97"/>
+                </a:solidFill>
+                <a:latin typeface="Consolas"/>
+              </a:rPr>
+              <a:t>   7  </a:t>
+            </a:r>
+            <a:r>
+              <a:rPr sz="1800">
+                <a:solidFill>
+                  <a:srgbClr val="6D8C97"/>
+                </a:solidFill>
+                <a:latin typeface="Consolas"/>
+              </a:rPr>
+              <a:t>.caution {</a:t>
+            </a:r>
+          </a:p>
+          <a:p>
+            <a:pPr>
+              <a:spcAft>
+                <a:spcPts val="0"/>
+              </a:spcAft>
+            </a:pPr>
+            <a:r>
+              <a:rPr sz="1800">
+                <a:solidFill>
+                  <a:srgbClr val="6D8C97"/>
+                </a:solidFill>
+                <a:latin typeface="Consolas"/>
+              </a:rPr>
+              <a:t>   8  </a:t>
+            </a:r>
+            <a:r>
+              <a:rPr sz="1800">
+                <a:solidFill>
+                  <a:srgbClr val="6D8C97"/>
+                </a:solidFill>
+                <a:latin typeface="Consolas"/>
+              </a:rPr>
+              <a:t>  margin: 0 0 18px;</a:t>
+            </a:r>
+          </a:p>
+          <a:p>
+            <a:pPr>
+              <a:spcAft>
+                <a:spcPts val="0"/>
+              </a:spcAft>
+            </a:pPr>
+            <a:r>
+              <a:rPr sz="1800">
+                <a:solidFill>
+                  <a:srgbClr val="6D8C97"/>
+                </a:solidFill>
+                <a:latin typeface="Consolas"/>
+              </a:rPr>
+              <a:t>   9  </a:t>
+            </a:r>
+            <a:r>
+              <a:rPr sz="1800">
+                <a:solidFill>
+                  <a:srgbClr val="6D8C97"/>
+                </a:solidFill>
+                <a:latin typeface="Consolas"/>
+              </a:rPr>
+              <a:t>  padding: 8px 11px;</a:t>
+            </a:r>
+          </a:p>
+          <a:p>
+            <a:pPr>
+              <a:spcAft>
+                <a:spcPts val="0"/>
+              </a:spcAft>
+            </a:pPr>
+            <a:r>
+              <a:rPr sz="1800">
+                <a:solidFill>
+                  <a:srgbClr val="6D8C97"/>
+                </a:solidFill>
+                <a:latin typeface="Consolas"/>
+              </a:rPr>
+              <a:t>  10  </a:t>
+            </a:r>
+            <a:r>
+              <a:rPr sz="1800">
+                <a:solidFill>
+                  <a:srgbClr val="7FE0A0"/>
+                </a:solidFill>
+                <a:latin typeface="Consolas"/>
+              </a:rPr>
+              <a:t>  border-left: 3px solid #e9952a;</a:t>
+            </a:r>
+          </a:p>
+        </p:txBody>
+      </p:sp>
+      <p:sp>
+        <p:nvSpPr>
+          <p:cNvPr id="4" name="TextBox 3"/>
+          <p:cNvSpPr txBox="1"/>
+          <p:nvPr/>
+        </p:nvSpPr>
+        <p:spPr>
+          <a:xfrm>
+            <a:off x="548640" y="5623560"/>
+            <a:ext cx="11064240" cy="1051560"/>
+          </a:xfrm>
+          <a:prstGeom prst="rect">
+            <a:avLst/>
+          </a:prstGeom>
+          <a:noFill/>
+        </p:spPr>
+        <p:txBody>
+          <a:bodyPr wrap="square">
+            <a:spAutoFit/>
+          </a:bodyPr>
+          <a:lstStyle/>
+          <a:p>
+            <a:r>
+              <a:rPr sz="2000">
+                <a:solidFill>
+                  <a:srgbClr val="DCECEF"/>
+                </a:solidFill>
+              </a:rPr>
+              <a:t>A coloured stripe down the LEFT edge - the warning accent.</a:t>
+            </a:r>
+          </a:p>
+        </p:txBody>
+      </p:sp>
+    </p:spTree>
+  </p:cSld>
+  <p:clrMapOvr>
+    <a:masterClrMapping/>
+  </p:clrMapOvr>
+</p:sld>
+</file>
+
 <file path=ppt/slides/slide3.xml><?xml version="1.0" encoding="utf-8"?>
 <p:sld xmlns:a="http://schemas.openxmlformats.org/drawingml/2006/main" xmlns:p="http://schemas.openxmlformats.org/presentationml/2006/main" xmlns:r="http://schemas.openxmlformats.org/officeDocument/2006/relationships">
   <p:cSld>
@@ -4359,6 +9159,1716 @@
                 </a:solidFill>
               </a:rPr>
               <a:t>• Best three go on the board</a:t>
+            </a:r>
+          </a:p>
+        </p:txBody>
+      </p:sp>
+    </p:spTree>
+  </p:cSld>
+  <p:clrMapOvr>
+    <a:masterClrMapping/>
+  </p:clrMapOvr>
+</p:sld>
+</file>
+
+<file path=ppt/slides/slide30.xml><?xml version="1.0" encoding="utf-8"?>
+<p:sld xmlns:a="http://schemas.openxmlformats.org/drawingml/2006/main" xmlns:p="http://schemas.openxmlformats.org/presentationml/2006/main" xmlns:r="http://schemas.openxmlformats.org/officeDocument/2006/relationships">
+  <p:cSld>
+    <p:bg>
+      <p:bgPr>
+        <a:solidFill>
+          <a:srgbClr val="102127"/>
+        </a:solidFill>
+        <a:effectLst/>
+      </p:bgPr>
+    </p:bg>
+    <p:spTree>
+      <p:nvGrpSpPr>
+        <p:cNvPr id="1" name=""/>
+        <p:cNvGrpSpPr/>
+        <p:nvPr/>
+      </p:nvGrpSpPr>
+      <p:grpSpPr/>
+      <p:sp>
+        <p:nvSpPr>
+          <p:cNvPr id="2" name="TextBox 1"/>
+          <p:cNvSpPr txBox="1"/>
+          <p:nvPr/>
+        </p:nvSpPr>
+        <p:spPr>
+          <a:xfrm>
+            <a:off x="502920" y="274320"/>
+            <a:ext cx="11155680" cy="548640"/>
+          </a:xfrm>
+          <a:prstGeom prst="rect">
+            <a:avLst/>
+          </a:prstGeom>
+          <a:noFill/>
+        </p:spPr>
+        <p:txBody>
+          <a:bodyPr wrap="none">
+            <a:spAutoFit/>
+          </a:bodyPr>
+          <a:lstStyle/>
+          <a:p>
+            <a:r>
+              <a:rPr sz="2200" b="1">
+                <a:solidFill>
+                  <a:srgbClr val="01AEFD"/>
+                </a:solidFill>
+              </a:rPr>
+              <a:t>Type this into style.css   -   line 11</a:t>
+            </a:r>
+          </a:p>
+        </p:txBody>
+      </p:sp>
+      <p:sp>
+        <p:nvSpPr>
+          <p:cNvPr id="3" name="TextBox 2"/>
+          <p:cNvSpPr txBox="1"/>
+          <p:nvPr/>
+        </p:nvSpPr>
+        <p:spPr>
+          <a:xfrm>
+            <a:off x="502920" y="960120"/>
+            <a:ext cx="11155680" cy="4297680"/>
+          </a:xfrm>
+          <a:prstGeom prst="rect">
+            <a:avLst/>
+          </a:prstGeom>
+          <a:noFill/>
+        </p:spPr>
+        <p:txBody>
+          <a:bodyPr wrap="none">
+            <a:spAutoFit/>
+          </a:bodyPr>
+          <a:lstStyle/>
+          <a:p>
+            <a:pPr>
+              <a:spcAft>
+                <a:spcPts val="0"/>
+              </a:spcAft>
+            </a:pPr>
+            <a:r>
+              <a:rPr sz="1300">
+                <a:solidFill>
+                  <a:srgbClr val="6D8C97"/>
+                </a:solidFill>
+                <a:latin typeface="Consolas"/>
+              </a:rPr>
+              <a:t>   1  </a:t>
+            </a:r>
+            <a:r>
+              <a:rPr sz="1300">
+                <a:solidFill>
+                  <a:srgbClr val="6D8C97"/>
+                </a:solidFill>
+                <a:latin typeface="Consolas"/>
+              </a:rPr>
+              <a:t>body {</a:t>
+            </a:r>
+          </a:p>
+          <a:p>
+            <a:pPr>
+              <a:spcAft>
+                <a:spcPts val="0"/>
+              </a:spcAft>
+            </a:pPr>
+            <a:r>
+              <a:rPr sz="1300">
+                <a:solidFill>
+                  <a:srgbClr val="6D8C97"/>
+                </a:solidFill>
+                <a:latin typeface="Consolas"/>
+              </a:rPr>
+              <a:t>   2  </a:t>
+            </a:r>
+            <a:r>
+              <a:rPr sz="1300">
+                <a:solidFill>
+                  <a:srgbClr val="6D8C97"/>
+                </a:solidFill>
+                <a:latin typeface="Consolas"/>
+              </a:rPr>
+              <a:t>  margin: 0;</a:t>
+            </a:r>
+          </a:p>
+          <a:p>
+            <a:pPr>
+              <a:spcAft>
+                <a:spcPts val="0"/>
+              </a:spcAft>
+            </a:pPr>
+            <a:r>
+              <a:rPr sz="1300">
+                <a:solidFill>
+                  <a:srgbClr val="6D8C97"/>
+                </a:solidFill>
+                <a:latin typeface="Consolas"/>
+              </a:rPr>
+              <a:t>   3  </a:t>
+            </a:r>
+            <a:r>
+              <a:rPr sz="1300">
+                <a:solidFill>
+                  <a:srgbClr val="6D8C97"/>
+                </a:solidFill>
+                <a:latin typeface="Consolas"/>
+              </a:rPr>
+              <a:t>  font-family: Arial, Helvetica, sans-serif;</a:t>
+            </a:r>
+          </a:p>
+          <a:p>
+            <a:pPr>
+              <a:spcAft>
+                <a:spcPts val="0"/>
+              </a:spcAft>
+            </a:pPr>
+            <a:r>
+              <a:rPr sz="1300">
+                <a:solidFill>
+                  <a:srgbClr val="6D8C97"/>
+                </a:solidFill>
+                <a:latin typeface="Consolas"/>
+              </a:rPr>
+              <a:t>   4  </a:t>
+            </a:r>
+            <a:r>
+              <a:rPr sz="1300">
+                <a:solidFill>
+                  <a:srgbClr val="6D8C97"/>
+                </a:solidFill>
+                <a:latin typeface="Consolas"/>
+              </a:rPr>
+              <a:t>  background: #eef2f7;</a:t>
+            </a:r>
+          </a:p>
+          <a:p>
+            <a:pPr>
+              <a:spcAft>
+                <a:spcPts val="0"/>
+              </a:spcAft>
+            </a:pPr>
+            <a:r>
+              <a:rPr sz="1300">
+                <a:solidFill>
+                  <a:srgbClr val="6D8C97"/>
+                </a:solidFill>
+                <a:latin typeface="Consolas"/>
+              </a:rPr>
+              <a:t>   5  </a:t>
+            </a:r>
+            <a:r>
+              <a:rPr sz="1300">
+                <a:solidFill>
+                  <a:srgbClr val="6D8C97"/>
+                </a:solidFill>
+                <a:latin typeface="Consolas"/>
+              </a:rPr>
+              <a:t>  color: #1f2a37;</a:t>
+            </a:r>
+          </a:p>
+          <a:p>
+            <a:pPr>
+              <a:spcAft>
+                <a:spcPts val="0"/>
+              </a:spcAft>
+            </a:pPr>
+            <a:r>
+              <a:rPr sz="1300">
+                <a:solidFill>
+                  <a:srgbClr val="6D8C97"/>
+                </a:solidFill>
+                <a:latin typeface="Consolas"/>
+              </a:rPr>
+              <a:t>   6  </a:t>
+            </a:r>
+            <a:r>
+              <a:rPr sz="1300">
+                <a:solidFill>
+                  <a:srgbClr val="6D8C97"/>
+                </a:solidFill>
+                <a:latin typeface="Consolas"/>
+              </a:rPr>
+              <a:t>}</a:t>
+            </a:r>
+          </a:p>
+          <a:p>
+            <a:pPr>
+              <a:spcAft>
+                <a:spcPts val="0"/>
+              </a:spcAft>
+            </a:pPr>
+            <a:r>
+              <a:rPr sz="1300">
+                <a:solidFill>
+                  <a:srgbClr val="6D8C97"/>
+                </a:solidFill>
+                <a:latin typeface="Consolas"/>
+              </a:rPr>
+              <a:t>   7  </a:t>
+            </a:r>
+            <a:r>
+              <a:rPr sz="1300">
+                <a:solidFill>
+                  <a:srgbClr val="6D8C97"/>
+                </a:solidFill>
+                <a:latin typeface="Consolas"/>
+              </a:rPr>
+              <a:t>.caution {</a:t>
+            </a:r>
+          </a:p>
+          <a:p>
+            <a:pPr>
+              <a:spcAft>
+                <a:spcPts val="0"/>
+              </a:spcAft>
+            </a:pPr>
+            <a:r>
+              <a:rPr sz="1300">
+                <a:solidFill>
+                  <a:srgbClr val="6D8C97"/>
+                </a:solidFill>
+                <a:latin typeface="Consolas"/>
+              </a:rPr>
+              <a:t>   8  </a:t>
+            </a:r>
+            <a:r>
+              <a:rPr sz="1300">
+                <a:solidFill>
+                  <a:srgbClr val="6D8C97"/>
+                </a:solidFill>
+                <a:latin typeface="Consolas"/>
+              </a:rPr>
+              <a:t>  margin: 0 0 18px;</a:t>
+            </a:r>
+          </a:p>
+          <a:p>
+            <a:pPr>
+              <a:spcAft>
+                <a:spcPts val="0"/>
+              </a:spcAft>
+            </a:pPr>
+            <a:r>
+              <a:rPr sz="1300">
+                <a:solidFill>
+                  <a:srgbClr val="6D8C97"/>
+                </a:solidFill>
+                <a:latin typeface="Consolas"/>
+              </a:rPr>
+              <a:t>   9  </a:t>
+            </a:r>
+            <a:r>
+              <a:rPr sz="1300">
+                <a:solidFill>
+                  <a:srgbClr val="6D8C97"/>
+                </a:solidFill>
+                <a:latin typeface="Consolas"/>
+              </a:rPr>
+              <a:t>  padding: 8px 11px;</a:t>
+            </a:r>
+          </a:p>
+          <a:p>
+            <a:pPr>
+              <a:spcAft>
+                <a:spcPts val="0"/>
+              </a:spcAft>
+            </a:pPr>
+            <a:r>
+              <a:rPr sz="1300">
+                <a:solidFill>
+                  <a:srgbClr val="6D8C97"/>
+                </a:solidFill>
+                <a:latin typeface="Consolas"/>
+              </a:rPr>
+              <a:t>  10  </a:t>
+            </a:r>
+            <a:r>
+              <a:rPr sz="1300">
+                <a:solidFill>
+                  <a:srgbClr val="6D8C97"/>
+                </a:solidFill>
+                <a:latin typeface="Consolas"/>
+              </a:rPr>
+              <a:t>  border-left: 3px solid #e9952a;</a:t>
+            </a:r>
+          </a:p>
+          <a:p>
+            <a:pPr>
+              <a:spcAft>
+                <a:spcPts val="0"/>
+              </a:spcAft>
+            </a:pPr>
+            <a:r>
+              <a:rPr sz="1300">
+                <a:solidFill>
+                  <a:srgbClr val="6D8C97"/>
+                </a:solidFill>
+                <a:latin typeface="Consolas"/>
+              </a:rPr>
+              <a:t>  11  </a:t>
+            </a:r>
+            <a:r>
+              <a:rPr sz="1300">
+                <a:solidFill>
+                  <a:srgbClr val="7FE0A0"/>
+                </a:solidFill>
+                <a:latin typeface="Consolas"/>
+              </a:rPr>
+              <a:t>  background: #fff8e9;</a:t>
+            </a:r>
+          </a:p>
+        </p:txBody>
+      </p:sp>
+      <p:sp>
+        <p:nvSpPr>
+          <p:cNvPr id="4" name="TextBox 3"/>
+          <p:cNvSpPr txBox="1"/>
+          <p:nvPr/>
+        </p:nvSpPr>
+        <p:spPr>
+          <a:xfrm>
+            <a:off x="548640" y="5623560"/>
+            <a:ext cx="11064240" cy="1051560"/>
+          </a:xfrm>
+          <a:prstGeom prst="rect">
+            <a:avLst/>
+          </a:prstGeom>
+          <a:noFill/>
+        </p:spPr>
+        <p:txBody>
+          <a:bodyPr wrap="square">
+            <a:spAutoFit/>
+          </a:bodyPr>
+          <a:lstStyle/>
+          <a:p>
+            <a:r>
+              <a:rPr sz="2000">
+                <a:solidFill>
+                  <a:srgbClr val="DCECEF"/>
+                </a:solidFill>
+              </a:rPr>
+              <a:t>A soft warning-yellow background.</a:t>
+            </a:r>
+          </a:p>
+        </p:txBody>
+      </p:sp>
+    </p:spTree>
+  </p:cSld>
+  <p:clrMapOvr>
+    <a:masterClrMapping/>
+  </p:clrMapOvr>
+</p:sld>
+</file>
+
+<file path=ppt/slides/slide31.xml><?xml version="1.0" encoding="utf-8"?>
+<p:sld xmlns:a="http://schemas.openxmlformats.org/drawingml/2006/main" xmlns:p="http://schemas.openxmlformats.org/presentationml/2006/main" xmlns:r="http://schemas.openxmlformats.org/officeDocument/2006/relationships">
+  <p:cSld>
+    <p:bg>
+      <p:bgPr>
+        <a:solidFill>
+          <a:srgbClr val="102127"/>
+        </a:solidFill>
+        <a:effectLst/>
+      </p:bgPr>
+    </p:bg>
+    <p:spTree>
+      <p:nvGrpSpPr>
+        <p:cNvPr id="1" name=""/>
+        <p:cNvGrpSpPr/>
+        <p:nvPr/>
+      </p:nvGrpSpPr>
+      <p:grpSpPr/>
+      <p:sp>
+        <p:nvSpPr>
+          <p:cNvPr id="2" name="TextBox 1"/>
+          <p:cNvSpPr txBox="1"/>
+          <p:nvPr/>
+        </p:nvSpPr>
+        <p:spPr>
+          <a:xfrm>
+            <a:off x="502920" y="274320"/>
+            <a:ext cx="11155680" cy="548640"/>
+          </a:xfrm>
+          <a:prstGeom prst="rect">
+            <a:avLst/>
+          </a:prstGeom>
+          <a:noFill/>
+        </p:spPr>
+        <p:txBody>
+          <a:bodyPr wrap="none">
+            <a:spAutoFit/>
+          </a:bodyPr>
+          <a:lstStyle/>
+          <a:p>
+            <a:r>
+              <a:rPr sz="2200" b="1">
+                <a:solidFill>
+                  <a:srgbClr val="01AEFD"/>
+                </a:solidFill>
+              </a:rPr>
+              <a:t>Type this into style.css   -   line 12</a:t>
+            </a:r>
+          </a:p>
+        </p:txBody>
+      </p:sp>
+      <p:sp>
+        <p:nvSpPr>
+          <p:cNvPr id="3" name="TextBox 2"/>
+          <p:cNvSpPr txBox="1"/>
+          <p:nvPr/>
+        </p:nvSpPr>
+        <p:spPr>
+          <a:xfrm>
+            <a:off x="502920" y="960120"/>
+            <a:ext cx="11155680" cy="4297680"/>
+          </a:xfrm>
+          <a:prstGeom prst="rect">
+            <a:avLst/>
+          </a:prstGeom>
+          <a:noFill/>
+        </p:spPr>
+        <p:txBody>
+          <a:bodyPr wrap="none">
+            <a:spAutoFit/>
+          </a:bodyPr>
+          <a:lstStyle/>
+          <a:p>
+            <a:pPr>
+              <a:spcAft>
+                <a:spcPts val="0"/>
+              </a:spcAft>
+            </a:pPr>
+            <a:r>
+              <a:rPr sz="1300">
+                <a:solidFill>
+                  <a:srgbClr val="6D8C97"/>
+                </a:solidFill>
+                <a:latin typeface="Consolas"/>
+              </a:rPr>
+              <a:t>   1  </a:t>
+            </a:r>
+            <a:r>
+              <a:rPr sz="1300">
+                <a:solidFill>
+                  <a:srgbClr val="6D8C97"/>
+                </a:solidFill>
+                <a:latin typeface="Consolas"/>
+              </a:rPr>
+              <a:t>body {</a:t>
+            </a:r>
+          </a:p>
+          <a:p>
+            <a:pPr>
+              <a:spcAft>
+                <a:spcPts val="0"/>
+              </a:spcAft>
+            </a:pPr>
+            <a:r>
+              <a:rPr sz="1300">
+                <a:solidFill>
+                  <a:srgbClr val="6D8C97"/>
+                </a:solidFill>
+                <a:latin typeface="Consolas"/>
+              </a:rPr>
+              <a:t>   2  </a:t>
+            </a:r>
+            <a:r>
+              <a:rPr sz="1300">
+                <a:solidFill>
+                  <a:srgbClr val="6D8C97"/>
+                </a:solidFill>
+                <a:latin typeface="Consolas"/>
+              </a:rPr>
+              <a:t>  margin: 0;</a:t>
+            </a:r>
+          </a:p>
+          <a:p>
+            <a:pPr>
+              <a:spcAft>
+                <a:spcPts val="0"/>
+              </a:spcAft>
+            </a:pPr>
+            <a:r>
+              <a:rPr sz="1300">
+                <a:solidFill>
+                  <a:srgbClr val="6D8C97"/>
+                </a:solidFill>
+                <a:latin typeface="Consolas"/>
+              </a:rPr>
+              <a:t>   3  </a:t>
+            </a:r>
+            <a:r>
+              <a:rPr sz="1300">
+                <a:solidFill>
+                  <a:srgbClr val="6D8C97"/>
+                </a:solidFill>
+                <a:latin typeface="Consolas"/>
+              </a:rPr>
+              <a:t>  font-family: Arial, Helvetica, sans-serif;</a:t>
+            </a:r>
+          </a:p>
+          <a:p>
+            <a:pPr>
+              <a:spcAft>
+                <a:spcPts val="0"/>
+              </a:spcAft>
+            </a:pPr>
+            <a:r>
+              <a:rPr sz="1300">
+                <a:solidFill>
+                  <a:srgbClr val="6D8C97"/>
+                </a:solidFill>
+                <a:latin typeface="Consolas"/>
+              </a:rPr>
+              <a:t>   4  </a:t>
+            </a:r>
+            <a:r>
+              <a:rPr sz="1300">
+                <a:solidFill>
+                  <a:srgbClr val="6D8C97"/>
+                </a:solidFill>
+                <a:latin typeface="Consolas"/>
+              </a:rPr>
+              <a:t>  background: #eef2f7;</a:t>
+            </a:r>
+          </a:p>
+          <a:p>
+            <a:pPr>
+              <a:spcAft>
+                <a:spcPts val="0"/>
+              </a:spcAft>
+            </a:pPr>
+            <a:r>
+              <a:rPr sz="1300">
+                <a:solidFill>
+                  <a:srgbClr val="6D8C97"/>
+                </a:solidFill>
+                <a:latin typeface="Consolas"/>
+              </a:rPr>
+              <a:t>   5  </a:t>
+            </a:r>
+            <a:r>
+              <a:rPr sz="1300">
+                <a:solidFill>
+                  <a:srgbClr val="6D8C97"/>
+                </a:solidFill>
+                <a:latin typeface="Consolas"/>
+              </a:rPr>
+              <a:t>  color: #1f2a37;</a:t>
+            </a:r>
+          </a:p>
+          <a:p>
+            <a:pPr>
+              <a:spcAft>
+                <a:spcPts val="0"/>
+              </a:spcAft>
+            </a:pPr>
+            <a:r>
+              <a:rPr sz="1300">
+                <a:solidFill>
+                  <a:srgbClr val="6D8C97"/>
+                </a:solidFill>
+                <a:latin typeface="Consolas"/>
+              </a:rPr>
+              <a:t>   6  </a:t>
+            </a:r>
+            <a:r>
+              <a:rPr sz="1300">
+                <a:solidFill>
+                  <a:srgbClr val="6D8C97"/>
+                </a:solidFill>
+                <a:latin typeface="Consolas"/>
+              </a:rPr>
+              <a:t>}</a:t>
+            </a:r>
+          </a:p>
+          <a:p>
+            <a:pPr>
+              <a:spcAft>
+                <a:spcPts val="0"/>
+              </a:spcAft>
+            </a:pPr>
+            <a:r>
+              <a:rPr sz="1300">
+                <a:solidFill>
+                  <a:srgbClr val="6D8C97"/>
+                </a:solidFill>
+                <a:latin typeface="Consolas"/>
+              </a:rPr>
+              <a:t>   7  </a:t>
+            </a:r>
+            <a:r>
+              <a:rPr sz="1300">
+                <a:solidFill>
+                  <a:srgbClr val="6D8C97"/>
+                </a:solidFill>
+                <a:latin typeface="Consolas"/>
+              </a:rPr>
+              <a:t>.caution {</a:t>
+            </a:r>
+          </a:p>
+          <a:p>
+            <a:pPr>
+              <a:spcAft>
+                <a:spcPts val="0"/>
+              </a:spcAft>
+            </a:pPr>
+            <a:r>
+              <a:rPr sz="1300">
+                <a:solidFill>
+                  <a:srgbClr val="6D8C97"/>
+                </a:solidFill>
+                <a:latin typeface="Consolas"/>
+              </a:rPr>
+              <a:t>   8  </a:t>
+            </a:r>
+            <a:r>
+              <a:rPr sz="1300">
+                <a:solidFill>
+                  <a:srgbClr val="6D8C97"/>
+                </a:solidFill>
+                <a:latin typeface="Consolas"/>
+              </a:rPr>
+              <a:t>  margin: 0 0 18px;</a:t>
+            </a:r>
+          </a:p>
+          <a:p>
+            <a:pPr>
+              <a:spcAft>
+                <a:spcPts val="0"/>
+              </a:spcAft>
+            </a:pPr>
+            <a:r>
+              <a:rPr sz="1300">
+                <a:solidFill>
+                  <a:srgbClr val="6D8C97"/>
+                </a:solidFill>
+                <a:latin typeface="Consolas"/>
+              </a:rPr>
+              <a:t>   9  </a:t>
+            </a:r>
+            <a:r>
+              <a:rPr sz="1300">
+                <a:solidFill>
+                  <a:srgbClr val="6D8C97"/>
+                </a:solidFill>
+                <a:latin typeface="Consolas"/>
+              </a:rPr>
+              <a:t>  padding: 8px 11px;</a:t>
+            </a:r>
+          </a:p>
+          <a:p>
+            <a:pPr>
+              <a:spcAft>
+                <a:spcPts val="0"/>
+              </a:spcAft>
+            </a:pPr>
+            <a:r>
+              <a:rPr sz="1300">
+                <a:solidFill>
+                  <a:srgbClr val="6D8C97"/>
+                </a:solidFill>
+                <a:latin typeface="Consolas"/>
+              </a:rPr>
+              <a:t>  10  </a:t>
+            </a:r>
+            <a:r>
+              <a:rPr sz="1300">
+                <a:solidFill>
+                  <a:srgbClr val="6D8C97"/>
+                </a:solidFill>
+                <a:latin typeface="Consolas"/>
+              </a:rPr>
+              <a:t>  border-left: 3px solid #e9952a;</a:t>
+            </a:r>
+          </a:p>
+          <a:p>
+            <a:pPr>
+              <a:spcAft>
+                <a:spcPts val="0"/>
+              </a:spcAft>
+            </a:pPr>
+            <a:r>
+              <a:rPr sz="1300">
+                <a:solidFill>
+                  <a:srgbClr val="6D8C97"/>
+                </a:solidFill>
+                <a:latin typeface="Consolas"/>
+              </a:rPr>
+              <a:t>  11  </a:t>
+            </a:r>
+            <a:r>
+              <a:rPr sz="1300">
+                <a:solidFill>
+                  <a:srgbClr val="6D8C97"/>
+                </a:solidFill>
+                <a:latin typeface="Consolas"/>
+              </a:rPr>
+              <a:t>  background: #fff8e9;</a:t>
+            </a:r>
+          </a:p>
+          <a:p>
+            <a:pPr>
+              <a:spcAft>
+                <a:spcPts val="0"/>
+              </a:spcAft>
+            </a:pPr>
+            <a:r>
+              <a:rPr sz="1300">
+                <a:solidFill>
+                  <a:srgbClr val="6D8C97"/>
+                </a:solidFill>
+                <a:latin typeface="Consolas"/>
+              </a:rPr>
+              <a:t>  12  </a:t>
+            </a:r>
+            <a:r>
+              <a:rPr sz="1300">
+                <a:solidFill>
+                  <a:srgbClr val="7FE0A0"/>
+                </a:solidFill>
+                <a:latin typeface="Consolas"/>
+              </a:rPr>
+              <a:t>  color: #8a5a12;</a:t>
+            </a:r>
+          </a:p>
+        </p:txBody>
+      </p:sp>
+      <p:sp>
+        <p:nvSpPr>
+          <p:cNvPr id="4" name="TextBox 3"/>
+          <p:cNvSpPr txBox="1"/>
+          <p:nvPr/>
+        </p:nvSpPr>
+        <p:spPr>
+          <a:xfrm>
+            <a:off x="548640" y="5623560"/>
+            <a:ext cx="11064240" cy="1051560"/>
+          </a:xfrm>
+          <a:prstGeom prst="rect">
+            <a:avLst/>
+          </a:prstGeom>
+          <a:noFill/>
+        </p:spPr>
+        <p:txBody>
+          <a:bodyPr wrap="square">
+            <a:spAutoFit/>
+          </a:bodyPr>
+          <a:lstStyle/>
+          <a:p>
+            <a:r>
+              <a:rPr sz="2000">
+                <a:solidFill>
+                  <a:srgbClr val="DCECEF"/>
+                </a:solidFill>
+              </a:rPr>
+              <a:t>Brown text to match.</a:t>
+            </a:r>
+          </a:p>
+        </p:txBody>
+      </p:sp>
+    </p:spTree>
+  </p:cSld>
+  <p:clrMapOvr>
+    <a:masterClrMapping/>
+  </p:clrMapOvr>
+</p:sld>
+</file>
+
+<file path=ppt/slides/slide32.xml><?xml version="1.0" encoding="utf-8"?>
+<p:sld xmlns:a="http://schemas.openxmlformats.org/drawingml/2006/main" xmlns:p="http://schemas.openxmlformats.org/presentationml/2006/main" xmlns:r="http://schemas.openxmlformats.org/officeDocument/2006/relationships">
+  <p:cSld>
+    <p:bg>
+      <p:bgPr>
+        <a:solidFill>
+          <a:srgbClr val="102127"/>
+        </a:solidFill>
+        <a:effectLst/>
+      </p:bgPr>
+    </p:bg>
+    <p:spTree>
+      <p:nvGrpSpPr>
+        <p:cNvPr id="1" name=""/>
+        <p:cNvGrpSpPr/>
+        <p:nvPr/>
+      </p:nvGrpSpPr>
+      <p:grpSpPr/>
+      <p:sp>
+        <p:nvSpPr>
+          <p:cNvPr id="2" name="TextBox 1"/>
+          <p:cNvSpPr txBox="1"/>
+          <p:nvPr/>
+        </p:nvSpPr>
+        <p:spPr>
+          <a:xfrm>
+            <a:off x="502920" y="274320"/>
+            <a:ext cx="11155680" cy="548640"/>
+          </a:xfrm>
+          <a:prstGeom prst="rect">
+            <a:avLst/>
+          </a:prstGeom>
+          <a:noFill/>
+        </p:spPr>
+        <p:txBody>
+          <a:bodyPr wrap="none">
+            <a:spAutoFit/>
+          </a:bodyPr>
+          <a:lstStyle/>
+          <a:p>
+            <a:r>
+              <a:rPr sz="2200" b="1">
+                <a:solidFill>
+                  <a:srgbClr val="01AEFD"/>
+                </a:solidFill>
+              </a:rPr>
+              <a:t>Type this into style.css   -   line 13</a:t>
+            </a:r>
+          </a:p>
+        </p:txBody>
+      </p:sp>
+      <p:sp>
+        <p:nvSpPr>
+          <p:cNvPr id="3" name="TextBox 2"/>
+          <p:cNvSpPr txBox="1"/>
+          <p:nvPr/>
+        </p:nvSpPr>
+        <p:spPr>
+          <a:xfrm>
+            <a:off x="502920" y="960120"/>
+            <a:ext cx="11155680" cy="4297680"/>
+          </a:xfrm>
+          <a:prstGeom prst="rect">
+            <a:avLst/>
+          </a:prstGeom>
+          <a:noFill/>
+        </p:spPr>
+        <p:txBody>
+          <a:bodyPr wrap="none">
+            <a:spAutoFit/>
+          </a:bodyPr>
+          <a:lstStyle/>
+          <a:p>
+            <a:pPr>
+              <a:spcAft>
+                <a:spcPts val="0"/>
+              </a:spcAft>
+            </a:pPr>
+            <a:r>
+              <a:rPr sz="1300">
+                <a:solidFill>
+                  <a:srgbClr val="6D8C97"/>
+                </a:solidFill>
+                <a:latin typeface="Consolas"/>
+              </a:rPr>
+              <a:t>   1  </a:t>
+            </a:r>
+            <a:r>
+              <a:rPr sz="1300">
+                <a:solidFill>
+                  <a:srgbClr val="6D8C97"/>
+                </a:solidFill>
+                <a:latin typeface="Consolas"/>
+              </a:rPr>
+              <a:t>body {</a:t>
+            </a:r>
+          </a:p>
+          <a:p>
+            <a:pPr>
+              <a:spcAft>
+                <a:spcPts val="0"/>
+              </a:spcAft>
+            </a:pPr>
+            <a:r>
+              <a:rPr sz="1300">
+                <a:solidFill>
+                  <a:srgbClr val="6D8C97"/>
+                </a:solidFill>
+                <a:latin typeface="Consolas"/>
+              </a:rPr>
+              <a:t>   2  </a:t>
+            </a:r>
+            <a:r>
+              <a:rPr sz="1300">
+                <a:solidFill>
+                  <a:srgbClr val="6D8C97"/>
+                </a:solidFill>
+                <a:latin typeface="Consolas"/>
+              </a:rPr>
+              <a:t>  margin: 0;</a:t>
+            </a:r>
+          </a:p>
+          <a:p>
+            <a:pPr>
+              <a:spcAft>
+                <a:spcPts val="0"/>
+              </a:spcAft>
+            </a:pPr>
+            <a:r>
+              <a:rPr sz="1300">
+                <a:solidFill>
+                  <a:srgbClr val="6D8C97"/>
+                </a:solidFill>
+                <a:latin typeface="Consolas"/>
+              </a:rPr>
+              <a:t>   3  </a:t>
+            </a:r>
+            <a:r>
+              <a:rPr sz="1300">
+                <a:solidFill>
+                  <a:srgbClr val="6D8C97"/>
+                </a:solidFill>
+                <a:latin typeface="Consolas"/>
+              </a:rPr>
+              <a:t>  font-family: Arial, Helvetica, sans-serif;</a:t>
+            </a:r>
+          </a:p>
+          <a:p>
+            <a:pPr>
+              <a:spcAft>
+                <a:spcPts val="0"/>
+              </a:spcAft>
+            </a:pPr>
+            <a:r>
+              <a:rPr sz="1300">
+                <a:solidFill>
+                  <a:srgbClr val="6D8C97"/>
+                </a:solidFill>
+                <a:latin typeface="Consolas"/>
+              </a:rPr>
+              <a:t>   4  </a:t>
+            </a:r>
+            <a:r>
+              <a:rPr sz="1300">
+                <a:solidFill>
+                  <a:srgbClr val="6D8C97"/>
+                </a:solidFill>
+                <a:latin typeface="Consolas"/>
+              </a:rPr>
+              <a:t>  background: #eef2f7;</a:t>
+            </a:r>
+          </a:p>
+          <a:p>
+            <a:pPr>
+              <a:spcAft>
+                <a:spcPts val="0"/>
+              </a:spcAft>
+            </a:pPr>
+            <a:r>
+              <a:rPr sz="1300">
+                <a:solidFill>
+                  <a:srgbClr val="6D8C97"/>
+                </a:solidFill>
+                <a:latin typeface="Consolas"/>
+              </a:rPr>
+              <a:t>   5  </a:t>
+            </a:r>
+            <a:r>
+              <a:rPr sz="1300">
+                <a:solidFill>
+                  <a:srgbClr val="6D8C97"/>
+                </a:solidFill>
+                <a:latin typeface="Consolas"/>
+              </a:rPr>
+              <a:t>  color: #1f2a37;</a:t>
+            </a:r>
+          </a:p>
+          <a:p>
+            <a:pPr>
+              <a:spcAft>
+                <a:spcPts val="0"/>
+              </a:spcAft>
+            </a:pPr>
+            <a:r>
+              <a:rPr sz="1300">
+                <a:solidFill>
+                  <a:srgbClr val="6D8C97"/>
+                </a:solidFill>
+                <a:latin typeface="Consolas"/>
+              </a:rPr>
+              <a:t>   6  </a:t>
+            </a:r>
+            <a:r>
+              <a:rPr sz="1300">
+                <a:solidFill>
+                  <a:srgbClr val="6D8C97"/>
+                </a:solidFill>
+                <a:latin typeface="Consolas"/>
+              </a:rPr>
+              <a:t>}</a:t>
+            </a:r>
+          </a:p>
+          <a:p>
+            <a:pPr>
+              <a:spcAft>
+                <a:spcPts val="0"/>
+              </a:spcAft>
+            </a:pPr>
+            <a:r>
+              <a:rPr sz="1300">
+                <a:solidFill>
+                  <a:srgbClr val="6D8C97"/>
+                </a:solidFill>
+                <a:latin typeface="Consolas"/>
+              </a:rPr>
+              <a:t>   7  </a:t>
+            </a:r>
+            <a:r>
+              <a:rPr sz="1300">
+                <a:solidFill>
+                  <a:srgbClr val="6D8C97"/>
+                </a:solidFill>
+                <a:latin typeface="Consolas"/>
+              </a:rPr>
+              <a:t>.caution {</a:t>
+            </a:r>
+          </a:p>
+          <a:p>
+            <a:pPr>
+              <a:spcAft>
+                <a:spcPts val="0"/>
+              </a:spcAft>
+            </a:pPr>
+            <a:r>
+              <a:rPr sz="1300">
+                <a:solidFill>
+                  <a:srgbClr val="6D8C97"/>
+                </a:solidFill>
+                <a:latin typeface="Consolas"/>
+              </a:rPr>
+              <a:t>   8  </a:t>
+            </a:r>
+            <a:r>
+              <a:rPr sz="1300">
+                <a:solidFill>
+                  <a:srgbClr val="6D8C97"/>
+                </a:solidFill>
+                <a:latin typeface="Consolas"/>
+              </a:rPr>
+              <a:t>  margin: 0 0 18px;</a:t>
+            </a:r>
+          </a:p>
+          <a:p>
+            <a:pPr>
+              <a:spcAft>
+                <a:spcPts val="0"/>
+              </a:spcAft>
+            </a:pPr>
+            <a:r>
+              <a:rPr sz="1300">
+                <a:solidFill>
+                  <a:srgbClr val="6D8C97"/>
+                </a:solidFill>
+                <a:latin typeface="Consolas"/>
+              </a:rPr>
+              <a:t>   9  </a:t>
+            </a:r>
+            <a:r>
+              <a:rPr sz="1300">
+                <a:solidFill>
+                  <a:srgbClr val="6D8C97"/>
+                </a:solidFill>
+                <a:latin typeface="Consolas"/>
+              </a:rPr>
+              <a:t>  padding: 8px 11px;</a:t>
+            </a:r>
+          </a:p>
+          <a:p>
+            <a:pPr>
+              <a:spcAft>
+                <a:spcPts val="0"/>
+              </a:spcAft>
+            </a:pPr>
+            <a:r>
+              <a:rPr sz="1300">
+                <a:solidFill>
+                  <a:srgbClr val="6D8C97"/>
+                </a:solidFill>
+                <a:latin typeface="Consolas"/>
+              </a:rPr>
+              <a:t>  10  </a:t>
+            </a:r>
+            <a:r>
+              <a:rPr sz="1300">
+                <a:solidFill>
+                  <a:srgbClr val="6D8C97"/>
+                </a:solidFill>
+                <a:latin typeface="Consolas"/>
+              </a:rPr>
+              <a:t>  border-left: 3px solid #e9952a;</a:t>
+            </a:r>
+          </a:p>
+          <a:p>
+            <a:pPr>
+              <a:spcAft>
+                <a:spcPts val="0"/>
+              </a:spcAft>
+            </a:pPr>
+            <a:r>
+              <a:rPr sz="1300">
+                <a:solidFill>
+                  <a:srgbClr val="6D8C97"/>
+                </a:solidFill>
+                <a:latin typeface="Consolas"/>
+              </a:rPr>
+              <a:t>  11  </a:t>
+            </a:r>
+            <a:r>
+              <a:rPr sz="1300">
+                <a:solidFill>
+                  <a:srgbClr val="6D8C97"/>
+                </a:solidFill>
+                <a:latin typeface="Consolas"/>
+              </a:rPr>
+              <a:t>  background: #fff8e9;</a:t>
+            </a:r>
+          </a:p>
+          <a:p>
+            <a:pPr>
+              <a:spcAft>
+                <a:spcPts val="0"/>
+              </a:spcAft>
+            </a:pPr>
+            <a:r>
+              <a:rPr sz="1300">
+                <a:solidFill>
+                  <a:srgbClr val="6D8C97"/>
+                </a:solidFill>
+                <a:latin typeface="Consolas"/>
+              </a:rPr>
+              <a:t>  12  </a:t>
+            </a:r>
+            <a:r>
+              <a:rPr sz="1300">
+                <a:solidFill>
+                  <a:srgbClr val="6D8C97"/>
+                </a:solidFill>
+                <a:latin typeface="Consolas"/>
+              </a:rPr>
+              <a:t>  color: #8a5a12;</a:t>
+            </a:r>
+          </a:p>
+          <a:p>
+            <a:pPr>
+              <a:spcAft>
+                <a:spcPts val="0"/>
+              </a:spcAft>
+            </a:pPr>
+            <a:r>
+              <a:rPr sz="1300">
+                <a:solidFill>
+                  <a:srgbClr val="6D8C97"/>
+                </a:solidFill>
+                <a:latin typeface="Consolas"/>
+              </a:rPr>
+              <a:t>  13  </a:t>
+            </a:r>
+            <a:r>
+              <a:rPr sz="1300">
+                <a:solidFill>
+                  <a:srgbClr val="7FE0A0"/>
+                </a:solidFill>
+                <a:latin typeface="Consolas"/>
+              </a:rPr>
+              <a:t>  font-size: 13px;</a:t>
+            </a:r>
+          </a:p>
+        </p:txBody>
+      </p:sp>
+      <p:sp>
+        <p:nvSpPr>
+          <p:cNvPr id="4" name="TextBox 3"/>
+          <p:cNvSpPr txBox="1"/>
+          <p:nvPr/>
+        </p:nvSpPr>
+        <p:spPr>
+          <a:xfrm>
+            <a:off x="548640" y="5623560"/>
+            <a:ext cx="11064240" cy="1051560"/>
+          </a:xfrm>
+          <a:prstGeom prst="rect">
+            <a:avLst/>
+          </a:prstGeom>
+          <a:noFill/>
+        </p:spPr>
+        <p:txBody>
+          <a:bodyPr wrap="square">
+            <a:spAutoFit/>
+          </a:bodyPr>
+          <a:lstStyle/>
+          <a:p>
+            <a:r>
+              <a:rPr sz="2000">
+                <a:solidFill>
+                  <a:srgbClr val="DCECEF"/>
+                </a:solidFill>
+              </a:rPr>
+              <a:t>Small - it is a note, not a headline.</a:t>
+            </a:r>
+          </a:p>
+        </p:txBody>
+      </p:sp>
+    </p:spTree>
+  </p:cSld>
+  <p:clrMapOvr>
+    <a:masterClrMapping/>
+  </p:clrMapOvr>
+</p:sld>
+</file>
+
+<file path=ppt/slides/slide33.xml><?xml version="1.0" encoding="utf-8"?>
+<p:sld xmlns:a="http://schemas.openxmlformats.org/drawingml/2006/main" xmlns:p="http://schemas.openxmlformats.org/presentationml/2006/main" xmlns:r="http://schemas.openxmlformats.org/officeDocument/2006/relationships">
+  <p:cSld>
+    <p:bg>
+      <p:bgPr>
+        <a:solidFill>
+          <a:srgbClr val="102127"/>
+        </a:solidFill>
+        <a:effectLst/>
+      </p:bgPr>
+    </p:bg>
+    <p:spTree>
+      <p:nvGrpSpPr>
+        <p:cNvPr id="1" name=""/>
+        <p:cNvGrpSpPr/>
+        <p:nvPr/>
+      </p:nvGrpSpPr>
+      <p:grpSpPr/>
+      <p:sp>
+        <p:nvSpPr>
+          <p:cNvPr id="2" name="TextBox 1"/>
+          <p:cNvSpPr txBox="1"/>
+          <p:nvPr/>
+        </p:nvSpPr>
+        <p:spPr>
+          <a:xfrm>
+            <a:off x="502920" y="274320"/>
+            <a:ext cx="11155680" cy="548640"/>
+          </a:xfrm>
+          <a:prstGeom prst="rect">
+            <a:avLst/>
+          </a:prstGeom>
+          <a:noFill/>
+        </p:spPr>
+        <p:txBody>
+          <a:bodyPr wrap="none">
+            <a:spAutoFit/>
+          </a:bodyPr>
+          <a:lstStyle/>
+          <a:p>
+            <a:r>
+              <a:rPr sz="2200" b="1">
+                <a:solidFill>
+                  <a:srgbClr val="01AEFD"/>
+                </a:solidFill>
+              </a:rPr>
+              <a:t>All together in style.css</a:t>
+            </a:r>
+          </a:p>
+        </p:txBody>
+      </p:sp>
+      <p:sp>
+        <p:nvSpPr>
+          <p:cNvPr id="3" name="TextBox 2"/>
+          <p:cNvSpPr txBox="1"/>
+          <p:nvPr/>
+        </p:nvSpPr>
+        <p:spPr>
+          <a:xfrm>
+            <a:off x="502920" y="960120"/>
+            <a:ext cx="11155680" cy="4297680"/>
+          </a:xfrm>
+          <a:prstGeom prst="rect">
+            <a:avLst/>
+          </a:prstGeom>
+          <a:noFill/>
+        </p:spPr>
+        <p:txBody>
+          <a:bodyPr wrap="none">
+            <a:spAutoFit/>
+          </a:bodyPr>
+          <a:lstStyle/>
+          <a:p>
+            <a:pPr>
+              <a:spcAft>
+                <a:spcPts val="0"/>
+              </a:spcAft>
+            </a:pPr>
+            <a:r>
+              <a:rPr sz="1300">
+                <a:solidFill>
+                  <a:srgbClr val="6D8C97"/>
+                </a:solidFill>
+                <a:latin typeface="Consolas"/>
+              </a:rPr>
+              <a:t>   1  </a:t>
+            </a:r>
+            <a:r>
+              <a:rPr sz="1300">
+                <a:solidFill>
+                  <a:srgbClr val="7FE0A0"/>
+                </a:solidFill>
+                <a:latin typeface="Consolas"/>
+              </a:rPr>
+              <a:t>body {</a:t>
+            </a:r>
+          </a:p>
+          <a:p>
+            <a:pPr>
+              <a:spcAft>
+                <a:spcPts val="0"/>
+              </a:spcAft>
+            </a:pPr>
+            <a:r>
+              <a:rPr sz="1300">
+                <a:solidFill>
+                  <a:srgbClr val="6D8C97"/>
+                </a:solidFill>
+                <a:latin typeface="Consolas"/>
+              </a:rPr>
+              <a:t>   2  </a:t>
+            </a:r>
+            <a:r>
+              <a:rPr sz="1300">
+                <a:solidFill>
+                  <a:srgbClr val="7FE0A0"/>
+                </a:solidFill>
+                <a:latin typeface="Consolas"/>
+              </a:rPr>
+              <a:t>  margin: 0;</a:t>
+            </a:r>
+          </a:p>
+          <a:p>
+            <a:pPr>
+              <a:spcAft>
+                <a:spcPts val="0"/>
+              </a:spcAft>
+            </a:pPr>
+            <a:r>
+              <a:rPr sz="1300">
+                <a:solidFill>
+                  <a:srgbClr val="6D8C97"/>
+                </a:solidFill>
+                <a:latin typeface="Consolas"/>
+              </a:rPr>
+              <a:t>   3  </a:t>
+            </a:r>
+            <a:r>
+              <a:rPr sz="1300">
+                <a:solidFill>
+                  <a:srgbClr val="7FE0A0"/>
+                </a:solidFill>
+                <a:latin typeface="Consolas"/>
+              </a:rPr>
+              <a:t>  font-family: Arial, Helvetica, sans-serif;</a:t>
+            </a:r>
+          </a:p>
+          <a:p>
+            <a:pPr>
+              <a:spcAft>
+                <a:spcPts val="0"/>
+              </a:spcAft>
+            </a:pPr>
+            <a:r>
+              <a:rPr sz="1300">
+                <a:solidFill>
+                  <a:srgbClr val="6D8C97"/>
+                </a:solidFill>
+                <a:latin typeface="Consolas"/>
+              </a:rPr>
+              <a:t>   4  </a:t>
+            </a:r>
+            <a:r>
+              <a:rPr sz="1300">
+                <a:solidFill>
+                  <a:srgbClr val="7FE0A0"/>
+                </a:solidFill>
+                <a:latin typeface="Consolas"/>
+              </a:rPr>
+              <a:t>  background: #eef2f7;</a:t>
+            </a:r>
+          </a:p>
+          <a:p>
+            <a:pPr>
+              <a:spcAft>
+                <a:spcPts val="0"/>
+              </a:spcAft>
+            </a:pPr>
+            <a:r>
+              <a:rPr sz="1300">
+                <a:solidFill>
+                  <a:srgbClr val="6D8C97"/>
+                </a:solidFill>
+                <a:latin typeface="Consolas"/>
+              </a:rPr>
+              <a:t>   5  </a:t>
+            </a:r>
+            <a:r>
+              <a:rPr sz="1300">
+                <a:solidFill>
+                  <a:srgbClr val="7FE0A0"/>
+                </a:solidFill>
+                <a:latin typeface="Consolas"/>
+              </a:rPr>
+              <a:t>  color: #1f2a37;</a:t>
+            </a:r>
+          </a:p>
+          <a:p>
+            <a:pPr>
+              <a:spcAft>
+                <a:spcPts val="0"/>
+              </a:spcAft>
+            </a:pPr>
+            <a:r>
+              <a:rPr sz="1300">
+                <a:solidFill>
+                  <a:srgbClr val="6D8C97"/>
+                </a:solidFill>
+                <a:latin typeface="Consolas"/>
+              </a:rPr>
+              <a:t>   6  </a:t>
+            </a:r>
+            <a:r>
+              <a:rPr sz="1300">
+                <a:solidFill>
+                  <a:srgbClr val="7FE0A0"/>
+                </a:solidFill>
+                <a:latin typeface="Consolas"/>
+              </a:rPr>
+              <a:t>}</a:t>
+            </a:r>
+          </a:p>
+          <a:p>
+            <a:pPr>
+              <a:spcAft>
+                <a:spcPts val="0"/>
+              </a:spcAft>
+            </a:pPr>
+            <a:r>
+              <a:rPr sz="1300">
+                <a:solidFill>
+                  <a:srgbClr val="6D8C97"/>
+                </a:solidFill>
+                <a:latin typeface="Consolas"/>
+              </a:rPr>
+              <a:t>   7  </a:t>
+            </a:r>
+            <a:r>
+              <a:rPr sz="1300">
+                <a:solidFill>
+                  <a:srgbClr val="7FE0A0"/>
+                </a:solidFill>
+                <a:latin typeface="Consolas"/>
+              </a:rPr>
+              <a:t>.caution {</a:t>
+            </a:r>
+          </a:p>
+          <a:p>
+            <a:pPr>
+              <a:spcAft>
+                <a:spcPts val="0"/>
+              </a:spcAft>
+            </a:pPr>
+            <a:r>
+              <a:rPr sz="1300">
+                <a:solidFill>
+                  <a:srgbClr val="6D8C97"/>
+                </a:solidFill>
+                <a:latin typeface="Consolas"/>
+              </a:rPr>
+              <a:t>   8  </a:t>
+            </a:r>
+            <a:r>
+              <a:rPr sz="1300">
+                <a:solidFill>
+                  <a:srgbClr val="7FE0A0"/>
+                </a:solidFill>
+                <a:latin typeface="Consolas"/>
+              </a:rPr>
+              <a:t>  margin: 0 0 18px;</a:t>
+            </a:r>
+          </a:p>
+          <a:p>
+            <a:pPr>
+              <a:spcAft>
+                <a:spcPts val="0"/>
+              </a:spcAft>
+            </a:pPr>
+            <a:r>
+              <a:rPr sz="1300">
+                <a:solidFill>
+                  <a:srgbClr val="6D8C97"/>
+                </a:solidFill>
+                <a:latin typeface="Consolas"/>
+              </a:rPr>
+              <a:t>   9  </a:t>
+            </a:r>
+            <a:r>
+              <a:rPr sz="1300">
+                <a:solidFill>
+                  <a:srgbClr val="7FE0A0"/>
+                </a:solidFill>
+                <a:latin typeface="Consolas"/>
+              </a:rPr>
+              <a:t>  padding: 8px 11px;</a:t>
+            </a:r>
+          </a:p>
+          <a:p>
+            <a:pPr>
+              <a:spcAft>
+                <a:spcPts val="0"/>
+              </a:spcAft>
+            </a:pPr>
+            <a:r>
+              <a:rPr sz="1300">
+                <a:solidFill>
+                  <a:srgbClr val="6D8C97"/>
+                </a:solidFill>
+                <a:latin typeface="Consolas"/>
+              </a:rPr>
+              <a:t>  10  </a:t>
+            </a:r>
+            <a:r>
+              <a:rPr sz="1300">
+                <a:solidFill>
+                  <a:srgbClr val="7FE0A0"/>
+                </a:solidFill>
+                <a:latin typeface="Consolas"/>
+              </a:rPr>
+              <a:t>  border-left: 3px solid #e9952a;</a:t>
+            </a:r>
+          </a:p>
+          <a:p>
+            <a:pPr>
+              <a:spcAft>
+                <a:spcPts val="0"/>
+              </a:spcAft>
+            </a:pPr>
+            <a:r>
+              <a:rPr sz="1300">
+                <a:solidFill>
+                  <a:srgbClr val="6D8C97"/>
+                </a:solidFill>
+                <a:latin typeface="Consolas"/>
+              </a:rPr>
+              <a:t>  11  </a:t>
+            </a:r>
+            <a:r>
+              <a:rPr sz="1300">
+                <a:solidFill>
+                  <a:srgbClr val="7FE0A0"/>
+                </a:solidFill>
+                <a:latin typeface="Consolas"/>
+              </a:rPr>
+              <a:t>  background: #fff8e9;</a:t>
+            </a:r>
+          </a:p>
+          <a:p>
+            <a:pPr>
+              <a:spcAft>
+                <a:spcPts val="0"/>
+              </a:spcAft>
+            </a:pPr>
+            <a:r>
+              <a:rPr sz="1300">
+                <a:solidFill>
+                  <a:srgbClr val="6D8C97"/>
+                </a:solidFill>
+                <a:latin typeface="Consolas"/>
+              </a:rPr>
+              <a:t>  12  </a:t>
+            </a:r>
+            <a:r>
+              <a:rPr sz="1300">
+                <a:solidFill>
+                  <a:srgbClr val="7FE0A0"/>
+                </a:solidFill>
+                <a:latin typeface="Consolas"/>
+              </a:rPr>
+              <a:t>  color: #8a5a12;</a:t>
+            </a:r>
+          </a:p>
+          <a:p>
+            <a:pPr>
+              <a:spcAft>
+                <a:spcPts val="0"/>
+              </a:spcAft>
+            </a:pPr>
+            <a:r>
+              <a:rPr sz="1300">
+                <a:solidFill>
+                  <a:srgbClr val="6D8C97"/>
+                </a:solidFill>
+                <a:latin typeface="Consolas"/>
+              </a:rPr>
+              <a:t>  13  </a:t>
+            </a:r>
+            <a:r>
+              <a:rPr sz="1300">
+                <a:solidFill>
+                  <a:srgbClr val="7FE0A0"/>
+                </a:solidFill>
+                <a:latin typeface="Consolas"/>
+              </a:rPr>
+              <a:t>  font-size: 13px;</a:t>
+            </a:r>
+          </a:p>
+          <a:p>
+            <a:pPr>
+              <a:spcAft>
+                <a:spcPts val="0"/>
+              </a:spcAft>
+            </a:pPr>
+            <a:r>
+              <a:rPr sz="1300">
+                <a:solidFill>
+                  <a:srgbClr val="6D8C97"/>
+                </a:solidFill>
+                <a:latin typeface="Consolas"/>
+              </a:rPr>
+              <a:t>  14  </a:t>
+            </a:r>
+            <a:r>
+              <a:rPr sz="1300">
+                <a:solidFill>
+                  <a:srgbClr val="7FE0A0"/>
+                </a:solidFill>
+                <a:latin typeface="Consolas"/>
+              </a:rPr>
+              <a:t>}</a:t>
+            </a:r>
+          </a:p>
+        </p:txBody>
+      </p:sp>
+      <p:sp>
+        <p:nvSpPr>
+          <p:cNvPr id="4" name="TextBox 3"/>
+          <p:cNvSpPr txBox="1"/>
+          <p:nvPr/>
+        </p:nvSpPr>
+        <p:spPr>
+          <a:xfrm>
+            <a:off x="548640" y="5623560"/>
+            <a:ext cx="11064240" cy="1051560"/>
+          </a:xfrm>
+          <a:prstGeom prst="rect">
+            <a:avLst/>
+          </a:prstGeom>
+          <a:noFill/>
+        </p:spPr>
+        <p:txBody>
+          <a:bodyPr wrap="square">
+            <a:spAutoFit/>
+          </a:bodyPr>
+          <a:lstStyle/>
+          <a:p>
+            <a:r>
+              <a:rPr sz="2000">
+                <a:solidFill>
+                  <a:srgbClr val="DCECEF"/>
+                </a:solidFill>
+              </a:rPr>
+              <a:t>That is the whole piece. Check yours looks the same before moving on.</a:t>
             </a:r>
           </a:p>
         </p:txBody>
@@ -4768,7 +11278,7 @@
                   <a:srgbClr val="1F2A37"/>
                 </a:solidFill>
               </a:rPr>
-              <a:t>Neither defence is perfect</a:t>
+              <a:t>Checkpoint: it guards itself</a:t>
             </a:r>
           </a:p>
         </p:txBody>
@@ -4776,6 +11286,39 @@
       <p:sp>
         <p:nvSpPr>
           <p:cNvPr id="3" name="TextBox 2"/>
+          <p:cNvSpPr txBox="1"/>
+          <p:nvPr/>
+        </p:nvSpPr>
+        <p:spPr>
+          <a:xfrm>
+            <a:off x="868680" y="502920"/>
+            <a:ext cx="5486400" cy="457200"/>
+          </a:xfrm>
+          <a:prstGeom prst="rect">
+            <a:avLst/>
+          </a:prstGeom>
+          <a:noFill/>
+        </p:spPr>
+        <p:txBody>
+          <a:bodyPr wrap="none">
+            <a:spAutoFit/>
+          </a:bodyPr>
+          <a:lstStyle/>
+          <a:p>
+            <a:r>
+              <a:rPr sz="1500" b="1">
+                <a:solidFill>
+                  <a:srgbClr val="01AEFD"/>
+                </a:solidFill>
+              </a:rPr>
+              <a:t>CHECKPOINT - RUN IT</a:t>
+            </a:r>
+          </a:p>
+        </p:txBody>
+      </p:sp>
+      <p:sp>
+        <p:nvSpPr>
+          <p:cNvPr id="4" name="TextBox 3"/>
           <p:cNvSpPr txBox="1"/>
           <p:nvPr/>
         </p:nvSpPr>
@@ -4801,12 +11344,27 @@
               </a:spcAft>
             </a:pPr>
             <a:r>
+              <a:rPr sz="2800">
+                <a:solidFill>
+                  <a:srgbClr val="01AEFD"/>
+                </a:solidFill>
+              </a:rPr>
+              <a:t>Press Run. Send an empty message (nothing happens), then paste a huge block over 500 characters - you should get 'That is too long...' instead of a wasted request. And read the caution line under the title: even a confident answer can be wrong.</a:t>
+            </a:r>
+          </a:p>
+          <a:p>
+            <a:pPr>
+              <a:spcAft>
+                <a:spcPts val="1400"/>
+              </a:spcAft>
+            </a:pPr>
+            <a:r>
               <a:rPr sz="2400">
                 <a:solidFill>
                   <a:srgbClr val="1F2A37"/>
                 </a:solidFill>
               </a:rPr>
-              <a:t>• Rules in the persona - can be talked around</a:t>
+              <a:t>• Run it in the classroom, or press Show the output in the web deck.</a:t>
             </a:r>
           </a:p>
           <a:p>
@@ -4821,22 +11379,7 @@
                   <a:srgbClr val="1F2A37"/>
                 </a:solidFill>
               </a:rPr>
-              <a:t>• Guards in code - blunt</a:t>
-            </a:r>
-          </a:p>
-          <a:p>
-            <a:pPr>
-              <a:spcAft>
-                <a:spcPts val="1400"/>
-              </a:spcAft>
-            </a:pPr>
-            <a:r>
-              <a:rPr sz="2400">
-                <a:solidFill>
-                  <a:srgbClr val="1F2A37"/>
-                </a:solidFill>
-              </a:rPr>
-              <a:t>• So never let it decide anything alone</a:t>
+              <a:t>• Everyone's screen should match this.</a:t>
             </a:r>
           </a:p>
         </p:txBody>
@@ -4852,14 +11395,6 @@
 <file path=ppt/slides/slide8.xml><?xml version="1.0" encoding="utf-8"?>
 <p:sld xmlns:a="http://schemas.openxmlformats.org/drawingml/2006/main" xmlns:p="http://schemas.openxmlformats.org/presentationml/2006/main" xmlns:r="http://schemas.openxmlformats.org/officeDocument/2006/relationships">
   <p:cSld>
-    <p:bg>
-      <p:bgPr>
-        <a:solidFill>
-          <a:srgbClr val="102127"/>
-        </a:solidFill>
-        <a:effectLst/>
-      </p:bgPr>
-    </p:bg>
     <p:spTree>
       <p:nvGrpSpPr>
         <p:cNvPr id="1" name=""/>
@@ -4869,14 +11404,40 @@
       <p:grpSpPr/>
       <p:sp>
         <p:nvSpPr>
-          <p:cNvPr id="2" name="TextBox 1"/>
+          <p:cNvPr id="2" name="Title 1"/>
+          <p:cNvSpPr>
+            <a:spLocks noGrp="1"/>
+          </p:cNvSpPr>
+          <p:nvPr>
+            <p:ph type="title"/>
+          </p:nvPr>
+        </p:nvSpPr>
+        <p:spPr/>
+        <p:txBody>
+          <a:bodyPr/>
+          <a:lstStyle/>
+          <a:p>
+            <a:r>
+              <a:rPr sz="3800" b="1">
+                <a:solidFill>
+                  <a:srgbClr val="1F2A37"/>
+                </a:solidFill>
+              </a:rPr>
+              <a:t>Neither defence is perfect</a:t>
+            </a:r>
+          </a:p>
+        </p:txBody>
+      </p:sp>
+      <p:sp>
+        <p:nvSpPr>
+          <p:cNvPr id="3" name="TextBox 2"/>
           <p:cNvSpPr txBox="1"/>
           <p:nvPr/>
         </p:nvSpPr>
         <p:spPr>
           <a:xfrm>
-            <a:off x="502920" y="274320"/>
-            <a:ext cx="11155680" cy="731520"/>
+            <a:off x="822960" y="1828800"/>
+            <a:ext cx="10515600" cy="4206240"/>
           </a:xfrm>
           <a:prstGeom prst="rect">
             <a:avLst/>
@@ -4884,416 +11445,53 @@
           <a:noFill/>
         </p:spPr>
         <p:txBody>
-          <a:bodyPr wrap="none">
+          <a:bodyPr wrap="square">
             <a:spAutoFit/>
           </a:bodyPr>
           <a:lstStyle/>
           <a:p>
-            <a:r>
-              <a:rPr sz="2600" b="1">
-                <a:solidFill>
-                  <a:srgbClr val="01AEFD"/>
-                </a:solidFill>
-              </a:rPr>
-              <a:t>Type this into script.js  (1 of 5)</a:t>
-            </a:r>
-          </a:p>
-        </p:txBody>
-      </p:sp>
-      <p:sp>
-        <p:nvSpPr>
-          <p:cNvPr id="3" name="TextBox 2"/>
-          <p:cNvSpPr txBox="1"/>
-          <p:nvPr/>
-        </p:nvSpPr>
-        <p:spPr>
-          <a:xfrm>
-            <a:off x="502920" y="1051560"/>
-            <a:ext cx="11155680" cy="5394960"/>
-          </a:xfrm>
-          <a:prstGeom prst="rect">
-            <a:avLst/>
-          </a:prstGeom>
-          <a:noFill/>
-        </p:spPr>
-        <p:txBody>
-          <a:bodyPr wrap="none">
-            <a:spAutoFit/>
-          </a:bodyPr>
-          <a:lstStyle/>
-          <a:p>
-            <a:pPr>
-              <a:spcAft>
-                <a:spcPts val="0"/>
-              </a:spcAft>
-            </a:pPr>
-            <a:r>
-              <a:rPr sz="1400">
-                <a:solidFill>
-                  <a:srgbClr val="6D8C97"/>
-                </a:solidFill>
-                <a:latin typeface="Consolas"/>
-              </a:rPr>
-              <a:t> 179  </a:t>
-            </a:r>
-            <a:r>
-              <a:rPr sz="1400">
-                <a:solidFill>
-                  <a:srgbClr val="DCECEF"/>
-                </a:solidFill>
-                <a:latin typeface="Consolas"/>
-              </a:rPr>
-              <a:t> </a:t>
-            </a:r>
-          </a:p>
-          <a:p>
-            <a:pPr>
-              <a:spcAft>
-                <a:spcPts val="0"/>
-              </a:spcAft>
-            </a:pPr>
-            <a:r>
-              <a:rPr sz="1400">
-                <a:solidFill>
-                  <a:srgbClr val="6D8C97"/>
-                </a:solidFill>
-                <a:latin typeface="Consolas"/>
-              </a:rPr>
-              <a:t> 180  </a:t>
-            </a:r>
-            <a:r>
-              <a:rPr sz="1400">
-                <a:solidFill>
-                  <a:srgbClr val="DCECEF"/>
-                </a:solidFill>
-                <a:latin typeface="Consolas"/>
-              </a:rPr>
-              <a:t>// The browser calls this when the form is submitted.</a:t>
-            </a:r>
-          </a:p>
-          <a:p>
-            <a:pPr>
-              <a:spcAft>
-                <a:spcPts val="0"/>
-              </a:spcAft>
-            </a:pPr>
-            <a:r>
-              <a:rPr sz="1400">
-                <a:solidFill>
-                  <a:srgbClr val="6D8C97"/>
-                </a:solidFill>
-                <a:latin typeface="Consolas"/>
-              </a:rPr>
-              <a:t> 181  </a:t>
-            </a:r>
-            <a:r>
-              <a:rPr sz="1400">
-                <a:solidFill>
-                  <a:srgbClr val="DCECEF"/>
-                </a:solidFill>
-                <a:latin typeface="Consolas"/>
-              </a:rPr>
-              <a:t>composer.addEventListener('submit', async function (event) {</a:t>
-            </a:r>
-          </a:p>
-          <a:p>
-            <a:pPr>
-              <a:spcAft>
-                <a:spcPts val="0"/>
-              </a:spcAft>
-            </a:pPr>
-            <a:r>
-              <a:rPr sz="1400">
-                <a:solidFill>
-                  <a:srgbClr val="6D8C97"/>
-                </a:solidFill>
-                <a:latin typeface="Consolas"/>
-              </a:rPr>
-              <a:t> 182  </a:t>
-            </a:r>
-            <a:r>
-              <a:rPr sz="1400">
-                <a:solidFill>
-                  <a:srgbClr val="DCECEF"/>
-                </a:solidFill>
-                <a:latin typeface="Consolas"/>
-              </a:rPr>
-              <a:t>  event.preventDefault();</a:t>
-            </a:r>
-          </a:p>
-          <a:p>
-            <a:pPr>
-              <a:spcAft>
-                <a:spcPts val="0"/>
-              </a:spcAft>
-            </a:pPr>
-            <a:r>
-              <a:rPr sz="1400">
-                <a:solidFill>
-                  <a:srgbClr val="6D8C97"/>
-                </a:solidFill>
-                <a:latin typeface="Consolas"/>
-              </a:rPr>
-              <a:t> 183  </a:t>
-            </a:r>
-            <a:r>
-              <a:rPr sz="1400">
-                <a:solidFill>
-                  <a:srgbClr val="DCECEF"/>
-                </a:solidFill>
-                <a:latin typeface="Consolas"/>
-              </a:rPr>
-              <a:t>  const text = promptBox.value.trim();</a:t>
-            </a:r>
-          </a:p>
-          <a:p>
-            <a:pPr>
-              <a:spcAft>
-                <a:spcPts val="0"/>
-              </a:spcAft>
-            </a:pPr>
-            <a:r>
-              <a:rPr sz="1400">
-                <a:solidFill>
-                  <a:srgbClr val="6D8C97"/>
-                </a:solidFill>
-                <a:latin typeface="Consolas"/>
-              </a:rPr>
-              <a:t> 184  </a:t>
-            </a:r>
-            <a:r>
-              <a:rPr sz="1400">
-                <a:solidFill>
-                  <a:srgbClr val="DCECEF"/>
-                </a:solidFill>
-                <a:latin typeface="Consolas"/>
-              </a:rPr>
-              <a:t>  if (text === '') { return; }</a:t>
-            </a:r>
-          </a:p>
-          <a:p>
-            <a:pPr>
-              <a:spcAft>
-                <a:spcPts val="0"/>
-              </a:spcAft>
-            </a:pPr>
-            <a:r>
-              <a:rPr sz="1400">
-                <a:solidFill>
-                  <a:srgbClr val="6D8C97"/>
-                </a:solidFill>
-                <a:latin typeface="Consolas"/>
-              </a:rPr>
-              <a:t> 185  </a:t>
-            </a:r>
-            <a:r>
-              <a:rPr sz="1400">
-                <a:solidFill>
-                  <a:srgbClr val="7FE0A0"/>
-                </a:solidFill>
-                <a:latin typeface="Consolas"/>
-              </a:rPr>
-              <a:t> </a:t>
-            </a:r>
-          </a:p>
-          <a:p>
-            <a:pPr>
-              <a:spcAft>
-                <a:spcPts val="0"/>
-              </a:spcAft>
-            </a:pPr>
-            <a:r>
-              <a:rPr sz="1400">
-                <a:solidFill>
-                  <a:srgbClr val="6D8C97"/>
-                </a:solidFill>
-                <a:latin typeface="Consolas"/>
-              </a:rPr>
-              <a:t> 186  </a:t>
-            </a:r>
-            <a:r>
-              <a:rPr sz="1400">
-                <a:solidFill>
-                  <a:srgbClr val="7FE0A0"/>
-                </a:solidFill>
-                <a:latin typeface="Consolas"/>
-              </a:rPr>
-              <a:t>  // Week 14: never trust what a user types. A giant message wastes the</a:t>
-            </a:r>
-          </a:p>
-          <a:p>
-            <a:pPr>
-              <a:spcAft>
-                <a:spcPts val="0"/>
-              </a:spcAft>
-            </a:pPr>
-            <a:r>
-              <a:rPr sz="1400">
-                <a:solidFill>
-                  <a:srgbClr val="6D8C97"/>
-                </a:solidFill>
-                <a:latin typeface="Consolas"/>
-              </a:rPr>
-              <a:t> 187  </a:t>
-            </a:r>
-            <a:r>
-              <a:rPr sz="1400">
-                <a:solidFill>
-                  <a:srgbClr val="7FE0A0"/>
-                </a:solidFill>
-                <a:latin typeface="Consolas"/>
-              </a:rPr>
-              <a:t>  // whole conversation budget and gets the request refused for everyone.</a:t>
-            </a:r>
-          </a:p>
-          <a:p>
-            <a:pPr>
-              <a:spcAft>
-                <a:spcPts val="0"/>
-              </a:spcAft>
-            </a:pPr>
-            <a:r>
-              <a:rPr sz="1400">
-                <a:solidFill>
-                  <a:srgbClr val="6D8C97"/>
-                </a:solidFill>
-                <a:latin typeface="Consolas"/>
-              </a:rPr>
-              <a:t> 188  </a:t>
-            </a:r>
-            <a:r>
-              <a:rPr sz="1400">
-                <a:solidFill>
-                  <a:srgbClr val="7FE0A0"/>
-                </a:solidFill>
-                <a:latin typeface="Consolas"/>
-              </a:rPr>
-              <a:t>  if (text.length &gt; 500) {</a:t>
-            </a:r>
-          </a:p>
-          <a:p>
-            <a:pPr>
-              <a:spcAft>
-                <a:spcPts val="0"/>
-              </a:spcAft>
-            </a:pPr>
-            <a:r>
-              <a:rPr sz="1400">
-                <a:solidFill>
-                  <a:srgbClr val="6D8C97"/>
-                </a:solidFill>
-                <a:latin typeface="Consolas"/>
-              </a:rPr>
-              <a:t> 189  </a:t>
-            </a:r>
-            <a:r>
-              <a:rPr sz="1400">
-                <a:solidFill>
-                  <a:srgbClr val="7FE0A0"/>
-                </a:solidFill>
-                <a:latin typeface="Consolas"/>
-              </a:rPr>
-              <a:t>    addLine('problem', 'That is too long for one message - try under 500 characters.');</a:t>
-            </a:r>
-          </a:p>
-          <a:p>
-            <a:pPr>
-              <a:spcAft>
-                <a:spcPts val="0"/>
-              </a:spcAft>
-            </a:pPr>
-            <a:r>
-              <a:rPr sz="1400">
-                <a:solidFill>
-                  <a:srgbClr val="6D8C97"/>
-                </a:solidFill>
-                <a:latin typeface="Consolas"/>
-              </a:rPr>
-              <a:t> 190  </a:t>
-            </a:r>
-            <a:r>
-              <a:rPr sz="1400">
-                <a:solidFill>
-                  <a:srgbClr val="7FE0A0"/>
-                </a:solidFill>
-                <a:latin typeface="Consolas"/>
-              </a:rPr>
-              <a:t>    return;</a:t>
-            </a:r>
-          </a:p>
-          <a:p>
-            <a:pPr>
-              <a:spcAft>
-                <a:spcPts val="0"/>
-              </a:spcAft>
-            </a:pPr>
-            <a:r>
-              <a:rPr sz="1400">
-                <a:solidFill>
-                  <a:srgbClr val="6D8C97"/>
-                </a:solidFill>
-                <a:latin typeface="Consolas"/>
-              </a:rPr>
-              <a:t> 191  </a:t>
-            </a:r>
-            <a:r>
-              <a:rPr sz="1400">
-                <a:solidFill>
-                  <a:srgbClr val="7FE0A0"/>
-                </a:solidFill>
-                <a:latin typeface="Consolas"/>
-              </a:rPr>
-              <a:t>  }</a:t>
-            </a:r>
-          </a:p>
-          <a:p>
-            <a:pPr>
-              <a:spcAft>
-                <a:spcPts val="0"/>
-              </a:spcAft>
-            </a:pPr>
-            <a:r>
-              <a:rPr sz="1400">
-                <a:solidFill>
-                  <a:srgbClr val="6D8C97"/>
-                </a:solidFill>
-                <a:latin typeface="Consolas"/>
-              </a:rPr>
-              <a:t> 192  </a:t>
-            </a:r>
-            <a:r>
-              <a:rPr sz="1400">
-                <a:solidFill>
-                  <a:srgbClr val="7FE0A0"/>
-                </a:solidFill>
-                <a:latin typeface="Consolas"/>
-              </a:rPr>
-              <a:t> </a:t>
-            </a:r>
-          </a:p>
-          <a:p>
-            <a:pPr>
-              <a:spcAft>
-                <a:spcPts val="0"/>
-              </a:spcAft>
-            </a:pPr>
-            <a:r>
-              <a:rPr sz="1400">
-                <a:solidFill>
-                  <a:srgbClr val="6D8C97"/>
-                </a:solidFill>
-                <a:latin typeface="Consolas"/>
-              </a:rPr>
-              <a:t> 193  </a:t>
-            </a:r>
-            <a:r>
-              <a:rPr sz="1400">
-                <a:solidFill>
-                  <a:srgbClr val="DCECEF"/>
-                </a:solidFill>
-                <a:latin typeface="Consolas"/>
-              </a:rPr>
-              <a:t>  promptBox.value = '';</a:t>
+            <a:pPr>
+              <a:spcAft>
+                <a:spcPts val="1400"/>
+              </a:spcAft>
+            </a:pPr>
+            <a:r>
+              <a:rPr sz="2400">
+                <a:solidFill>
+                  <a:srgbClr val="1F2A37"/>
+                </a:solidFill>
+              </a:rPr>
+              <a:t>• Rules in the persona - can be talked around</a:t>
+            </a:r>
+          </a:p>
+          <a:p>
+            <a:pPr>
+              <a:spcAft>
+                <a:spcPts val="1400"/>
+              </a:spcAft>
+            </a:pPr>
+            <a:r>
+              <a:rPr sz="2400">
+                <a:solidFill>
+                  <a:srgbClr val="1F2A37"/>
+                </a:solidFill>
+              </a:rPr>
+              <a:t>• Guards in code - blunt</a:t>
+            </a:r>
+          </a:p>
+          <a:p>
+            <a:pPr>
+              <a:spcAft>
+                <a:spcPts val="1400"/>
+              </a:spcAft>
+            </a:pPr>
+            <a:r>
+              <a:rPr sz="2400">
+                <a:solidFill>
+                  <a:srgbClr val="1F2A37"/>
+                </a:solidFill>
+              </a:rPr>
+              <a:t>• So never let it decide anything alone</a:t>
             </a:r>
           </a:p>
         </p:txBody>
@@ -5333,7 +11531,7 @@
         <p:spPr>
           <a:xfrm>
             <a:off x="502920" y="274320"/>
-            <a:ext cx="11155680" cy="731520"/>
+            <a:ext cx="11155680" cy="548640"/>
           </a:xfrm>
           <a:prstGeom prst="rect">
             <a:avLst/>
@@ -5347,12 +11545,12 @@
           <a:lstStyle/>
           <a:p>
             <a:r>
-              <a:rPr sz="2600" b="1">
+              <a:rPr sz="2200" b="1">
                 <a:solidFill>
                   <a:srgbClr val="01AEFD"/>
                 </a:solidFill>
               </a:rPr>
-              <a:t>Type this into script.js  (2 of 5)</a:t>
+              <a:t>Type this into script.js   -   line 188</a:t>
             </a:r>
           </a:p>
         </p:txBody>
@@ -5365,8 +11563,8 @@
         </p:nvSpPr>
         <p:spPr>
           <a:xfrm>
-            <a:off x="502920" y="1051560"/>
-            <a:ext cx="11155680" cy="5394960"/>
+            <a:off x="502920" y="960120"/>
+            <a:ext cx="11155680" cy="4297680"/>
           </a:xfrm>
           <a:prstGeom prst="rect">
             <a:avLst/>
@@ -5385,372 +11583,280 @@
               </a:spcAft>
             </a:pPr>
             <a:r>
-              <a:rPr sz="1400">
-                <a:solidFill>
-                  <a:srgbClr val="6D8C97"/>
-                </a:solidFill>
-                <a:latin typeface="Consolas"/>
-              </a:rPr>
-              <a:t> 194  </a:t>
-            </a:r>
-            <a:r>
-              <a:rPr sz="1400">
+              <a:rPr sz="1800">
+                <a:solidFill>
+                  <a:srgbClr val="6D8C97"/>
+                </a:solidFill>
+                <a:latin typeface="Consolas"/>
+              </a:rPr>
+              <a:t> 179  </a:t>
+            </a:r>
+            <a:r>
+              <a:rPr sz="1800">
+                <a:solidFill>
+                  <a:srgbClr val="6D8C97"/>
+                </a:solidFill>
+                <a:latin typeface="Consolas"/>
+              </a:rPr>
+              <a:t> </a:t>
+            </a:r>
+          </a:p>
+          <a:p>
+            <a:pPr>
+              <a:spcAft>
+                <a:spcPts val="0"/>
+              </a:spcAft>
+            </a:pPr>
+            <a:r>
+              <a:rPr sz="1800">
+                <a:solidFill>
+                  <a:srgbClr val="6D8C97"/>
+                </a:solidFill>
+                <a:latin typeface="Consolas"/>
+              </a:rPr>
+              <a:t> 180  </a:t>
+            </a:r>
+            <a:r>
+              <a:rPr sz="1800">
+                <a:solidFill>
+                  <a:srgbClr val="6D8C97"/>
+                </a:solidFill>
+                <a:latin typeface="Consolas"/>
+              </a:rPr>
+              <a:t>// The browser calls this when the form is submitted.</a:t>
+            </a:r>
+          </a:p>
+          <a:p>
+            <a:pPr>
+              <a:spcAft>
+                <a:spcPts val="0"/>
+              </a:spcAft>
+            </a:pPr>
+            <a:r>
+              <a:rPr sz="1800">
+                <a:solidFill>
+                  <a:srgbClr val="6D8C97"/>
+                </a:solidFill>
+                <a:latin typeface="Consolas"/>
+              </a:rPr>
+              <a:t> 181  </a:t>
+            </a:r>
+            <a:r>
+              <a:rPr sz="1800">
+                <a:solidFill>
+                  <a:srgbClr val="6D8C97"/>
+                </a:solidFill>
+                <a:latin typeface="Consolas"/>
+              </a:rPr>
+              <a:t>composer.addEventListener('submit', async function (event) {</a:t>
+            </a:r>
+          </a:p>
+          <a:p>
+            <a:pPr>
+              <a:spcAft>
+                <a:spcPts val="0"/>
+              </a:spcAft>
+            </a:pPr>
+            <a:r>
+              <a:rPr sz="1800">
+                <a:solidFill>
+                  <a:srgbClr val="6D8C97"/>
+                </a:solidFill>
+                <a:latin typeface="Consolas"/>
+              </a:rPr>
+              <a:t> 182  </a:t>
+            </a:r>
+            <a:r>
+              <a:rPr sz="1800">
+                <a:solidFill>
+                  <a:srgbClr val="6D8C97"/>
+                </a:solidFill>
+                <a:latin typeface="Consolas"/>
+              </a:rPr>
+              <a:t>  event.preventDefault();</a:t>
+            </a:r>
+          </a:p>
+          <a:p>
+            <a:pPr>
+              <a:spcAft>
+                <a:spcPts val="0"/>
+              </a:spcAft>
+            </a:pPr>
+            <a:r>
+              <a:rPr sz="1800">
+                <a:solidFill>
+                  <a:srgbClr val="6D8C97"/>
+                </a:solidFill>
+                <a:latin typeface="Consolas"/>
+              </a:rPr>
+              <a:t> 183  </a:t>
+            </a:r>
+            <a:r>
+              <a:rPr sz="1800">
+                <a:solidFill>
+                  <a:srgbClr val="6D8C97"/>
+                </a:solidFill>
+                <a:latin typeface="Consolas"/>
+              </a:rPr>
+              <a:t>  const text = promptBox.value.trim();</a:t>
+            </a:r>
+          </a:p>
+          <a:p>
+            <a:pPr>
+              <a:spcAft>
+                <a:spcPts val="0"/>
+              </a:spcAft>
+            </a:pPr>
+            <a:r>
+              <a:rPr sz="1800">
+                <a:solidFill>
+                  <a:srgbClr val="6D8C97"/>
+                </a:solidFill>
+                <a:latin typeface="Consolas"/>
+              </a:rPr>
+              <a:t> 184  </a:t>
+            </a:r>
+            <a:r>
+              <a:rPr sz="1800">
+                <a:solidFill>
+                  <a:srgbClr val="6D8C97"/>
+                </a:solidFill>
+                <a:latin typeface="Consolas"/>
+              </a:rPr>
+              <a:t>  if (text === '') { return; }</a:t>
+            </a:r>
+          </a:p>
+          <a:p>
+            <a:pPr>
+              <a:spcAft>
+                <a:spcPts val="0"/>
+              </a:spcAft>
+            </a:pPr>
+            <a:r>
+              <a:rPr sz="1800">
+                <a:solidFill>
+                  <a:srgbClr val="6D8C97"/>
+                </a:solidFill>
+                <a:latin typeface="Consolas"/>
+              </a:rPr>
+              <a:t> 185  </a:t>
+            </a:r>
+            <a:r>
+              <a:rPr sz="1800">
+                <a:solidFill>
+                  <a:srgbClr val="6D8C97"/>
+                </a:solidFill>
+                <a:latin typeface="Consolas"/>
+              </a:rPr>
+              <a:t> </a:t>
+            </a:r>
+          </a:p>
+          <a:p>
+            <a:pPr>
+              <a:spcAft>
+                <a:spcPts val="0"/>
+              </a:spcAft>
+            </a:pPr>
+            <a:r>
+              <a:rPr sz="1800">
+                <a:solidFill>
+                  <a:srgbClr val="6D8C97"/>
+                </a:solidFill>
+                <a:latin typeface="Consolas"/>
+              </a:rPr>
+              <a:t> 186  </a:t>
+            </a:r>
+            <a:r>
+              <a:rPr sz="1800">
+                <a:solidFill>
+                  <a:srgbClr val="6D8C97"/>
+                </a:solidFill>
+                <a:latin typeface="Consolas"/>
+              </a:rPr>
+              <a:t>  // Week 14: never trust what a user types. A giant message wastes the</a:t>
+            </a:r>
+          </a:p>
+          <a:p>
+            <a:pPr>
+              <a:spcAft>
+                <a:spcPts val="0"/>
+              </a:spcAft>
+            </a:pPr>
+            <a:r>
+              <a:rPr sz="1800">
+                <a:solidFill>
+                  <a:srgbClr val="6D8C97"/>
+                </a:solidFill>
+                <a:latin typeface="Consolas"/>
+              </a:rPr>
+              <a:t> 187  </a:t>
+            </a:r>
+            <a:r>
+              <a:rPr sz="1800">
+                <a:solidFill>
+                  <a:srgbClr val="6D8C97"/>
+                </a:solidFill>
+                <a:latin typeface="Consolas"/>
+              </a:rPr>
+              <a:t>  // whole conversation budget and gets the request refused for everyone.</a:t>
+            </a:r>
+          </a:p>
+          <a:p>
+            <a:pPr>
+              <a:spcAft>
+                <a:spcPts val="0"/>
+              </a:spcAft>
+            </a:pPr>
+            <a:r>
+              <a:rPr sz="1800">
+                <a:solidFill>
+                  <a:srgbClr val="6D8C97"/>
+                </a:solidFill>
+                <a:latin typeface="Consolas"/>
+              </a:rPr>
+              <a:t> 188  </a:t>
+            </a:r>
+            <a:r>
+              <a:rPr sz="1800">
+                <a:solidFill>
+                  <a:srgbClr val="7FE0A0"/>
+                </a:solidFill>
+                <a:latin typeface="Consolas"/>
+              </a:rPr>
+              <a:t>  if (text.length &gt; 500) {</a:t>
+            </a:r>
+          </a:p>
+        </p:txBody>
+      </p:sp>
+      <p:sp>
+        <p:nvSpPr>
+          <p:cNvPr id="4" name="TextBox 3"/>
+          <p:cNvSpPr txBox="1"/>
+          <p:nvPr/>
+        </p:nvSpPr>
+        <p:spPr>
+          <a:xfrm>
+            <a:off x="548640" y="5623560"/>
+            <a:ext cx="11064240" cy="1051560"/>
+          </a:xfrm>
+          <a:prstGeom prst="rect">
+            <a:avLst/>
+          </a:prstGeom>
+          <a:noFill/>
+        </p:spPr>
+        <p:txBody>
+          <a:bodyPr wrap="square">
+            <a:spAutoFit/>
+          </a:bodyPr>
+          <a:lstStyle/>
+          <a:p>
+            <a:r>
+              <a:rPr sz="2000">
                 <a:solidFill>
                   <a:srgbClr val="DCECEF"/>
                 </a:solidFill>
-                <a:latin typeface="Consolas"/>
-              </a:rPr>
-              <a:t>  addLine('you', text);</a:t>
-            </a:r>
-          </a:p>
-          <a:p>
-            <a:pPr>
-              <a:spcAft>
-                <a:spcPts val="0"/>
-              </a:spcAft>
-            </a:pPr>
-            <a:r>
-              <a:rPr sz="1400">
-                <a:solidFill>
-                  <a:srgbClr val="6D8C97"/>
-                </a:solidFill>
-                <a:latin typeface="Consolas"/>
-              </a:rPr>
-              <a:t> 195  </a:t>
-            </a:r>
-            <a:r>
-              <a:rPr sz="1400">
-                <a:solidFill>
-                  <a:srgbClr val="DCECEF"/>
-                </a:solidFill>
-                <a:latin typeface="Consolas"/>
-              </a:rPr>
-              <a:t>  history.push({ role: 'user', content: text });</a:t>
-            </a:r>
-          </a:p>
-          <a:p>
-            <a:pPr>
-              <a:spcAft>
-                <a:spcPts val="0"/>
-              </a:spcAft>
-            </a:pPr>
-            <a:r>
-              <a:rPr sz="1400">
-                <a:solidFill>
-                  <a:srgbClr val="6D8C97"/>
-                </a:solidFill>
-                <a:latin typeface="Consolas"/>
-              </a:rPr>
-              <a:t> 196  </a:t>
-            </a:r>
-            <a:r>
-              <a:rPr sz="1400">
-                <a:solidFill>
-                  <a:srgbClr val="DCECEF"/>
-                </a:solidFill>
-                <a:latin typeface="Consolas"/>
-              </a:rPr>
-              <a:t> </a:t>
-            </a:r>
-          </a:p>
-          <a:p>
-            <a:pPr>
-              <a:spcAft>
-                <a:spcPts val="0"/>
-              </a:spcAft>
-            </a:pPr>
-            <a:r>
-              <a:rPr sz="1400">
-                <a:solidFill>
-                  <a:srgbClr val="6D8C97"/>
-                </a:solidFill>
-                <a:latin typeface="Consolas"/>
-              </a:rPr>
-              <a:t> 197  </a:t>
-            </a:r>
-            <a:r>
-              <a:rPr sz="1400">
-                <a:solidFill>
-                  <a:srgbClr val="DCECEF"/>
-                </a:solidFill>
-                <a:latin typeface="Consolas"/>
-              </a:rPr>
-              <a:t>  const bubble = addLine('bot', '');</a:t>
-            </a:r>
-          </a:p>
-          <a:p>
-            <a:pPr>
-              <a:spcAft>
-                <a:spcPts val="0"/>
-              </a:spcAft>
-            </a:pPr>
-            <a:r>
-              <a:rPr sz="1400">
-                <a:solidFill>
-                  <a:srgbClr val="6D8C97"/>
-                </a:solidFill>
-                <a:latin typeface="Consolas"/>
-              </a:rPr>
-              <a:t> 198  </a:t>
-            </a:r>
-            <a:r>
-              <a:rPr sz="1400">
-                <a:solidFill>
-                  <a:srgbClr val="DCECEF"/>
-                </a:solidFill>
-                <a:latin typeface="Consolas"/>
-              </a:rPr>
-              <a:t>  bubble.classList.add('writing');   // week 11: blinking cursor while it types</a:t>
-            </a:r>
-          </a:p>
-          <a:p>
-            <a:pPr>
-              <a:spcAft>
-                <a:spcPts val="0"/>
-              </a:spcAft>
-            </a:pPr>
-            <a:r>
-              <a:rPr sz="1400">
-                <a:solidFill>
-                  <a:srgbClr val="6D8C97"/>
-                </a:solidFill>
-                <a:latin typeface="Consolas"/>
-              </a:rPr>
-              <a:t> 199  </a:t>
-            </a:r>
-            <a:r>
-              <a:rPr sz="1400">
-                <a:solidFill>
-                  <a:srgbClr val="DCECEF"/>
-                </a:solidFill>
-                <a:latin typeface="Consolas"/>
-              </a:rPr>
-              <a:t>  try {</a:t>
-            </a:r>
-          </a:p>
-          <a:p>
-            <a:pPr>
-              <a:spcAft>
-                <a:spcPts val="0"/>
-              </a:spcAft>
-            </a:pPr>
-            <a:r>
-              <a:rPr sz="1400">
-                <a:solidFill>
-                  <a:srgbClr val="6D8C97"/>
-                </a:solidFill>
-                <a:latin typeface="Consolas"/>
-              </a:rPr>
-              <a:t> 200  </a:t>
-            </a:r>
-            <a:r>
-              <a:rPr sz="1400">
-                <a:solidFill>
-                  <a:srgbClr val="DCECEF"/>
-                </a:solidFill>
-                <a:latin typeface="Consolas"/>
-              </a:rPr>
-              <a:t>    // The function we hand over runs on EVERY piece that arrives.</a:t>
-            </a:r>
-          </a:p>
-          <a:p>
-            <a:pPr>
-              <a:spcAft>
-                <a:spcPts val="0"/>
-              </a:spcAft>
-            </a:pPr>
-            <a:r>
-              <a:rPr sz="1400">
-                <a:solidFill>
-                  <a:srgbClr val="6D8C97"/>
-                </a:solidFill>
-                <a:latin typeface="Consolas"/>
-              </a:rPr>
-              <a:t> 201  </a:t>
-            </a:r>
-            <a:r>
-              <a:rPr sz="1400">
-                <a:solidFill>
-                  <a:srgbClr val="DCECEF"/>
-                </a:solidFill>
-                <a:latin typeface="Consolas"/>
-              </a:rPr>
-              <a:t>    const reply = await askAI(function (soFar) {</a:t>
-            </a:r>
-          </a:p>
-          <a:p>
-            <a:pPr>
-              <a:spcAft>
-                <a:spcPts val="0"/>
-              </a:spcAft>
-            </a:pPr>
-            <a:r>
-              <a:rPr sz="1400">
-                <a:solidFill>
-                  <a:srgbClr val="6D8C97"/>
-                </a:solidFill>
-                <a:latin typeface="Consolas"/>
-              </a:rPr>
-              <a:t> 202  </a:t>
-            </a:r>
-            <a:r>
-              <a:rPr sz="1400">
-                <a:solidFill>
-                  <a:srgbClr val="DCECEF"/>
-                </a:solidFill>
-                <a:latin typeface="Consolas"/>
-              </a:rPr>
-              <a:t>      bubble.textContent = soFar;</a:t>
-            </a:r>
-          </a:p>
-          <a:p>
-            <a:pPr>
-              <a:spcAft>
-                <a:spcPts val="0"/>
-              </a:spcAft>
-            </a:pPr>
-            <a:r>
-              <a:rPr sz="1400">
-                <a:solidFill>
-                  <a:srgbClr val="6D8C97"/>
-                </a:solidFill>
-                <a:latin typeface="Consolas"/>
-              </a:rPr>
-              <a:t> 203  </a:t>
-            </a:r>
-            <a:r>
-              <a:rPr sz="1400">
-                <a:solidFill>
-                  <a:srgbClr val="DCECEF"/>
-                </a:solidFill>
-                <a:latin typeface="Consolas"/>
-              </a:rPr>
-              <a:t>      chat.scrollTop = chat.scrollHeight;</a:t>
-            </a:r>
-          </a:p>
-          <a:p>
-            <a:pPr>
-              <a:spcAft>
-                <a:spcPts val="0"/>
-              </a:spcAft>
-            </a:pPr>
-            <a:r>
-              <a:rPr sz="1400">
-                <a:solidFill>
-                  <a:srgbClr val="6D8C97"/>
-                </a:solidFill>
-                <a:latin typeface="Consolas"/>
-              </a:rPr>
-              <a:t> 204  </a:t>
-            </a:r>
-            <a:r>
-              <a:rPr sz="1400">
-                <a:solidFill>
-                  <a:srgbClr val="DCECEF"/>
-                </a:solidFill>
-                <a:latin typeface="Consolas"/>
-              </a:rPr>
-              <a:t>    });</a:t>
-            </a:r>
-          </a:p>
-          <a:p>
-            <a:pPr>
-              <a:spcAft>
-                <a:spcPts val="0"/>
-              </a:spcAft>
-            </a:pPr>
-            <a:r>
-              <a:rPr sz="1400">
-                <a:solidFill>
-                  <a:srgbClr val="6D8C97"/>
-                </a:solidFill>
-                <a:latin typeface="Consolas"/>
-              </a:rPr>
-              <a:t> 205  </a:t>
-            </a:r>
-            <a:r>
-              <a:rPr sz="1400">
-                <a:solidFill>
-                  <a:srgbClr val="DCECEF"/>
-                </a:solidFill>
-                <a:latin typeface="Consolas"/>
-              </a:rPr>
-              <a:t>    bubble.classList.remove('writing');</a:t>
-            </a:r>
-          </a:p>
-          <a:p>
-            <a:pPr>
-              <a:spcAft>
-                <a:spcPts val="0"/>
-              </a:spcAft>
-            </a:pPr>
-            <a:r>
-              <a:rPr sz="1400">
-                <a:solidFill>
-                  <a:srgbClr val="6D8C97"/>
-                </a:solidFill>
-                <a:latin typeface="Consolas"/>
-              </a:rPr>
-              <a:t> 206  </a:t>
-            </a:r>
-            <a:r>
-              <a:rPr sz="1400">
-                <a:solidFill>
-                  <a:srgbClr val="DCECEF"/>
-                </a:solidFill>
-                <a:latin typeface="Consolas"/>
-              </a:rPr>
-              <a:t>    history.push({ role: 'assistant', content: reply });   // it said this too</a:t>
-            </a:r>
-          </a:p>
-          <a:p>
-            <a:pPr>
-              <a:spcAft>
-                <a:spcPts val="0"/>
-              </a:spcAft>
-            </a:pPr>
-            <a:r>
-              <a:rPr sz="1400">
-                <a:solidFill>
-                  <a:srgbClr val="6D8C97"/>
-                </a:solidFill>
-                <a:latin typeface="Consolas"/>
-              </a:rPr>
-              <a:t> 207  </a:t>
-            </a:r>
-            <a:r>
-              <a:rPr sz="1400">
-                <a:solidFill>
-                  <a:srgbClr val="DCECEF"/>
-                </a:solidFill>
-                <a:latin typeface="Consolas"/>
-              </a:rPr>
-              <a:t>  } catch (problem) {</a:t>
-            </a:r>
-          </a:p>
-          <a:p>
-            <a:pPr>
-              <a:spcAft>
-                <a:spcPts val="0"/>
-              </a:spcAft>
-            </a:pPr>
-            <a:r>
-              <a:rPr sz="1400">
-                <a:solidFill>
-                  <a:srgbClr val="6D8C97"/>
-                </a:solidFill>
-                <a:latin typeface="Consolas"/>
-              </a:rPr>
-              <a:t> 208  </a:t>
-            </a:r>
-            <a:r>
-              <a:rPr sz="1400">
-                <a:solidFill>
-                  <a:srgbClr val="DCECEF"/>
-                </a:solidFill>
-                <a:latin typeface="Consolas"/>
-              </a:rPr>
-              <a:t>    bubble.remove();</a:t>
+              </a:rPr>
+              <a:t>Week 14: guard against a giant message. .length is the character count.</a:t>
             </a:r>
           </a:p>
         </p:txBody>

--- a/ai101/slides/week-14.pptx
+++ b/ai101/slides/week-14.pptx
@@ -8661,12 +8661,57 @@
               </a:spcAft>
             </a:pPr>
             <a:r>
+              <a:rPr sz="2800">
+                <a:solidFill>
+                  <a:srgbClr val="01AEFD"/>
+                </a:solidFill>
+              </a:rPr>
+              <a:t>border-left: 3px solid #e9952a;</a:t>
+            </a:r>
+          </a:p>
+          <a:p>
+            <a:pPr>
+              <a:spcAft>
+                <a:spcPts val="1400"/>
+              </a:spcAft>
+            </a:pPr>
+            <a:r>
               <a:rPr sz="2400">
                 <a:solidFill>
                   <a:srgbClr val="1F2A37"/>
                 </a:solidFill>
               </a:rPr>
-              <a:t>• A border on ONE edge - the left - used here as a coloured warning stripe.</a:t>
+              <a:t>• A border on ONE edge - the left.</a:t>
+            </a:r>
+          </a:p>
+          <a:p>
+            <a:pPr>
+              <a:spcAft>
+                <a:spcPts val="1400"/>
+              </a:spcAft>
+            </a:pPr>
+            <a:r>
+              <a:rPr sz="2400">
+                <a:solidFill>
+                  <a:srgbClr val="1F2A37"/>
+                </a:solidFill>
+              </a:rPr>
+              <a:t>• border (week 2) drew a line all the way round; this is just one side.</a:t>
+            </a:r>
+          </a:p>
+          <a:p>
+            <a:pPr>
+              <a:spcAft>
+                <a:spcPts val="1400"/>
+              </a:spcAft>
+            </a:pPr>
+            <a:r>
+              <a:rPr sz="2400">
+                <a:solidFill>
+                  <a:srgbClr val="1F2A37"/>
+                </a:solidFill>
+              </a:rPr>
+              <a:t>• A coloured stripe down the left makes the caution stand out.</a:t>
             </a:r>
           </a:p>
         </p:txBody>

--- a/ai101/slides/week-14.pptx
+++ b/ai101/slides/week-14.pptx
@@ -38,6 +38,7 @@
     <p:sldId id="286" r:id="rId37"/>
     <p:sldId id="287" r:id="rId38"/>
     <p:sldId id="288" r:id="rId39"/>
+    <p:sldId id="289" r:id="rId40"/>
   </p:sldIdLst>
   <p:sldSz cx="12191695" cy="6858000" type="screen4x3"/>
   <p:notesSz cx="6858000" cy="9144000"/>
@@ -8730,7 +8731,7 @@
     <p:bg>
       <p:bgPr>
         <a:solidFill>
-          <a:srgbClr val="102127"/>
+          <a:srgbClr val="F4F8FB"/>
         </a:solidFill>
         <a:effectLst/>
       </p:bgPr>
@@ -8750,8 +8751,8 @@
         </p:nvSpPr>
         <p:spPr>
           <a:xfrm>
-            <a:off x="502920" y="274320"/>
-            <a:ext cx="11155680" cy="548640"/>
+            <a:off x="822960" y="365760"/>
+            <a:ext cx="7315200" cy="365760"/>
           </a:xfrm>
           <a:prstGeom prst="rect">
             <a:avLst/>
@@ -8765,12 +8766,12 @@
           <a:lstStyle/>
           <a:p>
             <a:r>
-              <a:rPr sz="2200" b="1">
+              <a:rPr sz="1400" b="1">
                 <a:solidFill>
                   <a:srgbClr val="01AEFD"/>
                 </a:solidFill>
               </a:rPr>
-              <a:t>Type this into style.css   -   line 10</a:t>
+              <a:t>ON THE PAGE</a:t>
             </a:r>
           </a:p>
         </p:txBody>
@@ -8783,8 +8784,8 @@
         </p:nvSpPr>
         <p:spPr>
           <a:xfrm>
-            <a:off x="502920" y="960120"/>
-            <a:ext cx="11155680" cy="4297680"/>
+            <a:off x="822960" y="658368"/>
+            <a:ext cx="10515600" cy="731520"/>
           </a:xfrm>
           <a:prstGeom prst="rect">
             <a:avLst/>
@@ -8797,267 +8798,511 @@
           </a:bodyPr>
           <a:lstStyle/>
           <a:p>
-            <a:pPr>
-              <a:spcAft>
-                <a:spcPts val="0"/>
-              </a:spcAft>
-            </a:pPr>
-            <a:r>
-              <a:rPr sz="1800">
-                <a:solidFill>
-                  <a:srgbClr val="6D8C97"/>
-                </a:solidFill>
-                <a:latin typeface="Consolas"/>
-              </a:rPr>
-              <a:t>   1  </a:t>
-            </a:r>
-            <a:r>
-              <a:rPr sz="1800">
-                <a:solidFill>
-                  <a:srgbClr val="6D8C97"/>
-                </a:solidFill>
-                <a:latin typeface="Consolas"/>
-              </a:rPr>
-              <a:t>body {</a:t>
-            </a:r>
-          </a:p>
-          <a:p>
-            <a:pPr>
-              <a:spcAft>
-                <a:spcPts val="0"/>
-              </a:spcAft>
-            </a:pPr>
-            <a:r>
-              <a:rPr sz="1800">
-                <a:solidFill>
-                  <a:srgbClr val="6D8C97"/>
-                </a:solidFill>
-                <a:latin typeface="Consolas"/>
-              </a:rPr>
-              <a:t>   2  </a:t>
-            </a:r>
-            <a:r>
-              <a:rPr sz="1800">
-                <a:solidFill>
-                  <a:srgbClr val="6D8C97"/>
-                </a:solidFill>
-                <a:latin typeface="Consolas"/>
-              </a:rPr>
-              <a:t>  margin: 0;</a:t>
-            </a:r>
-          </a:p>
-          <a:p>
-            <a:pPr>
-              <a:spcAft>
-                <a:spcPts val="0"/>
-              </a:spcAft>
-            </a:pPr>
-            <a:r>
-              <a:rPr sz="1800">
-                <a:solidFill>
-                  <a:srgbClr val="6D8C97"/>
-                </a:solidFill>
-                <a:latin typeface="Consolas"/>
-              </a:rPr>
-              <a:t>   3  </a:t>
-            </a:r>
-            <a:r>
-              <a:rPr sz="1800">
-                <a:solidFill>
-                  <a:srgbClr val="6D8C97"/>
-                </a:solidFill>
-                <a:latin typeface="Consolas"/>
-              </a:rPr>
-              <a:t>  font-family: Arial, Helvetica, sans-serif;</a:t>
-            </a:r>
-          </a:p>
-          <a:p>
-            <a:pPr>
-              <a:spcAft>
-                <a:spcPts val="0"/>
-              </a:spcAft>
-            </a:pPr>
-            <a:r>
-              <a:rPr sz="1800">
-                <a:solidFill>
-                  <a:srgbClr val="6D8C97"/>
-                </a:solidFill>
-                <a:latin typeface="Consolas"/>
-              </a:rPr>
-              <a:t>   4  </a:t>
-            </a:r>
-            <a:r>
-              <a:rPr sz="1800">
-                <a:solidFill>
-                  <a:srgbClr val="6D8C97"/>
-                </a:solidFill>
-                <a:latin typeface="Consolas"/>
-              </a:rPr>
-              <a:t>  background: #eef2f7;</a:t>
-            </a:r>
-          </a:p>
-          <a:p>
-            <a:pPr>
-              <a:spcAft>
-                <a:spcPts val="0"/>
-              </a:spcAft>
-            </a:pPr>
-            <a:r>
-              <a:rPr sz="1800">
-                <a:solidFill>
-                  <a:srgbClr val="6D8C97"/>
-                </a:solidFill>
-                <a:latin typeface="Consolas"/>
-              </a:rPr>
-              <a:t>   5  </a:t>
-            </a:r>
-            <a:r>
-              <a:rPr sz="1800">
-                <a:solidFill>
-                  <a:srgbClr val="6D8C97"/>
-                </a:solidFill>
-                <a:latin typeface="Consolas"/>
-              </a:rPr>
-              <a:t>  color: #1f2a37;</a:t>
-            </a:r>
-          </a:p>
-          <a:p>
-            <a:pPr>
-              <a:spcAft>
-                <a:spcPts val="0"/>
-              </a:spcAft>
-            </a:pPr>
-            <a:r>
-              <a:rPr sz="1800">
-                <a:solidFill>
-                  <a:srgbClr val="6D8C97"/>
-                </a:solidFill>
-                <a:latin typeface="Consolas"/>
-              </a:rPr>
-              <a:t>   6  </a:t>
-            </a:r>
-            <a:r>
-              <a:rPr sz="1800">
-                <a:solidFill>
-                  <a:srgbClr val="6D8C97"/>
-                </a:solidFill>
-                <a:latin typeface="Consolas"/>
-              </a:rPr>
-              <a:t>}</a:t>
-            </a:r>
-          </a:p>
-          <a:p>
-            <a:pPr>
-              <a:spcAft>
-                <a:spcPts val="0"/>
-              </a:spcAft>
-            </a:pPr>
-            <a:r>
-              <a:rPr sz="1800">
-                <a:solidFill>
-                  <a:srgbClr val="6D8C97"/>
-                </a:solidFill>
-                <a:latin typeface="Consolas"/>
-              </a:rPr>
-              <a:t>   7  </a:t>
-            </a:r>
-            <a:r>
-              <a:rPr sz="1800">
-                <a:solidFill>
-                  <a:srgbClr val="6D8C97"/>
-                </a:solidFill>
-                <a:latin typeface="Consolas"/>
-              </a:rPr>
-              <a:t>.caution {</a:t>
-            </a:r>
-          </a:p>
-          <a:p>
-            <a:pPr>
-              <a:spcAft>
-                <a:spcPts val="0"/>
-              </a:spcAft>
-            </a:pPr>
-            <a:r>
-              <a:rPr sz="1800">
-                <a:solidFill>
-                  <a:srgbClr val="6D8C97"/>
-                </a:solidFill>
-                <a:latin typeface="Consolas"/>
-              </a:rPr>
-              <a:t>   8  </a:t>
-            </a:r>
-            <a:r>
-              <a:rPr sz="1800">
-                <a:solidFill>
-                  <a:srgbClr val="6D8C97"/>
-                </a:solidFill>
-                <a:latin typeface="Consolas"/>
-              </a:rPr>
-              <a:t>  margin: 0 0 18px;</a:t>
-            </a:r>
-          </a:p>
-          <a:p>
-            <a:pPr>
-              <a:spcAft>
-                <a:spcPts val="0"/>
-              </a:spcAft>
-            </a:pPr>
-            <a:r>
-              <a:rPr sz="1800">
-                <a:solidFill>
-                  <a:srgbClr val="6D8C97"/>
-                </a:solidFill>
-                <a:latin typeface="Consolas"/>
-              </a:rPr>
-              <a:t>   9  </a:t>
-            </a:r>
-            <a:r>
-              <a:rPr sz="1800">
-                <a:solidFill>
-                  <a:srgbClr val="6D8C97"/>
-                </a:solidFill>
-                <a:latin typeface="Consolas"/>
-              </a:rPr>
-              <a:t>  padding: 8px 11px;</a:t>
-            </a:r>
-          </a:p>
-          <a:p>
-            <a:pPr>
-              <a:spcAft>
-                <a:spcPts val="0"/>
-              </a:spcAft>
-            </a:pPr>
-            <a:r>
-              <a:rPr sz="1800">
-                <a:solidFill>
-                  <a:srgbClr val="6D8C97"/>
-                </a:solidFill>
-                <a:latin typeface="Consolas"/>
-              </a:rPr>
-              <a:t>  10  </a:t>
-            </a:r>
-            <a:r>
-              <a:rPr sz="1800">
-                <a:solidFill>
-                  <a:srgbClr val="7FE0A0"/>
-                </a:solidFill>
-                <a:latin typeface="Consolas"/>
-              </a:rPr>
-              <a:t>  border-left: 3px solid #e9952a;</a:t>
-            </a:r>
-          </a:p>
-        </p:txBody>
-      </p:sp>
-      <p:sp>
-        <p:nvSpPr>
-          <p:cNvPr id="4" name="TextBox 3"/>
+            <a:r>
+              <a:rPr sz="3200" b="1">
+                <a:solidFill>
+                  <a:srgbClr val="1F2A37"/>
+                </a:solidFill>
+              </a:rPr>
+              <a:t>border-left</a:t>
+            </a:r>
+          </a:p>
+        </p:txBody>
+      </p:sp>
+      <p:sp>
+        <p:nvSpPr>
+          <p:cNvPr id="4" name="Rounded Rectangle 3"/>
+          <p:cNvSpPr/>
+          <p:nvPr/>
+        </p:nvSpPr>
+        <p:spPr>
+          <a:xfrm>
+            <a:off x="3454237" y="1641896"/>
+            <a:ext cx="5249387" cy="3918021"/>
+          </a:xfrm>
+          <a:prstGeom prst="roundRect">
+            <a:avLst/>
+          </a:prstGeom>
+          <a:solidFill>
+            <a:srgbClr val="0F1F27"/>
+          </a:solidFill>
+          <a:ln>
+            <a:noFill/>
+          </a:ln>
+          <a:effectLst/>
+        </p:spPr>
+        <p:style>
+          <a:lnRef idx="1">
+            <a:schemeClr val="accent1"/>
+          </a:lnRef>
+          <a:fillRef idx="3">
+            <a:schemeClr val="accent1"/>
+          </a:fillRef>
+          <a:effectRef idx="2">
+            <a:schemeClr val="accent1"/>
+          </a:effectRef>
+          <a:fontRef idx="minor">
+            <a:schemeClr val="lt1"/>
+          </a:fontRef>
+        </p:style>
+        <p:txBody>
+          <a:bodyPr rtlCol="0" anchor="ctr"/>
+          <a:lstStyle/>
+          <a:p>
+            <a:pPr algn="ctr"/>
+          </a:p>
+        </p:txBody>
+      </p:sp>
+      <p:sp>
+        <p:nvSpPr>
+          <p:cNvPr id="5" name="Rounded Rectangle 4"/>
+          <p:cNvSpPr/>
+          <p:nvPr/>
+        </p:nvSpPr>
+        <p:spPr>
+          <a:xfrm>
+            <a:off x="3606393" y="2022287"/>
+            <a:ext cx="4945075" cy="437448"/>
+          </a:xfrm>
+          <a:prstGeom prst="roundRect">
+            <a:avLst/>
+          </a:prstGeom>
+          <a:solidFill>
+            <a:srgbClr val="16303A"/>
+          </a:solidFill>
+          <a:ln>
+            <a:noFill/>
+          </a:ln>
+          <a:effectLst/>
+        </p:spPr>
+        <p:style>
+          <a:lnRef idx="1">
+            <a:schemeClr val="accent1"/>
+          </a:lnRef>
+          <a:fillRef idx="3">
+            <a:schemeClr val="accent1"/>
+          </a:fillRef>
+          <a:effectRef idx="2">
+            <a:schemeClr val="accent1"/>
+          </a:effectRef>
+          <a:fontRef idx="minor">
+            <a:schemeClr val="lt1"/>
+          </a:fontRef>
+        </p:style>
+        <p:txBody>
+          <a:bodyPr rtlCol="0" anchor="ctr"/>
+          <a:lstStyle/>
+          <a:p>
+            <a:pPr algn="ctr"/>
+          </a:p>
+        </p:txBody>
+      </p:sp>
+      <p:sp>
+        <p:nvSpPr>
+          <p:cNvPr id="6" name="Rounded Rectangle 5"/>
+          <p:cNvSpPr/>
+          <p:nvPr/>
+        </p:nvSpPr>
+        <p:spPr>
+          <a:xfrm>
+            <a:off x="3720510" y="2155423"/>
+            <a:ext cx="1426463" cy="190195"/>
+          </a:xfrm>
+          <a:prstGeom prst="roundRect">
+            <a:avLst/>
+          </a:prstGeom>
+          <a:solidFill>
+            <a:srgbClr val="4A6B78"/>
+          </a:solidFill>
+          <a:ln>
+            <a:noFill/>
+          </a:ln>
+          <a:effectLst/>
+        </p:spPr>
+        <p:style>
+          <a:lnRef idx="1">
+            <a:schemeClr val="accent1"/>
+          </a:lnRef>
+          <a:fillRef idx="3">
+            <a:schemeClr val="accent1"/>
+          </a:fillRef>
+          <a:effectRef idx="2">
+            <a:schemeClr val="accent1"/>
+          </a:effectRef>
+          <a:fontRef idx="minor">
+            <a:schemeClr val="lt1"/>
+          </a:fontRef>
+        </p:style>
+        <p:txBody>
+          <a:bodyPr rtlCol="0" anchor="ctr"/>
+          <a:lstStyle/>
+          <a:p>
+            <a:pPr algn="ctr"/>
+          </a:p>
+        </p:txBody>
+      </p:sp>
+      <p:sp>
+        <p:nvSpPr>
+          <p:cNvPr id="7" name="Rounded Rectangle 6"/>
+          <p:cNvSpPr/>
+          <p:nvPr/>
+        </p:nvSpPr>
+        <p:spPr>
+          <a:xfrm>
+            <a:off x="3606393" y="2554833"/>
+            <a:ext cx="4945075" cy="1806854"/>
+          </a:xfrm>
+          <a:prstGeom prst="roundRect">
+            <a:avLst/>
+          </a:prstGeom>
+          <a:solidFill>
+            <a:srgbClr val="0B171D"/>
+          </a:solidFill>
+          <a:ln>
+            <a:noFill/>
+          </a:ln>
+          <a:effectLst/>
+        </p:spPr>
+        <p:style>
+          <a:lnRef idx="1">
+            <a:schemeClr val="accent1"/>
+          </a:lnRef>
+          <a:fillRef idx="3">
+            <a:schemeClr val="accent1"/>
+          </a:fillRef>
+          <a:effectRef idx="2">
+            <a:schemeClr val="accent1"/>
+          </a:effectRef>
+          <a:fontRef idx="minor">
+            <a:schemeClr val="lt1"/>
+          </a:fontRef>
+        </p:style>
+        <p:txBody>
+          <a:bodyPr rtlCol="0" anchor="ctr"/>
+          <a:lstStyle/>
+          <a:p>
+            <a:pPr algn="ctr"/>
+          </a:p>
+        </p:txBody>
+      </p:sp>
+      <p:sp>
+        <p:nvSpPr>
+          <p:cNvPr id="8" name="Rounded Rectangle 7"/>
+          <p:cNvSpPr/>
+          <p:nvPr/>
+        </p:nvSpPr>
+        <p:spPr>
+          <a:xfrm>
+            <a:off x="3720510" y="2668950"/>
+            <a:ext cx="2852927" cy="399409"/>
+          </a:xfrm>
+          <a:prstGeom prst="roundRect">
+            <a:avLst/>
+          </a:prstGeom>
+          <a:solidFill>
+            <a:srgbClr val="1B3540"/>
+          </a:solidFill>
+          <a:ln>
+            <a:noFill/>
+          </a:ln>
+          <a:effectLst/>
+        </p:spPr>
+        <p:style>
+          <a:lnRef idx="1">
+            <a:schemeClr val="accent1"/>
+          </a:lnRef>
+          <a:fillRef idx="3">
+            <a:schemeClr val="accent1"/>
+          </a:fillRef>
+          <a:effectRef idx="2">
+            <a:schemeClr val="accent1"/>
+          </a:effectRef>
+          <a:fontRef idx="minor">
+            <a:schemeClr val="lt1"/>
+          </a:fontRef>
+        </p:style>
+        <p:txBody>
+          <a:bodyPr rtlCol="0" anchor="ctr"/>
+          <a:lstStyle/>
+          <a:p>
+            <a:pPr algn="ctr"/>
+          </a:p>
+        </p:txBody>
+      </p:sp>
+      <p:sp>
+        <p:nvSpPr>
+          <p:cNvPr id="9" name="Rounded Rectangle 8"/>
+          <p:cNvSpPr/>
+          <p:nvPr/>
+        </p:nvSpPr>
+        <p:spPr>
+          <a:xfrm>
+            <a:off x="5584423" y="3182477"/>
+            <a:ext cx="2852927" cy="399409"/>
+          </a:xfrm>
+          <a:prstGeom prst="roundRect">
+            <a:avLst/>
+          </a:prstGeom>
+          <a:solidFill>
+            <a:srgbClr val="123A32"/>
+          </a:solidFill>
+          <a:ln>
+            <a:noFill/>
+          </a:ln>
+          <a:effectLst/>
+        </p:spPr>
+        <p:style>
+          <a:lnRef idx="1">
+            <a:schemeClr val="accent1"/>
+          </a:lnRef>
+          <a:fillRef idx="3">
+            <a:schemeClr val="accent1"/>
+          </a:fillRef>
+          <a:effectRef idx="2">
+            <a:schemeClr val="accent1"/>
+          </a:effectRef>
+          <a:fontRef idx="minor">
+            <a:schemeClr val="lt1"/>
+          </a:fontRef>
+        </p:style>
+        <p:txBody>
+          <a:bodyPr rtlCol="0" anchor="ctr"/>
+          <a:lstStyle/>
+          <a:p>
+            <a:pPr algn="ctr"/>
+          </a:p>
+        </p:txBody>
+      </p:sp>
+      <p:sp>
+        <p:nvSpPr>
+          <p:cNvPr id="10" name="Rounded Rectangle 9"/>
+          <p:cNvSpPr/>
+          <p:nvPr/>
+        </p:nvSpPr>
+        <p:spPr>
+          <a:xfrm>
+            <a:off x="3720510" y="3696004"/>
+            <a:ext cx="3138220" cy="399409"/>
+          </a:xfrm>
+          <a:prstGeom prst="roundRect">
+            <a:avLst/>
+          </a:prstGeom>
+          <a:solidFill>
+            <a:srgbClr val="1B3540"/>
+          </a:solidFill>
+          <a:ln>
+            <a:noFill/>
+          </a:ln>
+          <a:effectLst/>
+        </p:spPr>
+        <p:style>
+          <a:lnRef idx="1">
+            <a:schemeClr val="accent1"/>
+          </a:lnRef>
+          <a:fillRef idx="3">
+            <a:schemeClr val="accent1"/>
+          </a:fillRef>
+          <a:effectRef idx="2">
+            <a:schemeClr val="accent1"/>
+          </a:effectRef>
+          <a:fontRef idx="minor">
+            <a:schemeClr val="lt1"/>
+          </a:fontRef>
+        </p:style>
+        <p:txBody>
+          <a:bodyPr rtlCol="0" anchor="ctr"/>
+          <a:lstStyle/>
+          <a:p>
+            <a:pPr algn="ctr"/>
+          </a:p>
+        </p:txBody>
+      </p:sp>
+      <p:sp>
+        <p:nvSpPr>
+          <p:cNvPr id="11" name="Rounded Rectangle 10"/>
+          <p:cNvSpPr/>
+          <p:nvPr/>
+        </p:nvSpPr>
+        <p:spPr>
+          <a:xfrm>
+            <a:off x="3701491" y="4856195"/>
+            <a:ext cx="3899001" cy="323331"/>
+          </a:xfrm>
+          <a:prstGeom prst="roundRect">
+            <a:avLst/>
+          </a:prstGeom>
+          <a:solidFill>
+            <a:srgbClr val="16303A"/>
+          </a:solidFill>
+          <a:ln>
+            <a:noFill/>
+          </a:ln>
+          <a:effectLst/>
+        </p:spPr>
+        <p:style>
+          <a:lnRef idx="1">
+            <a:schemeClr val="accent1"/>
+          </a:lnRef>
+          <a:fillRef idx="3">
+            <a:schemeClr val="accent1"/>
+          </a:fillRef>
+          <a:effectRef idx="2">
+            <a:schemeClr val="accent1"/>
+          </a:effectRef>
+          <a:fontRef idx="minor">
+            <a:schemeClr val="lt1"/>
+          </a:fontRef>
+        </p:style>
+        <p:txBody>
+          <a:bodyPr rtlCol="0" anchor="ctr"/>
+          <a:lstStyle/>
+          <a:p>
+            <a:pPr algn="ctr"/>
+          </a:p>
+        </p:txBody>
+      </p:sp>
+      <p:sp>
+        <p:nvSpPr>
+          <p:cNvPr id="12" name="Rounded Rectangle 11"/>
+          <p:cNvSpPr/>
+          <p:nvPr/>
+        </p:nvSpPr>
+        <p:spPr>
+          <a:xfrm>
+            <a:off x="7695590" y="4856195"/>
+            <a:ext cx="779800" cy="323331"/>
+          </a:xfrm>
+          <a:prstGeom prst="roundRect">
+            <a:avLst/>
+          </a:prstGeom>
+          <a:solidFill>
+            <a:srgbClr val="01AEFD"/>
+          </a:solidFill>
+          <a:ln>
+            <a:noFill/>
+          </a:ln>
+          <a:effectLst/>
+        </p:spPr>
+        <p:style>
+          <a:lnRef idx="1">
+            <a:schemeClr val="accent1"/>
+          </a:lnRef>
+          <a:fillRef idx="3">
+            <a:schemeClr val="accent1"/>
+          </a:fillRef>
+          <a:effectRef idx="2">
+            <a:schemeClr val="accent1"/>
+          </a:effectRef>
+          <a:fontRef idx="minor">
+            <a:schemeClr val="lt1"/>
+          </a:fontRef>
+        </p:style>
+        <p:txBody>
+          <a:bodyPr rtlCol="0" anchor="ctr"/>
+          <a:lstStyle/>
+          <a:p>
+            <a:pPr algn="ctr"/>
+          </a:p>
+        </p:txBody>
+      </p:sp>
+      <p:sp>
+        <p:nvSpPr>
+          <p:cNvPr id="13" name="Rounded Rectangle 12"/>
+          <p:cNvSpPr/>
+          <p:nvPr/>
+        </p:nvSpPr>
+        <p:spPr>
+          <a:xfrm>
+            <a:off x="3720510" y="5407761"/>
+            <a:ext cx="1616659" cy="95097"/>
+          </a:xfrm>
+          <a:prstGeom prst="roundRect">
+            <a:avLst/>
+          </a:prstGeom>
+          <a:solidFill>
+            <a:srgbClr val="2A4550"/>
+          </a:solidFill>
+          <a:ln>
+            <a:noFill/>
+          </a:ln>
+          <a:effectLst/>
+        </p:spPr>
+        <p:style>
+          <a:lnRef idx="1">
+            <a:schemeClr val="accent1"/>
+          </a:lnRef>
+          <a:fillRef idx="3">
+            <a:schemeClr val="accent1"/>
+          </a:fillRef>
+          <a:effectRef idx="2">
+            <a:schemeClr val="accent1"/>
+          </a:effectRef>
+          <a:fontRef idx="minor">
+            <a:schemeClr val="lt1"/>
+          </a:fontRef>
+        </p:style>
+        <p:txBody>
+          <a:bodyPr rtlCol="0" anchor="ctr"/>
+          <a:lstStyle/>
+          <a:p>
+            <a:pPr algn="ctr"/>
+          </a:p>
+        </p:txBody>
+      </p:sp>
+      <p:sp>
+        <p:nvSpPr>
+          <p:cNvPr id="14" name="Rounded Rectangle 13"/>
+          <p:cNvSpPr/>
+          <p:nvPr/>
+        </p:nvSpPr>
+        <p:spPr>
+          <a:xfrm>
+            <a:off x="3682471" y="2630911"/>
+            <a:ext cx="2929006" cy="475488"/>
+          </a:xfrm>
+          <a:prstGeom prst="roundRect">
+            <a:avLst/>
+          </a:prstGeom>
+          <a:noFill/>
+          <a:ln w="44450">
+            <a:solidFill>
+              <a:srgbClr val="FFD633"/>
+            </a:solidFill>
+          </a:ln>
+          <a:effectLst/>
+        </p:spPr>
+        <p:style>
+          <a:lnRef idx="1">
+            <a:schemeClr val="accent1"/>
+          </a:lnRef>
+          <a:fillRef idx="3">
+            <a:schemeClr val="accent1"/>
+          </a:fillRef>
+          <a:effectRef idx="2">
+            <a:schemeClr val="accent1"/>
+          </a:effectRef>
+          <a:fontRef idx="minor">
+            <a:schemeClr val="lt1"/>
+          </a:fontRef>
+        </p:style>
+        <p:txBody>
+          <a:bodyPr rtlCol="0" anchor="ctr"/>
+          <a:lstStyle/>
+          <a:p>
+            <a:pPr algn="ctr"/>
+          </a:p>
+        </p:txBody>
+      </p:sp>
+      <p:sp>
+        <p:nvSpPr>
+          <p:cNvPr id="15" name="TextBox 14"/>
           <p:cNvSpPr txBox="1"/>
           <p:nvPr/>
         </p:nvSpPr>
         <p:spPr>
           <a:xfrm>
-            <a:off x="548640" y="5623560"/>
-            <a:ext cx="11064240" cy="1051560"/>
+            <a:off x="822960" y="6172200"/>
+            <a:ext cx="10515600" cy="548640"/>
           </a:xfrm>
           <a:prstGeom prst="rect">
             <a:avLst/>
@@ -9073,10 +9318,10 @@
             <a:r>
               <a:rPr sz="2000">
                 <a:solidFill>
-                  <a:srgbClr val="DCECEF"/>
-                </a:solidFill>
-              </a:rPr>
-              <a:t>A coloured stripe down the LEFT edge - the warning accent.</a:t>
+                  <a:srgbClr val="0A6299"/>
+                </a:solidFill>
+              </a:rPr>
+              <a:t>border-left is a line down just one edge of a bubble.</a:t>
             </a:r>
           </a:p>
         </p:txBody>
@@ -9262,7 +9507,7 @@
                   <a:srgbClr val="01AEFD"/>
                 </a:solidFill>
               </a:rPr>
-              <a:t>Type this into style.css   -   line 11</a:t>
+              <a:t>Type this into style.css   -   line 10</a:t>
             </a:r>
           </a:p>
         </p:txBody>
@@ -9295,7 +9540,7 @@
               </a:spcAft>
             </a:pPr>
             <a:r>
-              <a:rPr sz="1300">
+              <a:rPr sz="1800">
                 <a:solidFill>
                   <a:srgbClr val="6D8C97"/>
                 </a:solidFill>
@@ -9304,7 +9549,7 @@
               <a:t>   1  </a:t>
             </a:r>
             <a:r>
-              <a:rPr sz="1300">
+              <a:rPr sz="1800">
                 <a:solidFill>
                   <a:srgbClr val="6D8C97"/>
                 </a:solidFill>
@@ -9320,7 +9565,7 @@
               </a:spcAft>
             </a:pPr>
             <a:r>
-              <a:rPr sz="1300">
+              <a:rPr sz="1800">
                 <a:solidFill>
                   <a:srgbClr val="6D8C97"/>
                 </a:solidFill>
@@ -9329,7 +9574,7 @@
               <a:t>   2  </a:t>
             </a:r>
             <a:r>
-              <a:rPr sz="1300">
+              <a:rPr sz="1800">
                 <a:solidFill>
                   <a:srgbClr val="6D8C97"/>
                 </a:solidFill>
@@ -9345,7 +9590,7 @@
               </a:spcAft>
             </a:pPr>
             <a:r>
-              <a:rPr sz="1300">
+              <a:rPr sz="1800">
                 <a:solidFill>
                   <a:srgbClr val="6D8C97"/>
                 </a:solidFill>
@@ -9354,7 +9599,7 @@
               <a:t>   3  </a:t>
             </a:r>
             <a:r>
-              <a:rPr sz="1300">
+              <a:rPr sz="1800">
                 <a:solidFill>
                   <a:srgbClr val="6D8C97"/>
                 </a:solidFill>
@@ -9370,7 +9615,7 @@
               </a:spcAft>
             </a:pPr>
             <a:r>
-              <a:rPr sz="1300">
+              <a:rPr sz="1800">
                 <a:solidFill>
                   <a:srgbClr val="6D8C97"/>
                 </a:solidFill>
@@ -9379,7 +9624,7 @@
               <a:t>   4  </a:t>
             </a:r>
             <a:r>
-              <a:rPr sz="1300">
+              <a:rPr sz="1800">
                 <a:solidFill>
                   <a:srgbClr val="6D8C97"/>
                 </a:solidFill>
@@ -9395,7 +9640,7 @@
               </a:spcAft>
             </a:pPr>
             <a:r>
-              <a:rPr sz="1300">
+              <a:rPr sz="1800">
                 <a:solidFill>
                   <a:srgbClr val="6D8C97"/>
                 </a:solidFill>
@@ -9404,7 +9649,7 @@
               <a:t>   5  </a:t>
             </a:r>
             <a:r>
-              <a:rPr sz="1300">
+              <a:rPr sz="1800">
                 <a:solidFill>
                   <a:srgbClr val="6D8C97"/>
                 </a:solidFill>
@@ -9420,7 +9665,7 @@
               </a:spcAft>
             </a:pPr>
             <a:r>
-              <a:rPr sz="1300">
+              <a:rPr sz="1800">
                 <a:solidFill>
                   <a:srgbClr val="6D8C97"/>
                 </a:solidFill>
@@ -9429,7 +9674,7 @@
               <a:t>   6  </a:t>
             </a:r>
             <a:r>
-              <a:rPr sz="1300">
+              <a:rPr sz="1800">
                 <a:solidFill>
                   <a:srgbClr val="6D8C97"/>
                 </a:solidFill>
@@ -9445,7 +9690,7 @@
               </a:spcAft>
             </a:pPr>
             <a:r>
-              <a:rPr sz="1300">
+              <a:rPr sz="1800">
                 <a:solidFill>
                   <a:srgbClr val="6D8C97"/>
                 </a:solidFill>
@@ -9454,7 +9699,7 @@
               <a:t>   7  </a:t>
             </a:r>
             <a:r>
-              <a:rPr sz="1300">
+              <a:rPr sz="1800">
                 <a:solidFill>
                   <a:srgbClr val="6D8C97"/>
                 </a:solidFill>
@@ -9470,7 +9715,7 @@
               </a:spcAft>
             </a:pPr>
             <a:r>
-              <a:rPr sz="1300">
+              <a:rPr sz="1800">
                 <a:solidFill>
                   <a:srgbClr val="6D8C97"/>
                 </a:solidFill>
@@ -9479,7 +9724,7 @@
               <a:t>   8  </a:t>
             </a:r>
             <a:r>
-              <a:rPr sz="1300">
+              <a:rPr sz="1800">
                 <a:solidFill>
                   <a:srgbClr val="6D8C97"/>
                 </a:solidFill>
@@ -9495,7 +9740,7 @@
               </a:spcAft>
             </a:pPr>
             <a:r>
-              <a:rPr sz="1300">
+              <a:rPr sz="1800">
                 <a:solidFill>
                   <a:srgbClr val="6D8C97"/>
                 </a:solidFill>
@@ -9504,7 +9749,7 @@
               <a:t>   9  </a:t>
             </a:r>
             <a:r>
-              <a:rPr sz="1300">
+              <a:rPr sz="1800">
                 <a:solidFill>
                   <a:srgbClr val="6D8C97"/>
                 </a:solidFill>
@@ -9520,7 +9765,7 @@
               </a:spcAft>
             </a:pPr>
             <a:r>
-              <a:rPr sz="1300">
+              <a:rPr sz="1800">
                 <a:solidFill>
                   <a:srgbClr val="6D8C97"/>
                 </a:solidFill>
@@ -9529,38 +9774,13 @@
               <a:t>  10  </a:t>
             </a:r>
             <a:r>
-              <a:rPr sz="1300">
-                <a:solidFill>
-                  <a:srgbClr val="6D8C97"/>
+              <a:rPr sz="1800">
+                <a:solidFill>
+                  <a:srgbClr val="7FE0A0"/>
                 </a:solidFill>
                 <a:latin typeface="Consolas"/>
               </a:rPr>
               <a:t>  border-left: 3px solid #e9952a;</a:t>
-            </a:r>
-          </a:p>
-          <a:p>
-            <a:pPr>
-              <a:spcAft>
-                <a:spcPts val="0"/>
-              </a:spcAft>
-            </a:pPr>
-            <a:r>
-              <a:rPr sz="1300">
-                <a:solidFill>
-                  <a:srgbClr val="6D8C97"/>
-                </a:solidFill>
-                <a:latin typeface="Consolas"/>
-              </a:rPr>
-              <a:t>  11  </a:t>
-            </a:r>
-            <a:r>
-              <a:rPr sz="1300">
-                <a:solidFill>
-                  <a:srgbClr val="7FE0A0"/>
-                </a:solidFill>
-                <a:latin typeface="Consolas"/>
-              </a:rPr>
-              <a:t>  background: #fff8e9;</a:t>
             </a:r>
           </a:p>
         </p:txBody>
@@ -9593,7 +9813,7 @@
                   <a:srgbClr val="DCECEF"/>
                 </a:solidFill>
               </a:rPr>
-              <a:t>A soft warning-yellow background.</a:t>
+              <a:t>A coloured stripe down the LEFT edge - the warning accent.</a:t>
             </a:r>
           </a:p>
         </p:txBody>
@@ -9652,7 +9872,7 @@
                   <a:srgbClr val="01AEFD"/>
                 </a:solidFill>
               </a:rPr>
-              <a:t>Type this into style.css   -   line 12</a:t>
+              <a:t>Type this into style.css   -   line 11</a:t>
             </a:r>
           </a:p>
         </p:txBody>
@@ -9946,36 +10166,11 @@
             <a:r>
               <a:rPr sz="1300">
                 <a:solidFill>
-                  <a:srgbClr val="6D8C97"/>
+                  <a:srgbClr val="7FE0A0"/>
                 </a:solidFill>
                 <a:latin typeface="Consolas"/>
               </a:rPr>
               <a:t>  background: #fff8e9;</a:t>
-            </a:r>
-          </a:p>
-          <a:p>
-            <a:pPr>
-              <a:spcAft>
-                <a:spcPts val="0"/>
-              </a:spcAft>
-            </a:pPr>
-            <a:r>
-              <a:rPr sz="1300">
-                <a:solidFill>
-                  <a:srgbClr val="6D8C97"/>
-                </a:solidFill>
-                <a:latin typeface="Consolas"/>
-              </a:rPr>
-              <a:t>  12  </a:t>
-            </a:r>
-            <a:r>
-              <a:rPr sz="1300">
-                <a:solidFill>
-                  <a:srgbClr val="7FE0A0"/>
-                </a:solidFill>
-                <a:latin typeface="Consolas"/>
-              </a:rPr>
-              <a:t>  color: #8a5a12;</a:t>
             </a:r>
           </a:p>
         </p:txBody>
@@ -10008,7 +10203,7 @@
                   <a:srgbClr val="DCECEF"/>
                 </a:solidFill>
               </a:rPr>
-              <a:t>Brown text to match.</a:t>
+              <a:t>A soft warning-yellow background.</a:t>
             </a:r>
           </a:p>
         </p:txBody>
@@ -10067,7 +10262,7 @@
                   <a:srgbClr val="01AEFD"/>
                 </a:solidFill>
               </a:rPr>
-              <a:t>Type this into style.css   -   line 13</a:t>
+              <a:t>Type this into style.css   -   line 12</a:t>
             </a:r>
           </a:p>
         </p:txBody>
@@ -10386,36 +10581,11 @@
             <a:r>
               <a:rPr sz="1300">
                 <a:solidFill>
-                  <a:srgbClr val="6D8C97"/>
+                  <a:srgbClr val="7FE0A0"/>
                 </a:solidFill>
                 <a:latin typeface="Consolas"/>
               </a:rPr>
               <a:t>  color: #8a5a12;</a:t>
-            </a:r>
-          </a:p>
-          <a:p>
-            <a:pPr>
-              <a:spcAft>
-                <a:spcPts val="0"/>
-              </a:spcAft>
-            </a:pPr>
-            <a:r>
-              <a:rPr sz="1300">
-                <a:solidFill>
-                  <a:srgbClr val="6D8C97"/>
-                </a:solidFill>
-                <a:latin typeface="Consolas"/>
-              </a:rPr>
-              <a:t>  13  </a:t>
-            </a:r>
-            <a:r>
-              <a:rPr sz="1300">
-                <a:solidFill>
-                  <a:srgbClr val="7FE0A0"/>
-                </a:solidFill>
-                <a:latin typeface="Consolas"/>
-              </a:rPr>
-              <a:t>  font-size: 13px;</a:t>
             </a:r>
           </a:p>
         </p:txBody>
@@ -10448,7 +10618,7 @@
                   <a:srgbClr val="DCECEF"/>
                 </a:solidFill>
               </a:rPr>
-              <a:t>Small - it is a note, not a headline.</a:t>
+              <a:t>Brown text to match.</a:t>
             </a:r>
           </a:p>
         </p:txBody>
@@ -10462,6 +10632,446 @@
 </file>
 
 <file path=ppt/slides/slide33.xml><?xml version="1.0" encoding="utf-8"?>
+<p:sld xmlns:a="http://schemas.openxmlformats.org/drawingml/2006/main" xmlns:p="http://schemas.openxmlformats.org/presentationml/2006/main" xmlns:r="http://schemas.openxmlformats.org/officeDocument/2006/relationships">
+  <p:cSld>
+    <p:bg>
+      <p:bgPr>
+        <a:solidFill>
+          <a:srgbClr val="102127"/>
+        </a:solidFill>
+        <a:effectLst/>
+      </p:bgPr>
+    </p:bg>
+    <p:spTree>
+      <p:nvGrpSpPr>
+        <p:cNvPr id="1" name=""/>
+        <p:cNvGrpSpPr/>
+        <p:nvPr/>
+      </p:nvGrpSpPr>
+      <p:grpSpPr/>
+      <p:sp>
+        <p:nvSpPr>
+          <p:cNvPr id="2" name="TextBox 1"/>
+          <p:cNvSpPr txBox="1"/>
+          <p:nvPr/>
+        </p:nvSpPr>
+        <p:spPr>
+          <a:xfrm>
+            <a:off x="502920" y="274320"/>
+            <a:ext cx="11155680" cy="548640"/>
+          </a:xfrm>
+          <a:prstGeom prst="rect">
+            <a:avLst/>
+          </a:prstGeom>
+          <a:noFill/>
+        </p:spPr>
+        <p:txBody>
+          <a:bodyPr wrap="none">
+            <a:spAutoFit/>
+          </a:bodyPr>
+          <a:lstStyle/>
+          <a:p>
+            <a:r>
+              <a:rPr sz="2200" b="1">
+                <a:solidFill>
+                  <a:srgbClr val="01AEFD"/>
+                </a:solidFill>
+              </a:rPr>
+              <a:t>Type this into style.css   -   line 13</a:t>
+            </a:r>
+          </a:p>
+        </p:txBody>
+      </p:sp>
+      <p:sp>
+        <p:nvSpPr>
+          <p:cNvPr id="3" name="TextBox 2"/>
+          <p:cNvSpPr txBox="1"/>
+          <p:nvPr/>
+        </p:nvSpPr>
+        <p:spPr>
+          <a:xfrm>
+            <a:off x="502920" y="960120"/>
+            <a:ext cx="11155680" cy="4297680"/>
+          </a:xfrm>
+          <a:prstGeom prst="rect">
+            <a:avLst/>
+          </a:prstGeom>
+          <a:noFill/>
+        </p:spPr>
+        <p:txBody>
+          <a:bodyPr wrap="none">
+            <a:spAutoFit/>
+          </a:bodyPr>
+          <a:lstStyle/>
+          <a:p>
+            <a:pPr>
+              <a:spcAft>
+                <a:spcPts val="0"/>
+              </a:spcAft>
+            </a:pPr>
+            <a:r>
+              <a:rPr sz="1300">
+                <a:solidFill>
+                  <a:srgbClr val="6D8C97"/>
+                </a:solidFill>
+                <a:latin typeface="Consolas"/>
+              </a:rPr>
+              <a:t>   1  </a:t>
+            </a:r>
+            <a:r>
+              <a:rPr sz="1300">
+                <a:solidFill>
+                  <a:srgbClr val="6D8C97"/>
+                </a:solidFill>
+                <a:latin typeface="Consolas"/>
+              </a:rPr>
+              <a:t>body {</a:t>
+            </a:r>
+          </a:p>
+          <a:p>
+            <a:pPr>
+              <a:spcAft>
+                <a:spcPts val="0"/>
+              </a:spcAft>
+            </a:pPr>
+            <a:r>
+              <a:rPr sz="1300">
+                <a:solidFill>
+                  <a:srgbClr val="6D8C97"/>
+                </a:solidFill>
+                <a:latin typeface="Consolas"/>
+              </a:rPr>
+              <a:t>   2  </a:t>
+            </a:r>
+            <a:r>
+              <a:rPr sz="1300">
+                <a:solidFill>
+                  <a:srgbClr val="6D8C97"/>
+                </a:solidFill>
+                <a:latin typeface="Consolas"/>
+              </a:rPr>
+              <a:t>  margin: 0;</a:t>
+            </a:r>
+          </a:p>
+          <a:p>
+            <a:pPr>
+              <a:spcAft>
+                <a:spcPts val="0"/>
+              </a:spcAft>
+            </a:pPr>
+            <a:r>
+              <a:rPr sz="1300">
+                <a:solidFill>
+                  <a:srgbClr val="6D8C97"/>
+                </a:solidFill>
+                <a:latin typeface="Consolas"/>
+              </a:rPr>
+              <a:t>   3  </a:t>
+            </a:r>
+            <a:r>
+              <a:rPr sz="1300">
+                <a:solidFill>
+                  <a:srgbClr val="6D8C97"/>
+                </a:solidFill>
+                <a:latin typeface="Consolas"/>
+              </a:rPr>
+              <a:t>  font-family: Arial, Helvetica, sans-serif;</a:t>
+            </a:r>
+          </a:p>
+          <a:p>
+            <a:pPr>
+              <a:spcAft>
+                <a:spcPts val="0"/>
+              </a:spcAft>
+            </a:pPr>
+            <a:r>
+              <a:rPr sz="1300">
+                <a:solidFill>
+                  <a:srgbClr val="6D8C97"/>
+                </a:solidFill>
+                <a:latin typeface="Consolas"/>
+              </a:rPr>
+              <a:t>   4  </a:t>
+            </a:r>
+            <a:r>
+              <a:rPr sz="1300">
+                <a:solidFill>
+                  <a:srgbClr val="6D8C97"/>
+                </a:solidFill>
+                <a:latin typeface="Consolas"/>
+              </a:rPr>
+              <a:t>  background: #eef2f7;</a:t>
+            </a:r>
+          </a:p>
+          <a:p>
+            <a:pPr>
+              <a:spcAft>
+                <a:spcPts val="0"/>
+              </a:spcAft>
+            </a:pPr>
+            <a:r>
+              <a:rPr sz="1300">
+                <a:solidFill>
+                  <a:srgbClr val="6D8C97"/>
+                </a:solidFill>
+                <a:latin typeface="Consolas"/>
+              </a:rPr>
+              <a:t>   5  </a:t>
+            </a:r>
+            <a:r>
+              <a:rPr sz="1300">
+                <a:solidFill>
+                  <a:srgbClr val="6D8C97"/>
+                </a:solidFill>
+                <a:latin typeface="Consolas"/>
+              </a:rPr>
+              <a:t>  color: #1f2a37;</a:t>
+            </a:r>
+          </a:p>
+          <a:p>
+            <a:pPr>
+              <a:spcAft>
+                <a:spcPts val="0"/>
+              </a:spcAft>
+            </a:pPr>
+            <a:r>
+              <a:rPr sz="1300">
+                <a:solidFill>
+                  <a:srgbClr val="6D8C97"/>
+                </a:solidFill>
+                <a:latin typeface="Consolas"/>
+              </a:rPr>
+              <a:t>   6  </a:t>
+            </a:r>
+            <a:r>
+              <a:rPr sz="1300">
+                <a:solidFill>
+                  <a:srgbClr val="6D8C97"/>
+                </a:solidFill>
+                <a:latin typeface="Consolas"/>
+              </a:rPr>
+              <a:t>}</a:t>
+            </a:r>
+          </a:p>
+          <a:p>
+            <a:pPr>
+              <a:spcAft>
+                <a:spcPts val="0"/>
+              </a:spcAft>
+            </a:pPr>
+            <a:r>
+              <a:rPr sz="1300">
+                <a:solidFill>
+                  <a:srgbClr val="6D8C97"/>
+                </a:solidFill>
+                <a:latin typeface="Consolas"/>
+              </a:rPr>
+              <a:t>   7  </a:t>
+            </a:r>
+            <a:r>
+              <a:rPr sz="1300">
+                <a:solidFill>
+                  <a:srgbClr val="6D8C97"/>
+                </a:solidFill>
+                <a:latin typeface="Consolas"/>
+              </a:rPr>
+              <a:t>.caution {</a:t>
+            </a:r>
+          </a:p>
+          <a:p>
+            <a:pPr>
+              <a:spcAft>
+                <a:spcPts val="0"/>
+              </a:spcAft>
+            </a:pPr>
+            <a:r>
+              <a:rPr sz="1300">
+                <a:solidFill>
+                  <a:srgbClr val="6D8C97"/>
+                </a:solidFill>
+                <a:latin typeface="Consolas"/>
+              </a:rPr>
+              <a:t>   8  </a:t>
+            </a:r>
+            <a:r>
+              <a:rPr sz="1300">
+                <a:solidFill>
+                  <a:srgbClr val="6D8C97"/>
+                </a:solidFill>
+                <a:latin typeface="Consolas"/>
+              </a:rPr>
+              <a:t>  margin: 0 0 18px;</a:t>
+            </a:r>
+          </a:p>
+          <a:p>
+            <a:pPr>
+              <a:spcAft>
+                <a:spcPts val="0"/>
+              </a:spcAft>
+            </a:pPr>
+            <a:r>
+              <a:rPr sz="1300">
+                <a:solidFill>
+                  <a:srgbClr val="6D8C97"/>
+                </a:solidFill>
+                <a:latin typeface="Consolas"/>
+              </a:rPr>
+              <a:t>   9  </a:t>
+            </a:r>
+            <a:r>
+              <a:rPr sz="1300">
+                <a:solidFill>
+                  <a:srgbClr val="6D8C97"/>
+                </a:solidFill>
+                <a:latin typeface="Consolas"/>
+              </a:rPr>
+              <a:t>  padding: 8px 11px;</a:t>
+            </a:r>
+          </a:p>
+          <a:p>
+            <a:pPr>
+              <a:spcAft>
+                <a:spcPts val="0"/>
+              </a:spcAft>
+            </a:pPr>
+            <a:r>
+              <a:rPr sz="1300">
+                <a:solidFill>
+                  <a:srgbClr val="6D8C97"/>
+                </a:solidFill>
+                <a:latin typeface="Consolas"/>
+              </a:rPr>
+              <a:t>  10  </a:t>
+            </a:r>
+            <a:r>
+              <a:rPr sz="1300">
+                <a:solidFill>
+                  <a:srgbClr val="6D8C97"/>
+                </a:solidFill>
+                <a:latin typeface="Consolas"/>
+              </a:rPr>
+              <a:t>  border-left: 3px solid #e9952a;</a:t>
+            </a:r>
+          </a:p>
+          <a:p>
+            <a:pPr>
+              <a:spcAft>
+                <a:spcPts val="0"/>
+              </a:spcAft>
+            </a:pPr>
+            <a:r>
+              <a:rPr sz="1300">
+                <a:solidFill>
+                  <a:srgbClr val="6D8C97"/>
+                </a:solidFill>
+                <a:latin typeface="Consolas"/>
+              </a:rPr>
+              <a:t>  11  </a:t>
+            </a:r>
+            <a:r>
+              <a:rPr sz="1300">
+                <a:solidFill>
+                  <a:srgbClr val="6D8C97"/>
+                </a:solidFill>
+                <a:latin typeface="Consolas"/>
+              </a:rPr>
+              <a:t>  background: #fff8e9;</a:t>
+            </a:r>
+          </a:p>
+          <a:p>
+            <a:pPr>
+              <a:spcAft>
+                <a:spcPts val="0"/>
+              </a:spcAft>
+            </a:pPr>
+            <a:r>
+              <a:rPr sz="1300">
+                <a:solidFill>
+                  <a:srgbClr val="6D8C97"/>
+                </a:solidFill>
+                <a:latin typeface="Consolas"/>
+              </a:rPr>
+              <a:t>  12  </a:t>
+            </a:r>
+            <a:r>
+              <a:rPr sz="1300">
+                <a:solidFill>
+                  <a:srgbClr val="6D8C97"/>
+                </a:solidFill>
+                <a:latin typeface="Consolas"/>
+              </a:rPr>
+              <a:t>  color: #8a5a12;</a:t>
+            </a:r>
+          </a:p>
+          <a:p>
+            <a:pPr>
+              <a:spcAft>
+                <a:spcPts val="0"/>
+              </a:spcAft>
+            </a:pPr>
+            <a:r>
+              <a:rPr sz="1300">
+                <a:solidFill>
+                  <a:srgbClr val="6D8C97"/>
+                </a:solidFill>
+                <a:latin typeface="Consolas"/>
+              </a:rPr>
+              <a:t>  13  </a:t>
+            </a:r>
+            <a:r>
+              <a:rPr sz="1300">
+                <a:solidFill>
+                  <a:srgbClr val="7FE0A0"/>
+                </a:solidFill>
+                <a:latin typeface="Consolas"/>
+              </a:rPr>
+              <a:t>  font-size: 13px;</a:t>
+            </a:r>
+          </a:p>
+        </p:txBody>
+      </p:sp>
+      <p:sp>
+        <p:nvSpPr>
+          <p:cNvPr id="4" name="TextBox 3"/>
+          <p:cNvSpPr txBox="1"/>
+          <p:nvPr/>
+        </p:nvSpPr>
+        <p:spPr>
+          <a:xfrm>
+            <a:off x="548640" y="5623560"/>
+            <a:ext cx="11064240" cy="1051560"/>
+          </a:xfrm>
+          <a:prstGeom prst="rect">
+            <a:avLst/>
+          </a:prstGeom>
+          <a:noFill/>
+        </p:spPr>
+        <p:txBody>
+          <a:bodyPr wrap="square">
+            <a:spAutoFit/>
+          </a:bodyPr>
+          <a:lstStyle/>
+          <a:p>
+            <a:r>
+              <a:rPr sz="2000">
+                <a:solidFill>
+                  <a:srgbClr val="DCECEF"/>
+                </a:solidFill>
+              </a:rPr>
+              <a:t>Small - it is a note, not a headline.</a:t>
+            </a:r>
+          </a:p>
+        </p:txBody>
+      </p:sp>
+    </p:spTree>
+  </p:cSld>
+  <p:clrMapOvr>
+    <a:masterClrMapping/>
+  </p:clrMapOvr>
+</p:sld>
+</file>
+
+<file path=ppt/slides/slide34.xml><?xml version="1.0" encoding="utf-8"?>
 <p:sld xmlns:a="http://schemas.openxmlformats.org/drawingml/2006/main" xmlns:p="http://schemas.openxmlformats.org/presentationml/2006/main" xmlns:r="http://schemas.openxmlformats.org/officeDocument/2006/relationships">
   <p:cSld>
     <p:bg>

--- a/ai101/slides/week-14.pptx
+++ b/ai101/slides/week-14.pptx
@@ -5605,7 +5605,7 @@
                   <a:srgbClr val="1F2A37"/>
                 </a:solidFill>
               </a:rPr>
-              <a:t>• A. A huge message wastes the budget and gets the request refused for everyone</a:t>
+              <a:t>• A. It is rude</a:t>
             </a:r>
           </a:p>
           <a:p>
@@ -5620,7 +5620,7 @@
                   <a:srgbClr val="1F2A37"/>
                 </a:solidFill>
               </a:rPr>
-              <a:t>• B. It is rude</a:t>
+              <a:t>• B. The AI cannot read it</a:t>
             </a:r>
           </a:p>
           <a:p>
@@ -5635,7 +5635,7 @@
                   <a:srgbClr val="1F2A37"/>
                 </a:solidFill>
               </a:rPr>
-              <a:t>• C. The AI cannot read it</a:t>
+              <a:t>• C. To save the file</a:t>
             </a:r>
           </a:p>
           <a:p>
@@ -5650,7 +5650,7 @@
                   <a:srgbClr val="1F2A37"/>
                 </a:solidFill>
               </a:rPr>
-              <a:t>• D. To save the file</a:t>
+              <a:t>• D. A huge message wastes the budget and gets the request refused for everyone</a:t>
             </a:r>
           </a:p>
           <a:p>
@@ -5780,7 +5780,7 @@
                   <a:srgbClr val="1F2A37"/>
                 </a:solidFill>
               </a:rPr>
-              <a:t>• A. A huge message wastes the budget and gets the request refused for everyone (correct)</a:t>
+              <a:t>• A. It is rude</a:t>
             </a:r>
           </a:p>
           <a:p>
@@ -5795,7 +5795,7 @@
                   <a:srgbClr val="1F2A37"/>
                 </a:solidFill>
               </a:rPr>
-              <a:t>• B. It is rude</a:t>
+              <a:t>• B. The AI cannot read it</a:t>
             </a:r>
           </a:p>
           <a:p>
@@ -5810,7 +5810,7 @@
                   <a:srgbClr val="1F2A37"/>
                 </a:solidFill>
               </a:rPr>
-              <a:t>• C. The AI cannot read it</a:t>
+              <a:t>• C. To save the file</a:t>
             </a:r>
           </a:p>
           <a:p>
@@ -5825,7 +5825,7 @@
                   <a:srgbClr val="1F2A37"/>
                 </a:solidFill>
               </a:rPr>
-              <a:t>• D. To save the file</a:t>
+              <a:t>• D. A huge message wastes the budget and gets the request refused for everyone (correct)</a:t>
             </a:r>
           </a:p>
           <a:p>
@@ -5955,7 +5955,7 @@
                   <a:srgbClr val="1F2A37"/>
                 </a:solidFill>
               </a:rPr>
-              <a:t>• A. the number of characters in text</a:t>
+              <a:t>• A. the AI's reply</a:t>
             </a:r>
           </a:p>
           <a:p>
@@ -5970,7 +5970,7 @@
                   <a:srgbClr val="1F2A37"/>
                 </a:solidFill>
               </a:rPr>
-              <a:t>• B. the AI's reply</a:t>
+              <a:t>• B. the number of characters in text</a:t>
             </a:r>
           </a:p>
           <a:p>
@@ -6130,7 +6130,7 @@
                   <a:srgbClr val="1F2A37"/>
                 </a:solidFill>
               </a:rPr>
-              <a:t>• A. the number of characters in text (correct)</a:t>
+              <a:t>• A. the AI's reply</a:t>
             </a:r>
           </a:p>
           <a:p>
@@ -6145,7 +6145,7 @@
                   <a:srgbClr val="1F2A37"/>
                 </a:solidFill>
               </a:rPr>
-              <a:t>• B. the AI's reply</a:t>
+              <a:t>• B. the number of characters in text (correct)</a:t>
             </a:r>
           </a:p>
           <a:p>
@@ -6305,7 +6305,7 @@
                   <a:srgbClr val="1F2A37"/>
                 </a:solidFill>
               </a:rPr>
-              <a:t>• A. the AI can be confidently wrong - check what matters</a:t>
+              <a:t>• A. the AI is always right</a:t>
             </a:r>
           </a:p>
           <a:p>
@@ -6320,7 +6320,7 @@
                   <a:srgbClr val="1F2A37"/>
                 </a:solidFill>
               </a:rPr>
-              <a:t>• B. the AI is always right</a:t>
+              <a:t>• B. the AI can be confidently wrong - check what matters</a:t>
             </a:r>
           </a:p>
           <a:p>
@@ -6480,7 +6480,7 @@
                   <a:srgbClr val="1F2A37"/>
                 </a:solidFill>
               </a:rPr>
-              <a:t>• A. the AI can be confidently wrong - check what matters (correct)</a:t>
+              <a:t>• A. the AI is always right</a:t>
             </a:r>
           </a:p>
           <a:p>
@@ -6495,7 +6495,7 @@
                   <a:srgbClr val="1F2A37"/>
                 </a:solidFill>
               </a:rPr>
-              <a:t>• B. the AI is always right</a:t>
+              <a:t>• B. the AI can be confidently wrong - check what matters (correct)</a:t>
             </a:r>
           </a:p>
           <a:p>
@@ -6782,7 +6782,7 @@
                   <a:srgbClr val="1F2A37"/>
                 </a:solidFill>
               </a:rPr>
-              <a:t>• A. fetch does NOT throw on a refusal, so you must check yourself</a:t>
+              <a:t>• A. to make it faster</a:t>
             </a:r>
           </a:p>
           <a:p>
@@ -6797,7 +6797,7 @@
                   <a:srgbClr val="1F2A37"/>
                 </a:solidFill>
               </a:rPr>
-              <a:t>• B. to make it faster</a:t>
+              <a:t>• B. to stream the reply</a:t>
             </a:r>
           </a:p>
           <a:p>
@@ -6812,7 +6812,7 @@
                   <a:srgbClr val="1F2A37"/>
                 </a:solidFill>
               </a:rPr>
-              <a:t>• C. to stream the reply</a:t>
+              <a:t>• C. to save the chat</a:t>
             </a:r>
           </a:p>
           <a:p>
@@ -6827,7 +6827,7 @@
                   <a:srgbClr val="1F2A37"/>
                 </a:solidFill>
               </a:rPr>
-              <a:t>• D. to save the chat</a:t>
+              <a:t>• D. fetch does NOT throw on a refusal, so you must check yourself</a:t>
             </a:r>
           </a:p>
           <a:p>
@@ -6957,7 +6957,7 @@
                   <a:srgbClr val="1F2A37"/>
                 </a:solidFill>
               </a:rPr>
-              <a:t>• A. fetch does NOT throw on a refusal, so you must check yourself (correct)</a:t>
+              <a:t>• A. to make it faster</a:t>
             </a:r>
           </a:p>
           <a:p>
@@ -6972,7 +6972,7 @@
                   <a:srgbClr val="1F2A37"/>
                 </a:solidFill>
               </a:rPr>
-              <a:t>• B. to make it faster</a:t>
+              <a:t>• B. to stream the reply</a:t>
             </a:r>
           </a:p>
           <a:p>
@@ -6987,7 +6987,7 @@
                   <a:srgbClr val="1F2A37"/>
                 </a:solidFill>
               </a:rPr>
-              <a:t>• C. to stream the reply</a:t>
+              <a:t>• C. to save the chat</a:t>
             </a:r>
           </a:p>
           <a:p>
@@ -7002,7 +7002,7 @@
                   <a:srgbClr val="1F2A37"/>
                 </a:solidFill>
               </a:rPr>
-              <a:t>• D. to save the chat</a:t>
+              <a:t>• D. fetch does NOT throw on a refusal, so you must check yourself (correct)</a:t>
             </a:r>
           </a:p>
           <a:p>
@@ -7132,7 +7132,7 @@
                   <a:srgbClr val="1F2A37"/>
                 </a:solidFill>
               </a:rPr>
-              <a:t>• A. trimHistory drops the oldest messages</a:t>
+              <a:t>• A. the AI shortens it</a:t>
             </a:r>
           </a:p>
           <a:p>
@@ -7147,7 +7147,7 @@
                   <a:srgbClr val="1F2A37"/>
                 </a:solidFill>
               </a:rPr>
-              <a:t>• B. the AI shortens it</a:t>
+              <a:t>• B. nothing</a:t>
             </a:r>
           </a:p>
           <a:p>
@@ -7162,7 +7162,7 @@
                   <a:srgbClr val="1F2A37"/>
                 </a:solidFill>
               </a:rPr>
-              <a:t>• C. nothing</a:t>
+              <a:t>• C. trimHistory drops the oldest messages</a:t>
             </a:r>
           </a:p>
           <a:p>
@@ -7307,7 +7307,7 @@
                   <a:srgbClr val="1F2A37"/>
                 </a:solidFill>
               </a:rPr>
-              <a:t>• A. trimHistory drops the oldest messages (correct)</a:t>
+              <a:t>• A. the AI shortens it</a:t>
             </a:r>
           </a:p>
           <a:p>
@@ -7322,7 +7322,7 @@
                   <a:srgbClr val="1F2A37"/>
                 </a:solidFill>
               </a:rPr>
-              <a:t>• B. the AI shortens it</a:t>
+              <a:t>• B. nothing</a:t>
             </a:r>
           </a:p>
           <a:p>
@@ -7337,7 +7337,7 @@
                   <a:srgbClr val="1F2A37"/>
                 </a:solidFill>
               </a:rPr>
-              <a:t>• C. nothing</a:t>
+              <a:t>• C. trimHistory drops the oldest messages (correct)</a:t>
             </a:r>
           </a:p>
           <a:p>

--- a/ai101/slides/week-14.pptx
+++ b/ai101/slides/week-14.pptx
@@ -8950,7 +8950,7 @@
         <p:spPr>
           <a:xfrm>
             <a:off x="3606393" y="2554833"/>
-            <a:ext cx="4945075" cy="1806854"/>
+            <a:ext cx="4945075" cy="1730776"/>
           </a:xfrm>
           <a:prstGeom prst="roundRect">
             <a:avLst/>
@@ -9125,6 +9125,94 @@
         </p:nvSpPr>
         <p:spPr>
           <a:xfrm>
+            <a:off x="3701491" y="4409236"/>
+            <a:ext cx="1426463" cy="228234"/>
+          </a:xfrm>
+          <a:prstGeom prst="roundRect">
+            <a:avLst/>
+          </a:prstGeom>
+          <a:solidFill>
+            <a:srgbClr val="16303A"/>
+          </a:solidFill>
+          <a:ln>
+            <a:noFill/>
+          </a:ln>
+          <a:effectLst/>
+        </p:spPr>
+        <p:style>
+          <a:lnRef idx="1">
+            <a:schemeClr val="accent1"/>
+          </a:lnRef>
+          <a:fillRef idx="3">
+            <a:schemeClr val="accent1"/>
+          </a:fillRef>
+          <a:effectRef idx="2">
+            <a:schemeClr val="accent1"/>
+          </a:effectRef>
+          <a:fontRef idx="minor">
+            <a:schemeClr val="lt1"/>
+          </a:fontRef>
+        </p:style>
+        <p:txBody>
+          <a:bodyPr rtlCol="0" anchor="ctr"/>
+          <a:lstStyle/>
+          <a:p>
+            <a:pPr algn="ctr"/>
+          </a:p>
+        </p:txBody>
+      </p:sp>
+      <p:sp>
+        <p:nvSpPr>
+          <p:cNvPr id="12" name="Rounded Rectangle 11"/>
+          <p:cNvSpPr/>
+          <p:nvPr/>
+        </p:nvSpPr>
+        <p:spPr>
+          <a:xfrm>
+            <a:off x="5223052" y="4409236"/>
+            <a:ext cx="1426463" cy="228234"/>
+          </a:xfrm>
+          <a:prstGeom prst="roundRect">
+            <a:avLst/>
+          </a:prstGeom>
+          <a:solidFill>
+            <a:srgbClr val="16303A"/>
+          </a:solidFill>
+          <a:ln>
+            <a:noFill/>
+          </a:ln>
+          <a:effectLst/>
+        </p:spPr>
+        <p:style>
+          <a:lnRef idx="1">
+            <a:schemeClr val="accent1"/>
+          </a:lnRef>
+          <a:fillRef idx="3">
+            <a:schemeClr val="accent1"/>
+          </a:fillRef>
+          <a:effectRef idx="2">
+            <a:schemeClr val="accent1"/>
+          </a:effectRef>
+          <a:fontRef idx="minor">
+            <a:schemeClr val="lt1"/>
+          </a:fontRef>
+        </p:style>
+        <p:txBody>
+          <a:bodyPr rtlCol="0" anchor="ctr"/>
+          <a:lstStyle/>
+          <a:p>
+            <a:pPr algn="ctr"/>
+          </a:p>
+        </p:txBody>
+      </p:sp>
+      <p:sp>
+        <p:nvSpPr>
+          <p:cNvPr id="13" name="Rounded Rectangle 12"/>
+          <p:cNvSpPr/>
+          <p:nvPr/>
+        </p:nvSpPr>
+        <p:spPr>
+          <a:xfrm>
             <a:off x="3701491" y="4856195"/>
             <a:ext cx="3899001" cy="323331"/>
           </a:xfrm>
@@ -9163,7 +9251,7 @@
       </p:sp>
       <p:sp>
         <p:nvSpPr>
-          <p:cNvPr id="12" name="Rounded Rectangle 11"/>
+          <p:cNvPr id="14" name="Rounded Rectangle 13"/>
           <p:cNvSpPr/>
           <p:nvPr/>
         </p:nvSpPr>
@@ -9207,7 +9295,7 @@
       </p:sp>
       <p:sp>
         <p:nvSpPr>
-          <p:cNvPr id="13" name="Rounded Rectangle 12"/>
+          <p:cNvPr id="15" name="Rounded Rectangle 14"/>
           <p:cNvSpPr/>
           <p:nvPr/>
         </p:nvSpPr>
@@ -9251,7 +9339,7 @@
       </p:sp>
       <p:sp>
         <p:nvSpPr>
-          <p:cNvPr id="14" name="Rounded Rectangle 13"/>
+          <p:cNvPr id="16" name="Rounded Rectangle 15"/>
           <p:cNvSpPr/>
           <p:nvPr/>
         </p:nvSpPr>
@@ -9295,7 +9383,7 @@
       </p:sp>
       <p:sp>
         <p:nvSpPr>
-          <p:cNvPr id="15" name="TextBox 14"/>
+          <p:cNvPr id="17" name="TextBox 16"/>
           <p:cNvSpPr txBox="1"/>
           <p:nvPr/>
         </p:nvSpPr>
